--- a/presentation/RBST_prompt-eng [Autosaved].pptx
+++ b/presentation/RBST_prompt-eng [Autosaved].pptx
@@ -206,7 +206,7 @@
           <a:p>
             <a:fld id="{0C1CC868-F01F-4D3C-B0FF-9A3075033AE5}" type="datetimeFigureOut">
               <a:rPr lang="en-AT" smtClean="0"/>
-              <a:t>23/04/2025</a:t>
+              <a:t>29/04/2025</a:t>
             </a:fld>
             <a:endParaRPr lang="en-AT"/>
           </a:p>
@@ -518,140 +518,7 @@
           <a:bodyPr/>
           <a:lstStyle/>
           <a:p>
-            <a:r>
-              <a:rPr lang="en-GB" dirty="0"/>
-              <a:t>Quick refresher of software testing.</a:t>
-            </a:r>
-          </a:p>
-          <a:p>
-            <a:pPr marL="171450" indent="-171450">
-              <a:buFontTx/>
-              <a:buChar char="-"/>
-            </a:pPr>
-            <a:r>
-              <a:rPr lang="en-GB" dirty="0"/>
-              <a:t>Needed to verify and validate developed software to meet specifications (describe picture)</a:t>
-            </a:r>
-          </a:p>
-          <a:p>
-            <a:pPr marL="171450" indent="-171450">
-              <a:buFontTx/>
-              <a:buChar char="-"/>
-            </a:pPr>
-            <a:r>
-              <a:rPr lang="en-GB" dirty="0"/>
-              <a:t>Prevent and find errors in a system</a:t>
-            </a:r>
-          </a:p>
-          <a:p>
-            <a:pPr marL="171450" indent="-171450">
-              <a:buFontTx/>
-              <a:buChar char="-"/>
-            </a:pPr>
-            <a:r>
-              <a:rPr lang="en-GB" dirty="0"/>
-              <a:t>Analyze for usability, compatibility, reliability, integrity, efficiency, security, portability, maintainability, …</a:t>
-            </a:r>
-          </a:p>
-          <a:p>
-            <a:endParaRPr lang="en-GB" dirty="0"/>
-          </a:p>
-          <a:p>
-            <a:r>
-              <a:rPr lang="en-GB" dirty="0"/>
-              <a:t>In general there are four types of testing strategies.</a:t>
-            </a:r>
-          </a:p>
-          <a:p>
-            <a:pPr marL="171450" indent="-171450">
-              <a:buFontTx/>
-              <a:buChar char="-"/>
-            </a:pPr>
-            <a:r>
-              <a:rPr lang="en-GB" dirty="0"/>
-              <a:t>Unit testing: smallest testable part (done by developer)</a:t>
-            </a:r>
-          </a:p>
-          <a:p>
-            <a:pPr marL="171450" indent="-171450">
-              <a:buFontTx/>
-              <a:buChar char="-"/>
-            </a:pPr>
-            <a:r>
-              <a:rPr lang="en-GB" dirty="0"/>
-              <a:t>Integration testing: integrate unit tested component and test them as a group – interfacing</a:t>
-            </a:r>
-          </a:p>
-          <a:p>
-            <a:pPr marL="171450" indent="-171450">
-              <a:buFontTx/>
-              <a:buChar char="-"/>
-            </a:pPr>
-            <a:r>
-              <a:rPr lang="en-GB" dirty="0"/>
-              <a:t>Acceptance/Validation testing: authenticate whether product is developed as per standards and detailed criteria and meets all requirements specified by the user</a:t>
-            </a:r>
-          </a:p>
-          <a:p>
-            <a:pPr marL="171450" indent="-171450">
-              <a:buFontTx/>
-              <a:buChar char="-"/>
-            </a:pPr>
-            <a:r>
-              <a:rPr lang="en-GB" dirty="0"/>
-              <a:t>System testing: testing done on complete integrated system</a:t>
-            </a:r>
-          </a:p>
-          <a:p>
-            <a:endParaRPr lang="en-GB" dirty="0"/>
-          </a:p>
-          <a:p>
-            <a:r>
-              <a:rPr lang="en-GB" dirty="0"/>
-              <a:t>This requires a lot of resources, human, costs, time … usually separate test team</a:t>
-            </a:r>
-          </a:p>
-          <a:p>
-            <a:r>
-              <a:rPr lang="en-GB" dirty="0"/>
-              <a:t>If you have experience many tests are pretty basic from a complexity perspective.</a:t>
-            </a:r>
-          </a:p>
-          <a:p>
-            <a:r>
-              <a:rPr lang="en-GB" dirty="0"/>
-              <a:t>Especially in the industry -&gt; fast development cycle for new products / projects are essential to stay competitive </a:t>
-            </a:r>
-          </a:p>
-          <a:p>
-            <a:endParaRPr lang="en-GB" dirty="0"/>
-          </a:p>
-          <a:p>
-            <a:r>
-              <a:rPr lang="en-GB" dirty="0"/>
-              <a:t>Recent years with upcoming powerful LLM’s there are now many possibilities to change the classic approach and potentially minimize or optimize testing efforts.</a:t>
-            </a:r>
-          </a:p>
-          <a:p>
-            <a:r>
-              <a:rPr lang="en-GB" dirty="0"/>
-              <a:t>Overview of areas of research where LLM’s are applied most:</a:t>
-            </a:r>
-          </a:p>
-          <a:p>
-            <a:endParaRPr lang="en-GB" dirty="0"/>
-          </a:p>
-          <a:p>
-            <a:r>
-              <a:rPr lang="en-GB" dirty="0"/>
-              <a:t>Large amount of research in recent years focuses mainly on utilizing LLM for automating unit test generation for high coverage. (-&gt; generating tests for code snippets)</a:t>
-            </a:r>
-          </a:p>
-          <a:p>
-            <a:r>
-              <a:rPr lang="en-GB" dirty="0"/>
-              <a:t>Generating test scenarios for system tests. </a:t>
-            </a:r>
+            <a:endParaRPr lang="en-AT" dirty="0"/>
           </a:p>
         </p:txBody>
       </p:sp>
@@ -672,7 +539,7 @@
           <a:p>
             <a:fld id="{75C8DF60-03EB-41BF-AD08-E11AFAEB47A5}" type="slidenum">
               <a:rPr lang="en-AT" smtClean="0"/>
-              <a:t>3</a:t>
+              <a:t>1</a:t>
             </a:fld>
             <a:endParaRPr lang="en-AT"/>
           </a:p>
@@ -681,7 +548,7 @@
     </p:spTree>
     <p:extLst>
       <p:ext uri="{BB962C8B-B14F-4D97-AF65-F5344CB8AC3E}">
-        <p14:creationId xmlns:p14="http://schemas.microsoft.com/office/powerpoint/2010/main" val="638221337"/>
+        <p14:creationId xmlns:p14="http://schemas.microsoft.com/office/powerpoint/2010/main" val="1322344735"/>
       </p:ext>
     </p:extLst>
   </p:cSld>
@@ -737,108 +604,7 @@
           <a:p>
             <a:r>
               <a:rPr lang="en-GB" dirty="0"/>
-              <a:t>I found little research trying to utilize directly the software requirements as a resource to generate testcases.</a:t>
-            </a:r>
-          </a:p>
-          <a:p>
-            <a:pPr marL="171450" indent="-171450">
-              <a:buFont typeface="Wingdings" panose="05000000000000000000" pitchFamily="2" charset="2"/>
-              <a:buChar char="è"/>
-            </a:pPr>
-            <a:r>
-              <a:rPr lang="en-GB" dirty="0"/>
-              <a:t>Falling more in the category of acceptance testing</a:t>
-            </a:r>
-            <a:br>
-              <a:rPr lang="en-GB" dirty="0"/>
-            </a:br>
-            <a:endParaRPr lang="en-GB" dirty="0"/>
-          </a:p>
-          <a:p>
-            <a:pPr marL="0" marR="0" lvl="0" indent="0" algn="l" defTabSz="914400" rtl="0" eaLnBrk="1" fontAlgn="auto" latinLnBrk="0" hangingPunct="1">
-              <a:lnSpc>
-                <a:spcPct val="100000"/>
-              </a:lnSpc>
-              <a:spcBef>
-                <a:spcPts val="0"/>
-              </a:spcBef>
-              <a:spcAft>
-                <a:spcPts val="0"/>
-              </a:spcAft>
-              <a:buClrTx/>
-              <a:buSzTx/>
-              <a:buFont typeface="Wingdings" panose="05000000000000000000" pitchFamily="2" charset="2"/>
-              <a:buNone/>
-              <a:tabLst/>
-              <a:defRPr/>
-            </a:pPr>
-            <a:r>
-              <a:rPr lang="en-GB" dirty="0"/>
-              <a:t>Especially when tests can be related to requirements this usually is a complete process (describe picture) to exactly track the process.</a:t>
-            </a:r>
-          </a:p>
-          <a:p>
-            <a:pPr marL="0" indent="0">
-              <a:buFont typeface="Wingdings" panose="05000000000000000000" pitchFamily="2" charset="2"/>
-              <a:buNone/>
-            </a:pPr>
-            <a:br>
-              <a:rPr lang="en-GB" dirty="0"/>
-            </a:br>
-            <a:r>
-              <a:rPr lang="en-GB" dirty="0"/>
-              <a:t>And generally </a:t>
-            </a:r>
-          </a:p>
-          <a:p>
-            <a:pPr marL="0" indent="0">
-              <a:buFont typeface="Wingdings" panose="05000000000000000000" pitchFamily="2" charset="2"/>
-              <a:buNone/>
-            </a:pPr>
-            <a:r>
-              <a:rPr lang="en-GB" dirty="0"/>
-              <a:t>- Management Defines Product Requirements in combination with Customers </a:t>
-            </a:r>
-          </a:p>
-          <a:p>
-            <a:r>
-              <a:rPr lang="en-GB" dirty="0"/>
-              <a:t>- Technical Leads derive Software Requirements</a:t>
-            </a:r>
-          </a:p>
-          <a:p>
-            <a:r>
-              <a:rPr lang="en-GB" dirty="0"/>
-              <a:t>- Separate test team:</a:t>
-            </a:r>
-          </a:p>
-          <a:p>
-            <a:pPr lvl="1"/>
-            <a:r>
-              <a:rPr lang="en-GB" dirty="0"/>
-              <a:t>Initial Tests are derived from Requirements</a:t>
-            </a:r>
-          </a:p>
-          <a:p>
-            <a:pPr lvl="1"/>
-            <a:r>
-              <a:rPr lang="en-GB" dirty="0"/>
-              <a:t>(later system tests)</a:t>
-            </a:r>
-          </a:p>
-          <a:p>
-            <a:endParaRPr lang="en-GB" dirty="0"/>
-          </a:p>
-          <a:p>
-            <a:r>
-              <a:rPr lang="en-GB" dirty="0"/>
-              <a:t>High confidence that requirements are met is required at an early stage. </a:t>
-            </a:r>
-          </a:p>
-          <a:p>
-            <a:r>
-              <a:rPr lang="en-GB" dirty="0"/>
-              <a:t>Biggest factor therefore are definitions of requirements </a:t>
+              <a:t>Quick refresher on software testing.</a:t>
             </a:r>
           </a:p>
           <a:p>
@@ -848,30 +614,7 @@
             </a:pPr>
             <a:r>
               <a:rPr lang="en-GB" dirty="0"/>
-              <a:t>how detailed requirements are defined – usually using natural language</a:t>
-            </a:r>
-          </a:p>
-          <a:p>
-            <a:pPr marL="171450" marR="0" lvl="0" indent="-171450" algn="l" defTabSz="914400" rtl="0" eaLnBrk="1" fontAlgn="auto" latinLnBrk="0" hangingPunct="1">
-              <a:lnSpc>
-                <a:spcPct val="100000"/>
-              </a:lnSpc>
-              <a:spcBef>
-                <a:spcPts val="0"/>
-              </a:spcBef>
-              <a:spcAft>
-                <a:spcPts val="0"/>
-              </a:spcAft>
-              <a:buClrTx/>
-              <a:buSzTx/>
-              <a:buFontTx/>
-              <a:buChar char="-"/>
-              <a:tabLst/>
-              <a:defRPr/>
-            </a:pPr>
-            <a:r>
-              <a:rPr lang="en-GB" dirty="0"/>
-              <a:t>room for interpretation – possible conflicts, … but definition is another topic (verifying requirements for completeness, integrity, …. Is another story)</a:t>
+              <a:t>Needed to verify and validate developed software to meet specifications </a:t>
             </a:r>
           </a:p>
           <a:p>
@@ -881,7 +624,16 @@
             </a:pPr>
             <a:r>
               <a:rPr lang="en-GB" dirty="0"/>
-              <a:t>requirements define what the system must to but not how.</a:t>
+              <a:t>Analyze for usability, compatibility, reliability, integrity, efficiency, security, portability, maintainability, …</a:t>
+            </a:r>
+          </a:p>
+          <a:p>
+            <a:endParaRPr lang="en-GB" dirty="0"/>
+          </a:p>
+          <a:p>
+            <a:r>
+              <a:rPr lang="en-GB" dirty="0"/>
+              <a:t>In general there are four types of testing strategies.</a:t>
             </a:r>
           </a:p>
           <a:p>
@@ -891,7 +643,37 @@
             </a:pPr>
             <a:r>
               <a:rPr lang="en-GB" dirty="0"/>
-              <a:t>basic functionality of a system shall be tested through simple testcases that relate to at least one requirement.</a:t>
+              <a:t>Unit testing: smallest testable part (done by developer)</a:t>
+            </a:r>
+          </a:p>
+          <a:p>
+            <a:pPr marL="171450" indent="-171450">
+              <a:buFontTx/>
+              <a:buChar char="-"/>
+            </a:pPr>
+            <a:r>
+              <a:rPr lang="en-GB" dirty="0"/>
+              <a:t>Integration testing: integrate unit tested component and test them as a group – interfacing</a:t>
+            </a:r>
+          </a:p>
+          <a:p>
+            <a:pPr marL="171450" indent="-171450">
+              <a:buFontTx/>
+              <a:buChar char="-"/>
+            </a:pPr>
+            <a:r>
+              <a:rPr lang="en-GB" dirty="0"/>
+              <a:t>Acceptance/Validation testing: authenticate whether product is developed as per standards and detailed criteria and meets all requirements specified by the user</a:t>
+            </a:r>
+          </a:p>
+          <a:p>
+            <a:pPr marL="171450" indent="-171450">
+              <a:buFontTx/>
+              <a:buChar char="-"/>
+            </a:pPr>
+            <a:r>
+              <a:rPr lang="en-GB" dirty="0"/>
+              <a:t>System testing: testing done on complete integrated system</a:t>
             </a:r>
           </a:p>
           <a:p>
@@ -900,25 +682,37 @@
           <a:p>
             <a:r>
               <a:rPr lang="en-GB" dirty="0"/>
-              <a:t>Requirements usually short precise definition of expected behaviour.</a:t>
-            </a:r>
+              <a:t>This requires a lot of resources, human, costs, time … -&gt; trade off between under and over testing</a:t>
+            </a:r>
+          </a:p>
+          <a:p>
+            <a:endParaRPr lang="en-GB" dirty="0"/>
           </a:p>
           <a:p>
             <a:r>
               <a:rPr lang="en-GB" dirty="0"/>
-              <a:t>I am interested in how capable LLM’s are in generating structured test case description out of natural language requirements.</a:t>
-            </a:r>
+              <a:t>Recent years with upcoming powerful LLM’s there are now possibilities to change the classic approach and potentially minimize or optimize testing efforts.</a:t>
+            </a:r>
+          </a:p>
+          <a:p>
+            <a:endParaRPr lang="en-GB" dirty="0"/>
           </a:p>
           <a:p>
             <a:r>
               <a:rPr lang="en-GB" dirty="0"/>
-              <a:t>Especially in techincal domains.</a:t>
+              <a:t>Large amount of research in recent years focuses mainly on utilizing LLM for automating unit test generation for high coverage. (-&gt; generating tests from code snippets)</a:t>
             </a:r>
           </a:p>
           <a:p>
             <a:r>
               <a:rPr lang="en-GB" dirty="0"/>
-              <a:t>Idea that in the future the approach would be a semi automatic acceptance testing pipeline with human in the loop.</a:t>
+              <a:t>And System tests -&gt; software already done for the most part. (mainly for GUI testing mobile apps)</a:t>
+            </a:r>
+          </a:p>
+          <a:p>
+            <a:r>
+              <a:rPr lang="en-GB" dirty="0"/>
+              <a:t>Generating test scenarios for the whole system.</a:t>
             </a:r>
           </a:p>
           <a:p>
@@ -927,33 +721,20 @@
           <a:p>
             <a:r>
               <a:rPr lang="en-GB" dirty="0"/>
-              <a:t>requirements -&gt; LLM -&gt; TC’s + Human verification -&gt; LLM -&gt; implementation + Human verification</a:t>
+              <a:t>Even projects which act as a whole development team (archcode) -&gt; given problem statement and system goes through the whole process of</a:t>
+            </a:r>
+          </a:p>
+          <a:p>
+            <a:r>
+              <a:rPr lang="en-GB" dirty="0"/>
+              <a:t>Defining requirements, creating testcases and implementation.</a:t>
             </a:r>
           </a:p>
           <a:p>
             <a:endParaRPr lang="en-GB" dirty="0"/>
           </a:p>
           <a:p>
-            <a:r>
-              <a:rPr lang="en-GB" dirty="0"/>
-              <a:t>First we need to get an impression of how capable the models are to understand the requirements.</a:t>
-            </a:r>
-            <a:endParaRPr lang="en-AT" dirty="0"/>
-          </a:p>
-          <a:p>
             <a:endParaRPr lang="en-GB" dirty="0"/>
-          </a:p>
-          <a:p>
-            <a:endParaRPr lang="en-GB" dirty="0"/>
-          </a:p>
-          <a:p>
-            <a:pPr marL="0" indent="0">
-              <a:buNone/>
-            </a:pPr>
-            <a:endParaRPr lang="en-GB" dirty="0"/>
-          </a:p>
-          <a:p>
-            <a:endParaRPr lang="en-AT" dirty="0"/>
           </a:p>
         </p:txBody>
       </p:sp>
@@ -974,7 +755,7 @@
           <a:p>
             <a:fld id="{75C8DF60-03EB-41BF-AD08-E11AFAEB47A5}" type="slidenum">
               <a:rPr lang="en-AT" smtClean="0"/>
-              <a:t>4</a:t>
+              <a:t>3</a:t>
             </a:fld>
             <a:endParaRPr lang="en-AT"/>
           </a:p>
@@ -983,7 +764,7 @@
     </p:spTree>
     <p:extLst>
       <p:ext uri="{BB962C8B-B14F-4D97-AF65-F5344CB8AC3E}">
-        <p14:creationId xmlns:p14="http://schemas.microsoft.com/office/powerpoint/2010/main" val="3541748672"/>
+        <p14:creationId xmlns:p14="http://schemas.microsoft.com/office/powerpoint/2010/main" val="638221337"/>
       </p:ext>
     </p:extLst>
   </p:cSld>
@@ -1037,298 +818,56 @@
           <a:bodyPr/>
           <a:lstStyle/>
           <a:p>
-            <a:pPr marL="0" marR="0" lvl="0" indent="0" algn="l" defTabSz="914400" rtl="0" eaLnBrk="1" fontAlgn="auto" latinLnBrk="0" hangingPunct="1">
-              <a:lnSpc>
-                <a:spcPct val="100000"/>
-              </a:lnSpc>
-              <a:spcBef>
-                <a:spcPts val="0"/>
-              </a:spcBef>
-              <a:spcAft>
-                <a:spcPts val="0"/>
-              </a:spcAft>
-              <a:buClrTx/>
-              <a:buSzTx/>
+            <a:r>
+              <a:rPr lang="en-GB" dirty="0"/>
+              <a:t>What I am interested in and where I also found little research is trying to utilize the software requirements as a resource to generate testcases.</a:t>
+            </a:r>
+          </a:p>
+          <a:p>
+            <a:r>
+              <a:rPr lang="en-GB" dirty="0"/>
+              <a:t>As in industrial settings integrating LLM’s in the development processes will be a step by step process.</a:t>
+            </a:r>
+          </a:p>
+          <a:p>
+            <a:r>
+              <a:rPr lang="en-GB" dirty="0"/>
+              <a:t>Since for unit testing they are already commonly used, I wanted to approach the topic from the other direction starting at the requirements.</a:t>
+            </a:r>
+          </a:p>
+          <a:p>
+            <a:pPr marL="171450" indent="-171450">
+              <a:buFont typeface="Wingdings" panose="05000000000000000000" pitchFamily="2" charset="2"/>
+              <a:buChar char="è"/>
+            </a:pPr>
+            <a:r>
+              <a:rPr lang="en-GB" dirty="0"/>
+              <a:t> acceptance testing</a:t>
+            </a:r>
+          </a:p>
+          <a:p>
+            <a:endParaRPr lang="en-GB" dirty="0"/>
+          </a:p>
+          <a:p>
+            <a:r>
+              <a:rPr lang="en-GB" dirty="0"/>
+              <a:t>High confidence that requirements are met is required at an early stage of developement. </a:t>
+            </a:r>
+          </a:p>
+          <a:p>
+            <a:r>
+              <a:rPr lang="en-GB" dirty="0"/>
+              <a:t>Biggest factor therefore are definitions of requirements </a:t>
+            </a:r>
+          </a:p>
+          <a:p>
+            <a:pPr marL="171450" indent="-171450">
               <a:buFontTx/>
-              <a:buNone/>
-              <a:tabLst/>
-              <a:defRPr/>
+              <a:buChar char="-"/>
             </a:pPr>
             <a:r>
               <a:rPr lang="en-GB" dirty="0"/>
-              <a:t>As an experimental setup I created a framework for structured test descriptions.</a:t>
-            </a:r>
-          </a:p>
-          <a:p>
-            <a:pPr marL="0" marR="0" lvl="0" indent="0" algn="l" defTabSz="914400" rtl="0" eaLnBrk="1" fontAlgn="auto" latinLnBrk="0" hangingPunct="1">
-              <a:lnSpc>
-                <a:spcPct val="100000"/>
-              </a:lnSpc>
-              <a:spcBef>
-                <a:spcPts val="0"/>
-              </a:spcBef>
-              <a:spcAft>
-                <a:spcPts val="0"/>
-              </a:spcAft>
-              <a:buClrTx/>
-              <a:buSzTx/>
-              <a:buFontTx/>
-              <a:buNone/>
-              <a:tabLst/>
-              <a:defRPr/>
-            </a:pPr>
-            <a:r>
-              <a:rPr lang="en-GB" dirty="0"/>
-              <a:t>As the difficulty is not to generate output, but to evaluate the quality of the output</a:t>
-            </a:r>
-          </a:p>
-          <a:p>
-            <a:pPr marL="0" marR="0" lvl="0" indent="0" algn="l" defTabSz="914400" rtl="0" eaLnBrk="1" fontAlgn="auto" latinLnBrk="0" hangingPunct="1">
-              <a:lnSpc>
-                <a:spcPct val="100000"/>
-              </a:lnSpc>
-              <a:spcBef>
-                <a:spcPts val="0"/>
-              </a:spcBef>
-              <a:spcAft>
-                <a:spcPts val="0"/>
-              </a:spcAft>
-              <a:buClrTx/>
-              <a:buSzTx/>
-              <a:buFontTx/>
-              <a:buNone/>
-              <a:tabLst/>
-              <a:defRPr/>
-            </a:pPr>
-            <a:endParaRPr lang="en-GB" dirty="0"/>
-          </a:p>
-          <a:p>
-            <a:pPr marL="0" marR="0" lvl="0" indent="0" algn="l" defTabSz="914400" rtl="0" eaLnBrk="1" fontAlgn="auto" latinLnBrk="0" hangingPunct="1">
-              <a:lnSpc>
-                <a:spcPct val="100000"/>
-              </a:lnSpc>
-              <a:spcBef>
-                <a:spcPts val="0"/>
-              </a:spcBef>
-              <a:spcAft>
-                <a:spcPts val="0"/>
-              </a:spcAft>
-              <a:buClrTx/>
-              <a:buSzTx/>
-              <a:buFontTx/>
-              <a:buNone/>
-              <a:tabLst/>
-              <a:defRPr/>
-            </a:pPr>
-            <a:r>
-              <a:rPr lang="en-GB" dirty="0"/>
-              <a:t>General structure shall be enforced using JSON which is a common way to get structured output from a LLM.</a:t>
-            </a:r>
-          </a:p>
-          <a:p>
-            <a:pPr marL="0" marR="0" lvl="0" indent="0" algn="l" defTabSz="914400" rtl="0" eaLnBrk="1" fontAlgn="auto" latinLnBrk="0" hangingPunct="1">
-              <a:lnSpc>
-                <a:spcPct val="100000"/>
-              </a:lnSpc>
-              <a:spcBef>
-                <a:spcPts val="0"/>
-              </a:spcBef>
-              <a:spcAft>
-                <a:spcPts val="0"/>
-              </a:spcAft>
-              <a:buClrTx/>
-              <a:buSzTx/>
-              <a:buFontTx/>
-              <a:buNone/>
-              <a:tabLst/>
-              <a:defRPr/>
-            </a:pPr>
-            <a:r>
-              <a:rPr lang="en-GB" sz="1200" dirty="0">
-                <a:latin typeface="Consolas" panose="020B0609020204030204" pitchFamily="49" charset="0"/>
-              </a:rPr>
-              <a:t>Requirement, test objective, preconditions, test steps, expected result </a:t>
-            </a:r>
-            <a:endParaRPr lang="en-GB" dirty="0">
-              <a:latin typeface="Consolas" panose="020B0609020204030204" pitchFamily="49" charset="0"/>
-            </a:endParaRPr>
-          </a:p>
-          <a:p>
-            <a:pPr marL="0" marR="0" lvl="0" indent="0" algn="l" defTabSz="914400" rtl="0" eaLnBrk="1" fontAlgn="auto" latinLnBrk="0" hangingPunct="1">
-              <a:lnSpc>
-                <a:spcPct val="100000"/>
-              </a:lnSpc>
-              <a:spcBef>
-                <a:spcPts val="0"/>
-              </a:spcBef>
-              <a:spcAft>
-                <a:spcPts val="0"/>
-              </a:spcAft>
-              <a:buClrTx/>
-              <a:buSzTx/>
-              <a:buFontTx/>
-              <a:buNone/>
-              <a:tabLst/>
-              <a:defRPr/>
-            </a:pPr>
-            <a:endParaRPr lang="en-GB" dirty="0"/>
-          </a:p>
-          <a:p>
-            <a:pPr marL="0" marR="0" lvl="0" indent="0" algn="l" defTabSz="914400" rtl="0" eaLnBrk="1" fontAlgn="auto" latinLnBrk="0" hangingPunct="1">
-              <a:lnSpc>
-                <a:spcPct val="100000"/>
-              </a:lnSpc>
-              <a:spcBef>
-                <a:spcPts val="0"/>
-              </a:spcBef>
-              <a:spcAft>
-                <a:spcPts val="0"/>
-              </a:spcAft>
-              <a:buClrTx/>
-              <a:buSzTx/>
-              <a:buFontTx/>
-              <a:buNone/>
-              <a:tabLst/>
-              <a:defRPr/>
-            </a:pPr>
-            <a:r>
-              <a:rPr lang="en-GB" dirty="0"/>
-              <a:t>Using prompt engineering techniques to generate testcase for each requirement.</a:t>
-            </a:r>
-          </a:p>
-          <a:p>
-            <a:pPr marL="0" marR="0" lvl="0" indent="0" algn="l" defTabSz="914400" rtl="0" eaLnBrk="1" fontAlgn="auto" latinLnBrk="0" hangingPunct="1">
-              <a:lnSpc>
-                <a:spcPct val="100000"/>
-              </a:lnSpc>
-              <a:spcBef>
-                <a:spcPts val="0"/>
-              </a:spcBef>
-              <a:spcAft>
-                <a:spcPts val="0"/>
-              </a:spcAft>
-              <a:buClrTx/>
-              <a:buSzTx/>
-              <a:buFontTx/>
-              <a:buNone/>
-              <a:tabLst/>
-              <a:defRPr/>
-            </a:pPr>
-            <a:r>
-              <a:rPr lang="en-GB" dirty="0"/>
-              <a:t>Simple validation structure for each component for a first quality estimate of model and prompt.</a:t>
-            </a:r>
-          </a:p>
-          <a:p>
-            <a:pPr marL="0" marR="0" lvl="0" indent="0" algn="l" defTabSz="914400" rtl="0" eaLnBrk="1" fontAlgn="auto" latinLnBrk="0" hangingPunct="1">
-              <a:lnSpc>
-                <a:spcPct val="100000"/>
-              </a:lnSpc>
-              <a:spcBef>
-                <a:spcPts val="0"/>
-              </a:spcBef>
-              <a:spcAft>
-                <a:spcPts val="0"/>
-              </a:spcAft>
-              <a:buClrTx/>
-              <a:buSzTx/>
-              <a:buFontTx/>
-              <a:buNone/>
-              <a:tabLst/>
-              <a:defRPr/>
-            </a:pPr>
-            <a:endParaRPr lang="en-GB" dirty="0"/>
-          </a:p>
-          <a:p>
-            <a:pPr marL="0" marR="0" lvl="0" indent="0" algn="l" defTabSz="914400" rtl="0" eaLnBrk="1" fontAlgn="auto" latinLnBrk="0" hangingPunct="1">
-              <a:lnSpc>
-                <a:spcPct val="100000"/>
-              </a:lnSpc>
-              <a:spcBef>
-                <a:spcPts val="0"/>
-              </a:spcBef>
-              <a:spcAft>
-                <a:spcPts val="0"/>
-              </a:spcAft>
-              <a:buClrTx/>
-              <a:buSzTx/>
-              <a:buFontTx/>
-              <a:buNone/>
-              <a:tabLst/>
-              <a:defRPr/>
-            </a:pPr>
-            <a:r>
-              <a:rPr lang="en-GB" dirty="0"/>
-              <a:t>Describe few rules….</a:t>
-            </a:r>
-          </a:p>
-          <a:p>
-            <a:pPr marL="0" marR="0" lvl="0" indent="0" algn="l" defTabSz="914400" rtl="0" eaLnBrk="1" fontAlgn="auto" latinLnBrk="0" hangingPunct="1">
-              <a:lnSpc>
-                <a:spcPct val="100000"/>
-              </a:lnSpc>
-              <a:spcBef>
-                <a:spcPts val="0"/>
-              </a:spcBef>
-              <a:spcAft>
-                <a:spcPts val="0"/>
-              </a:spcAft>
-              <a:buClrTx/>
-              <a:buSzTx/>
-              <a:buFontTx/>
-              <a:buNone/>
-              <a:tabLst/>
-              <a:defRPr/>
-            </a:pPr>
-            <a:endParaRPr lang="en-GB" dirty="0"/>
-          </a:p>
-          <a:p>
-            <a:pPr marL="0" marR="0" lvl="0" indent="0" algn="l" defTabSz="914400" rtl="0" eaLnBrk="1" fontAlgn="auto" latinLnBrk="0" hangingPunct="1">
-              <a:lnSpc>
-                <a:spcPct val="100000"/>
-              </a:lnSpc>
-              <a:spcBef>
-                <a:spcPts val="0"/>
-              </a:spcBef>
-              <a:spcAft>
-                <a:spcPts val="0"/>
-              </a:spcAft>
-              <a:buClrTx/>
-              <a:buSzTx/>
-              <a:buFontTx/>
-              <a:buNone/>
-              <a:tabLst/>
-              <a:defRPr/>
-            </a:pPr>
-            <a:r>
-              <a:rPr lang="en-GB" dirty="0"/>
-              <a:t>As a last step human verification </a:t>
-            </a:r>
-          </a:p>
-          <a:p>
-            <a:endParaRPr lang="en-GB" dirty="0"/>
-          </a:p>
-          <a:p>
-            <a:pPr marL="0" marR="0" lvl="0" indent="0" algn="l" defTabSz="914400" rtl="0" eaLnBrk="1" fontAlgn="auto" latinLnBrk="0" hangingPunct="1">
-              <a:lnSpc>
-                <a:spcPct val="100000"/>
-              </a:lnSpc>
-              <a:spcBef>
-                <a:spcPts val="0"/>
-              </a:spcBef>
-              <a:spcAft>
-                <a:spcPts val="0"/>
-              </a:spcAft>
-              <a:buClrTx/>
-              <a:buSzTx/>
-              <a:buFontTx/>
-              <a:buNone/>
-              <a:tabLst/>
-              <a:defRPr/>
-            </a:pPr>
-            <a:r>
-              <a:rPr lang="en-GB" dirty="0"/>
-              <a:t>Implementation:</a:t>
+              <a:t>how detailed requirements are defined – usually using natural language</a:t>
             </a:r>
           </a:p>
           <a:p>
@@ -1351,51 +890,95 @@
             </a:pPr>
             <a:r>
               <a:rPr lang="en-GB" dirty="0"/>
-              <a:t>OLLAMA API, focus on local models?, …</a:t>
-            </a:r>
-          </a:p>
-          <a:p>
-            <a:pPr marL="171450" marR="0" lvl="0" indent="-171450" algn="l" defTabSz="914400" rtl="0" eaLnBrk="1" fontAlgn="auto" latinLnBrk="0" hangingPunct="1">
-              <a:lnSpc>
-                <a:spcPct val="100000"/>
-              </a:lnSpc>
-              <a:spcBef>
-                <a:spcPts val="0"/>
-              </a:spcBef>
-              <a:spcAft>
-                <a:spcPts val="0"/>
-              </a:spcAft>
-              <a:buClrTx/>
-              <a:buSzTx/>
+              <a:t>room for interpretation – possible conflicts, … but definition is another topic (verifying requirements for completeness, integrity, …. Is another story)</a:t>
+            </a:r>
+          </a:p>
+          <a:p>
+            <a:pPr marL="171450" indent="-171450">
               <a:buFontTx/>
               <a:buChar char="-"/>
-              <a:tabLst/>
-              <a:defRPr/>
+            </a:pPr>
+            <a:r>
+              <a:rPr lang="en-GB" dirty="0"/>
+              <a:t>requirements define what the system must to but not how.</a:t>
+            </a:r>
+          </a:p>
+          <a:p>
+            <a:pPr marL="171450" indent="-171450">
+              <a:buFontTx/>
+              <a:buChar char="-"/>
+            </a:pPr>
+            <a:r>
+              <a:rPr lang="en-GB" dirty="0"/>
+              <a:t>basic functionality of a system shall be tested through simple testcases that relate to at least one requirement.</a:t>
+            </a:r>
+          </a:p>
+          <a:p>
+            <a:endParaRPr lang="en-GB" dirty="0"/>
+          </a:p>
+          <a:p>
+            <a:r>
+              <a:rPr lang="en-GB" dirty="0"/>
+              <a:t>Requirements usually short precise definition of expected behaviour.</a:t>
+            </a:r>
+          </a:p>
+          <a:p>
+            <a:r>
+              <a:rPr lang="en-GB" dirty="0"/>
+              <a:t>I am interested in how capable LLM’s are in generating structured test case description out of natural language requirements.</a:t>
+            </a:r>
+          </a:p>
+          <a:p>
+            <a:r>
+              <a:rPr lang="en-GB" dirty="0"/>
+              <a:t>Especially in techincal domains.</a:t>
+            </a:r>
+          </a:p>
+          <a:p>
+            <a:r>
+              <a:rPr lang="en-GB" dirty="0"/>
+              <a:t>Idea that in the future the approach would be a semi automatic acceptance testing pipeline with human in the loop.</a:t>
+            </a:r>
+          </a:p>
+          <a:p>
+            <a:endParaRPr lang="en-GB" dirty="0"/>
+          </a:p>
+          <a:p>
+            <a:r>
+              <a:rPr lang="en-GB" dirty="0"/>
+              <a:t>requirements -&gt; LLM -&gt; TC’s + Human verification as a first part of the pipeline</a:t>
+            </a:r>
+          </a:p>
+          <a:p>
+            <a:r>
+              <a:rPr lang="en-GB" dirty="0"/>
+              <a:t>-&gt; LLM -&gt; implementation human or machine + verification through gernerated TC + Human verification</a:t>
+            </a:r>
+          </a:p>
+          <a:p>
+            <a:endParaRPr lang="en-GB" dirty="0"/>
+          </a:p>
+          <a:p>
+            <a:r>
+              <a:rPr lang="en-GB" dirty="0"/>
+              <a:t>First we need to get an impression of how capable the models are to understand the requirements.</a:t>
+            </a:r>
+            <a:endParaRPr lang="en-AT" dirty="0"/>
+          </a:p>
+          <a:p>
+            <a:endParaRPr lang="en-GB" dirty="0"/>
+          </a:p>
+          <a:p>
+            <a:endParaRPr lang="en-GB" dirty="0"/>
+          </a:p>
+          <a:p>
+            <a:pPr marL="0" indent="0">
+              <a:buNone/>
             </a:pPr>
             <a:endParaRPr lang="en-GB" dirty="0"/>
           </a:p>
           <a:p>
-            <a:pPr marL="0" marR="0" lvl="0" indent="0" algn="l" defTabSz="914400" rtl="0" eaLnBrk="1" fontAlgn="auto" latinLnBrk="0" hangingPunct="1">
-              <a:lnSpc>
-                <a:spcPct val="100000"/>
-              </a:lnSpc>
-              <a:spcBef>
-                <a:spcPts val="0"/>
-              </a:spcBef>
-              <a:spcAft>
-                <a:spcPts val="0"/>
-              </a:spcAft>
-              <a:buClrTx/>
-              <a:buSzTx/>
-              <a:buFontTx/>
-              <a:buNone/>
-              <a:tabLst/>
-              <a:defRPr/>
-            </a:pPr>
-            <a:endParaRPr lang="en-GB" dirty="0"/>
-          </a:p>
-          <a:p>
-            <a:endParaRPr lang="en-GB" dirty="0"/>
+            <a:endParaRPr lang="en-AT" dirty="0"/>
           </a:p>
         </p:txBody>
       </p:sp>
@@ -1416,7 +999,7 @@
           <a:p>
             <a:fld id="{75C8DF60-03EB-41BF-AD08-E11AFAEB47A5}" type="slidenum">
               <a:rPr lang="en-AT" smtClean="0"/>
-              <a:t>5</a:t>
+              <a:t>4</a:t>
             </a:fld>
             <a:endParaRPr lang="en-AT"/>
           </a:p>
@@ -1425,7 +1008,7 @@
     </p:spTree>
     <p:extLst>
       <p:ext uri="{BB962C8B-B14F-4D97-AF65-F5344CB8AC3E}">
-        <p14:creationId xmlns:p14="http://schemas.microsoft.com/office/powerpoint/2010/main" val="2692396763"/>
+        <p14:creationId xmlns:p14="http://schemas.microsoft.com/office/powerpoint/2010/main" val="3541748672"/>
       </p:ext>
     </p:extLst>
   </p:cSld>
@@ -1479,6 +1062,560 @@
           <a:bodyPr/>
           <a:lstStyle/>
           <a:p>
+            <a:pPr marL="0" marR="0" lvl="0" indent="0" algn="l" defTabSz="914400" rtl="0" eaLnBrk="1" fontAlgn="auto" latinLnBrk="0" hangingPunct="1">
+              <a:lnSpc>
+                <a:spcPct val="100000"/>
+              </a:lnSpc>
+              <a:spcBef>
+                <a:spcPts val="0"/>
+              </a:spcBef>
+              <a:spcAft>
+                <a:spcPts val="0"/>
+              </a:spcAft>
+              <a:buClrTx/>
+              <a:buSzTx/>
+              <a:buFontTx/>
+              <a:buNone/>
+              <a:tabLst/>
+              <a:defRPr/>
+            </a:pPr>
+            <a:r>
+              <a:rPr lang="en-GB" dirty="0"/>
+              <a:t>As an experimental setup I first thought about the evaluation procedure.</a:t>
+            </a:r>
+          </a:p>
+          <a:p>
+            <a:pPr marL="0" marR="0" lvl="0" indent="0" algn="l" defTabSz="914400" rtl="0" eaLnBrk="1" fontAlgn="auto" latinLnBrk="0" hangingPunct="1">
+              <a:lnSpc>
+                <a:spcPct val="100000"/>
+              </a:lnSpc>
+              <a:spcBef>
+                <a:spcPts val="0"/>
+              </a:spcBef>
+              <a:spcAft>
+                <a:spcPts val="0"/>
+              </a:spcAft>
+              <a:buClrTx/>
+              <a:buSzTx/>
+              <a:buFontTx/>
+              <a:buNone/>
+              <a:tabLst/>
+              <a:defRPr/>
+            </a:pPr>
+            <a:r>
+              <a:rPr lang="en-GB" dirty="0"/>
+              <a:t>As the difficulty is not to generate output, but to evaluate the quality of the output</a:t>
+            </a:r>
+          </a:p>
+          <a:p>
+            <a:pPr marL="0" marR="0" lvl="0" indent="0" algn="l" defTabSz="914400" rtl="0" eaLnBrk="1" fontAlgn="auto" latinLnBrk="0" hangingPunct="1">
+              <a:lnSpc>
+                <a:spcPct val="100000"/>
+              </a:lnSpc>
+              <a:spcBef>
+                <a:spcPts val="0"/>
+              </a:spcBef>
+              <a:spcAft>
+                <a:spcPts val="0"/>
+              </a:spcAft>
+              <a:buClrTx/>
+              <a:buSzTx/>
+              <a:buFontTx/>
+              <a:buNone/>
+              <a:tabLst/>
+              <a:defRPr/>
+            </a:pPr>
+            <a:r>
+              <a:rPr lang="en-GB" dirty="0"/>
+              <a:t>Therefore I created a framework for structured test descriptions.</a:t>
+            </a:r>
+          </a:p>
+          <a:p>
+            <a:pPr marL="0" marR="0" lvl="0" indent="0" algn="l" defTabSz="914400" rtl="0" eaLnBrk="1" fontAlgn="auto" latinLnBrk="0" hangingPunct="1">
+              <a:lnSpc>
+                <a:spcPct val="100000"/>
+              </a:lnSpc>
+              <a:spcBef>
+                <a:spcPts val="0"/>
+              </a:spcBef>
+              <a:spcAft>
+                <a:spcPts val="0"/>
+              </a:spcAft>
+              <a:buClrTx/>
+              <a:buSzTx/>
+              <a:buFontTx/>
+              <a:buNone/>
+              <a:tabLst/>
+              <a:defRPr/>
+            </a:pPr>
+            <a:endParaRPr lang="en-GB" dirty="0"/>
+          </a:p>
+          <a:p>
+            <a:pPr marL="0" marR="0" lvl="0" indent="0" algn="l" defTabSz="914400" rtl="0" eaLnBrk="1" fontAlgn="auto" latinLnBrk="0" hangingPunct="1">
+              <a:lnSpc>
+                <a:spcPct val="100000"/>
+              </a:lnSpc>
+              <a:spcBef>
+                <a:spcPts val="0"/>
+              </a:spcBef>
+              <a:spcAft>
+                <a:spcPts val="0"/>
+              </a:spcAft>
+              <a:buClrTx/>
+              <a:buSzTx/>
+              <a:buFontTx/>
+              <a:buNone/>
+              <a:tabLst/>
+              <a:defRPr/>
+            </a:pPr>
+            <a:r>
+              <a:rPr lang="en-GB" dirty="0"/>
+              <a:t>General structure shall be enforced using JSON which is a common way to get structured output from a LLM -&gt; this already introduces a kind of directional stimulus.</a:t>
+            </a:r>
+          </a:p>
+          <a:p>
+            <a:pPr marL="0" marR="0" lvl="0" indent="0" algn="l" defTabSz="914400" rtl="0" eaLnBrk="1" fontAlgn="auto" latinLnBrk="0" hangingPunct="1">
+              <a:lnSpc>
+                <a:spcPct val="100000"/>
+              </a:lnSpc>
+              <a:spcBef>
+                <a:spcPts val="0"/>
+              </a:spcBef>
+              <a:spcAft>
+                <a:spcPts val="0"/>
+              </a:spcAft>
+              <a:buClrTx/>
+              <a:buSzTx/>
+              <a:buFontTx/>
+              <a:buNone/>
+              <a:tabLst/>
+              <a:defRPr/>
+            </a:pPr>
+            <a:r>
+              <a:rPr lang="en-GB" sz="1200" dirty="0">
+                <a:latin typeface="Consolas" panose="020B0609020204030204" pitchFamily="49" charset="0"/>
+              </a:rPr>
+              <a:t>Requirement, test objective, preconditions, test steps, expected result </a:t>
+            </a:r>
+            <a:endParaRPr lang="en-GB" dirty="0">
+              <a:latin typeface="Consolas" panose="020B0609020204030204" pitchFamily="49" charset="0"/>
+            </a:endParaRPr>
+          </a:p>
+          <a:p>
+            <a:pPr marL="0" marR="0" lvl="0" indent="0" algn="l" defTabSz="914400" rtl="0" eaLnBrk="1" fontAlgn="auto" latinLnBrk="0" hangingPunct="1">
+              <a:lnSpc>
+                <a:spcPct val="100000"/>
+              </a:lnSpc>
+              <a:spcBef>
+                <a:spcPts val="0"/>
+              </a:spcBef>
+              <a:spcAft>
+                <a:spcPts val="0"/>
+              </a:spcAft>
+              <a:buClrTx/>
+              <a:buSzTx/>
+              <a:buFontTx/>
+              <a:buNone/>
+              <a:tabLst/>
+              <a:defRPr/>
+            </a:pPr>
+            <a:endParaRPr lang="en-GB" dirty="0"/>
+          </a:p>
+          <a:p>
+            <a:pPr marL="0" marR="0" lvl="0" indent="0" algn="l" defTabSz="914400" rtl="0" eaLnBrk="1" fontAlgn="auto" latinLnBrk="0" hangingPunct="1">
+              <a:lnSpc>
+                <a:spcPct val="100000"/>
+              </a:lnSpc>
+              <a:spcBef>
+                <a:spcPts val="0"/>
+              </a:spcBef>
+              <a:spcAft>
+                <a:spcPts val="0"/>
+              </a:spcAft>
+              <a:buClrTx/>
+              <a:buSzTx/>
+              <a:buFontTx/>
+              <a:buNone/>
+              <a:tabLst/>
+              <a:defRPr/>
+            </a:pPr>
+            <a:r>
+              <a:rPr lang="en-GB" dirty="0"/>
+              <a:t>Using prompt engineering techniques to generate testcase for each requirement.</a:t>
+            </a:r>
+          </a:p>
+          <a:p>
+            <a:pPr marL="0" marR="0" lvl="0" indent="0" algn="l" defTabSz="914400" rtl="0" eaLnBrk="1" fontAlgn="auto" latinLnBrk="0" hangingPunct="1">
+              <a:lnSpc>
+                <a:spcPct val="100000"/>
+              </a:lnSpc>
+              <a:spcBef>
+                <a:spcPts val="0"/>
+              </a:spcBef>
+              <a:spcAft>
+                <a:spcPts val="0"/>
+              </a:spcAft>
+              <a:buClrTx/>
+              <a:buSzTx/>
+              <a:buFontTx/>
+              <a:buNone/>
+              <a:tabLst/>
+              <a:defRPr/>
+            </a:pPr>
+            <a:r>
+              <a:rPr lang="en-GB" dirty="0"/>
+              <a:t>Implement validation structure for each component of the test description for a first quality estimate of model and prompt.</a:t>
+            </a:r>
+          </a:p>
+          <a:p>
+            <a:pPr marL="0" marR="0" lvl="0" indent="0" algn="l" defTabSz="914400" rtl="0" eaLnBrk="1" fontAlgn="auto" latinLnBrk="0" hangingPunct="1">
+              <a:lnSpc>
+                <a:spcPct val="100000"/>
+              </a:lnSpc>
+              <a:spcBef>
+                <a:spcPts val="0"/>
+              </a:spcBef>
+              <a:spcAft>
+                <a:spcPts val="0"/>
+              </a:spcAft>
+              <a:buClrTx/>
+              <a:buSzTx/>
+              <a:buFontTx/>
+              <a:buNone/>
+              <a:tabLst/>
+              <a:defRPr/>
+            </a:pPr>
+            <a:endParaRPr lang="en-GB" dirty="0"/>
+          </a:p>
+          <a:p>
+            <a:pPr marL="0" marR="0" lvl="0" indent="0" algn="l" defTabSz="914400" rtl="0" eaLnBrk="1" fontAlgn="auto" latinLnBrk="0" hangingPunct="1">
+              <a:lnSpc>
+                <a:spcPct val="100000"/>
+              </a:lnSpc>
+              <a:spcBef>
+                <a:spcPts val="0"/>
+              </a:spcBef>
+              <a:spcAft>
+                <a:spcPts val="0"/>
+              </a:spcAft>
+              <a:buClrTx/>
+              <a:buSzTx/>
+              <a:buFontTx/>
+              <a:buNone/>
+              <a:tabLst/>
+              <a:defRPr/>
+            </a:pPr>
+            <a:r>
+              <a:rPr lang="en-GB" dirty="0"/>
+              <a:t>Requirement -&gt; high cosine similarity with original</a:t>
+            </a:r>
+          </a:p>
+          <a:p>
+            <a:pPr marL="0" marR="0" lvl="0" indent="0" algn="l" defTabSz="914400" rtl="0" eaLnBrk="1" fontAlgn="auto" latinLnBrk="0" hangingPunct="1">
+              <a:lnSpc>
+                <a:spcPct val="100000"/>
+              </a:lnSpc>
+              <a:spcBef>
+                <a:spcPts val="0"/>
+              </a:spcBef>
+              <a:spcAft>
+                <a:spcPts val="0"/>
+              </a:spcAft>
+              <a:buClrTx/>
+              <a:buSzTx/>
+              <a:buFontTx/>
+              <a:buNone/>
+              <a:tabLst/>
+              <a:defRPr/>
+            </a:pPr>
+            <a:r>
+              <a:rPr lang="en-GB" dirty="0"/>
+              <a:t>Use spacy pos tagging to verify expected field characteristics</a:t>
+            </a:r>
+          </a:p>
+          <a:p>
+            <a:pPr marL="0" marR="0" lvl="0" indent="0" algn="l" defTabSz="914400" rtl="0" eaLnBrk="1" fontAlgn="auto" latinLnBrk="0" hangingPunct="1">
+              <a:lnSpc>
+                <a:spcPct val="100000"/>
+              </a:lnSpc>
+              <a:spcBef>
+                <a:spcPts val="0"/>
+              </a:spcBef>
+              <a:spcAft>
+                <a:spcPts val="0"/>
+              </a:spcAft>
+              <a:buClrTx/>
+              <a:buSzTx/>
+              <a:buFontTx/>
+              <a:buNone/>
+              <a:tabLst/>
+              <a:defRPr/>
+            </a:pPr>
+            <a:r>
+              <a:rPr lang="en-GB" dirty="0"/>
+              <a:t>shall be present tense</a:t>
+            </a:r>
+          </a:p>
+          <a:p>
+            <a:pPr marL="0" marR="0" lvl="0" indent="0" algn="l" defTabSz="914400" rtl="0" eaLnBrk="1" fontAlgn="auto" latinLnBrk="0" hangingPunct="1">
+              <a:lnSpc>
+                <a:spcPct val="100000"/>
+              </a:lnSpc>
+              <a:spcBef>
+                <a:spcPts val="0"/>
+              </a:spcBef>
+              <a:spcAft>
+                <a:spcPts val="0"/>
+              </a:spcAft>
+              <a:buClrTx/>
+              <a:buSzTx/>
+              <a:buFontTx/>
+              <a:buNone/>
+              <a:tabLst/>
+              <a:defRPr/>
+            </a:pPr>
+            <a:r>
+              <a:rPr lang="en-GB" dirty="0"/>
+              <a:t>testObjective -&gt; describes the goal shall start with a verb</a:t>
+            </a:r>
+          </a:p>
+          <a:p>
+            <a:pPr marL="0" marR="0" lvl="0" indent="0" algn="l" defTabSz="914400" rtl="0" eaLnBrk="1" fontAlgn="auto" latinLnBrk="0" hangingPunct="1">
+              <a:lnSpc>
+                <a:spcPct val="100000"/>
+              </a:lnSpc>
+              <a:spcBef>
+                <a:spcPts val="0"/>
+              </a:spcBef>
+              <a:spcAft>
+                <a:spcPts val="0"/>
+              </a:spcAft>
+              <a:buClrTx/>
+              <a:buSzTx/>
+              <a:buFontTx/>
+              <a:buNone/>
+              <a:tabLst/>
+              <a:defRPr/>
+            </a:pPr>
+            <a:r>
+              <a:rPr lang="en-GB" dirty="0"/>
+              <a:t>preconditions -&gt; describes a state</a:t>
+            </a:r>
+          </a:p>
+          <a:p>
+            <a:pPr marL="0" marR="0" lvl="0" indent="0" algn="l" defTabSz="914400" rtl="0" eaLnBrk="1" fontAlgn="auto" latinLnBrk="0" hangingPunct="1">
+              <a:lnSpc>
+                <a:spcPct val="100000"/>
+              </a:lnSpc>
+              <a:spcBef>
+                <a:spcPts val="0"/>
+              </a:spcBef>
+              <a:spcAft>
+                <a:spcPts val="0"/>
+              </a:spcAft>
+              <a:buClrTx/>
+              <a:buSzTx/>
+              <a:buFontTx/>
+              <a:buNone/>
+              <a:tabLst/>
+              <a:defRPr/>
+            </a:pPr>
+            <a:r>
+              <a:rPr lang="en-GB" dirty="0"/>
+              <a:t>testSteps -&gt; generic check for list of sentences</a:t>
+            </a:r>
+          </a:p>
+          <a:p>
+            <a:pPr marL="0" marR="0" lvl="0" indent="0" algn="l" defTabSz="914400" rtl="0" eaLnBrk="1" fontAlgn="auto" latinLnBrk="0" hangingPunct="1">
+              <a:lnSpc>
+                <a:spcPct val="100000"/>
+              </a:lnSpc>
+              <a:spcBef>
+                <a:spcPts val="0"/>
+              </a:spcBef>
+              <a:spcAft>
+                <a:spcPts val="0"/>
+              </a:spcAft>
+              <a:buClrTx/>
+              <a:buSzTx/>
+              <a:buFontTx/>
+              <a:buNone/>
+              <a:tabLst/>
+              <a:defRPr/>
+            </a:pPr>
+            <a:r>
+              <a:rPr lang="en-GB" dirty="0"/>
+              <a:t>Expected results -&gt;</a:t>
+            </a:r>
+          </a:p>
+          <a:p>
+            <a:pPr marL="0" marR="0" lvl="0" indent="0" algn="l" defTabSz="914400" rtl="0" eaLnBrk="1" fontAlgn="auto" latinLnBrk="0" hangingPunct="1">
+              <a:lnSpc>
+                <a:spcPct val="100000"/>
+              </a:lnSpc>
+              <a:spcBef>
+                <a:spcPts val="0"/>
+              </a:spcBef>
+              <a:spcAft>
+                <a:spcPts val="0"/>
+              </a:spcAft>
+              <a:buClrTx/>
+              <a:buSzTx/>
+              <a:buFontTx/>
+              <a:buNone/>
+              <a:tabLst/>
+              <a:defRPr/>
+            </a:pPr>
+            <a:endParaRPr lang="en-GB" dirty="0"/>
+          </a:p>
+          <a:p>
+            <a:pPr marL="0" marR="0" lvl="0" indent="0" algn="l" defTabSz="914400" rtl="0" eaLnBrk="1" fontAlgn="auto" latinLnBrk="0" hangingPunct="1">
+              <a:lnSpc>
+                <a:spcPct val="100000"/>
+              </a:lnSpc>
+              <a:spcBef>
+                <a:spcPts val="0"/>
+              </a:spcBef>
+              <a:spcAft>
+                <a:spcPts val="0"/>
+              </a:spcAft>
+              <a:buClrTx/>
+              <a:buSzTx/>
+              <a:buFontTx/>
+              <a:buNone/>
+              <a:tabLst/>
+              <a:defRPr/>
+            </a:pPr>
+            <a:r>
+              <a:rPr lang="en-GB" dirty="0"/>
+              <a:t>As a last step human verification.</a:t>
+            </a:r>
+          </a:p>
+          <a:p>
+            <a:pPr marL="0" marR="0" lvl="0" indent="0" algn="l" defTabSz="914400" rtl="0" eaLnBrk="1" fontAlgn="auto" latinLnBrk="0" hangingPunct="1">
+              <a:lnSpc>
+                <a:spcPct val="100000"/>
+              </a:lnSpc>
+              <a:spcBef>
+                <a:spcPts val="0"/>
+              </a:spcBef>
+              <a:spcAft>
+                <a:spcPts val="0"/>
+              </a:spcAft>
+              <a:buClrTx/>
+              <a:buSzTx/>
+              <a:buFontTx/>
+              <a:buNone/>
+              <a:tabLst/>
+              <a:defRPr/>
+            </a:pPr>
+            <a:endParaRPr lang="en-GB" dirty="0"/>
+          </a:p>
+          <a:p>
+            <a:pPr marL="0" marR="0" lvl="0" indent="0" algn="l" defTabSz="914400" rtl="0" eaLnBrk="1" fontAlgn="auto" latinLnBrk="0" hangingPunct="1">
+              <a:lnSpc>
+                <a:spcPct val="100000"/>
+              </a:lnSpc>
+              <a:spcBef>
+                <a:spcPts val="0"/>
+              </a:spcBef>
+              <a:spcAft>
+                <a:spcPts val="0"/>
+              </a:spcAft>
+              <a:buClrTx/>
+              <a:buSzTx/>
+              <a:buFontTx/>
+              <a:buNone/>
+              <a:tabLst/>
+              <a:defRPr/>
+            </a:pPr>
+            <a:endParaRPr lang="en-GB" dirty="0"/>
+          </a:p>
+          <a:p>
+            <a:endParaRPr lang="en-GB" dirty="0"/>
+          </a:p>
+        </p:txBody>
+      </p:sp>
+      <p:sp>
+        <p:nvSpPr>
+          <p:cNvPr id="4" name="Slide Number Placeholder 3"/>
+          <p:cNvSpPr>
+            <a:spLocks noGrp="1"/>
+          </p:cNvSpPr>
+          <p:nvPr>
+            <p:ph type="sldNum" sz="quarter" idx="5"/>
+          </p:nvPr>
+        </p:nvSpPr>
+        <p:spPr/>
+        <p:txBody>
+          <a:bodyPr/>
+          <a:lstStyle/>
+          <a:p>
+            <a:fld id="{75C8DF60-03EB-41BF-AD08-E11AFAEB47A5}" type="slidenum">
+              <a:rPr lang="en-AT" smtClean="0"/>
+              <a:t>5</a:t>
+            </a:fld>
+            <a:endParaRPr lang="en-AT"/>
+          </a:p>
+        </p:txBody>
+      </p:sp>
+    </p:spTree>
+    <p:extLst>
+      <p:ext uri="{BB962C8B-B14F-4D97-AF65-F5344CB8AC3E}">
+        <p14:creationId xmlns:p14="http://schemas.microsoft.com/office/powerpoint/2010/main" val="2692396763"/>
+      </p:ext>
+    </p:extLst>
+  </p:cSld>
+  <p:clrMapOvr>
+    <a:masterClrMapping/>
+  </p:clrMapOvr>
+</p:notes>
+</file>
+
+<file path=ppt/notesSlides/notesSlide5.xml><?xml version="1.0" encoding="utf-8"?>
+<p:notes xmlns:a="http://schemas.openxmlformats.org/drawingml/2006/main" xmlns:r="http://schemas.openxmlformats.org/officeDocument/2006/relationships" xmlns:p="http://schemas.openxmlformats.org/presentationml/2006/main">
+  <p:cSld>
+    <p:spTree>
+      <p:nvGrpSpPr>
+        <p:cNvPr id="1" name=""/>
+        <p:cNvGrpSpPr/>
+        <p:nvPr/>
+      </p:nvGrpSpPr>
+      <p:grpSpPr>
+        <a:xfrm>
+          <a:off x="0" y="0"/>
+          <a:ext cx="0" cy="0"/>
+          <a:chOff x="0" y="0"/>
+          <a:chExt cx="0" cy="0"/>
+        </a:xfrm>
+      </p:grpSpPr>
+      <p:sp>
+        <p:nvSpPr>
+          <p:cNvPr id="2" name="Slide Image Placeholder 1"/>
+          <p:cNvSpPr>
+            <a:spLocks noGrp="1" noRot="1" noChangeAspect="1"/>
+          </p:cNvSpPr>
+          <p:nvPr>
+            <p:ph type="sldImg"/>
+          </p:nvPr>
+        </p:nvSpPr>
+        <p:spPr/>
+      </p:sp>
+      <p:sp>
+        <p:nvSpPr>
+          <p:cNvPr id="3" name="Notes Placeholder 2"/>
+          <p:cNvSpPr>
+            <a:spLocks noGrp="1"/>
+          </p:cNvSpPr>
+          <p:nvPr>
+            <p:ph type="body" idx="1"/>
+          </p:nvPr>
+        </p:nvSpPr>
+        <p:spPr/>
+        <p:txBody>
+          <a:bodyPr/>
+          <a:lstStyle/>
+          <a:p>
             <a:r>
               <a:rPr lang="en-GB" dirty="0"/>
               <a:t>Domain specific application chosen:</a:t>
@@ -1637,6 +1774,94 @@
     <p:extLst>
       <p:ext uri="{BB962C8B-B14F-4D97-AF65-F5344CB8AC3E}">
         <p14:creationId xmlns:p14="http://schemas.microsoft.com/office/powerpoint/2010/main" val="3964314433"/>
+      </p:ext>
+    </p:extLst>
+  </p:cSld>
+  <p:clrMapOvr>
+    <a:masterClrMapping/>
+  </p:clrMapOvr>
+</p:notes>
+</file>
+
+<file path=ppt/notesSlides/notesSlide6.xml><?xml version="1.0" encoding="utf-8"?>
+<p:notes xmlns:a="http://schemas.openxmlformats.org/drawingml/2006/main" xmlns:r="http://schemas.openxmlformats.org/officeDocument/2006/relationships" xmlns:p="http://schemas.openxmlformats.org/presentationml/2006/main">
+  <p:cSld>
+    <p:spTree>
+      <p:nvGrpSpPr>
+        <p:cNvPr id="1" name=""/>
+        <p:cNvGrpSpPr/>
+        <p:nvPr/>
+      </p:nvGrpSpPr>
+      <p:grpSpPr>
+        <a:xfrm>
+          <a:off x="0" y="0"/>
+          <a:ext cx="0" cy="0"/>
+          <a:chOff x="0" y="0"/>
+          <a:chExt cx="0" cy="0"/>
+        </a:xfrm>
+      </p:grpSpPr>
+      <p:sp>
+        <p:nvSpPr>
+          <p:cNvPr id="2" name="Slide Image Placeholder 1"/>
+          <p:cNvSpPr>
+            <a:spLocks noGrp="1" noRot="1" noChangeAspect="1"/>
+          </p:cNvSpPr>
+          <p:nvPr>
+            <p:ph type="sldImg"/>
+          </p:nvPr>
+        </p:nvSpPr>
+        <p:spPr/>
+      </p:sp>
+      <p:sp>
+        <p:nvSpPr>
+          <p:cNvPr id="3" name="Notes Placeholder 2"/>
+          <p:cNvSpPr>
+            <a:spLocks noGrp="1"/>
+          </p:cNvSpPr>
+          <p:nvPr>
+            <p:ph type="body" idx="1"/>
+          </p:nvPr>
+        </p:nvSpPr>
+        <p:spPr/>
+        <p:txBody>
+          <a:bodyPr/>
+          <a:lstStyle/>
+          <a:p>
+            <a:r>
+              <a:rPr lang="en-GB" dirty="0"/>
+              <a:t>As a baseline Zero shot learning was used with directional stimulus </a:t>
+            </a:r>
+            <a:endParaRPr lang="en-AT" dirty="0"/>
+          </a:p>
+        </p:txBody>
+      </p:sp>
+      <p:sp>
+        <p:nvSpPr>
+          <p:cNvPr id="4" name="Slide Number Placeholder 3"/>
+          <p:cNvSpPr>
+            <a:spLocks noGrp="1"/>
+          </p:cNvSpPr>
+          <p:nvPr>
+            <p:ph type="sldNum" sz="quarter" idx="5"/>
+          </p:nvPr>
+        </p:nvSpPr>
+        <p:spPr/>
+        <p:txBody>
+          <a:bodyPr/>
+          <a:lstStyle/>
+          <a:p>
+            <a:fld id="{75C8DF60-03EB-41BF-AD08-E11AFAEB47A5}" type="slidenum">
+              <a:rPr lang="en-AT" smtClean="0"/>
+              <a:t>8</a:t>
+            </a:fld>
+            <a:endParaRPr lang="en-AT"/>
+          </a:p>
+        </p:txBody>
+      </p:sp>
+    </p:spTree>
+    <p:extLst>
+      <p:ext uri="{BB962C8B-B14F-4D97-AF65-F5344CB8AC3E}">
+        <p14:creationId xmlns:p14="http://schemas.microsoft.com/office/powerpoint/2010/main" val="3643168453"/>
       </p:ext>
     </p:extLst>
   </p:cSld>
@@ -1795,7 +2020,7 @@
           <a:p>
             <a:fld id="{CD0BFEE2-3EAA-4386-9A3C-82D92E479C9F}" type="datetimeFigureOut">
               <a:rPr lang="en-AT" smtClean="0"/>
-              <a:t>23/04/2025</a:t>
+              <a:t>29/04/2025</a:t>
             </a:fld>
             <a:endParaRPr lang="en-AT"/>
           </a:p>
@@ -1995,7 +2220,7 @@
           <a:p>
             <a:fld id="{CD0BFEE2-3EAA-4386-9A3C-82D92E479C9F}" type="datetimeFigureOut">
               <a:rPr lang="en-AT" smtClean="0"/>
-              <a:t>23/04/2025</a:t>
+              <a:t>29/04/2025</a:t>
             </a:fld>
             <a:endParaRPr lang="en-AT"/>
           </a:p>
@@ -2205,7 +2430,7 @@
           <a:p>
             <a:fld id="{CD0BFEE2-3EAA-4386-9A3C-82D92E479C9F}" type="datetimeFigureOut">
               <a:rPr lang="en-AT" smtClean="0"/>
-              <a:t>23/04/2025</a:t>
+              <a:t>29/04/2025</a:t>
             </a:fld>
             <a:endParaRPr lang="en-AT"/>
           </a:p>
@@ -2405,7 +2630,7 @@
           <a:p>
             <a:fld id="{CD0BFEE2-3EAA-4386-9A3C-82D92E479C9F}" type="datetimeFigureOut">
               <a:rPr lang="en-AT" smtClean="0"/>
-              <a:t>23/04/2025</a:t>
+              <a:t>29/04/2025</a:t>
             </a:fld>
             <a:endParaRPr lang="en-AT"/>
           </a:p>
@@ -2681,7 +2906,7 @@
           <a:p>
             <a:fld id="{CD0BFEE2-3EAA-4386-9A3C-82D92E479C9F}" type="datetimeFigureOut">
               <a:rPr lang="en-AT" smtClean="0"/>
-              <a:t>23/04/2025</a:t>
+              <a:t>29/04/2025</a:t>
             </a:fld>
             <a:endParaRPr lang="en-AT"/>
           </a:p>
@@ -2949,7 +3174,7 @@
           <a:p>
             <a:fld id="{CD0BFEE2-3EAA-4386-9A3C-82D92E479C9F}" type="datetimeFigureOut">
               <a:rPr lang="en-AT" smtClean="0"/>
-              <a:t>23/04/2025</a:t>
+              <a:t>29/04/2025</a:t>
             </a:fld>
             <a:endParaRPr lang="en-AT"/>
           </a:p>
@@ -3364,7 +3589,7 @@
           <a:p>
             <a:fld id="{CD0BFEE2-3EAA-4386-9A3C-82D92E479C9F}" type="datetimeFigureOut">
               <a:rPr lang="en-AT" smtClean="0"/>
-              <a:t>23/04/2025</a:t>
+              <a:t>29/04/2025</a:t>
             </a:fld>
             <a:endParaRPr lang="en-AT"/>
           </a:p>
@@ -3506,7 +3731,7 @@
           <a:p>
             <a:fld id="{CD0BFEE2-3EAA-4386-9A3C-82D92E479C9F}" type="datetimeFigureOut">
               <a:rPr lang="en-AT" smtClean="0"/>
-              <a:t>23/04/2025</a:t>
+              <a:t>29/04/2025</a:t>
             </a:fld>
             <a:endParaRPr lang="en-AT"/>
           </a:p>
@@ -3619,7 +3844,7 @@
           <a:p>
             <a:fld id="{CD0BFEE2-3EAA-4386-9A3C-82D92E479C9F}" type="datetimeFigureOut">
               <a:rPr lang="en-AT" smtClean="0"/>
-              <a:t>23/04/2025</a:t>
+              <a:t>29/04/2025</a:t>
             </a:fld>
             <a:endParaRPr lang="en-AT"/>
           </a:p>
@@ -3932,7 +4157,7 @@
           <a:p>
             <a:fld id="{CD0BFEE2-3EAA-4386-9A3C-82D92E479C9F}" type="datetimeFigureOut">
               <a:rPr lang="en-AT" smtClean="0"/>
-              <a:t>23/04/2025</a:t>
+              <a:t>29/04/2025</a:t>
             </a:fld>
             <a:endParaRPr lang="en-AT"/>
           </a:p>
@@ -4221,7 +4446,7 @@
           <a:p>
             <a:fld id="{CD0BFEE2-3EAA-4386-9A3C-82D92E479C9F}" type="datetimeFigureOut">
               <a:rPr lang="en-AT" smtClean="0"/>
-              <a:t>23/04/2025</a:t>
+              <a:t>29/04/2025</a:t>
             </a:fld>
             <a:endParaRPr lang="en-AT"/>
           </a:p>
@@ -4464,7 +4689,7 @@
           <a:p>
             <a:fld id="{CD0BFEE2-3EAA-4386-9A3C-82D92E479C9F}" type="datetimeFigureOut">
               <a:rPr lang="en-AT" smtClean="0"/>
-              <a:t>23/04/2025</a:t>
+              <a:t>29/04/2025</a:t>
             </a:fld>
             <a:endParaRPr lang="en-AT"/>
           </a:p>
@@ -5425,7 +5650,7 @@
           <a:lstStyle/>
           <a:p>
             <a:r>
-              <a:rPr lang="en-GB">
+              <a:rPr lang="en-GB" dirty="0">
                 <a:latin typeface="Consolas" panose="020B0609020204030204" pitchFamily="49" charset="0"/>
               </a:rPr>
               <a:t>Outline</a:t>
@@ -5588,35 +5813,6 @@
           </a:p>
         </p:txBody>
       </p:sp>
-      <p:pic>
-        <p:nvPicPr>
-          <p:cNvPr id="5" name="Content Placeholder 4">
-            <a:extLst>
-              <a:ext uri="{FF2B5EF4-FFF2-40B4-BE49-F238E27FC236}">
-                <a16:creationId xmlns:a16="http://schemas.microsoft.com/office/drawing/2014/main" id="{507F5BA2-E442-8313-EF43-48BB47D63721}"/>
-              </a:ext>
-            </a:extLst>
-          </p:cNvPr>
-          <p:cNvPicPr>
-            <a:picLocks noGrp="1" noChangeAspect="1"/>
-          </p:cNvPicPr>
-          <p:nvPr>
-            <p:ph idx="1"/>
-          </p:nvPr>
-        </p:nvPicPr>
-        <p:blipFill>
-          <a:blip r:embed="rId3"/>
-          <a:stretch>
-            <a:fillRect/>
-          </a:stretch>
-        </p:blipFill>
-        <p:spPr>
-          <a:xfrm>
-            <a:off x="8156366" y="1397427"/>
-            <a:ext cx="3400425" cy="2790825"/>
-          </a:xfrm>
-        </p:spPr>
-      </p:pic>
       <p:sp>
         <p:nvSpPr>
           <p:cNvPr id="13" name="TextBox 12">
@@ -5937,15 +6133,21 @@
           </a:lstStyle>
           <a:p>
             <a:r>
-              <a:rPr lang="en-GB" dirty="0">
+              <a:rPr lang="en-GB" sz="2400" dirty="0">
                 <a:latin typeface="Consolas" panose="020B0609020204030204" pitchFamily="49" charset="0"/>
               </a:rPr>
               <a:t>Quality assurance through testing</a:t>
             </a:r>
           </a:p>
           <a:p>
-            <a:r>
-              <a:rPr lang="en-GB" dirty="0">
+            <a:pPr lvl="1"/>
+            <a:endParaRPr lang="en-GB" sz="2000" dirty="0">
+              <a:latin typeface="Consolas" panose="020B0609020204030204" pitchFamily="49" charset="0"/>
+            </a:endParaRPr>
+          </a:p>
+          <a:p>
+            <a:r>
+              <a:rPr lang="en-GB" sz="2400" dirty="0">
                 <a:latin typeface="Consolas" panose="020B0609020204030204" pitchFamily="49" charset="0"/>
               </a:rPr>
               <a:t>Strategies</a:t>
@@ -5954,49 +6156,79 @@
           <a:p>
             <a:pPr lvl="1"/>
             <a:r>
-              <a:rPr lang="en-GB" dirty="0">
+              <a:rPr lang="en-GB" sz="2000" dirty="0">
                 <a:latin typeface="Consolas" panose="020B0609020204030204" pitchFamily="49" charset="0"/>
               </a:rPr>
               <a:t>Unit testing</a:t>
             </a:r>
+            <a:endParaRPr lang="en-GB" sz="1600" dirty="0">
+              <a:latin typeface="Consolas" panose="020B0609020204030204" pitchFamily="49" charset="0"/>
+            </a:endParaRPr>
+          </a:p>
+          <a:p>
+            <a:pPr lvl="1"/>
+            <a:r>
+              <a:rPr lang="en-GB" sz="2000" dirty="0">
+                <a:latin typeface="Consolas" panose="020B0609020204030204" pitchFamily="49" charset="0"/>
+              </a:rPr>
+              <a:t>Integration testing</a:t>
+            </a:r>
+          </a:p>
+          <a:p>
+            <a:pPr lvl="1"/>
+            <a:r>
+              <a:rPr lang="en-GB" sz="2000" dirty="0">
+                <a:latin typeface="Consolas" panose="020B0609020204030204" pitchFamily="49" charset="0"/>
+              </a:rPr>
+              <a:t>Acceptance/Validation testing</a:t>
+            </a:r>
+          </a:p>
+          <a:p>
+            <a:pPr lvl="1"/>
+            <a:r>
+              <a:rPr lang="en-GB" sz="2000" dirty="0">
+                <a:latin typeface="Consolas" panose="020B0609020204030204" pitchFamily="49" charset="0"/>
+              </a:rPr>
+              <a:t>System testing</a:t>
+            </a:r>
+            <a:endParaRPr lang="en-GB" dirty="0">
+              <a:latin typeface="Consolas" panose="020B0609020204030204" pitchFamily="49" charset="0"/>
+            </a:endParaRPr>
+          </a:p>
+          <a:p>
+            <a:pPr marL="0" indent="0">
+              <a:buNone/>
+            </a:pPr>
             <a:endParaRPr lang="en-GB" sz="1800" dirty="0">
               <a:latin typeface="Consolas" panose="020B0609020204030204" pitchFamily="49" charset="0"/>
             </a:endParaRPr>
           </a:p>
           <a:p>
-            <a:pPr lvl="1"/>
-            <a:r>
-              <a:rPr lang="en-GB" dirty="0">
+            <a:r>
+              <a:rPr lang="en-GB" sz="2000" dirty="0">
                 <a:latin typeface="Consolas" panose="020B0609020204030204" pitchFamily="49" charset="0"/>
               </a:rPr>
-              <a:t>Integration testing</a:t>
-            </a:r>
-          </a:p>
-          <a:p>
-            <a:pPr lvl="1"/>
-            <a:r>
-              <a:rPr lang="en-GB" dirty="0">
+              <a:t>Research on applying LLM’s for </a:t>
+            </a:r>
+            <a:br>
+              <a:rPr lang="en-GB" sz="2000" dirty="0">
                 <a:latin typeface="Consolas" panose="020B0609020204030204" pitchFamily="49" charset="0"/>
               </a:rPr>
-              <a:t>Acceptance/Validation testing</a:t>
-            </a:r>
-          </a:p>
-          <a:p>
-            <a:pPr lvl="1"/>
-            <a:r>
-              <a:rPr lang="en-GB" dirty="0">
+            </a:br>
+            <a:r>
+              <a:rPr lang="en-GB" sz="2000" dirty="0">
                 <a:latin typeface="Consolas" panose="020B0609020204030204" pitchFamily="49" charset="0"/>
               </a:rPr>
-              <a:t>System testing</a:t>
-            </a:r>
-          </a:p>
-          <a:p>
-            <a:r>
-              <a:rPr lang="en-GB" sz="1600" dirty="0">
-                <a:latin typeface="Consolas" panose="020B0609020204030204" pitchFamily="49" charset="0"/>
-              </a:rPr>
-              <a:t>Most of LLM research on System and Unit testing</a:t>
-            </a:r>
+              <a:t>different testing strategies:</a:t>
+            </a:r>
+          </a:p>
+          <a:p>
+            <a:pPr lvl="1"/>
+            <a:endParaRPr lang="en-GB" sz="1400" dirty="0">
+              <a:latin typeface="Consolas" panose="020B0609020204030204" pitchFamily="49" charset="0"/>
+            </a:endParaRPr>
+          </a:p>
+          <a:p>
             <a:endParaRPr lang="en-AT" sz="1600" dirty="0">
               <a:latin typeface="Consolas" panose="020B0609020204030204" pitchFamily="49" charset="0"/>
             </a:endParaRPr>
@@ -6018,15 +6250,15 @@
           <p:nvPr/>
         </p:nvPicPr>
         <p:blipFill>
-          <a:blip r:embed="rId4"/>
+          <a:blip r:embed="rId3"/>
           <a:stretch>
             <a:fillRect/>
           </a:stretch>
         </p:blipFill>
         <p:spPr>
           <a:xfrm>
-            <a:off x="7689954" y="4099721"/>
-            <a:ext cx="4055386" cy="2358033"/>
+            <a:off x="6608027" y="3340241"/>
+            <a:ext cx="5421955" cy="3152634"/>
           </a:xfrm>
           <a:prstGeom prst="rect">
             <a:avLst/>
@@ -6101,35 +6333,6 @@
           </a:p>
         </p:txBody>
       </p:sp>
-      <p:pic>
-        <p:nvPicPr>
-          <p:cNvPr id="7" name="Content Placeholder 4">
-            <a:extLst>
-              <a:ext uri="{FF2B5EF4-FFF2-40B4-BE49-F238E27FC236}">
-                <a16:creationId xmlns:a16="http://schemas.microsoft.com/office/drawing/2014/main" id="{24381BF6-875C-C6D7-0F8A-56A34AFA6222}"/>
-              </a:ext>
-            </a:extLst>
-          </p:cNvPr>
-          <p:cNvPicPr>
-            <a:picLocks noGrp="1" noChangeAspect="1"/>
-          </p:cNvPicPr>
-          <p:nvPr>
-            <p:ph idx="1"/>
-          </p:nvPr>
-        </p:nvPicPr>
-        <p:blipFill>
-          <a:blip r:embed="rId3"/>
-          <a:stretch>
-            <a:fillRect/>
-          </a:stretch>
-        </p:blipFill>
-        <p:spPr>
-          <a:xfrm>
-            <a:off x="8189279" y="1567203"/>
-            <a:ext cx="3400425" cy="2790825"/>
-          </a:xfrm>
-        </p:spPr>
-      </p:pic>
       <p:sp>
         <p:nvSpPr>
           <p:cNvPr id="4" name="Content Placeholder 2">
@@ -6347,7 +6550,7 @@
         </p:nvSpPr>
         <p:spPr>
           <a:xfrm>
-            <a:off x="800724" y="1850401"/>
+            <a:off x="756274" y="1888841"/>
             <a:ext cx="10515600" cy="4351338"/>
           </a:xfrm>
           <a:prstGeom prst="rect">
@@ -6524,40 +6727,53 @@
           </a:lstStyle>
           <a:p>
             <a:r>
-              <a:rPr lang="en-GB" dirty="0">
+              <a:rPr lang="en-GB" sz="2400" dirty="0">
                 <a:latin typeface="Consolas" panose="020B0609020204030204" pitchFamily="49" charset="0"/>
               </a:rPr>
-              <a:t>Ensuring project meets </a:t>
-            </a:r>
-            <a:br>
-              <a:rPr lang="en-GB" dirty="0">
+              <a:t>Are requirements fullfilled?</a:t>
+            </a:r>
+          </a:p>
+          <a:p>
+            <a:endParaRPr lang="en-GB" sz="2400" dirty="0">
+              <a:latin typeface="Consolas" panose="020B0609020204030204" pitchFamily="49" charset="0"/>
+            </a:endParaRPr>
+          </a:p>
+          <a:p>
+            <a:r>
+              <a:rPr lang="en-GB" sz="2400" dirty="0">
                 <a:latin typeface="Consolas" panose="020B0609020204030204" pitchFamily="49" charset="0"/>
               </a:rPr>
-            </a:br>
-            <a:r>
-              <a:rPr lang="en-GB" dirty="0">
+              <a:t>How capable are LLM’s in:</a:t>
+            </a:r>
+          </a:p>
+          <a:p>
+            <a:pPr lvl="1"/>
+            <a:endParaRPr lang="en-GB" sz="2000" dirty="0">
+              <a:latin typeface="Consolas" panose="020B0609020204030204" pitchFamily="49" charset="0"/>
+            </a:endParaRPr>
+          </a:p>
+          <a:p>
+            <a:pPr lvl="1"/>
+            <a:r>
+              <a:rPr lang="en-GB" sz="2000" dirty="0">
                 <a:latin typeface="Consolas" panose="020B0609020204030204" pitchFamily="49" charset="0"/>
               </a:rPr>
-              <a:t>base requirements</a:t>
-            </a:r>
-          </a:p>
-          <a:p>
-            <a:r>
-              <a:rPr lang="en-GB" dirty="0">
+              <a:t>Understanding requirements in technical domain?</a:t>
+            </a:r>
+          </a:p>
+          <a:p>
+            <a:pPr lvl="1"/>
+            <a:endParaRPr lang="en-GB" sz="2000" dirty="0">
+              <a:latin typeface="Consolas" panose="020B0609020204030204" pitchFamily="49" charset="0"/>
+            </a:endParaRPr>
+          </a:p>
+          <a:p>
+            <a:pPr lvl="1"/>
+            <a:r>
+              <a:rPr lang="en-GB" sz="2000" dirty="0">
                 <a:latin typeface="Consolas" panose="020B0609020204030204" pitchFamily="49" charset="0"/>
               </a:rPr>
-              <a:t>Requirements highly dependent on </a:t>
-            </a:r>
-            <a:br>
-              <a:rPr lang="en-GB" dirty="0">
-                <a:latin typeface="Consolas" panose="020B0609020204030204" pitchFamily="49" charset="0"/>
-              </a:rPr>
-            </a:br>
-            <a:r>
-              <a:rPr lang="en-GB" dirty="0">
-                <a:latin typeface="Consolas" panose="020B0609020204030204" pitchFamily="49" charset="0"/>
-              </a:rPr>
-              <a:t>domain and project leads</a:t>
+              <a:t>Deriving test descriptions from requirements?</a:t>
             </a:r>
           </a:p>
           <a:p>
@@ -6565,19 +6781,14 @@
               <a:latin typeface="Consolas" panose="020B0609020204030204" pitchFamily="49" charset="0"/>
             </a:endParaRPr>
           </a:p>
-          <a:p>
-            <a:endParaRPr lang="en-AT" dirty="0">
-              <a:latin typeface="Consolas" panose="020B0609020204030204" pitchFamily="49" charset="0"/>
-            </a:endParaRPr>
-          </a:p>
         </p:txBody>
       </p:sp>
       <p:pic>
         <p:nvPicPr>
-          <p:cNvPr id="9" name="Picture 8">
-            <a:extLst>
-              <a:ext uri="{FF2B5EF4-FFF2-40B4-BE49-F238E27FC236}">
-                <a16:creationId xmlns:a16="http://schemas.microsoft.com/office/drawing/2014/main" id="{65419378-99D6-E9AE-D153-C28579E57131}"/>
+          <p:cNvPr id="12" name="Picture 11" descr="A diagram of a software process&#10;&#10;AI-generated content may be incorrect.">
+            <a:extLst>
+              <a:ext uri="{FF2B5EF4-FFF2-40B4-BE49-F238E27FC236}">
+                <a16:creationId xmlns:a16="http://schemas.microsoft.com/office/drawing/2014/main" id="{8668134D-364E-A501-4C35-C07E89BAF2A6}"/>
               </a:ext>
             </a:extLst>
           </p:cNvPr>
@@ -6587,15 +6798,21 @@
           <p:nvPr/>
         </p:nvPicPr>
         <p:blipFill>
-          <a:blip r:embed="rId4"/>
+          <a:blip r:embed="rId3">
+            <a:extLst>
+              <a:ext uri="{28A0092B-C50C-407E-A947-70E740481C1C}">
+                <a14:useLocalDpi xmlns:a14="http://schemas.microsoft.com/office/drawing/2010/main" val="0"/>
+              </a:ext>
+            </a:extLst>
+          </a:blip>
           <a:stretch>
             <a:fillRect/>
           </a:stretch>
         </p:blipFill>
         <p:spPr>
           <a:xfrm>
-            <a:off x="1504950" y="5282309"/>
-            <a:ext cx="8296275" cy="685800"/>
+            <a:off x="8702072" y="1333834"/>
+            <a:ext cx="3173584" cy="5121565"/>
           </a:xfrm>
           <a:prstGeom prst="rect">
             <a:avLst/>
@@ -6681,13 +6898,18 @@
             <p:ph idx="1"/>
           </p:nvPr>
         </p:nvSpPr>
-        <p:spPr/>
+        <p:spPr>
+          <a:xfrm>
+            <a:off x="838200" y="1690688"/>
+            <a:ext cx="10515600" cy="4351338"/>
+          </a:xfrm>
+        </p:spPr>
         <p:txBody>
           <a:bodyPr/>
           <a:lstStyle/>
           <a:p>
             <a:r>
-              <a:rPr lang="en-GB" dirty="0">
+              <a:rPr lang="en-GB" sz="2400" dirty="0">
                 <a:latin typeface="Consolas" panose="020B0609020204030204" pitchFamily="49" charset="0"/>
               </a:rPr>
               <a:t>Evaluation Procedure</a:t>
@@ -6696,7 +6918,7 @@
           <a:p>
             <a:pPr lvl="1"/>
             <a:r>
-              <a:rPr lang="en-GB" dirty="0">
+              <a:rPr lang="en-GB" sz="2000" dirty="0">
                 <a:latin typeface="Consolas" panose="020B0609020204030204" pitchFamily="49" charset="0"/>
               </a:rPr>
               <a:t>Use prompt engineering techniques to generate testcases</a:t>
@@ -6705,16 +6927,16 @@
           <a:p>
             <a:pPr lvl="1"/>
             <a:r>
-              <a:rPr lang="en-GB" dirty="0">
+              <a:rPr lang="en-GB" sz="2000" dirty="0">
                 <a:latin typeface="Consolas" panose="020B0609020204030204" pitchFamily="49" charset="0"/>
               </a:rPr>
-              <a:t>Simple validation structure for initial quality estimate of model output + prompt</a:t>
+              <a:t>Validation structure for initial quality estimate of model output + prompt</a:t>
             </a:r>
           </a:p>
           <a:p>
             <a:pPr lvl="1"/>
             <a:r>
-              <a:rPr lang="en-GB" dirty="0">
+              <a:rPr lang="en-GB" sz="2000" dirty="0">
                 <a:latin typeface="Consolas" panose="020B0609020204030204" pitchFamily="49" charset="0"/>
               </a:rPr>
               <a:t>Basic Test Description structure shall be enforced</a:t>
@@ -6722,20 +6944,38 @@
           </a:p>
           <a:p>
             <a:pPr lvl="2"/>
-            <a:r>
-              <a:rPr lang="en-GB" sz="2000" dirty="0">
-                <a:latin typeface="Consolas" panose="020B0609020204030204" pitchFamily="49" charset="0"/>
-              </a:rPr>
-              <a:t>Requirement, test objective, preconditions, test steps, expected result </a:t>
-            </a:r>
-            <a:endParaRPr lang="en-GB" dirty="0">
+            <a:endParaRPr lang="en-GB" sz="1800" dirty="0">
               <a:latin typeface="Consolas" panose="020B0609020204030204" pitchFamily="49" charset="0"/>
             </a:endParaRPr>
           </a:p>
           <a:p>
+            <a:pPr lvl="2"/>
+            <a:endParaRPr lang="en-GB" sz="1800" dirty="0">
+              <a:latin typeface="Consolas" panose="020B0609020204030204" pitchFamily="49" charset="0"/>
+            </a:endParaRPr>
+          </a:p>
+          <a:p>
+            <a:pPr lvl="2"/>
+            <a:endParaRPr lang="en-GB" sz="1800" dirty="0">
+              <a:latin typeface="Consolas" panose="020B0609020204030204" pitchFamily="49" charset="0"/>
+            </a:endParaRPr>
+          </a:p>
+          <a:p>
+            <a:pPr lvl="2"/>
+            <a:endParaRPr lang="en-GB" sz="1800" dirty="0">
+              <a:latin typeface="Consolas" panose="020B0609020204030204" pitchFamily="49" charset="0"/>
+            </a:endParaRPr>
+          </a:p>
+          <a:p>
+            <a:pPr lvl="2"/>
+            <a:endParaRPr lang="en-GB" sz="1800" dirty="0">
+              <a:latin typeface="Consolas" panose="020B0609020204030204" pitchFamily="49" charset="0"/>
+            </a:endParaRPr>
+          </a:p>
+          <a:p>
             <a:pPr lvl="1"/>
             <a:r>
-              <a:rPr lang="en-GB" dirty="0">
+              <a:rPr lang="en-GB" sz="2000" dirty="0">
                 <a:latin typeface="Consolas" panose="020B0609020204030204" pitchFamily="49" charset="0"/>
               </a:rPr>
               <a:t>Human verification as final evaluation</a:t>
@@ -6749,6 +6989,36 @@
           </a:p>
         </p:txBody>
       </p:sp>
+      <p:pic>
+        <p:nvPicPr>
+          <p:cNvPr id="5" name="Picture 4">
+            <a:extLst>
+              <a:ext uri="{FF2B5EF4-FFF2-40B4-BE49-F238E27FC236}">
+                <a16:creationId xmlns:a16="http://schemas.microsoft.com/office/drawing/2014/main" id="{3E48E7C1-7749-EDCC-8F01-AEDE69A6F890}"/>
+              </a:ext>
+            </a:extLst>
+          </p:cNvPr>
+          <p:cNvPicPr>
+            <a:picLocks noChangeAspect="1"/>
+          </p:cNvPicPr>
+          <p:nvPr/>
+        </p:nvPicPr>
+        <p:blipFill>
+          <a:blip r:embed="rId3"/>
+          <a:stretch>
+            <a:fillRect/>
+          </a:stretch>
+        </p:blipFill>
+        <p:spPr>
+          <a:xfrm>
+            <a:off x="3476786" y="3429000"/>
+            <a:ext cx="2415107" cy="1434615"/>
+          </a:xfrm>
+          <a:prstGeom prst="rect">
+            <a:avLst/>
+          </a:prstGeom>
+        </p:spPr>
+      </p:pic>
     </p:spTree>
     <p:extLst>
       <p:ext uri="{BB962C8B-B14F-4D97-AF65-F5344CB8AC3E}">
@@ -7267,14 +7537,6 @@
                 <a:latin typeface="Consolas" panose="020B0609020204030204" pitchFamily="49" charset="0"/>
               </a:rPr>
               <a:t>Providing context</a:t>
-            </a:r>
-          </a:p>
-          <a:p>
-            <a:r>
-              <a:rPr lang="en-GB" dirty="0">
-                <a:latin typeface="Consolas" panose="020B0609020204030204" pitchFamily="49" charset="0"/>
-              </a:rPr>
-              <a:t>Multimodality</a:t>
             </a:r>
           </a:p>
           <a:p>

--- a/presentation/RBST_prompt-eng [Autosaved].pptx
+++ b/presentation/RBST_prompt-eng [Autosaved].pptx
@@ -5,19 +5,22 @@
     <p:sldMasterId id="2147483648" r:id="rId1"/>
   </p:sldMasterIdLst>
   <p:notesMasterIdLst>
-    <p:notesMasterId r:id="rId12"/>
+    <p:notesMasterId r:id="rId15"/>
   </p:notesMasterIdLst>
   <p:sldIdLst>
     <p:sldId id="256" r:id="rId2"/>
-    <p:sldId id="257" r:id="rId3"/>
-    <p:sldId id="258" r:id="rId4"/>
-    <p:sldId id="264" r:id="rId5"/>
-    <p:sldId id="260" r:id="rId6"/>
-    <p:sldId id="261" r:id="rId7"/>
-    <p:sldId id="266" r:id="rId8"/>
-    <p:sldId id="262" r:id="rId9"/>
+    <p:sldId id="258" r:id="rId3"/>
+    <p:sldId id="264" r:id="rId4"/>
+    <p:sldId id="260" r:id="rId5"/>
+    <p:sldId id="261" r:id="rId6"/>
+    <p:sldId id="266" r:id="rId7"/>
+    <p:sldId id="262" r:id="rId8"/>
+    <p:sldId id="269" r:id="rId9"/>
     <p:sldId id="263" r:id="rId10"/>
-    <p:sldId id="265" r:id="rId11"/>
+    <p:sldId id="270" r:id="rId11"/>
+    <p:sldId id="265" r:id="rId12"/>
+    <p:sldId id="268" r:id="rId13"/>
+    <p:sldId id="267" r:id="rId14"/>
   </p:sldIdLst>
   <p:sldSz cx="12192000" cy="6858000"/>
   <p:notesSz cx="6858000" cy="9144000"/>
@@ -206,7 +209,7 @@
           <a:p>
             <a:fld id="{0C1CC868-F01F-4D3C-B0FF-9A3075033AE5}" type="datetimeFigureOut">
               <a:rPr lang="en-AT" smtClean="0"/>
-              <a:t>29/04/2025</a:t>
+              <a:t>02/06/2025</a:t>
             </a:fld>
             <a:endParaRPr lang="en-AT"/>
           </a:p>
@@ -558,6 +561,457 @@
 </p:notes>
 </file>
 
+<file path=ppt/notesSlides/notesSlide10.xml><?xml version="1.0" encoding="utf-8"?>
+<p:notes xmlns:a="http://schemas.openxmlformats.org/drawingml/2006/main" xmlns:r="http://schemas.openxmlformats.org/officeDocument/2006/relationships" xmlns:p="http://schemas.openxmlformats.org/presentationml/2006/main">
+  <p:cSld>
+    <p:spTree>
+      <p:nvGrpSpPr>
+        <p:cNvPr id="1" name="">
+          <a:extLst>
+            <a:ext uri="{FF2B5EF4-FFF2-40B4-BE49-F238E27FC236}">
+              <a16:creationId xmlns:a16="http://schemas.microsoft.com/office/drawing/2014/main" id="{F3230FB1-8E47-85F2-CF8A-538624B30CB8}"/>
+            </a:ext>
+          </a:extLst>
+        </p:cNvPr>
+        <p:cNvGrpSpPr/>
+        <p:nvPr/>
+      </p:nvGrpSpPr>
+      <p:grpSpPr>
+        <a:xfrm>
+          <a:off x="0" y="0"/>
+          <a:ext cx="0" cy="0"/>
+          <a:chOff x="0" y="0"/>
+          <a:chExt cx="0" cy="0"/>
+        </a:xfrm>
+      </p:grpSpPr>
+      <p:sp>
+        <p:nvSpPr>
+          <p:cNvPr id="2" name="Slide Image Placeholder 1">
+            <a:extLst>
+              <a:ext uri="{FF2B5EF4-FFF2-40B4-BE49-F238E27FC236}">
+                <a16:creationId xmlns:a16="http://schemas.microsoft.com/office/drawing/2014/main" id="{0817DF9A-89D2-0EE6-5822-E92798831F73}"/>
+              </a:ext>
+            </a:extLst>
+          </p:cNvPr>
+          <p:cNvSpPr>
+            <a:spLocks noGrp="1" noRot="1" noChangeAspect="1"/>
+          </p:cNvSpPr>
+          <p:nvPr>
+            <p:ph type="sldImg"/>
+          </p:nvPr>
+        </p:nvSpPr>
+        <p:spPr/>
+      </p:sp>
+      <p:sp>
+        <p:nvSpPr>
+          <p:cNvPr id="3" name="Notes Placeholder 2">
+            <a:extLst>
+              <a:ext uri="{FF2B5EF4-FFF2-40B4-BE49-F238E27FC236}">
+                <a16:creationId xmlns:a16="http://schemas.microsoft.com/office/drawing/2014/main" id="{1144EAD9-D1DF-FC35-C065-9A6F79BFDBE1}"/>
+              </a:ext>
+            </a:extLst>
+          </p:cNvPr>
+          <p:cNvSpPr>
+            <a:spLocks noGrp="1"/>
+          </p:cNvSpPr>
+          <p:nvPr>
+            <p:ph type="body" idx="1"/>
+          </p:nvPr>
+        </p:nvSpPr>
+        <p:spPr/>
+        <p:txBody>
+          <a:bodyPr/>
+          <a:lstStyle/>
+          <a:p>
+            <a:endParaRPr lang="en-GB" b="0" dirty="0"/>
+          </a:p>
+        </p:txBody>
+      </p:sp>
+      <p:sp>
+        <p:nvSpPr>
+          <p:cNvPr id="4" name="Slide Number Placeholder 3">
+            <a:extLst>
+              <a:ext uri="{FF2B5EF4-FFF2-40B4-BE49-F238E27FC236}">
+                <a16:creationId xmlns:a16="http://schemas.microsoft.com/office/drawing/2014/main" id="{A471498F-773C-52EB-5319-AC8D23EF2937}"/>
+              </a:ext>
+            </a:extLst>
+          </p:cNvPr>
+          <p:cNvSpPr>
+            <a:spLocks noGrp="1"/>
+          </p:cNvSpPr>
+          <p:nvPr>
+            <p:ph type="sldNum" sz="quarter" idx="5"/>
+          </p:nvPr>
+        </p:nvSpPr>
+        <p:spPr/>
+        <p:txBody>
+          <a:bodyPr/>
+          <a:lstStyle/>
+          <a:p>
+            <a:fld id="{75C8DF60-03EB-41BF-AD08-E11AFAEB47A5}" type="slidenum">
+              <a:rPr lang="en-AT" smtClean="0"/>
+              <a:t>10</a:t>
+            </a:fld>
+            <a:endParaRPr lang="en-AT"/>
+          </a:p>
+        </p:txBody>
+      </p:sp>
+    </p:spTree>
+    <p:extLst>
+      <p:ext uri="{BB962C8B-B14F-4D97-AF65-F5344CB8AC3E}">
+        <p14:creationId xmlns:p14="http://schemas.microsoft.com/office/powerpoint/2010/main" val="3192088645"/>
+      </p:ext>
+    </p:extLst>
+  </p:cSld>
+  <p:clrMapOvr>
+    <a:masterClrMapping/>
+  </p:clrMapOvr>
+</p:notes>
+</file>
+
+<file path=ppt/notesSlides/notesSlide11.xml><?xml version="1.0" encoding="utf-8"?>
+<p:notes xmlns:a="http://schemas.openxmlformats.org/drawingml/2006/main" xmlns:r="http://schemas.openxmlformats.org/officeDocument/2006/relationships" xmlns:p="http://schemas.openxmlformats.org/presentationml/2006/main">
+  <p:cSld>
+    <p:spTree>
+      <p:nvGrpSpPr>
+        <p:cNvPr id="1" name=""/>
+        <p:cNvGrpSpPr/>
+        <p:nvPr/>
+      </p:nvGrpSpPr>
+      <p:grpSpPr>
+        <a:xfrm>
+          <a:off x="0" y="0"/>
+          <a:ext cx="0" cy="0"/>
+          <a:chOff x="0" y="0"/>
+          <a:chExt cx="0" cy="0"/>
+        </a:xfrm>
+      </p:grpSpPr>
+      <p:sp>
+        <p:nvSpPr>
+          <p:cNvPr id="2" name="Slide Image Placeholder 1"/>
+          <p:cNvSpPr>
+            <a:spLocks noGrp="1" noRot="1" noChangeAspect="1"/>
+          </p:cNvSpPr>
+          <p:nvPr>
+            <p:ph type="sldImg"/>
+          </p:nvPr>
+        </p:nvSpPr>
+        <p:spPr/>
+      </p:sp>
+      <p:sp>
+        <p:nvSpPr>
+          <p:cNvPr id="3" name="Notes Placeholder 2"/>
+          <p:cNvSpPr>
+            <a:spLocks noGrp="1"/>
+          </p:cNvSpPr>
+          <p:nvPr>
+            <p:ph type="body" idx="1"/>
+          </p:nvPr>
+        </p:nvSpPr>
+        <p:spPr/>
+        <p:txBody>
+          <a:bodyPr/>
+          <a:lstStyle/>
+          <a:p>
+            <a:endParaRPr lang="en-AT" dirty="0"/>
+          </a:p>
+        </p:txBody>
+      </p:sp>
+      <p:sp>
+        <p:nvSpPr>
+          <p:cNvPr id="4" name="Slide Number Placeholder 3"/>
+          <p:cNvSpPr>
+            <a:spLocks noGrp="1"/>
+          </p:cNvSpPr>
+          <p:nvPr>
+            <p:ph type="sldNum" sz="quarter" idx="5"/>
+          </p:nvPr>
+        </p:nvSpPr>
+        <p:spPr/>
+        <p:txBody>
+          <a:bodyPr/>
+          <a:lstStyle/>
+          <a:p>
+            <a:fld id="{75C8DF60-03EB-41BF-AD08-E11AFAEB47A5}" type="slidenum">
+              <a:rPr lang="en-AT" smtClean="0"/>
+              <a:t>11</a:t>
+            </a:fld>
+            <a:endParaRPr lang="en-AT"/>
+          </a:p>
+        </p:txBody>
+      </p:sp>
+    </p:spTree>
+    <p:extLst>
+      <p:ext uri="{BB962C8B-B14F-4D97-AF65-F5344CB8AC3E}">
+        <p14:creationId xmlns:p14="http://schemas.microsoft.com/office/powerpoint/2010/main" val="1324648689"/>
+      </p:ext>
+    </p:extLst>
+  </p:cSld>
+  <p:clrMapOvr>
+    <a:masterClrMapping/>
+  </p:clrMapOvr>
+</p:notes>
+</file>
+
+<file path=ppt/notesSlides/notesSlide12.xml><?xml version="1.0" encoding="utf-8"?>
+<p:notes xmlns:a="http://schemas.openxmlformats.org/drawingml/2006/main" xmlns:r="http://schemas.openxmlformats.org/officeDocument/2006/relationships" xmlns:p="http://schemas.openxmlformats.org/presentationml/2006/main">
+  <p:cSld>
+    <p:spTree>
+      <p:nvGrpSpPr>
+        <p:cNvPr id="1" name=""/>
+        <p:cNvGrpSpPr/>
+        <p:nvPr/>
+      </p:nvGrpSpPr>
+      <p:grpSpPr>
+        <a:xfrm>
+          <a:off x="0" y="0"/>
+          <a:ext cx="0" cy="0"/>
+          <a:chOff x="0" y="0"/>
+          <a:chExt cx="0" cy="0"/>
+        </a:xfrm>
+      </p:grpSpPr>
+      <p:sp>
+        <p:nvSpPr>
+          <p:cNvPr id="2" name="Slide Image Placeholder 1"/>
+          <p:cNvSpPr>
+            <a:spLocks noGrp="1" noRot="1" noChangeAspect="1"/>
+          </p:cNvSpPr>
+          <p:nvPr>
+            <p:ph type="sldImg"/>
+          </p:nvPr>
+        </p:nvSpPr>
+        <p:spPr/>
+      </p:sp>
+      <p:sp>
+        <p:nvSpPr>
+          <p:cNvPr id="3" name="Notes Placeholder 2"/>
+          <p:cNvSpPr>
+            <a:spLocks noGrp="1"/>
+          </p:cNvSpPr>
+          <p:nvPr>
+            <p:ph type="body" idx="1"/>
+          </p:nvPr>
+        </p:nvSpPr>
+        <p:spPr/>
+        <p:txBody>
+          <a:bodyPr/>
+          <a:lstStyle/>
+          <a:p>
+            <a:r>
+              <a:rPr lang="en-GB" dirty="0"/>
+              <a:t>Initially problems with generation where model just got stuck and did not output anything anymore at a certain point.</a:t>
+            </a:r>
+          </a:p>
+          <a:p>
+            <a:endParaRPr lang="en-GB" dirty="0"/>
+          </a:p>
+          <a:p>
+            <a:r>
+              <a:rPr lang="en-GB" dirty="0"/>
+              <a:t>Played around with parameters to stabilize it.</a:t>
+            </a:r>
+          </a:p>
+          <a:p>
+            <a:r>
+              <a:rPr lang="en-GB" dirty="0"/>
+              <a:t>Most important changes:</a:t>
+            </a:r>
+          </a:p>
+          <a:p>
+            <a:endParaRPr lang="en-GB" dirty="0"/>
+          </a:p>
+          <a:p>
+            <a:r>
+              <a:rPr lang="en-GB" dirty="0"/>
+              <a:t>Larger context size for better </a:t>
+            </a:r>
+          </a:p>
+          <a:p>
+            <a:r>
+              <a:rPr lang="en-GB" dirty="0"/>
+              <a:t>Deacreased repeat penalty default 1.1 to 0.7 -&gt; highes impact</a:t>
+            </a:r>
+          </a:p>
+          <a:p>
+            <a:r>
+              <a:rPr lang="en-GB" dirty="0"/>
+              <a:t>top_p 0.8 -&gt; 0.7 to get slightly more conservative answers</a:t>
+            </a:r>
+          </a:p>
+          <a:p>
+            <a:endParaRPr lang="en-GB" dirty="0"/>
+          </a:p>
+          <a:p>
+            <a:pPr marL="0" marR="0" lvl="0" indent="0" algn="l" defTabSz="914400" rtl="0" eaLnBrk="1" fontAlgn="auto" latinLnBrk="0" hangingPunct="1">
+              <a:lnSpc>
+                <a:spcPct val="100000"/>
+              </a:lnSpc>
+              <a:spcBef>
+                <a:spcPts val="0"/>
+              </a:spcBef>
+              <a:spcAft>
+                <a:spcPts val="0"/>
+              </a:spcAft>
+              <a:buClrTx/>
+              <a:buSzTx/>
+              <a:buFontTx/>
+              <a:buNone/>
+              <a:tabLst/>
+              <a:defRPr/>
+            </a:pPr>
+            <a:r>
+              <a:rPr lang="en-GB" dirty="0"/>
+              <a:t>1.5b parameter model:</a:t>
+            </a:r>
+          </a:p>
+          <a:p>
+            <a:pPr marL="0" marR="0" lvl="0" indent="0" algn="l" defTabSz="914400" rtl="0" eaLnBrk="1" fontAlgn="auto" latinLnBrk="0" hangingPunct="1">
+              <a:lnSpc>
+                <a:spcPct val="100000"/>
+              </a:lnSpc>
+              <a:spcBef>
+                <a:spcPts val="0"/>
+              </a:spcBef>
+              <a:spcAft>
+                <a:spcPts val="0"/>
+              </a:spcAft>
+              <a:buClrTx/>
+              <a:buSzTx/>
+              <a:buFontTx/>
+              <a:buNone/>
+              <a:tabLst/>
+              <a:defRPr/>
+            </a:pPr>
+            <a:r>
+              <a:rPr lang="en-GB" dirty="0"/>
+              <a:t>(Ctx should not be the issue model card says 128k)</a:t>
+            </a:r>
+          </a:p>
+          <a:p>
+            <a:endParaRPr lang="en-AT" dirty="0"/>
+          </a:p>
+        </p:txBody>
+      </p:sp>
+      <p:sp>
+        <p:nvSpPr>
+          <p:cNvPr id="4" name="Slide Number Placeholder 3"/>
+          <p:cNvSpPr>
+            <a:spLocks noGrp="1"/>
+          </p:cNvSpPr>
+          <p:nvPr>
+            <p:ph type="sldNum" sz="quarter" idx="5"/>
+          </p:nvPr>
+        </p:nvSpPr>
+        <p:spPr/>
+        <p:txBody>
+          <a:bodyPr/>
+          <a:lstStyle/>
+          <a:p>
+            <a:fld id="{75C8DF60-03EB-41BF-AD08-E11AFAEB47A5}" type="slidenum">
+              <a:rPr lang="en-AT" smtClean="0"/>
+              <a:t>12</a:t>
+            </a:fld>
+            <a:endParaRPr lang="en-AT"/>
+          </a:p>
+        </p:txBody>
+      </p:sp>
+    </p:spTree>
+    <p:extLst>
+      <p:ext uri="{BB962C8B-B14F-4D97-AF65-F5344CB8AC3E}">
+        <p14:creationId xmlns:p14="http://schemas.microsoft.com/office/powerpoint/2010/main" val="2441362846"/>
+      </p:ext>
+    </p:extLst>
+  </p:cSld>
+  <p:clrMapOvr>
+    <a:masterClrMapping/>
+  </p:clrMapOvr>
+</p:notes>
+</file>
+
+<file path=ppt/notesSlides/notesSlide13.xml><?xml version="1.0" encoding="utf-8"?>
+<p:notes xmlns:a="http://schemas.openxmlformats.org/drawingml/2006/main" xmlns:r="http://schemas.openxmlformats.org/officeDocument/2006/relationships" xmlns:p="http://schemas.openxmlformats.org/presentationml/2006/main">
+  <p:cSld>
+    <p:spTree>
+      <p:nvGrpSpPr>
+        <p:cNvPr id="1" name=""/>
+        <p:cNvGrpSpPr/>
+        <p:nvPr/>
+      </p:nvGrpSpPr>
+      <p:grpSpPr>
+        <a:xfrm>
+          <a:off x="0" y="0"/>
+          <a:ext cx="0" cy="0"/>
+          <a:chOff x="0" y="0"/>
+          <a:chExt cx="0" cy="0"/>
+        </a:xfrm>
+      </p:grpSpPr>
+      <p:sp>
+        <p:nvSpPr>
+          <p:cNvPr id="2" name="Slide Image Placeholder 1"/>
+          <p:cNvSpPr>
+            <a:spLocks noGrp="1" noRot="1" noChangeAspect="1"/>
+          </p:cNvSpPr>
+          <p:nvPr>
+            <p:ph type="sldImg"/>
+          </p:nvPr>
+        </p:nvSpPr>
+        <p:spPr/>
+      </p:sp>
+      <p:sp>
+        <p:nvSpPr>
+          <p:cNvPr id="3" name="Notes Placeholder 2"/>
+          <p:cNvSpPr>
+            <a:spLocks noGrp="1"/>
+          </p:cNvSpPr>
+          <p:nvPr>
+            <p:ph type="body" idx="1"/>
+          </p:nvPr>
+        </p:nvSpPr>
+        <p:spPr/>
+        <p:txBody>
+          <a:bodyPr/>
+          <a:lstStyle/>
+          <a:p>
+            <a:endParaRPr lang="en-AT" dirty="0"/>
+          </a:p>
+        </p:txBody>
+      </p:sp>
+      <p:sp>
+        <p:nvSpPr>
+          <p:cNvPr id="4" name="Slide Number Placeholder 3"/>
+          <p:cNvSpPr>
+            <a:spLocks noGrp="1"/>
+          </p:cNvSpPr>
+          <p:nvPr>
+            <p:ph type="sldNum" sz="quarter" idx="5"/>
+          </p:nvPr>
+        </p:nvSpPr>
+        <p:spPr/>
+        <p:txBody>
+          <a:bodyPr/>
+          <a:lstStyle/>
+          <a:p>
+            <a:fld id="{75C8DF60-03EB-41BF-AD08-E11AFAEB47A5}" type="slidenum">
+              <a:rPr lang="en-AT" smtClean="0"/>
+              <a:t>13</a:t>
+            </a:fld>
+            <a:endParaRPr lang="en-AT"/>
+          </a:p>
+        </p:txBody>
+      </p:sp>
+    </p:spTree>
+    <p:extLst>
+      <p:ext uri="{BB962C8B-B14F-4D97-AF65-F5344CB8AC3E}">
+        <p14:creationId xmlns:p14="http://schemas.microsoft.com/office/powerpoint/2010/main" val="1656617536"/>
+      </p:ext>
+    </p:extLst>
+  </p:cSld>
+  <p:clrMapOvr>
+    <a:masterClrMapping/>
+  </p:clrMapOvr>
+</p:notes>
+</file>
+
 <file path=ppt/notesSlides/notesSlide2.xml><?xml version="1.0" encoding="utf-8"?>
 <p:notes xmlns:a="http://schemas.openxmlformats.org/drawingml/2006/main" xmlns:r="http://schemas.openxmlformats.org/officeDocument/2006/relationships" xmlns:p="http://schemas.openxmlformats.org/presentationml/2006/main">
   <p:cSld>
@@ -604,7 +1058,13 @@
           <a:p>
             <a:r>
               <a:rPr lang="en-GB" dirty="0"/>
-              <a:t>Quick refresher on software testing.</a:t>
+              <a:t>As we all know we need software tests to ensure a certain quality of the applicaton.</a:t>
+            </a:r>
+          </a:p>
+          <a:p>
+            <a:r>
+              <a:rPr lang="en-GB" dirty="0"/>
+              <a:t>Now to which extend testing is done is dependent mostly on </a:t>
             </a:r>
           </a:p>
           <a:p>
@@ -614,7 +1074,7 @@
             </a:pPr>
             <a:r>
               <a:rPr lang="en-GB" dirty="0"/>
-              <a:t>Needed to verify and validate developed software to meet specifications </a:t>
+              <a:t>the domain (how much security, contraints, …)</a:t>
             </a:r>
           </a:p>
           <a:p>
@@ -624,7 +1084,30 @@
             </a:pPr>
             <a:r>
               <a:rPr lang="en-GB" dirty="0"/>
-              <a:t>Analyze for usability, compatibility, reliability, integrity, efficiency, security, portability, maintainability, …</a:t>
+              <a:t>and availability of resources (human resource, financal).</a:t>
+            </a:r>
+          </a:p>
+          <a:p>
+            <a:pPr marL="0" marR="0" lvl="0" indent="0" algn="l" defTabSz="914400" rtl="0" eaLnBrk="1" fontAlgn="auto" latinLnBrk="0" hangingPunct="1">
+              <a:lnSpc>
+                <a:spcPct val="100000"/>
+              </a:lnSpc>
+              <a:spcBef>
+                <a:spcPts val="0"/>
+              </a:spcBef>
+              <a:spcAft>
+                <a:spcPts val="0"/>
+              </a:spcAft>
+              <a:buClrTx/>
+              <a:buSzTx/>
+              <a:buFontTx/>
+              <a:buNone/>
+              <a:tabLst/>
+              <a:defRPr/>
+            </a:pPr>
+            <a:r>
+              <a:rPr lang="en-GB" dirty="0"/>
+              <a:t>-&gt; trade off between under and over testing and cost</a:t>
             </a:r>
           </a:p>
           <a:p>
@@ -633,7 +1116,43 @@
           <a:p>
             <a:r>
               <a:rPr lang="en-GB" dirty="0"/>
-              <a:t>In general there are four types of testing strategies.</a:t>
+              <a:t>In practice a lot of manual work in many situations repetitive and at some point lets be honest boring.</a:t>
+            </a:r>
+          </a:p>
+          <a:p>
+            <a:r>
+              <a:rPr lang="en-GB" dirty="0"/>
+              <a:t>As many tests are quite simple.</a:t>
+            </a:r>
+          </a:p>
+          <a:p>
+            <a:r>
+              <a:rPr lang="en-GB" dirty="0"/>
+              <a:t>Even tho not as bad as writing documentation.</a:t>
+            </a:r>
+          </a:p>
+          <a:p>
+            <a:endParaRPr lang="en-GB" dirty="0"/>
+          </a:p>
+          <a:p>
+            <a:r>
+              <a:rPr lang="en-GB" dirty="0"/>
+              <a:t>I think that’s one of the main reasons why this is such an interesting application for LLM’s. (engineers lazy / boring work -&gt; lets automate)</a:t>
+            </a:r>
+          </a:p>
+          <a:p>
+            <a:r>
+              <a:rPr lang="en-GB" dirty="0"/>
+              <a:t>LLM with their inreasing capabilities open up possibilities to change the classic approach and potentially minimize or optimize the testing procedure.</a:t>
+            </a:r>
+          </a:p>
+          <a:p>
+            <a:endParaRPr lang="en-GB" dirty="0"/>
+          </a:p>
+          <a:p>
+            <a:r>
+              <a:rPr lang="en-GB" dirty="0"/>
+              <a:t>With that being said there are in general four types of testing strategies.</a:t>
             </a:r>
           </a:p>
           <a:p>
@@ -647,6 +1166,26 @@
             </a:r>
           </a:p>
           <a:p>
+            <a:pPr marL="628650" lvl="1" indent="-171450">
+              <a:buFontTx/>
+              <a:buChar char="-"/>
+            </a:pPr>
+            <a:r>
+              <a:rPr lang="en-GB" dirty="0"/>
+              <a:t>LLM already very capable much research - automating unit test generation for high coverage</a:t>
+            </a:r>
+          </a:p>
+          <a:p>
+            <a:pPr marL="628650" lvl="1" indent="-171450">
+              <a:buFontTx/>
+              <a:buChar char="-"/>
+            </a:pPr>
+            <a:r>
+              <a:rPr lang="en-GB" dirty="0"/>
+              <a:t>From my experience not yet established very well in the industry</a:t>
+            </a:r>
+          </a:p>
+          <a:p>
             <a:pPr marL="171450" indent="-171450">
               <a:buFontTx/>
               <a:buChar char="-"/>
@@ -657,6 +1196,16 @@
             </a:r>
           </a:p>
           <a:p>
+            <a:pPr marL="628650" lvl="1" indent="-171450">
+              <a:buFontTx/>
+              <a:buChar char="-"/>
+            </a:pPr>
+            <a:r>
+              <a:rPr lang="en-GB" dirty="0"/>
+              <a:t>Research??</a:t>
+            </a:r>
+          </a:p>
+          <a:p>
             <a:pPr marL="171450" indent="-171450">
               <a:buFontTx/>
               <a:buChar char="-"/>
@@ -667,6 +1216,16 @@
             </a:r>
           </a:p>
           <a:p>
+            <a:pPr marL="628650" lvl="1" indent="-171450">
+              <a:buFontTx/>
+              <a:buChar char="-"/>
+            </a:pPr>
+            <a:r>
+              <a:rPr lang="en-GB" dirty="0"/>
+              <a:t>Research??</a:t>
+            </a:r>
+          </a:p>
+          <a:p>
             <a:pPr marL="171450" indent="-171450">
               <a:buFontTx/>
               <a:buChar char="-"/>
@@ -677,42 +1236,23 @@
             </a:r>
           </a:p>
           <a:p>
-            <a:endParaRPr lang="en-GB" dirty="0"/>
-          </a:p>
-          <a:p>
-            <a:r>
-              <a:rPr lang="en-GB" dirty="0"/>
-              <a:t>This requires a lot of resources, human, costs, time … -&gt; trade off between under and over testing</a:t>
-            </a:r>
-          </a:p>
-          <a:p>
-            <a:endParaRPr lang="en-GB" dirty="0"/>
-          </a:p>
-          <a:p>
-            <a:r>
-              <a:rPr lang="en-GB" dirty="0"/>
-              <a:t>Recent years with upcoming powerful LLM’s there are now possibilities to change the classic approach and potentially minimize or optimize testing efforts.</a:t>
-            </a:r>
-          </a:p>
-          <a:p>
-            <a:endParaRPr lang="en-GB" dirty="0"/>
-          </a:p>
-          <a:p>
-            <a:r>
-              <a:rPr lang="en-GB" dirty="0"/>
-              <a:t>Large amount of research in recent years focuses mainly on utilizing LLM for automating unit test generation for high coverage. (-&gt; generating tests from code snippets)</a:t>
-            </a:r>
-          </a:p>
-          <a:p>
-            <a:r>
-              <a:rPr lang="en-GB" dirty="0"/>
-              <a:t>And System tests -&gt; software already done for the most part. (mainly for GUI testing mobile apps)</a:t>
-            </a:r>
-          </a:p>
-          <a:p>
-            <a:r>
-              <a:rPr lang="en-GB" dirty="0"/>
-              <a:t>Generating test scenarios for the whole system.</a:t>
+            <a:pPr marL="628650" lvl="1" indent="-171450">
+              <a:buFontTx/>
+              <a:buChar char="-"/>
+            </a:pPr>
+            <a:r>
+              <a:rPr lang="en-GB" dirty="0"/>
+              <a:t>Many LLM applications-&gt; software already done for the most part. (mainly for GUI testing mobile apps)</a:t>
+            </a:r>
+          </a:p>
+          <a:p>
+            <a:pPr marL="628650" lvl="1" indent="-171450">
+              <a:buFontTx/>
+              <a:buChar char="-"/>
+            </a:pPr>
+            <a:r>
+              <a:rPr lang="en-GB" dirty="0"/>
+              <a:t>Generating test scenarios for the whole system</a:t>
             </a:r>
           </a:p>
           <a:p>
@@ -755,7 +1295,7 @@
           <a:p>
             <a:fld id="{75C8DF60-03EB-41BF-AD08-E11AFAEB47A5}" type="slidenum">
               <a:rPr lang="en-AT" smtClean="0"/>
-              <a:t>3</a:t>
+              <a:t>2</a:t>
             </a:fld>
             <a:endParaRPr lang="en-AT"/>
           </a:p>
@@ -824,10 +1364,16 @@
             </a:r>
           </a:p>
           <a:p>
+            <a:endParaRPr lang="en-GB" dirty="0"/>
+          </a:p>
+          <a:p>
             <a:r>
               <a:rPr lang="en-GB" dirty="0"/>
               <a:t>As in industrial settings integrating LLM’s in the development processes will be a step by step process.</a:t>
             </a:r>
+          </a:p>
+          <a:p>
+            <a:endParaRPr lang="en-GB" dirty="0"/>
           </a:p>
           <a:p>
             <a:r>
@@ -855,65 +1401,6 @@
             </a:r>
           </a:p>
           <a:p>
-            <a:r>
-              <a:rPr lang="en-GB" dirty="0"/>
-              <a:t>Biggest factor therefore are definitions of requirements </a:t>
-            </a:r>
-          </a:p>
-          <a:p>
-            <a:pPr marL="171450" indent="-171450">
-              <a:buFontTx/>
-              <a:buChar char="-"/>
-            </a:pPr>
-            <a:r>
-              <a:rPr lang="en-GB" dirty="0"/>
-              <a:t>how detailed requirements are defined – usually using natural language</a:t>
-            </a:r>
-          </a:p>
-          <a:p>
-            <a:pPr marL="171450" marR="0" lvl="0" indent="-171450" algn="l" defTabSz="914400" rtl="0" eaLnBrk="1" fontAlgn="auto" latinLnBrk="0" hangingPunct="1">
-              <a:lnSpc>
-                <a:spcPct val="100000"/>
-              </a:lnSpc>
-              <a:spcBef>
-                <a:spcPts val="0"/>
-              </a:spcBef>
-              <a:spcAft>
-                <a:spcPts val="0"/>
-              </a:spcAft>
-              <a:buClrTx/>
-              <a:buSzTx/>
-              <a:buFontTx/>
-              <a:buChar char="-"/>
-              <a:tabLst/>
-              <a:defRPr/>
-            </a:pPr>
-            <a:r>
-              <a:rPr lang="en-GB" dirty="0"/>
-              <a:t>room for interpretation – possible conflicts, … but definition is another topic (verifying requirements for completeness, integrity, …. Is another story)</a:t>
-            </a:r>
-          </a:p>
-          <a:p>
-            <a:pPr marL="171450" indent="-171450">
-              <a:buFontTx/>
-              <a:buChar char="-"/>
-            </a:pPr>
-            <a:r>
-              <a:rPr lang="en-GB" dirty="0"/>
-              <a:t>requirements define what the system must to but not how.</a:t>
-            </a:r>
-          </a:p>
-          <a:p>
-            <a:pPr marL="171450" indent="-171450">
-              <a:buFontTx/>
-              <a:buChar char="-"/>
-            </a:pPr>
-            <a:r>
-              <a:rPr lang="en-GB" dirty="0"/>
-              <a:t>basic functionality of a system shall be tested through simple testcases that relate to at least one requirement.</a:t>
-            </a:r>
-          </a:p>
-          <a:p>
             <a:endParaRPr lang="en-GB" dirty="0"/>
           </a:p>
           <a:p>
@@ -935,9 +1422,12 @@
             </a:r>
           </a:p>
           <a:p>
-            <a:r>
-              <a:rPr lang="en-GB" dirty="0"/>
-              <a:t>Idea that in the future the approach would be a semi automatic acceptance testing pipeline with human in the loop.</a:t>
+            <a:endParaRPr lang="en-GB" dirty="0"/>
+          </a:p>
+          <a:p>
+            <a:r>
+              <a:rPr lang="en-GB" dirty="0"/>
+              <a:t>Vision that in the future the approach would be a semi automatic acceptance testing pipeline with human in the loop.</a:t>
             </a:r>
           </a:p>
           <a:p>
@@ -999,7 +1489,7 @@
           <a:p>
             <a:fld id="{75C8DF60-03EB-41BF-AD08-E11AFAEB47A5}" type="slidenum">
               <a:rPr lang="en-AT" smtClean="0"/>
-              <a:t>4</a:t>
+              <a:t>3</a:t>
             </a:fld>
             <a:endParaRPr lang="en-AT"/>
           </a:p>
@@ -1104,7 +1594,7 @@
             </a:pPr>
             <a:r>
               <a:rPr lang="en-GB" dirty="0"/>
-              <a:t>As the difficulty is not to generate output, but to evaluate the quality of the output</a:t>
+              <a:t>As the difficulty should not be to generate output, but to evaluate the quality of the output</a:t>
             </a:r>
           </a:p>
           <a:p>
@@ -1553,7 +2043,7 @@
           <a:p>
             <a:fld id="{75C8DF60-03EB-41BF-AD08-E11AFAEB47A5}" type="slidenum">
               <a:rPr lang="en-AT" smtClean="0"/>
-              <a:t>5</a:t>
+              <a:t>4</a:t>
             </a:fld>
             <a:endParaRPr lang="en-AT"/>
           </a:p>
@@ -1618,7 +2108,7 @@
           <a:p>
             <a:r>
               <a:rPr lang="en-GB" dirty="0"/>
-              <a:t>Domain specific application chosen:</a:t>
+              <a:t>I also want to quickly talk about the domain </a:t>
             </a:r>
           </a:p>
           <a:p>
@@ -1639,35 +2129,36 @@
             <a:br>
               <a:rPr lang="en-GB" dirty="0"/>
             </a:br>
-            <a:br>
-              <a:rPr lang="en-GB" dirty="0"/>
-            </a:br>
-            <a:r>
-              <a:rPr lang="en-GB" dirty="0"/>
-              <a:t>The project has two main objectives:</a:t>
-            </a:r>
-          </a:p>
-          <a:p>
-            <a:r>
-              <a:rPr lang="en-GB" dirty="0"/>
-              <a:t>First, to </a:t>
-            </a:r>
+            <a:endParaRPr lang="en-GB" dirty="0"/>
+          </a:p>
+          <a:p>
+            <a:r>
+              <a:rPr lang="en-GB" dirty="0"/>
+              <a:t>Two goals:</a:t>
+            </a:r>
+          </a:p>
+          <a:p>
+            <a:pPr marL="171450" indent="-171450">
+              <a:buFont typeface="Wingdings" panose="05000000000000000000" pitchFamily="2" charset="2"/>
+              <a:buChar char="è"/>
+            </a:pPr>
             <a:r>
               <a:rPr lang="en-GB" b="1" dirty="0"/>
-              <a:t>establish a  research environment</a:t>
-            </a:r>
-            <a:r>
-              <a:rPr lang="en-GB" dirty="0"/>
-              <a:t> for studying various aspects of software and systems engineering for cyber-physical systems -- e.g., runtime monitoring, safety analysis, and product line development.</a:t>
-            </a:r>
-          </a:p>
-          <a:p>
-            <a:endParaRPr lang="en-GB" dirty="0"/>
-          </a:p>
-          <a:p>
-            <a:r>
-              <a:rPr lang="en-GB" dirty="0"/>
-              <a:t>Second,  to </a:t>
+              <a:t>establish a research environment</a:t>
+            </a:r>
+            <a:r>
+              <a:rPr lang="en-GB" dirty="0"/>
+              <a:t> for studying various aspects of software and systems engineering for cyber-physical systems -&gt; that’s why requirements public</a:t>
+            </a:r>
+          </a:p>
+          <a:p>
+            <a:pPr marL="171450" indent="-171450">
+              <a:buFont typeface="Wingdings" panose="05000000000000000000" pitchFamily="2" charset="2"/>
+              <a:buChar char="è"/>
+            </a:pPr>
+            <a:r>
+              <a:rPr lang="en-GB" dirty="0"/>
+              <a:t>to </a:t>
             </a:r>
             <a:r>
               <a:rPr lang="en-GB" b="1" dirty="0"/>
@@ -1679,71 +2170,80 @@
             </a:r>
           </a:p>
           <a:p>
+            <a:endParaRPr lang="en-GB" dirty="0"/>
+          </a:p>
+          <a:p>
+            <a:r>
+              <a:rPr lang="en-GB" dirty="0"/>
+              <a:t>It is designed around the concept of a Dronology Core</a:t>
+            </a:r>
+          </a:p>
+          <a:p>
+            <a:r>
+              <a:rPr lang="en-GB" dirty="0"/>
+              <a:t>Services middleware that support UI development </a:t>
+            </a:r>
+          </a:p>
+          <a:p>
+            <a:r>
+              <a:rPr lang="en-GB" dirty="0"/>
+              <a:t>Groundstation middleware that supports communication with diverse UAS. </a:t>
+            </a:r>
+          </a:p>
+          <a:p>
             <a:br>
               <a:rPr lang="en-GB" dirty="0"/>
             </a:br>
             <a:r>
               <a:rPr lang="en-GB" dirty="0"/>
-              <a:t>The Dronology Architecture is designed to deliver a multi-platform solution.  It  is designed around the concept of a Dronology Core with Services middleware that support UI development and Groundstation middleware that supports communication with diverse UAS.  Here we describe each core component and provide links to other pages containing further details.</a:t>
-            </a:r>
+              <a:t>Dronology Core provides features for coordinating the flights of multiple sUAS in a shared airspace. </a:t>
+            </a:r>
+          </a:p>
+          <a:p>
+            <a:r>
+              <a:rPr lang="en-GB" dirty="0"/>
+              <a:t>This includes centralized collision avoidance, fleet management, internal simulator, and management of vehicle status.</a:t>
+            </a:r>
+          </a:p>
+          <a:p>
+            <a:r>
+              <a:rPr lang="en-GB" dirty="0"/>
+              <a:t>Dronology services are used by various clients to construct user interfaces. </a:t>
+            </a:r>
+          </a:p>
+          <a:p>
+            <a:r>
+              <a:rPr lang="en-GB" dirty="0"/>
+              <a:t>The services can be used to perform tasks such as upload flight plans, activate UASs, observe and visualize UAS flights, and register equipment to individual UAS.</a:t>
+            </a:r>
+          </a:p>
+          <a:p>
             <a:br>
               <a:rPr lang="en-GB" dirty="0"/>
             </a:br>
+            <a:r>
+              <a:rPr lang="en-GB" dirty="0"/>
+              <a:t>The ground station middleware provides a bridge between the Dronology core and a diverse set of ground stations.  </a:t>
+            </a:r>
+          </a:p>
+          <a:p>
+            <a:r>
+              <a:rPr lang="en-GB" dirty="0"/>
+              <a:t>The middleware allows registration of a new ground station.  </a:t>
+            </a:r>
+          </a:p>
+          <a:p>
+            <a:r>
+              <a:rPr lang="en-GB" dirty="0"/>
+              <a:t>It passes directives from the Dronology core to UAVs registered through their respective ground stations, and forwards UAV data, such as their GPS coordinates from the ground station back to the the core.</a:t>
+            </a:r>
             <a:br>
               <a:rPr lang="en-GB" dirty="0"/>
             </a:br>
             <a:r>
               <a:rPr lang="en-GB" dirty="0"/>
-              <a:t>Dronology Core provides features for coordinating the flights of multiple sUAS in a shared airspace.  This includes centralized collision avoidance, fleet management, internal simulator, and management of vehicle status.  Click here to learn more about key components in the Dronology core.</a:t>
-            </a:r>
-          </a:p>
-          <a:p>
-            <a:r>
-              <a:rPr lang="en-GB" dirty="0"/>
-              <a:t>Dronology services are used by various clients to construct user interfaces.  The services can be used to perform tasks such as upload flight plans, activate UASs, observe and visualize UAS flights, and register equipment to individual UAS.</a:t>
-            </a:r>
-            <a:br>
-              <a:rPr lang="en-GB" dirty="0"/>
-            </a:br>
-            <a:r>
-              <a:rPr lang="en-GB" dirty="0"/>
-              <a:t>Vaadin is an open-source web framework that supports development of rich user interfaces.  It has a server-side architecture, which allows most of the logic to run on the server, while Ajax technology on the client side ensures a rich and highly interactive UI.  In Dronology, we run Vaadin on TomCat — which can be deployed either centrally or locally.  The web-based approach enables our goal of platform portability.</a:t>
-            </a:r>
-            <a:br>
-              <a:rPr lang="en-GB" dirty="0"/>
-            </a:br>
-            <a:r>
-              <a:rPr lang="en-GB" dirty="0"/>
-              <a:t>The ground station middleware provides a bridge between the Dronology core and a diverse set of ground stations.  It is designed to allow future developers to build their own ground stations.  The middleware allows registration of a new ground station.  It passes directives from the Dronology core to UAVs registered through their respective ground stations, and forwards UAV data, such as their GPS coordinates from the ground station back to the the core.</a:t>
-            </a:r>
-            <a:br>
-              <a:rPr lang="en-GB" dirty="0"/>
-            </a:br>
-            <a:r>
-              <a:rPr lang="en-GB" dirty="0"/>
-              <a:t>Groundstations are responsible for communicating directly with the physical or externally simulated UAVs.  Our current ground station is developed in Python using Dronekit Python — and is capable of communicating with UAVs that run </a:t>
-            </a:r>
-            <a:r>
-              <a:rPr lang="en-GB" dirty="0">
-                <a:hlinkClick r:id="rId4"/>
-              </a:rPr>
-              <a:t>ArduPilot</a:t>
-            </a:r>
-            <a:r>
-              <a:rPr lang="en-GB" dirty="0"/>
-              <a:t>.</a:t>
-            </a:r>
-            <a:br>
-              <a:rPr lang="en-GB" dirty="0"/>
-            </a:br>
-            <a:r>
-              <a:rPr lang="en-GB" dirty="0"/>
-              <a:t>The runtime monitoring component allows constraints to be defined and various values to be monitored.  The monitored variables include UAV specific values such as coordinates, velocity, and battery power, as well as external variables read from sensors on the UAV. </a:t>
-            </a:r>
-            <a:br>
-              <a:rPr lang="en-GB" dirty="0"/>
-            </a:br>
-            <a:endParaRPr lang="en-AT" dirty="0"/>
+              <a:t>Groundstations are responsible for communicating directly with the physical or externally simulated UAVs.  </a:t>
+            </a:r>
           </a:p>
         </p:txBody>
       </p:sp>
@@ -1764,7 +2264,7 @@
           <a:p>
             <a:fld id="{75C8DF60-03EB-41BF-AD08-E11AFAEB47A5}" type="slidenum">
               <a:rPr lang="en-AT" smtClean="0"/>
-              <a:t>6</a:t>
+              <a:t>5</a:t>
             </a:fld>
             <a:endParaRPr lang="en-AT"/>
           </a:p>
@@ -1829,9 +2329,423 @@
           <a:p>
             <a:r>
               <a:rPr lang="en-GB" dirty="0"/>
-              <a:t>As a baseline Zero shot learning was used with directional stimulus </a:t>
-            </a:r>
+              <a:t>Total of 97 requirements</a:t>
+            </a:r>
+          </a:p>
+          <a:p>
+            <a:r>
+              <a:rPr lang="en-GB" dirty="0"/>
+              <a:t>Examples shown, always a trade off of how much time and effort you put into the requirements.</a:t>
+            </a:r>
+          </a:p>
+          <a:p>
+            <a:r>
+              <a:rPr lang="en-GB" dirty="0"/>
+              <a:t>Requirements engineering its own topic</a:t>
+            </a:r>
+          </a:p>
+          <a:p>
+            <a:endParaRPr lang="en-GB" dirty="0"/>
+          </a:p>
+          <a:p>
+            <a:r>
+              <a:rPr lang="en-GB" dirty="0"/>
+              <a:t>Biggest factor therefore are definitions of requirements </a:t>
+            </a:r>
+          </a:p>
+          <a:p>
+            <a:pPr marL="171450" indent="-171450">
+              <a:buFontTx/>
+              <a:buChar char="-"/>
+            </a:pPr>
+            <a:r>
+              <a:rPr lang="en-GB" dirty="0"/>
+              <a:t>how detailed requirements are defined – usually using natural language</a:t>
+            </a:r>
+          </a:p>
+          <a:p>
+            <a:pPr marL="171450" marR="0" lvl="0" indent="-171450" algn="l" defTabSz="914400" rtl="0" eaLnBrk="1" fontAlgn="auto" latinLnBrk="0" hangingPunct="1">
+              <a:lnSpc>
+                <a:spcPct val="100000"/>
+              </a:lnSpc>
+              <a:spcBef>
+                <a:spcPts val="0"/>
+              </a:spcBef>
+              <a:spcAft>
+                <a:spcPts val="0"/>
+              </a:spcAft>
+              <a:buClrTx/>
+              <a:buSzTx/>
+              <a:buFontTx/>
+              <a:buChar char="-"/>
+              <a:tabLst/>
+              <a:defRPr/>
+            </a:pPr>
+            <a:r>
+              <a:rPr lang="en-GB" dirty="0"/>
+              <a:t>room for interpretation – possible conflicts, … but definition is another topic (verifying requirements for completeness, integrity, …. Is another story)</a:t>
+            </a:r>
+          </a:p>
+          <a:p>
+            <a:pPr marL="171450" indent="-171450">
+              <a:buFontTx/>
+              <a:buChar char="-"/>
+            </a:pPr>
+            <a:r>
+              <a:rPr lang="en-GB" dirty="0"/>
+              <a:t>requirements define what the system must to but not how.</a:t>
+            </a:r>
+          </a:p>
+          <a:p>
+            <a:pPr marL="171450" indent="-171450">
+              <a:buFontTx/>
+              <a:buChar char="-"/>
+            </a:pPr>
+            <a:r>
+              <a:rPr lang="en-GB" dirty="0"/>
+              <a:t>basic functionality of a system shall be tested through simple testcases that relate to at least one requirement.</a:t>
+            </a:r>
+          </a:p>
+          <a:p>
+            <a:endParaRPr lang="en-GB" dirty="0"/>
+          </a:p>
+          <a:p>
+            <a:r>
+              <a:rPr lang="en-GB" dirty="0"/>
+              <a:t>(Website says source code will be available in the future)</a:t>
+            </a:r>
+          </a:p>
+        </p:txBody>
+      </p:sp>
+      <p:sp>
+        <p:nvSpPr>
+          <p:cNvPr id="4" name="Slide Number Placeholder 3"/>
+          <p:cNvSpPr>
+            <a:spLocks noGrp="1"/>
+          </p:cNvSpPr>
+          <p:nvPr>
+            <p:ph type="sldNum" sz="quarter" idx="5"/>
+          </p:nvPr>
+        </p:nvSpPr>
+        <p:spPr/>
+        <p:txBody>
+          <a:bodyPr/>
+          <a:lstStyle/>
+          <a:p>
+            <a:fld id="{75C8DF60-03EB-41BF-AD08-E11AFAEB47A5}" type="slidenum">
+              <a:rPr lang="en-AT" smtClean="0"/>
+              <a:t>6</a:t>
+            </a:fld>
+            <a:endParaRPr lang="en-AT"/>
+          </a:p>
+        </p:txBody>
+      </p:sp>
+    </p:spTree>
+    <p:extLst>
+      <p:ext uri="{BB962C8B-B14F-4D97-AF65-F5344CB8AC3E}">
+        <p14:creationId xmlns:p14="http://schemas.microsoft.com/office/powerpoint/2010/main" val="913013492"/>
+      </p:ext>
+    </p:extLst>
+  </p:cSld>
+  <p:clrMapOvr>
+    <a:masterClrMapping/>
+  </p:clrMapOvr>
+</p:notes>
+</file>
+
+<file path=ppt/notesSlides/notesSlide7.xml><?xml version="1.0" encoding="utf-8"?>
+<p:notes xmlns:a="http://schemas.openxmlformats.org/drawingml/2006/main" xmlns:r="http://schemas.openxmlformats.org/officeDocument/2006/relationships" xmlns:p="http://schemas.openxmlformats.org/presentationml/2006/main">
+  <p:cSld>
+    <p:spTree>
+      <p:nvGrpSpPr>
+        <p:cNvPr id="1" name=""/>
+        <p:cNvGrpSpPr/>
+        <p:nvPr/>
+      </p:nvGrpSpPr>
+      <p:grpSpPr>
+        <a:xfrm>
+          <a:off x="0" y="0"/>
+          <a:ext cx="0" cy="0"/>
+          <a:chOff x="0" y="0"/>
+          <a:chExt cx="0" cy="0"/>
+        </a:xfrm>
+      </p:grpSpPr>
+      <p:sp>
+        <p:nvSpPr>
+          <p:cNvPr id="2" name="Slide Image Placeholder 1"/>
+          <p:cNvSpPr>
+            <a:spLocks noGrp="1" noRot="1" noChangeAspect="1"/>
+          </p:cNvSpPr>
+          <p:nvPr>
+            <p:ph type="sldImg"/>
+          </p:nvPr>
+        </p:nvSpPr>
+        <p:spPr/>
+      </p:sp>
+      <p:sp>
+        <p:nvSpPr>
+          <p:cNvPr id="3" name="Notes Placeholder 2"/>
+          <p:cNvSpPr>
+            <a:spLocks noGrp="1"/>
+          </p:cNvSpPr>
+          <p:nvPr>
+            <p:ph type="body" idx="1"/>
+          </p:nvPr>
+        </p:nvSpPr>
+        <p:spPr/>
+        <p:txBody>
+          <a:bodyPr/>
+          <a:lstStyle/>
+          <a:p>
+            <a:r>
+              <a:rPr lang="en-GB" dirty="0"/>
+              <a:t>Shortly discuss the prompt engineering techniques I focused on.</a:t>
+            </a:r>
+          </a:p>
+          <a:p>
+            <a:endParaRPr lang="en-GB" dirty="0"/>
+          </a:p>
+          <a:p>
+            <a:r>
+              <a:rPr lang="en-GB" dirty="0"/>
+              <a:t>As a baseline Zero shot learning was used with directional stimulus</a:t>
+            </a:r>
+          </a:p>
+          <a:p>
+            <a:pPr marL="171450" indent="-171450">
+              <a:buFont typeface="Wingdings" panose="05000000000000000000" pitchFamily="2" charset="2"/>
+              <a:buChar char="è"/>
+            </a:pPr>
+            <a:r>
+              <a:rPr lang="en-GB" dirty="0"/>
+              <a:t>Json test description structure can be seen as providing directional stimulus</a:t>
+            </a:r>
+          </a:p>
+          <a:p>
+            <a:pPr marL="0" indent="0">
+              <a:buFont typeface="Wingdings" panose="05000000000000000000" pitchFamily="2" charset="2"/>
+              <a:buNone/>
+            </a:pPr>
+            <a:endParaRPr lang="en-GB" dirty="0"/>
+          </a:p>
+          <a:p>
+            <a:pPr marL="0" indent="0">
+              <a:buFont typeface="Wingdings" panose="05000000000000000000" pitchFamily="2" charset="2"/>
+              <a:buNone/>
+            </a:pPr>
+            <a:r>
+              <a:rPr lang="en-GB" dirty="0"/>
+              <a:t>Personas – software tester + json structure</a:t>
+            </a:r>
+          </a:p>
+          <a:p>
+            <a:pPr marL="0" indent="0">
+              <a:buFont typeface="Wingdings" panose="05000000000000000000" pitchFamily="2" charset="2"/>
+              <a:buNone/>
+            </a:pPr>
+            <a:endParaRPr lang="en-GB" dirty="0"/>
+          </a:p>
+          <a:p>
+            <a:pPr marL="0" indent="0">
+              <a:buFont typeface="Wingdings" panose="05000000000000000000" pitchFamily="2" charset="2"/>
+              <a:buNone/>
+            </a:pPr>
+            <a:r>
+              <a:rPr lang="en-GB" dirty="0"/>
+              <a:t>TOT – multiple experts discussing solution if one is wrong he steps back + json structure</a:t>
+            </a:r>
+          </a:p>
+          <a:p>
+            <a:pPr marL="0" indent="0">
+              <a:buFont typeface="Wingdings" panose="05000000000000000000" pitchFamily="2" charset="2"/>
+              <a:buNone/>
+            </a:pPr>
+            <a:endParaRPr lang="en-GB" dirty="0"/>
+          </a:p>
+          <a:p>
+            <a:pPr marL="0" indent="0">
+              <a:buFont typeface="Wingdings" panose="05000000000000000000" pitchFamily="2" charset="2"/>
+              <a:buNone/>
+            </a:pPr>
+            <a:r>
+              <a:rPr lang="en-GB" dirty="0"/>
+              <a:t>Providing context</a:t>
+            </a:r>
+          </a:p>
+          <a:p>
+            <a:pPr marL="171450" indent="-171450">
+              <a:buFont typeface="Wingdings" panose="05000000000000000000" pitchFamily="2" charset="2"/>
+              <a:buChar char="è"/>
+            </a:pPr>
+            <a:r>
+              <a:rPr lang="en-GB" dirty="0"/>
+              <a:t>First in form of introduction of dronology design</a:t>
+            </a:r>
+          </a:p>
+          <a:p>
+            <a:pPr marL="171450" indent="-171450">
+              <a:buFont typeface="Wingdings" panose="05000000000000000000" pitchFamily="2" charset="2"/>
+              <a:buChar char="è"/>
+            </a:pPr>
+            <a:r>
+              <a:rPr lang="en-GB" dirty="0"/>
+              <a:t>Preparsing all requirements + TOT</a:t>
+            </a:r>
+          </a:p>
+          <a:p>
+            <a:pPr marL="0" indent="0">
+              <a:buFont typeface="Wingdings" panose="05000000000000000000" pitchFamily="2" charset="2"/>
+              <a:buNone/>
+            </a:pPr>
+            <a:endParaRPr lang="en-GB" dirty="0"/>
+          </a:p>
+          <a:p>
+            <a:pPr marL="0" indent="0">
+              <a:buFont typeface="Wingdings" panose="05000000000000000000" pitchFamily="2" charset="2"/>
+              <a:buNone/>
+            </a:pPr>
             <a:endParaRPr lang="en-AT" dirty="0"/>
+          </a:p>
+        </p:txBody>
+      </p:sp>
+      <p:sp>
+        <p:nvSpPr>
+          <p:cNvPr id="4" name="Slide Number Placeholder 3"/>
+          <p:cNvSpPr>
+            <a:spLocks noGrp="1"/>
+          </p:cNvSpPr>
+          <p:nvPr>
+            <p:ph type="sldNum" sz="quarter" idx="5"/>
+          </p:nvPr>
+        </p:nvSpPr>
+        <p:spPr/>
+        <p:txBody>
+          <a:bodyPr/>
+          <a:lstStyle/>
+          <a:p>
+            <a:fld id="{75C8DF60-03EB-41BF-AD08-E11AFAEB47A5}" type="slidenum">
+              <a:rPr lang="en-AT" smtClean="0"/>
+              <a:t>7</a:t>
+            </a:fld>
+            <a:endParaRPr lang="en-AT"/>
+          </a:p>
+        </p:txBody>
+      </p:sp>
+    </p:spTree>
+    <p:extLst>
+      <p:ext uri="{BB962C8B-B14F-4D97-AF65-F5344CB8AC3E}">
+        <p14:creationId xmlns:p14="http://schemas.microsoft.com/office/powerpoint/2010/main" val="3643168453"/>
+      </p:ext>
+    </p:extLst>
+  </p:cSld>
+  <p:clrMapOvr>
+    <a:masterClrMapping/>
+  </p:clrMapOvr>
+</p:notes>
+</file>
+
+<file path=ppt/notesSlides/notesSlide8.xml><?xml version="1.0" encoding="utf-8"?>
+<p:notes xmlns:a="http://schemas.openxmlformats.org/drawingml/2006/main" xmlns:r="http://schemas.openxmlformats.org/officeDocument/2006/relationships" xmlns:p="http://schemas.openxmlformats.org/presentationml/2006/main">
+  <p:cSld>
+    <p:spTree>
+      <p:nvGrpSpPr>
+        <p:cNvPr id="1" name=""/>
+        <p:cNvGrpSpPr/>
+        <p:nvPr/>
+      </p:nvGrpSpPr>
+      <p:grpSpPr>
+        <a:xfrm>
+          <a:off x="0" y="0"/>
+          <a:ext cx="0" cy="0"/>
+          <a:chOff x="0" y="0"/>
+          <a:chExt cx="0" cy="0"/>
+        </a:xfrm>
+      </p:grpSpPr>
+      <p:sp>
+        <p:nvSpPr>
+          <p:cNvPr id="2" name="Slide Image Placeholder 1"/>
+          <p:cNvSpPr>
+            <a:spLocks noGrp="1" noRot="1" noChangeAspect="1"/>
+          </p:cNvSpPr>
+          <p:nvPr>
+            <p:ph type="sldImg"/>
+          </p:nvPr>
+        </p:nvSpPr>
+        <p:spPr/>
+      </p:sp>
+      <p:sp>
+        <p:nvSpPr>
+          <p:cNvPr id="3" name="Notes Placeholder 2"/>
+          <p:cNvSpPr>
+            <a:spLocks noGrp="1"/>
+          </p:cNvSpPr>
+          <p:nvPr>
+            <p:ph type="body" idx="1"/>
+          </p:nvPr>
+        </p:nvSpPr>
+        <p:spPr/>
+        <p:txBody>
+          <a:bodyPr/>
+          <a:lstStyle/>
+          <a:p>
+            <a:r>
+              <a:rPr lang="en-GB" dirty="0"/>
+              <a:t>Deepseek made quite the news when it was published.</a:t>
+            </a:r>
+          </a:p>
+          <a:p>
+            <a:r>
+              <a:rPr lang="en-GB" dirty="0"/>
+              <a:t>and has also shown that reasoning patterns of large models can be distilled into smaller ones.</a:t>
+            </a:r>
+          </a:p>
+          <a:p>
+            <a:r>
+              <a:rPr lang="en-GB" dirty="0"/>
+              <a:t>Smaller perform better if learning from bigger than learning on their own (through RL)</a:t>
+            </a:r>
+          </a:p>
+          <a:p>
+            <a:endParaRPr lang="en-GB" dirty="0"/>
+          </a:p>
+          <a:p>
+            <a:r>
+              <a:rPr lang="en-GB" dirty="0"/>
+              <a:t>This allows to run LLM’s locally with limited resources and fully independent.</a:t>
+            </a:r>
+          </a:p>
+          <a:p>
+            <a:r>
+              <a:rPr lang="en-GB" dirty="0"/>
+              <a:t>Which is usually required when when developing software as most of the time we don’t want the requirements to be public.</a:t>
+            </a:r>
+          </a:p>
+          <a:p>
+            <a:pPr marL="0" indent="0">
+              <a:buFont typeface="Wingdings" panose="05000000000000000000" pitchFamily="2" charset="2"/>
+              <a:buNone/>
+            </a:pPr>
+            <a:endParaRPr lang="en-GB" dirty="0"/>
+          </a:p>
+          <a:p>
+            <a:pPr marL="0" indent="0">
+              <a:buFont typeface="Wingdings" panose="05000000000000000000" pitchFamily="2" charset="2"/>
+              <a:buNone/>
+            </a:pPr>
+            <a:r>
+              <a:rPr lang="en-GB" dirty="0"/>
+              <a:t>Therefore I wanted to see whats possible with distilled models.</a:t>
+            </a:r>
+          </a:p>
+          <a:p>
+            <a:pPr marL="0" indent="0">
+              <a:buFont typeface="Wingdings" panose="05000000000000000000" pitchFamily="2" charset="2"/>
+              <a:buNone/>
+            </a:pPr>
+            <a:r>
+              <a:rPr lang="en-GB" dirty="0"/>
+              <a:t>To make the results comparable I used a fixed set of model parameters across distilled versions.</a:t>
+            </a:r>
           </a:p>
         </p:txBody>
       </p:sp>
@@ -1861,7 +2775,115 @@
     </p:spTree>
     <p:extLst>
       <p:ext uri="{BB962C8B-B14F-4D97-AF65-F5344CB8AC3E}">
-        <p14:creationId xmlns:p14="http://schemas.microsoft.com/office/powerpoint/2010/main" val="3643168453"/>
+        <p14:creationId xmlns:p14="http://schemas.microsoft.com/office/powerpoint/2010/main" val="1271802495"/>
+      </p:ext>
+    </p:extLst>
+  </p:cSld>
+  <p:clrMapOvr>
+    <a:masterClrMapping/>
+  </p:clrMapOvr>
+</p:notes>
+</file>
+
+<file path=ppt/notesSlides/notesSlide9.xml><?xml version="1.0" encoding="utf-8"?>
+<p:notes xmlns:a="http://schemas.openxmlformats.org/drawingml/2006/main" xmlns:r="http://schemas.openxmlformats.org/officeDocument/2006/relationships" xmlns:p="http://schemas.openxmlformats.org/presentationml/2006/main">
+  <p:cSld>
+    <p:spTree>
+      <p:nvGrpSpPr>
+        <p:cNvPr id="1" name=""/>
+        <p:cNvGrpSpPr/>
+        <p:nvPr/>
+      </p:nvGrpSpPr>
+      <p:grpSpPr>
+        <a:xfrm>
+          <a:off x="0" y="0"/>
+          <a:ext cx="0" cy="0"/>
+          <a:chOff x="0" y="0"/>
+          <a:chExt cx="0" cy="0"/>
+        </a:xfrm>
+      </p:grpSpPr>
+      <p:sp>
+        <p:nvSpPr>
+          <p:cNvPr id="2" name="Slide Image Placeholder 1"/>
+          <p:cNvSpPr>
+            <a:spLocks noGrp="1" noRot="1" noChangeAspect="1"/>
+          </p:cNvSpPr>
+          <p:nvPr>
+            <p:ph type="sldImg"/>
+          </p:nvPr>
+        </p:nvSpPr>
+        <p:spPr/>
+      </p:sp>
+      <p:sp>
+        <p:nvSpPr>
+          <p:cNvPr id="3" name="Notes Placeholder 2"/>
+          <p:cNvSpPr>
+            <a:spLocks noGrp="1"/>
+          </p:cNvSpPr>
+          <p:nvPr>
+            <p:ph type="body" idx="1"/>
+          </p:nvPr>
+        </p:nvSpPr>
+        <p:spPr/>
+        <p:txBody>
+          <a:bodyPr/>
+          <a:lstStyle/>
+          <a:p>
+            <a:r>
+              <a:rPr lang="en-GB" b="0" dirty="0"/>
+              <a:t>Upper bar chart shows percentage of valid entries per model and prompt variation – sorted from worse to best</a:t>
+            </a:r>
+          </a:p>
+          <a:p>
+            <a:r>
+              <a:rPr lang="en-GB" b="0" dirty="0"/>
+              <a:t>So including all field checks, if any single field check fails it is counted as an invalid entry.</a:t>
+            </a:r>
+          </a:p>
+          <a:p>
+            <a:endParaRPr lang="en-GB" b="0" dirty="0"/>
+          </a:p>
+          <a:p>
+            <a:r>
+              <a:rPr lang="en-GB" b="0" dirty="0"/>
+              <a:t>Lower bar chart shows number of valid entries per model and prompt variation</a:t>
+            </a:r>
+          </a:p>
+          <a:p>
+            <a:r>
+              <a:rPr lang="en-GB" b="0" dirty="0"/>
+              <a:t>Only from a json template point of view. Valid entry here means the model was able to generate the expected json template.</a:t>
+            </a:r>
+          </a:p>
+        </p:txBody>
+      </p:sp>
+      <p:sp>
+        <p:nvSpPr>
+          <p:cNvPr id="4" name="Slide Number Placeholder 3"/>
+          <p:cNvSpPr>
+            <a:spLocks noGrp="1"/>
+          </p:cNvSpPr>
+          <p:nvPr>
+            <p:ph type="sldNum" sz="quarter" idx="5"/>
+          </p:nvPr>
+        </p:nvSpPr>
+        <p:spPr/>
+        <p:txBody>
+          <a:bodyPr/>
+          <a:lstStyle/>
+          <a:p>
+            <a:fld id="{75C8DF60-03EB-41BF-AD08-E11AFAEB47A5}" type="slidenum">
+              <a:rPr lang="en-AT" smtClean="0"/>
+              <a:t>9</a:t>
+            </a:fld>
+            <a:endParaRPr lang="en-AT"/>
+          </a:p>
+        </p:txBody>
+      </p:sp>
+    </p:spTree>
+    <p:extLst>
+      <p:ext uri="{BB962C8B-B14F-4D97-AF65-F5344CB8AC3E}">
+        <p14:creationId xmlns:p14="http://schemas.microsoft.com/office/powerpoint/2010/main" val="4061238754"/>
       </p:ext>
     </p:extLst>
   </p:cSld>
@@ -2020,7 +3042,7 @@
           <a:p>
             <a:fld id="{CD0BFEE2-3EAA-4386-9A3C-82D92E479C9F}" type="datetimeFigureOut">
               <a:rPr lang="en-AT" smtClean="0"/>
-              <a:t>29/04/2025</a:t>
+              <a:t>02/06/2025</a:t>
             </a:fld>
             <a:endParaRPr lang="en-AT"/>
           </a:p>
@@ -2220,7 +3242,7 @@
           <a:p>
             <a:fld id="{CD0BFEE2-3EAA-4386-9A3C-82D92E479C9F}" type="datetimeFigureOut">
               <a:rPr lang="en-AT" smtClean="0"/>
-              <a:t>29/04/2025</a:t>
+              <a:t>02/06/2025</a:t>
             </a:fld>
             <a:endParaRPr lang="en-AT"/>
           </a:p>
@@ -2430,7 +3452,7 @@
           <a:p>
             <a:fld id="{CD0BFEE2-3EAA-4386-9A3C-82D92E479C9F}" type="datetimeFigureOut">
               <a:rPr lang="en-AT" smtClean="0"/>
-              <a:t>29/04/2025</a:t>
+              <a:t>02/06/2025</a:t>
             </a:fld>
             <a:endParaRPr lang="en-AT"/>
           </a:p>
@@ -2630,7 +3652,7 @@
           <a:p>
             <a:fld id="{CD0BFEE2-3EAA-4386-9A3C-82D92E479C9F}" type="datetimeFigureOut">
               <a:rPr lang="en-AT" smtClean="0"/>
-              <a:t>29/04/2025</a:t>
+              <a:t>02/06/2025</a:t>
             </a:fld>
             <a:endParaRPr lang="en-AT"/>
           </a:p>
@@ -2906,7 +3928,7 @@
           <a:p>
             <a:fld id="{CD0BFEE2-3EAA-4386-9A3C-82D92E479C9F}" type="datetimeFigureOut">
               <a:rPr lang="en-AT" smtClean="0"/>
-              <a:t>29/04/2025</a:t>
+              <a:t>02/06/2025</a:t>
             </a:fld>
             <a:endParaRPr lang="en-AT"/>
           </a:p>
@@ -3174,7 +4196,7 @@
           <a:p>
             <a:fld id="{CD0BFEE2-3EAA-4386-9A3C-82D92E479C9F}" type="datetimeFigureOut">
               <a:rPr lang="en-AT" smtClean="0"/>
-              <a:t>29/04/2025</a:t>
+              <a:t>02/06/2025</a:t>
             </a:fld>
             <a:endParaRPr lang="en-AT"/>
           </a:p>
@@ -3589,7 +4611,7 @@
           <a:p>
             <a:fld id="{CD0BFEE2-3EAA-4386-9A3C-82D92E479C9F}" type="datetimeFigureOut">
               <a:rPr lang="en-AT" smtClean="0"/>
-              <a:t>29/04/2025</a:t>
+              <a:t>02/06/2025</a:t>
             </a:fld>
             <a:endParaRPr lang="en-AT"/>
           </a:p>
@@ -3731,7 +4753,7 @@
           <a:p>
             <a:fld id="{CD0BFEE2-3EAA-4386-9A3C-82D92E479C9F}" type="datetimeFigureOut">
               <a:rPr lang="en-AT" smtClean="0"/>
-              <a:t>29/04/2025</a:t>
+              <a:t>02/06/2025</a:t>
             </a:fld>
             <a:endParaRPr lang="en-AT"/>
           </a:p>
@@ -3844,7 +4866,7 @@
           <a:p>
             <a:fld id="{CD0BFEE2-3EAA-4386-9A3C-82D92E479C9F}" type="datetimeFigureOut">
               <a:rPr lang="en-AT" smtClean="0"/>
-              <a:t>29/04/2025</a:t>
+              <a:t>02/06/2025</a:t>
             </a:fld>
             <a:endParaRPr lang="en-AT"/>
           </a:p>
@@ -4157,7 +5179,7 @@
           <a:p>
             <a:fld id="{CD0BFEE2-3EAA-4386-9A3C-82D92E479C9F}" type="datetimeFigureOut">
               <a:rPr lang="en-AT" smtClean="0"/>
-              <a:t>29/04/2025</a:t>
+              <a:t>02/06/2025</a:t>
             </a:fld>
             <a:endParaRPr lang="en-AT"/>
           </a:p>
@@ -4446,7 +5468,7 @@
           <a:p>
             <a:fld id="{CD0BFEE2-3EAA-4386-9A3C-82D92E479C9F}" type="datetimeFigureOut">
               <a:rPr lang="en-AT" smtClean="0"/>
-              <a:t>29/04/2025</a:t>
+              <a:t>02/06/2025</a:t>
             </a:fld>
             <a:endParaRPr lang="en-AT"/>
           </a:p>
@@ -4689,7 +5711,7 @@
           <a:p>
             <a:fld id="{CD0BFEE2-3EAA-4386-9A3C-82D92E479C9F}" type="datetimeFigureOut">
               <a:rPr lang="en-AT" smtClean="0"/>
-              <a:t>29/04/2025</a:t>
+              <a:t>02/06/2025</a:t>
             </a:fld>
             <a:endParaRPr lang="en-AT"/>
           </a:p>
@@ -5526,6 +6548,367 @@
   <p:cSld>
     <p:spTree>
       <p:nvGrpSpPr>
+        <p:cNvPr id="1" name="">
+          <a:extLst>
+            <a:ext uri="{FF2B5EF4-FFF2-40B4-BE49-F238E27FC236}">
+              <a16:creationId xmlns:a16="http://schemas.microsoft.com/office/drawing/2014/main" id="{AC397236-E164-84A9-24F2-E45BC9725B6F}"/>
+            </a:ext>
+          </a:extLst>
+        </p:cNvPr>
+        <p:cNvGrpSpPr/>
+        <p:nvPr/>
+      </p:nvGrpSpPr>
+      <p:grpSpPr>
+        <a:xfrm>
+          <a:off x="0" y="0"/>
+          <a:ext cx="0" cy="0"/>
+          <a:chOff x="0" y="0"/>
+          <a:chExt cx="0" cy="0"/>
+        </a:xfrm>
+      </p:grpSpPr>
+      <p:pic>
+        <p:nvPicPr>
+          <p:cNvPr id="21" name="Picture 20" descr="A graph with blue and white bars&#10;&#10;AI-generated content may be incorrect.">
+            <a:extLst>
+              <a:ext uri="{FF2B5EF4-FFF2-40B4-BE49-F238E27FC236}">
+                <a16:creationId xmlns:a16="http://schemas.microsoft.com/office/drawing/2014/main" id="{0E211FCD-D298-A01D-645B-7D2B4FFD0D7B}"/>
+              </a:ext>
+            </a:extLst>
+          </p:cNvPr>
+          <p:cNvPicPr>
+            <a:picLocks noChangeAspect="1"/>
+          </p:cNvPicPr>
+          <p:nvPr/>
+        </p:nvPicPr>
+        <p:blipFill>
+          <a:blip r:embed="rId3">
+            <a:extLst>
+              <a:ext uri="{28A0092B-C50C-407E-A947-70E740481C1C}">
+                <a14:useLocalDpi xmlns:a14="http://schemas.microsoft.com/office/drawing/2010/main" val="0"/>
+              </a:ext>
+            </a:extLst>
+          </a:blip>
+          <a:stretch>
+            <a:fillRect/>
+          </a:stretch>
+        </p:blipFill>
+        <p:spPr>
+          <a:xfrm>
+            <a:off x="0" y="1259542"/>
+            <a:ext cx="12192000" cy="3406158"/>
+          </a:xfrm>
+          <a:prstGeom prst="rect">
+            <a:avLst/>
+          </a:prstGeom>
+        </p:spPr>
+      </p:pic>
+      <p:pic>
+        <p:nvPicPr>
+          <p:cNvPr id="9" name="Picture 8" descr="A graph with blue and white stripes&#10;&#10;AI-generated content may be incorrect.">
+            <a:extLst>
+              <a:ext uri="{FF2B5EF4-FFF2-40B4-BE49-F238E27FC236}">
+                <a16:creationId xmlns:a16="http://schemas.microsoft.com/office/drawing/2014/main" id="{C7A36C36-88B2-3483-1441-3EFA1C94BEC6}"/>
+              </a:ext>
+            </a:extLst>
+          </p:cNvPr>
+          <p:cNvPicPr>
+            <a:picLocks noChangeAspect="1"/>
+          </p:cNvPicPr>
+          <p:nvPr/>
+        </p:nvPicPr>
+        <p:blipFill>
+          <a:blip r:embed="rId4">
+            <a:extLst>
+              <a:ext uri="{28A0092B-C50C-407E-A947-70E740481C1C}">
+                <a14:useLocalDpi xmlns:a14="http://schemas.microsoft.com/office/drawing/2010/main" val="0"/>
+              </a:ext>
+            </a:extLst>
+          </a:blip>
+          <a:stretch>
+            <a:fillRect/>
+          </a:stretch>
+        </p:blipFill>
+        <p:spPr>
+          <a:xfrm>
+            <a:off x="0" y="3531934"/>
+            <a:ext cx="12192000" cy="3406158"/>
+          </a:xfrm>
+          <a:prstGeom prst="rect">
+            <a:avLst/>
+          </a:prstGeom>
+        </p:spPr>
+      </p:pic>
+      <p:sp>
+        <p:nvSpPr>
+          <p:cNvPr id="2" name="Title 1">
+            <a:extLst>
+              <a:ext uri="{FF2B5EF4-FFF2-40B4-BE49-F238E27FC236}">
+                <a16:creationId xmlns:a16="http://schemas.microsoft.com/office/drawing/2014/main" id="{E8EDFAAE-E253-B5D8-B442-992D47CC13D3}"/>
+              </a:ext>
+            </a:extLst>
+          </p:cNvPr>
+          <p:cNvSpPr>
+            <a:spLocks noGrp="1"/>
+          </p:cNvSpPr>
+          <p:nvPr>
+            <p:ph type="title"/>
+          </p:nvPr>
+        </p:nvSpPr>
+        <p:spPr/>
+        <p:txBody>
+          <a:bodyPr/>
+          <a:lstStyle/>
+          <a:p>
+            <a:r>
+              <a:rPr lang="en-GB" dirty="0">
+                <a:latin typeface="Consolas" panose="020B0609020204030204" pitchFamily="49" charset="0"/>
+              </a:rPr>
+              <a:t>Results</a:t>
+            </a:r>
+            <a:endParaRPr lang="en-AT" dirty="0">
+              <a:latin typeface="Consolas" panose="020B0609020204030204" pitchFamily="49" charset="0"/>
+            </a:endParaRPr>
+          </a:p>
+        </p:txBody>
+      </p:sp>
+      <p:sp>
+        <p:nvSpPr>
+          <p:cNvPr id="3" name="Rectangle 2">
+            <a:extLst>
+              <a:ext uri="{FF2B5EF4-FFF2-40B4-BE49-F238E27FC236}">
+                <a16:creationId xmlns:a16="http://schemas.microsoft.com/office/drawing/2014/main" id="{D9882C11-5C57-E742-5E62-8819FE1D7C45}"/>
+              </a:ext>
+            </a:extLst>
+          </p:cNvPr>
+          <p:cNvSpPr/>
+          <p:nvPr/>
+        </p:nvSpPr>
+        <p:spPr>
+          <a:xfrm>
+            <a:off x="10775577" y="1447477"/>
+            <a:ext cx="551329" cy="4356848"/>
+          </a:xfrm>
+          <a:prstGeom prst="rect">
+            <a:avLst/>
+          </a:prstGeom>
+          <a:noFill/>
+          <a:ln>
+            <a:solidFill>
+              <a:srgbClr val="FF0000"/>
+            </a:solidFill>
+          </a:ln>
+        </p:spPr>
+        <p:style>
+          <a:lnRef idx="2">
+            <a:schemeClr val="accent1">
+              <a:shade val="15000"/>
+            </a:schemeClr>
+          </a:lnRef>
+          <a:fillRef idx="1">
+            <a:schemeClr val="accent1"/>
+          </a:fillRef>
+          <a:effectRef idx="0">
+            <a:schemeClr val="accent1"/>
+          </a:effectRef>
+          <a:fontRef idx="minor">
+            <a:schemeClr val="lt1"/>
+          </a:fontRef>
+        </p:style>
+        <p:txBody>
+          <a:bodyPr rtlCol="0" anchor="ctr"/>
+          <a:lstStyle/>
+          <a:p>
+            <a:pPr algn="ctr"/>
+            <a:endParaRPr lang="en-AT"/>
+          </a:p>
+        </p:txBody>
+      </p:sp>
+      <p:sp>
+        <p:nvSpPr>
+          <p:cNvPr id="4" name="Rectangle 3">
+            <a:extLst>
+              <a:ext uri="{FF2B5EF4-FFF2-40B4-BE49-F238E27FC236}">
+                <a16:creationId xmlns:a16="http://schemas.microsoft.com/office/drawing/2014/main" id="{5FEF312F-5FF3-ADF5-00D8-C9C052AF257F}"/>
+              </a:ext>
+            </a:extLst>
+          </p:cNvPr>
+          <p:cNvSpPr/>
+          <p:nvPr/>
+        </p:nvSpPr>
+        <p:spPr>
+          <a:xfrm>
+            <a:off x="10107708" y="1447477"/>
+            <a:ext cx="551329" cy="4356848"/>
+          </a:xfrm>
+          <a:prstGeom prst="rect">
+            <a:avLst/>
+          </a:prstGeom>
+          <a:noFill/>
+          <a:ln>
+            <a:solidFill>
+              <a:srgbClr val="FF0000"/>
+            </a:solidFill>
+          </a:ln>
+        </p:spPr>
+        <p:style>
+          <a:lnRef idx="2">
+            <a:schemeClr val="accent1">
+              <a:shade val="15000"/>
+            </a:schemeClr>
+          </a:lnRef>
+          <a:fillRef idx="1">
+            <a:schemeClr val="accent1"/>
+          </a:fillRef>
+          <a:effectRef idx="0">
+            <a:schemeClr val="accent1"/>
+          </a:effectRef>
+          <a:fontRef idx="minor">
+            <a:schemeClr val="lt1"/>
+          </a:fontRef>
+        </p:style>
+        <p:txBody>
+          <a:bodyPr rtlCol="0" anchor="ctr"/>
+          <a:lstStyle/>
+          <a:p>
+            <a:pPr algn="ctr"/>
+            <a:endParaRPr lang="en-AT"/>
+          </a:p>
+        </p:txBody>
+      </p:sp>
+      <p:sp>
+        <p:nvSpPr>
+          <p:cNvPr id="6" name="TextBox 5">
+            <a:extLst>
+              <a:ext uri="{FF2B5EF4-FFF2-40B4-BE49-F238E27FC236}">
+                <a16:creationId xmlns:a16="http://schemas.microsoft.com/office/drawing/2014/main" id="{6697E459-2235-EED1-8DC0-49502D9725B9}"/>
+              </a:ext>
+            </a:extLst>
+          </p:cNvPr>
+          <p:cNvSpPr txBox="1"/>
+          <p:nvPr/>
+        </p:nvSpPr>
+        <p:spPr>
+          <a:xfrm>
+            <a:off x="10123397" y="1027906"/>
+            <a:ext cx="535640" cy="400110"/>
+          </a:xfrm>
+          <a:prstGeom prst="rect">
+            <a:avLst/>
+          </a:prstGeom>
+          <a:noFill/>
+        </p:spPr>
+        <p:txBody>
+          <a:bodyPr wrap="square" rtlCol="0">
+            <a:spAutoFit/>
+          </a:bodyPr>
+          <a:lstStyle/>
+          <a:p>
+            <a:r>
+              <a:rPr lang="en-GB" sz="1000" dirty="0">
+                <a:solidFill>
+                  <a:srgbClr val="FF0000"/>
+                </a:solidFill>
+              </a:rPr>
+              <a:t>95 #</a:t>
+            </a:r>
+          </a:p>
+          <a:p>
+            <a:r>
+              <a:rPr lang="en-GB" sz="1000" dirty="0">
+                <a:solidFill>
+                  <a:srgbClr val="FF0000"/>
+                </a:solidFill>
+              </a:rPr>
+              <a:t>90 %</a:t>
+            </a:r>
+            <a:endParaRPr lang="en-AT" sz="1000" dirty="0">
+              <a:solidFill>
+                <a:srgbClr val="FF0000"/>
+              </a:solidFill>
+            </a:endParaRPr>
+          </a:p>
+        </p:txBody>
+      </p:sp>
+      <p:sp>
+        <p:nvSpPr>
+          <p:cNvPr id="7" name="TextBox 6">
+            <a:extLst>
+              <a:ext uri="{FF2B5EF4-FFF2-40B4-BE49-F238E27FC236}">
+                <a16:creationId xmlns:a16="http://schemas.microsoft.com/office/drawing/2014/main" id="{FE4CD9AD-7FC0-73FC-B81F-574A6A9C74ED}"/>
+              </a:ext>
+            </a:extLst>
+          </p:cNvPr>
+          <p:cNvSpPr txBox="1"/>
+          <p:nvPr/>
+        </p:nvSpPr>
+        <p:spPr>
+          <a:xfrm>
+            <a:off x="10791266" y="1047367"/>
+            <a:ext cx="535640" cy="400110"/>
+          </a:xfrm>
+          <a:prstGeom prst="rect">
+            <a:avLst/>
+          </a:prstGeom>
+          <a:noFill/>
+        </p:spPr>
+        <p:txBody>
+          <a:bodyPr wrap="square" rtlCol="0">
+            <a:spAutoFit/>
+          </a:bodyPr>
+          <a:lstStyle/>
+          <a:p>
+            <a:r>
+              <a:rPr lang="en-GB" sz="1000" dirty="0">
+                <a:solidFill>
+                  <a:srgbClr val="FF0000"/>
+                </a:solidFill>
+              </a:rPr>
+              <a:t>95 #</a:t>
+            </a:r>
+          </a:p>
+          <a:p>
+            <a:r>
+              <a:rPr lang="en-GB" sz="1000" dirty="0">
+                <a:solidFill>
+                  <a:srgbClr val="FF0000"/>
+                </a:solidFill>
+              </a:rPr>
+              <a:t>92 %</a:t>
+            </a:r>
+            <a:endParaRPr lang="en-AT" sz="1000" dirty="0">
+              <a:solidFill>
+                <a:srgbClr val="FF0000"/>
+              </a:solidFill>
+            </a:endParaRPr>
+          </a:p>
+        </p:txBody>
+      </p:sp>
+    </p:spTree>
+    <p:extLst>
+      <p:ext uri="{BB962C8B-B14F-4D97-AF65-F5344CB8AC3E}">
+        <p14:creationId xmlns:p14="http://schemas.microsoft.com/office/powerpoint/2010/main" val="2383129376"/>
+      </p:ext>
+    </p:extLst>
+  </p:cSld>
+  <p:clrMapOvr>
+    <a:masterClrMapping/>
+  </p:clrMapOvr>
+</p:sld>
+</file>
+
+<file path=ppt/slides/slide11.xml><?xml version="1.0" encoding="utf-8"?>
+<p:sld xmlns:a="http://schemas.openxmlformats.org/drawingml/2006/main" xmlns:r="http://schemas.openxmlformats.org/officeDocument/2006/relationships" xmlns:p="http://schemas.openxmlformats.org/presentationml/2006/main">
+  <p:cSld>
+    <p:bg>
+      <p:bgPr>
+        <a:solidFill>
+          <a:schemeClr val="bg1"/>
+        </a:solidFill>
+        <a:effectLst/>
+      </p:bgPr>
+    </p:bg>
+    <p:spTree>
+      <p:nvGrpSpPr>
         <p:cNvPr id="1" name=""/>
         <p:cNvGrpSpPr/>
         <p:nvPr/>
@@ -5538,6 +6921,658 @@
           <a:chExt cx="0" cy="0"/>
         </a:xfrm>
       </p:grpSpPr>
+      <p:sp useBgFill="1">
+        <p:nvSpPr>
+          <p:cNvPr id="10" name="Rectangle 9">
+            <a:extLst>
+              <a:ext uri="{FF2B5EF4-FFF2-40B4-BE49-F238E27FC236}">
+                <a16:creationId xmlns:a16="http://schemas.microsoft.com/office/drawing/2014/main" id="{7DA3C418-758E-4180-A5D0-8655D6804587}"/>
+              </a:ext>
+              <a:ext uri="{C183D7F6-B498-43B3-948B-1728B52AA6E4}">
+                <adec:decorative xmlns:adec="http://schemas.microsoft.com/office/drawing/2017/decorative" val="1"/>
+              </a:ext>
+            </a:extLst>
+          </p:cNvPr>
+          <p:cNvSpPr>
+            <a:spLocks noGrp="1" noRot="1" noChangeAspect="1" noMove="1" noResize="1" noEditPoints="1" noAdjustHandles="1" noChangeArrowheads="1" noChangeShapeType="1" noTextEdit="1"/>
+          </p:cNvSpPr>
+          <p:nvPr>
+            <p:extLst>
+              <p:ext uri="{386F3935-93C4-4BCD-93E2-E3B085C9AB24}">
+                <p16:designElem xmlns:p16="http://schemas.microsoft.com/office/powerpoint/2015/main" val="1"/>
+              </p:ext>
+            </p:extLst>
+          </p:nvPr>
+        </p:nvSpPr>
+        <p:spPr>
+          <a:xfrm>
+            <a:off x="0" y="0"/>
+            <a:ext cx="12192000" cy="6858000"/>
+          </a:xfrm>
+          <a:prstGeom prst="rect">
+            <a:avLst/>
+          </a:prstGeom>
+          <a:ln w="12700" cap="flat" cmpd="sng" algn="ctr">
+            <a:noFill/>
+            <a:prstDash val="solid"/>
+            <a:miter lim="800000"/>
+          </a:ln>
+          <a:effectLst/>
+          <a:extLst>
+            <a:ext uri="{91240B29-F687-4F45-9708-019B960494DF}">
+              <a14:hiddenLine xmlns:a14="http://schemas.microsoft.com/office/drawing/2010/main" w="12700" cap="flat" cmpd="sng" algn="ctr">
+                <a:solidFill>
+                  <a:schemeClr val="accent1">
+                    <a:shade val="50000"/>
+                  </a:schemeClr>
+                </a:solidFill>
+                <a:prstDash val="solid"/>
+                <a:miter lim="800000"/>
+              </a14:hiddenLine>
+            </a:ext>
+          </a:extLst>
+        </p:spPr>
+        <p:style>
+          <a:lnRef idx="2">
+            <a:schemeClr val="accent1">
+              <a:shade val="50000"/>
+            </a:schemeClr>
+          </a:lnRef>
+          <a:fillRef idx="1">
+            <a:schemeClr val="accent1"/>
+          </a:fillRef>
+          <a:effectRef idx="0">
+            <a:schemeClr val="accent1"/>
+          </a:effectRef>
+          <a:fontRef idx="minor">
+            <a:schemeClr val="lt1"/>
+          </a:fontRef>
+        </p:style>
+        <p:txBody>
+          <a:bodyPr rtlCol="0" anchor="ctr"/>
+          <a:lstStyle/>
+          <a:p>
+            <a:pPr algn="ctr"/>
+            <a:endParaRPr lang="en-US"/>
+          </a:p>
+        </p:txBody>
+      </p:sp>
+      <p:sp>
+        <p:nvSpPr>
+          <p:cNvPr id="12" name="Rectangle 11">
+            <a:extLst>
+              <a:ext uri="{FF2B5EF4-FFF2-40B4-BE49-F238E27FC236}">
+                <a16:creationId xmlns:a16="http://schemas.microsoft.com/office/drawing/2014/main" id="{28C8EF06-5EC3-4883-AFAF-D74FF46550FB}"/>
+              </a:ext>
+              <a:ext uri="{C183D7F6-B498-43B3-948B-1728B52AA6E4}">
+                <adec:decorative xmlns:adec="http://schemas.microsoft.com/office/drawing/2017/decorative" val="1"/>
+              </a:ext>
+            </a:extLst>
+          </p:cNvPr>
+          <p:cNvSpPr>
+            <a:spLocks noGrp="1" noRot="1" noChangeAspect="1" noMove="1" noResize="1" noEditPoints="1" noAdjustHandles="1" noChangeArrowheads="1" noChangeShapeType="1" noTextEdit="1"/>
+          </p:cNvSpPr>
+          <p:nvPr>
+            <p:extLst>
+              <p:ext uri="{386F3935-93C4-4BCD-93E2-E3B085C9AB24}">
+                <p16:designElem xmlns:p16="http://schemas.microsoft.com/office/powerpoint/2015/main" val="1"/>
+              </p:ext>
+            </p:extLst>
+          </p:nvPr>
+        </p:nvSpPr>
+        <p:spPr>
+          <a:xfrm>
+            <a:off x="-3" y="0"/>
+            <a:ext cx="5135971" cy="6871648"/>
+          </a:xfrm>
+          <a:prstGeom prst="rect">
+            <a:avLst/>
+          </a:prstGeom>
+          <a:solidFill>
+            <a:srgbClr val="82766A">
+              <a:alpha val="15000"/>
+            </a:srgbClr>
+          </a:solidFill>
+          <a:ln>
+            <a:noFill/>
+          </a:ln>
+        </p:spPr>
+        <p:style>
+          <a:lnRef idx="2">
+            <a:schemeClr val="accent1">
+              <a:shade val="50000"/>
+            </a:schemeClr>
+          </a:lnRef>
+          <a:fillRef idx="1">
+            <a:schemeClr val="accent1"/>
+          </a:fillRef>
+          <a:effectRef idx="0">
+            <a:schemeClr val="accent1"/>
+          </a:effectRef>
+          <a:fontRef idx="minor">
+            <a:schemeClr val="lt1"/>
+          </a:fontRef>
+        </p:style>
+        <p:txBody>
+          <a:bodyPr rtlCol="0" anchor="ctr"/>
+          <a:lstStyle/>
+          <a:p>
+            <a:pPr algn="ctr"/>
+            <a:endParaRPr lang="en-US"/>
+          </a:p>
+        </p:txBody>
+      </p:sp>
+      <p:pic>
+        <p:nvPicPr>
+          <p:cNvPr id="5" name="Picture 4" descr="A group of white speech bubbles with question marks and light bulb&#10;&#10;AI-generated content may be incorrect.">
+            <a:extLst>
+              <a:ext uri="{FF2B5EF4-FFF2-40B4-BE49-F238E27FC236}">
+                <a16:creationId xmlns:a16="http://schemas.microsoft.com/office/drawing/2014/main" id="{6050C4D7-C893-1C56-CED5-14661426AA7A}"/>
+              </a:ext>
+            </a:extLst>
+          </p:cNvPr>
+          <p:cNvPicPr>
+            <a:picLocks noChangeAspect="1"/>
+          </p:cNvPicPr>
+          <p:nvPr/>
+        </p:nvPicPr>
+        <p:blipFill>
+          <a:blip r:embed="rId3">
+            <a:extLst>
+              <a:ext uri="{28A0092B-C50C-407E-A947-70E740481C1C}">
+                <a14:useLocalDpi xmlns:a14="http://schemas.microsoft.com/office/drawing/2010/main" val="0"/>
+              </a:ext>
+            </a:extLst>
+          </a:blip>
+          <a:srcRect l="4273" r="6113" b="-1"/>
+          <a:stretch>
+            <a:fillRect/>
+          </a:stretch>
+        </p:blipFill>
+        <p:spPr>
+          <a:xfrm>
+            <a:off x="2915455" y="10"/>
+            <a:ext cx="9276545" cy="6857990"/>
+          </a:xfrm>
+          <a:custGeom>
+            <a:avLst/>
+            <a:gdLst/>
+            <a:ahLst/>
+            <a:cxnLst/>
+            <a:rect l="l" t="t" r="r" b="b"/>
+            <a:pathLst>
+              <a:path w="9276545" h="6871647">
+                <a:moveTo>
+                  <a:pt x="9276545" y="0"/>
+                </a:moveTo>
+                <a:lnTo>
+                  <a:pt x="9276545" y="6858000"/>
+                </a:lnTo>
+                <a:lnTo>
+                  <a:pt x="1546051" y="6871647"/>
+                </a:lnTo>
+                <a:lnTo>
+                  <a:pt x="1535751" y="6828910"/>
+                </a:lnTo>
+                <a:cubicBezTo>
+                  <a:pt x="1530460" y="6775140"/>
+                  <a:pt x="1515370" y="6618042"/>
+                  <a:pt x="1514301" y="6549029"/>
+                </a:cubicBezTo>
+                <a:cubicBezTo>
+                  <a:pt x="1518045" y="6491396"/>
+                  <a:pt x="1528503" y="6450608"/>
+                  <a:pt x="1529339" y="6414828"/>
+                </a:cubicBezTo>
+                <a:cubicBezTo>
+                  <a:pt x="1525062" y="6359280"/>
+                  <a:pt x="1502062" y="6307149"/>
+                  <a:pt x="1493941" y="6268848"/>
+                </a:cubicBezTo>
+                <a:cubicBezTo>
+                  <a:pt x="1502669" y="6254191"/>
+                  <a:pt x="1469920" y="6200171"/>
+                  <a:pt x="1480613" y="6185025"/>
+                </a:cubicBezTo>
+                <a:cubicBezTo>
+                  <a:pt x="1481020" y="6164522"/>
+                  <a:pt x="1458164" y="6060790"/>
+                  <a:pt x="1443364" y="6018360"/>
+                </a:cubicBezTo>
+                <a:cubicBezTo>
+                  <a:pt x="1426694" y="5970758"/>
+                  <a:pt x="1390307" y="5920074"/>
+                  <a:pt x="1380584" y="5899407"/>
+                </a:cubicBezTo>
+                <a:cubicBezTo>
+                  <a:pt x="1370860" y="5878740"/>
+                  <a:pt x="1392244" y="5920877"/>
+                  <a:pt x="1385023" y="5894356"/>
+                </a:cubicBezTo>
+                <a:cubicBezTo>
+                  <a:pt x="1377800" y="5867835"/>
+                  <a:pt x="1345702" y="5770498"/>
+                  <a:pt x="1337254" y="5740279"/>
+                </a:cubicBezTo>
+                <a:cubicBezTo>
+                  <a:pt x="1353956" y="5738860"/>
+                  <a:pt x="1323673" y="5722040"/>
+                  <a:pt x="1334321" y="5713042"/>
+                </a:cubicBezTo>
+                <a:cubicBezTo>
+                  <a:pt x="1343675" y="5706701"/>
+                  <a:pt x="1336672" y="5700118"/>
+                  <a:pt x="1335877" y="5692870"/>
+                </a:cubicBezTo>
+                <a:cubicBezTo>
+                  <a:pt x="1343201" y="5683812"/>
+                  <a:pt x="1329617" y="5652064"/>
+                  <a:pt x="1319978" y="5643427"/>
+                </a:cubicBezTo>
+                <a:cubicBezTo>
+                  <a:pt x="1286551" y="5622177"/>
+                  <a:pt x="1310947" y="5579803"/>
+                  <a:pt x="1285321" y="5562271"/>
+                </a:cubicBezTo>
+                <a:cubicBezTo>
+                  <a:pt x="1281540" y="5556238"/>
+                  <a:pt x="1279983" y="5550455"/>
+                  <a:pt x="1279815" y="5544867"/>
+                </a:cubicBezTo>
+                <a:lnTo>
+                  <a:pt x="1282507" y="5529404"/>
+                </a:lnTo>
+                <a:lnTo>
+                  <a:pt x="1289604" y="5525378"/>
+                </a:lnTo>
+                <a:lnTo>
+                  <a:pt x="1287766" y="5515726"/>
+                </a:lnTo>
+                <a:lnTo>
+                  <a:pt x="1288829" y="5513051"/>
+                </a:lnTo>
+                <a:cubicBezTo>
+                  <a:pt x="1290896" y="5507946"/>
+                  <a:pt x="1292688" y="5502897"/>
+                  <a:pt x="1293373" y="5497833"/>
+                </a:cubicBezTo>
+                <a:cubicBezTo>
+                  <a:pt x="1288690" y="5483829"/>
+                  <a:pt x="1272696" y="5459278"/>
+                  <a:pt x="1260736" y="5429027"/>
+                </a:cubicBezTo>
+                <a:cubicBezTo>
+                  <a:pt x="1238579" y="5396416"/>
+                  <a:pt x="1238884" y="5351600"/>
+                  <a:pt x="1221610" y="5316328"/>
+                </a:cubicBezTo>
+                <a:lnTo>
+                  <a:pt x="1216099" y="5309330"/>
+                </a:lnTo>
+                <a:lnTo>
+                  <a:pt x="1217278" y="5279477"/>
+                </a:lnTo>
+                <a:cubicBezTo>
+                  <a:pt x="1221588" y="5274318"/>
+                  <a:pt x="1222716" y="5266940"/>
+                  <a:pt x="1218469" y="5260597"/>
+                </a:cubicBezTo>
+                <a:lnTo>
+                  <a:pt x="1206220" y="5152555"/>
+                </a:lnTo>
+                <a:cubicBezTo>
+                  <a:pt x="1205294" y="5116878"/>
+                  <a:pt x="1196908" y="5101727"/>
+                  <a:pt x="1212921" y="5046536"/>
+                </a:cubicBezTo>
+                <a:cubicBezTo>
+                  <a:pt x="1234138" y="4987918"/>
+                  <a:pt x="1204801" y="4903116"/>
+                  <a:pt x="1212183" y="4837345"/>
+                </a:cubicBezTo>
+                <a:cubicBezTo>
+                  <a:pt x="1183151" y="4802424"/>
+                  <a:pt x="1209228" y="4821062"/>
+                  <a:pt x="1202048" y="4784195"/>
+                </a:cubicBezTo>
+                <a:cubicBezTo>
+                  <a:pt x="1202483" y="4760878"/>
+                  <a:pt x="1202919" y="4737561"/>
+                  <a:pt x="1203354" y="4714245"/>
+                </a:cubicBezTo>
+                <a:lnTo>
+                  <a:pt x="1201502" y="4700836"/>
+                </a:lnTo>
+                <a:lnTo>
+                  <a:pt x="1194919" y="4697224"/>
+                </a:lnTo>
+                <a:lnTo>
+                  <a:pt x="1187792" y="4677162"/>
+                </a:lnTo>
+                <a:cubicBezTo>
+                  <a:pt x="1186060" y="4669625"/>
+                  <a:pt x="1185291" y="4661478"/>
+                  <a:pt x="1186080" y="4652429"/>
+                </a:cubicBezTo>
+                <a:cubicBezTo>
+                  <a:pt x="1199189" y="4622456"/>
+                  <a:pt x="1167081" y="4571771"/>
+                  <a:pt x="1184722" y="4534840"/>
+                </a:cubicBezTo>
+                <a:cubicBezTo>
+                  <a:pt x="1182407" y="4499077"/>
+                  <a:pt x="1175424" y="4460227"/>
+                  <a:pt x="1172188" y="4437851"/>
+                </a:cubicBezTo>
+                <a:cubicBezTo>
+                  <a:pt x="1161331" y="4428466"/>
+                  <a:pt x="1178123" y="4398274"/>
+                  <a:pt x="1165306" y="4400581"/>
+                </a:cubicBezTo>
+                <a:cubicBezTo>
+                  <a:pt x="1171061" y="4389819"/>
+                  <a:pt x="1173552" y="4346771"/>
+                  <a:pt x="1168602" y="4335651"/>
+                </a:cubicBezTo>
+                <a:lnTo>
+                  <a:pt x="1178384" y="4280215"/>
+                </a:lnTo>
+                <a:lnTo>
+                  <a:pt x="1177294" y="4274660"/>
+                </a:lnTo>
+                <a:cubicBezTo>
+                  <a:pt x="1177138" y="4268882"/>
+                  <a:pt x="1177520" y="4251103"/>
+                  <a:pt x="1177448" y="4245552"/>
+                </a:cubicBezTo>
+                <a:cubicBezTo>
+                  <a:pt x="1177252" y="4244155"/>
+                  <a:pt x="1177058" y="4242757"/>
+                  <a:pt x="1176863" y="4241361"/>
+                </a:cubicBezTo>
+                <a:lnTo>
+                  <a:pt x="1162386" y="4207167"/>
+                </a:lnTo>
+                <a:cubicBezTo>
+                  <a:pt x="1162950" y="4202536"/>
+                  <a:pt x="1174655" y="4199565"/>
+                  <a:pt x="1174343" y="4192380"/>
+                </a:cubicBezTo>
+                <a:lnTo>
+                  <a:pt x="1160516" y="4164062"/>
+                </a:lnTo>
+                <a:lnTo>
+                  <a:pt x="1161365" y="4158623"/>
+                </a:lnTo>
+                <a:lnTo>
+                  <a:pt x="1144878" y="4076261"/>
+                </a:lnTo>
+                <a:lnTo>
+                  <a:pt x="1123687" y="4005692"/>
+                </a:lnTo>
+                <a:lnTo>
+                  <a:pt x="1096720" y="3754257"/>
+                </a:lnTo>
+                <a:cubicBezTo>
+                  <a:pt x="1083618" y="3639924"/>
+                  <a:pt x="1064313" y="3636659"/>
+                  <a:pt x="1047682" y="3517638"/>
+                </a:cubicBezTo>
+                <a:cubicBezTo>
+                  <a:pt x="1048550" y="3477187"/>
+                  <a:pt x="1049418" y="3436735"/>
+                  <a:pt x="1050285" y="3396284"/>
+                </a:cubicBezTo>
+                <a:lnTo>
+                  <a:pt x="1030166" y="3320814"/>
+                </a:lnTo>
+                <a:lnTo>
+                  <a:pt x="1034128" y="3260443"/>
+                </a:lnTo>
+                <a:lnTo>
+                  <a:pt x="1007751" y="3198916"/>
+                </a:lnTo>
+                <a:cubicBezTo>
+                  <a:pt x="1003323" y="3193074"/>
+                  <a:pt x="1001150" y="3187393"/>
+                  <a:pt x="1000384" y="3181839"/>
+                </a:cubicBezTo>
+                <a:cubicBezTo>
+                  <a:pt x="1000734" y="3176675"/>
+                  <a:pt x="1001085" y="3171511"/>
+                  <a:pt x="1001435" y="3166346"/>
+                </a:cubicBezTo>
+                <a:lnTo>
+                  <a:pt x="968918" y="3112638"/>
+                </a:lnTo>
+                <a:cubicBezTo>
+                  <a:pt x="957125" y="3092489"/>
+                  <a:pt x="955617" y="3065232"/>
+                  <a:pt x="934483" y="3031628"/>
+                </a:cubicBezTo>
+                <a:cubicBezTo>
+                  <a:pt x="914631" y="2997037"/>
+                  <a:pt x="908933" y="3005661"/>
+                  <a:pt x="879229" y="2948196"/>
+                </a:cubicBezTo>
+                <a:cubicBezTo>
+                  <a:pt x="850845" y="2897154"/>
+                  <a:pt x="820829" y="2806798"/>
+                  <a:pt x="798666" y="2761198"/>
+                </a:cubicBezTo>
+                <a:cubicBezTo>
+                  <a:pt x="773970" y="2714562"/>
+                  <a:pt x="758278" y="2715446"/>
+                  <a:pt x="746962" y="2694939"/>
+                </a:cubicBezTo>
+                <a:lnTo>
+                  <a:pt x="712796" y="2614779"/>
+                </a:lnTo>
+                <a:lnTo>
+                  <a:pt x="697701" y="2600020"/>
+                </a:lnTo>
+                <a:cubicBezTo>
+                  <a:pt x="697743" y="2598787"/>
+                  <a:pt x="697784" y="2597555"/>
+                  <a:pt x="697823" y="2596321"/>
+                </a:cubicBezTo>
+                <a:lnTo>
+                  <a:pt x="679645" y="2572602"/>
+                </a:lnTo>
+                <a:lnTo>
+                  <a:pt x="680789" y="2571831"/>
+                </a:lnTo>
+                <a:cubicBezTo>
+                  <a:pt x="682946" y="2569560"/>
+                  <a:pt x="683757" y="2566863"/>
+                  <a:pt x="681771" y="2563200"/>
+                </a:cubicBezTo>
+                <a:cubicBezTo>
+                  <a:pt x="705290" y="2562299"/>
+                  <a:pt x="688388" y="2558438"/>
+                  <a:pt x="680456" y="2547723"/>
+                </a:cubicBezTo>
+                <a:cubicBezTo>
+                  <a:pt x="679482" y="2534148"/>
+                  <a:pt x="677183" y="2493617"/>
+                  <a:pt x="675922" y="2481749"/>
+                </a:cubicBezTo>
+                <a:lnTo>
+                  <a:pt x="672894" y="2476509"/>
+                </a:lnTo>
+                <a:lnTo>
+                  <a:pt x="673143" y="2476297"/>
+                </a:lnTo>
+                <a:cubicBezTo>
+                  <a:pt x="673152" y="2474932"/>
+                  <a:pt x="672405" y="2473126"/>
+                  <a:pt x="670567" y="2470561"/>
+                </a:cubicBezTo>
+                <a:lnTo>
+                  <a:pt x="667369" y="2466951"/>
+                </a:lnTo>
+                <a:lnTo>
+                  <a:pt x="661495" y="2456785"/>
+                </a:lnTo>
+                <a:cubicBezTo>
+                  <a:pt x="661510" y="2455387"/>
+                  <a:pt x="661525" y="2453987"/>
+                  <a:pt x="661540" y="2452588"/>
+                </a:cubicBezTo>
+                <a:lnTo>
+                  <a:pt x="664540" y="2449913"/>
+                </a:lnTo>
+                <a:lnTo>
+                  <a:pt x="663581" y="2449129"/>
+                </a:lnTo>
+                <a:cubicBezTo>
+                  <a:pt x="653014" y="2444453"/>
+                  <a:pt x="642406" y="2445872"/>
+                  <a:pt x="663129" y="2426579"/>
+                </a:cubicBezTo>
+                <a:cubicBezTo>
+                  <a:pt x="643271" y="2414167"/>
+                  <a:pt x="657229" y="2404769"/>
+                  <a:pt x="650205" y="2379928"/>
+                </a:cubicBezTo>
+                <a:cubicBezTo>
+                  <a:pt x="634911" y="2374359"/>
+                  <a:pt x="634260" y="2365346"/>
+                  <a:pt x="638008" y="2354824"/>
+                </a:cubicBezTo>
+                <a:cubicBezTo>
+                  <a:pt x="621083" y="2334576"/>
+                  <a:pt x="620949" y="2310146"/>
+                  <a:pt x="609851" y="2284299"/>
+                </a:cubicBezTo>
+                <a:lnTo>
+                  <a:pt x="585585" y="2155739"/>
+                </a:lnTo>
+                <a:lnTo>
+                  <a:pt x="581391" y="2152892"/>
+                </a:lnTo>
+                <a:cubicBezTo>
+                  <a:pt x="578821" y="2150768"/>
+                  <a:pt x="577525" y="2149149"/>
+                  <a:pt x="577083" y="2147807"/>
+                </a:cubicBezTo>
+                <a:lnTo>
+                  <a:pt x="577251" y="2147544"/>
+                </a:lnTo>
+                <a:lnTo>
+                  <a:pt x="546845" y="2085601"/>
+                </a:lnTo>
+                <a:cubicBezTo>
+                  <a:pt x="538270" y="2073917"/>
+                  <a:pt x="486356" y="1955894"/>
+                  <a:pt x="470837" y="1931362"/>
+                </a:cubicBezTo>
+                <a:lnTo>
+                  <a:pt x="428154" y="1657167"/>
+                </a:lnTo>
+                <a:lnTo>
+                  <a:pt x="392797" y="1510175"/>
+                </a:lnTo>
+                <a:cubicBezTo>
+                  <a:pt x="380165" y="1504446"/>
+                  <a:pt x="369910" y="1451095"/>
+                  <a:pt x="372847" y="1440507"/>
+                </a:cubicBezTo>
+                <a:cubicBezTo>
+                  <a:pt x="369015" y="1433783"/>
+                  <a:pt x="338503" y="1376212"/>
+                  <a:pt x="344479" y="1367690"/>
+                </a:cubicBezTo>
+                <a:cubicBezTo>
+                  <a:pt x="332264" y="1342150"/>
+                  <a:pt x="321736" y="1310521"/>
+                  <a:pt x="299558" y="1287266"/>
+                </a:cubicBezTo>
+                <a:cubicBezTo>
+                  <a:pt x="277380" y="1264010"/>
+                  <a:pt x="259203" y="1269909"/>
+                  <a:pt x="243216" y="1249403"/>
+                </a:cubicBezTo>
+                <a:cubicBezTo>
+                  <a:pt x="227230" y="1228898"/>
+                  <a:pt x="218454" y="1166841"/>
+                  <a:pt x="203639" y="1164232"/>
+                </a:cubicBezTo>
+                <a:cubicBezTo>
+                  <a:pt x="192352" y="1144923"/>
+                  <a:pt x="198158" y="1133798"/>
+                  <a:pt x="169195" y="1087898"/>
+                </a:cubicBezTo>
+                <a:cubicBezTo>
+                  <a:pt x="139228" y="1002950"/>
+                  <a:pt x="140891" y="969630"/>
+                  <a:pt x="98775" y="910071"/>
+                </a:cubicBezTo>
+                <a:cubicBezTo>
+                  <a:pt x="45025" y="831068"/>
+                  <a:pt x="34038" y="817468"/>
+                  <a:pt x="43820" y="712632"/>
+                </a:cubicBezTo>
+                <a:cubicBezTo>
+                  <a:pt x="34816" y="659496"/>
+                  <a:pt x="43273" y="613587"/>
+                  <a:pt x="44748" y="591246"/>
+                </a:cubicBezTo>
+                <a:lnTo>
+                  <a:pt x="36767" y="546725"/>
+                </a:lnTo>
+                <a:cubicBezTo>
+                  <a:pt x="36093" y="528360"/>
+                  <a:pt x="35418" y="509996"/>
+                  <a:pt x="34744" y="491632"/>
+                </a:cubicBezTo>
+                <a:cubicBezTo>
+                  <a:pt x="34670" y="458441"/>
+                  <a:pt x="29296" y="473054"/>
+                  <a:pt x="29222" y="439863"/>
+                </a:cubicBezTo>
+                <a:cubicBezTo>
+                  <a:pt x="29152" y="439762"/>
+                  <a:pt x="2578" y="397168"/>
+                  <a:pt x="2507" y="397065"/>
+                </a:cubicBezTo>
+                <a:cubicBezTo>
+                  <a:pt x="-7796" y="385479"/>
+                  <a:pt x="17492" y="336832"/>
+                  <a:pt x="9810" y="317232"/>
+                </a:cubicBezTo>
+                <a:lnTo>
+                  <a:pt x="25323" y="268841"/>
+                </a:lnTo>
+                <a:cubicBezTo>
+                  <a:pt x="20582" y="241406"/>
+                  <a:pt x="55391" y="238509"/>
+                  <a:pt x="50278" y="195107"/>
+                </a:cubicBezTo>
+                <a:cubicBezTo>
+                  <a:pt x="49891" y="157638"/>
+                  <a:pt x="41873" y="124837"/>
+                  <a:pt x="47653" y="93413"/>
+                </a:cubicBezTo>
+                <a:cubicBezTo>
+                  <a:pt x="41389" y="80245"/>
+                  <a:pt x="38874" y="67990"/>
+                  <a:pt x="48323" y="56668"/>
+                </a:cubicBezTo>
+                <a:cubicBezTo>
+                  <a:pt x="46028" y="30349"/>
+                  <a:pt x="37896" y="18658"/>
+                  <a:pt x="38423" y="5323"/>
+                </a:cubicBezTo>
+                <a:lnTo>
+                  <a:pt x="39875" y="1"/>
+                </a:lnTo>
+                <a:close/>
+              </a:path>
+            </a:pathLst>
+          </a:custGeom>
+        </p:spPr>
+      </p:pic>
       <p:sp>
         <p:nvSpPr>
           <p:cNvPr id="2" name="Title 1">
@@ -5554,47 +7589,29 @@
             <p:ph type="title"/>
           </p:nvPr>
         </p:nvSpPr>
-        <p:spPr/>
-        <p:txBody>
-          <a:bodyPr/>
+        <p:spPr>
+          <a:xfrm>
+            <a:off x="661916" y="2852381"/>
+            <a:ext cx="3161940" cy="2640247"/>
+          </a:xfrm>
+        </p:spPr>
+        <p:txBody>
+          <a:bodyPr vert="horz" lIns="91440" tIns="45720" rIns="91440" bIns="45720" rtlCol="0" anchor="b">
+            <a:normAutofit/>
+          </a:bodyPr>
           <a:lstStyle/>
           <a:p>
             <a:r>
-              <a:rPr lang="en-GB" dirty="0">
-                <a:latin typeface="Consolas" panose="020B0609020204030204" pitchFamily="49" charset="0"/>
+              <a:rPr lang="en-US" sz="3600" dirty="0">
+                <a:solidFill>
+                  <a:schemeClr val="tx1">
+                    <a:lumMod val="85000"/>
+                    <a:lumOff val="15000"/>
+                  </a:schemeClr>
+                </a:solidFill>
               </a:rPr>
               <a:t>Q &amp; A</a:t>
             </a:r>
-            <a:endParaRPr lang="en-AT" dirty="0">
-              <a:latin typeface="Consolas" panose="020B0609020204030204" pitchFamily="49" charset="0"/>
-            </a:endParaRPr>
-          </a:p>
-        </p:txBody>
-      </p:sp>
-      <p:sp>
-        <p:nvSpPr>
-          <p:cNvPr id="3" name="Content Placeholder 2">
-            <a:extLst>
-              <a:ext uri="{FF2B5EF4-FFF2-40B4-BE49-F238E27FC236}">
-                <a16:creationId xmlns:a16="http://schemas.microsoft.com/office/drawing/2014/main" id="{F9D6AE6E-165B-9A93-3AE4-16307F2A134A}"/>
-              </a:ext>
-            </a:extLst>
-          </p:cNvPr>
-          <p:cNvSpPr>
-            <a:spLocks noGrp="1"/>
-          </p:cNvSpPr>
-          <p:nvPr>
-            <p:ph idx="1"/>
-          </p:nvPr>
-        </p:nvSpPr>
-        <p:spPr/>
-        <p:txBody>
-          <a:bodyPr/>
-          <a:lstStyle/>
-          <a:p>
-            <a:endParaRPr lang="en-AT" dirty="0">
-              <a:latin typeface="Consolas" panose="020B0609020204030204" pitchFamily="49" charset="0"/>
-            </a:endParaRPr>
           </a:p>
         </p:txBody>
       </p:sp>
@@ -5611,7 +7628,7 @@
 </p:sld>
 </file>
 
-<file path=ppt/slides/slide2.xml><?xml version="1.0" encoding="utf-8"?>
+<file path=ppt/slides/slide12.xml><?xml version="1.0" encoding="utf-8"?>
 <p:sld xmlns:a="http://schemas.openxmlformats.org/drawingml/2006/main" xmlns:r="http://schemas.openxmlformats.org/officeDocument/2006/relationships" xmlns:p="http://schemas.openxmlformats.org/presentationml/2006/main">
   <p:cSld>
     <p:spTree>
@@ -5633,7 +7650,7 @@
           <p:cNvPr id="2" name="Title 1">
             <a:extLst>
               <a:ext uri="{FF2B5EF4-FFF2-40B4-BE49-F238E27FC236}">
-                <a16:creationId xmlns:a16="http://schemas.microsoft.com/office/drawing/2014/main" id="{B716F989-DD0E-8678-5CD1-3E028AD2397C}"/>
+                <a16:creationId xmlns:a16="http://schemas.microsoft.com/office/drawing/2014/main" id="{66D958A0-8E5A-F8AD-44A3-435CE0BAF065}"/>
               </a:ext>
             </a:extLst>
           </p:cNvPr>
@@ -5650,14 +7667,10 @@
           <a:lstStyle/>
           <a:p>
             <a:r>
-              <a:rPr lang="en-GB" dirty="0">
-                <a:latin typeface="Consolas" panose="020B0609020204030204" pitchFamily="49" charset="0"/>
-              </a:rPr>
-              <a:t>Outline</a:t>
-            </a:r>
-            <a:endParaRPr lang="en-AT" dirty="0">
-              <a:latin typeface="Consolas" panose="020B0609020204030204" pitchFamily="49" charset="0"/>
-            </a:endParaRPr>
+              <a:rPr lang="en-GB" dirty="0"/>
+              <a:t>Challenges</a:t>
+            </a:r>
+            <a:endParaRPr lang="en-AT" dirty="0"/>
           </a:p>
         </p:txBody>
       </p:sp>
@@ -5666,7 +7679,7 @@
           <p:cNvPr id="3" name="Content Placeholder 2">
             <a:extLst>
               <a:ext uri="{FF2B5EF4-FFF2-40B4-BE49-F238E27FC236}">
-                <a16:creationId xmlns:a16="http://schemas.microsoft.com/office/drawing/2014/main" id="{236E846E-E9C6-A01C-4F49-67DC0E5D93FC}"/>
+                <a16:creationId xmlns:a16="http://schemas.microsoft.com/office/drawing/2014/main" id="{84DEF03D-144D-239E-0DE9-224CE2315E68}"/>
               </a:ext>
             </a:extLst>
           </p:cNvPr>
@@ -5685,78 +7698,82 @@
           <a:lstStyle/>
           <a:p>
             <a:r>
-              <a:rPr lang="en-GB" dirty="0">
+              <a:rPr lang="en-GB" dirty="0"/>
+              <a:t>Output generation</a:t>
+            </a:r>
+          </a:p>
+          <a:p>
+            <a:pPr lvl="1"/>
+            <a:r>
+              <a:rPr lang="en-GB" sz="2000" dirty="0"/>
+              <a:t>Unstable output with default parameters</a:t>
+            </a:r>
+          </a:p>
+          <a:p>
+            <a:pPr lvl="2"/>
+            <a:r>
+              <a:rPr lang="en-GB" sz="1600" dirty="0"/>
+              <a:t>Increased context window</a:t>
+            </a:r>
+          </a:p>
+          <a:p>
+            <a:pPr lvl="2"/>
+            <a:r>
+              <a:rPr lang="en-GB" sz="1600" dirty="0"/>
+              <a:t>Decreased repeat penalty</a:t>
+            </a:r>
+          </a:p>
+          <a:p>
+            <a:pPr lvl="2"/>
+            <a:r>
+              <a:rPr lang="en-GB" sz="1600" dirty="0"/>
+              <a:t>Decreased top_p</a:t>
+            </a:r>
+            <a:endParaRPr lang="en-GB" dirty="0"/>
+          </a:p>
+          <a:p>
+            <a:pPr lvl="1"/>
+            <a:r>
+              <a:rPr lang="en-GB" sz="2000" dirty="0"/>
+              <a:t>1.5b – very unreliable</a:t>
+            </a:r>
+          </a:p>
+          <a:p>
+            <a:pPr lvl="1"/>
+            <a:r>
+              <a:rPr lang="en-GB" sz="2000" dirty="0">
                 <a:latin typeface="Consolas" panose="020B0609020204030204" pitchFamily="49" charset="0"/>
               </a:rPr>
-              <a:t>Software testing overview</a:t>
-            </a:r>
-          </a:p>
-          <a:p>
-            <a:r>
-              <a:rPr lang="en-GB" dirty="0">
-                <a:latin typeface="Consolas" panose="020B0609020204030204" pitchFamily="49" charset="0"/>
-              </a:rPr>
-              <a:t>Focus of this project</a:t>
-            </a:r>
-          </a:p>
-          <a:p>
-            <a:r>
-              <a:rPr lang="en-GB" dirty="0">
-                <a:latin typeface="Consolas" panose="020B0609020204030204" pitchFamily="49" charset="0"/>
-              </a:rPr>
-              <a:t>Experimental Setup</a:t>
+              <a:t>&gt;32b parameters - local resource limit</a:t>
+            </a:r>
+          </a:p>
+          <a:p>
+            <a:r>
+              <a:rPr lang="en-GB" dirty="0"/>
+              <a:t>Field Rules</a:t>
             </a:r>
           </a:p>
           <a:p>
             <a:pPr lvl="1"/>
             <a:r>
-              <a:rPr lang="en-GB" dirty="0">
-                <a:latin typeface="Consolas" panose="020B0609020204030204" pitchFamily="49" charset="0"/>
-              </a:rPr>
-              <a:t>Evaluation Procedure</a:t>
+              <a:rPr lang="en-GB" dirty="0"/>
+              <a:t>Present tense check uncertanties</a:t>
             </a:r>
           </a:p>
           <a:p>
             <a:pPr lvl="1"/>
-            <a:r>
-              <a:rPr lang="en-GB" dirty="0">
-                <a:latin typeface="Consolas" panose="020B0609020204030204" pitchFamily="49" charset="0"/>
-              </a:rPr>
-              <a:t>Dronology Dataset</a:t>
-            </a:r>
-          </a:p>
-          <a:p>
-            <a:r>
-              <a:rPr lang="en-GB" dirty="0">
-                <a:latin typeface="Consolas" panose="020B0609020204030204" pitchFamily="49" charset="0"/>
-              </a:rPr>
-              <a:t>Prompt engineering techniques</a:t>
-            </a:r>
-          </a:p>
-          <a:p>
-            <a:r>
-              <a:rPr lang="en-GB" dirty="0">
-                <a:latin typeface="Consolas" panose="020B0609020204030204" pitchFamily="49" charset="0"/>
-              </a:rPr>
-              <a:t>Results</a:t>
-            </a:r>
-          </a:p>
-          <a:p>
-            <a:endParaRPr lang="en-GB" dirty="0">
-              <a:latin typeface="Consolas" panose="020B0609020204030204" pitchFamily="49" charset="0"/>
-            </a:endParaRPr>
-          </a:p>
-          <a:p>
-            <a:endParaRPr lang="en-AT" dirty="0">
-              <a:latin typeface="Consolas" panose="020B0609020204030204" pitchFamily="49" charset="0"/>
-            </a:endParaRPr>
+            <a:endParaRPr lang="en-GB" dirty="0"/>
+          </a:p>
+          <a:p>
+            <a:pPr lvl="1"/>
+            <a:endParaRPr lang="en-AT" dirty="0"/>
           </a:p>
         </p:txBody>
       </p:sp>
     </p:spTree>
     <p:extLst>
       <p:ext uri="{BB962C8B-B14F-4D97-AF65-F5344CB8AC3E}">
-        <p14:creationId xmlns:p14="http://schemas.microsoft.com/office/powerpoint/2010/main" val="1450470351"/>
+        <p14:creationId xmlns:p14="http://schemas.microsoft.com/office/powerpoint/2010/main" val="2733759788"/>
       </p:ext>
     </p:extLst>
   </p:cSld>
@@ -5766,7 +7783,127 @@
 </p:sld>
 </file>
 
-<file path=ppt/slides/slide3.xml><?xml version="1.0" encoding="utf-8"?>
+<file path=ppt/slides/slide13.xml><?xml version="1.0" encoding="utf-8"?>
+<p:sld xmlns:a="http://schemas.openxmlformats.org/drawingml/2006/main" xmlns:r="http://schemas.openxmlformats.org/officeDocument/2006/relationships" xmlns:p="http://schemas.openxmlformats.org/presentationml/2006/main">
+  <p:cSld>
+    <p:spTree>
+      <p:nvGrpSpPr>
+        <p:cNvPr id="1" name=""/>
+        <p:cNvGrpSpPr/>
+        <p:nvPr/>
+      </p:nvGrpSpPr>
+      <p:grpSpPr>
+        <a:xfrm>
+          <a:off x="0" y="0"/>
+          <a:ext cx="0" cy="0"/>
+          <a:chOff x="0" y="0"/>
+          <a:chExt cx="0" cy="0"/>
+        </a:xfrm>
+      </p:grpSpPr>
+      <p:sp>
+        <p:nvSpPr>
+          <p:cNvPr id="2" name="Title 1">
+            <a:extLst>
+              <a:ext uri="{FF2B5EF4-FFF2-40B4-BE49-F238E27FC236}">
+                <a16:creationId xmlns:a16="http://schemas.microsoft.com/office/drawing/2014/main" id="{DD2EEDC9-2608-346D-53B0-3FAD20BBD102}"/>
+              </a:ext>
+            </a:extLst>
+          </p:cNvPr>
+          <p:cNvSpPr>
+            <a:spLocks noGrp="1"/>
+          </p:cNvSpPr>
+          <p:nvPr>
+            <p:ph type="title"/>
+          </p:nvPr>
+        </p:nvSpPr>
+        <p:spPr/>
+        <p:txBody>
+          <a:bodyPr/>
+          <a:lstStyle/>
+          <a:p>
+            <a:r>
+              <a:rPr lang="en-GB" dirty="0"/>
+              <a:t>Field check analysis</a:t>
+            </a:r>
+            <a:endParaRPr lang="en-AT" dirty="0"/>
+          </a:p>
+        </p:txBody>
+      </p:sp>
+      <p:sp>
+        <p:nvSpPr>
+          <p:cNvPr id="5" name="Content Placeholder 4">
+            <a:extLst>
+              <a:ext uri="{FF2B5EF4-FFF2-40B4-BE49-F238E27FC236}">
+                <a16:creationId xmlns:a16="http://schemas.microsoft.com/office/drawing/2014/main" id="{8E2C0F10-A04A-DA19-E6F5-521CEBF0B8FC}"/>
+              </a:ext>
+            </a:extLst>
+          </p:cNvPr>
+          <p:cNvSpPr>
+            <a:spLocks noGrp="1"/>
+          </p:cNvSpPr>
+          <p:nvPr>
+            <p:ph idx="1"/>
+          </p:nvPr>
+        </p:nvSpPr>
+        <p:spPr/>
+        <p:txBody>
+          <a:bodyPr>
+            <a:normAutofit/>
+          </a:bodyPr>
+          <a:lstStyle/>
+          <a:p>
+            <a:r>
+              <a:rPr lang="en-GB" dirty="0"/>
+              <a:t>Example output - persona prompt 14b</a:t>
+            </a:r>
+            <a:endParaRPr lang="en-AT" dirty="0"/>
+          </a:p>
+        </p:txBody>
+      </p:sp>
+      <p:pic>
+        <p:nvPicPr>
+          <p:cNvPr id="12" name="Picture 11">
+            <a:extLst>
+              <a:ext uri="{FF2B5EF4-FFF2-40B4-BE49-F238E27FC236}">
+                <a16:creationId xmlns:a16="http://schemas.microsoft.com/office/drawing/2014/main" id="{8C7A68D2-B6FD-63C1-FD6C-FF299B350C43}"/>
+              </a:ext>
+            </a:extLst>
+          </p:cNvPr>
+          <p:cNvPicPr>
+            <a:picLocks noChangeAspect="1"/>
+          </p:cNvPicPr>
+          <p:nvPr/>
+        </p:nvPicPr>
+        <p:blipFill>
+          <a:blip r:embed="rId3"/>
+          <a:stretch>
+            <a:fillRect/>
+          </a:stretch>
+        </p:blipFill>
+        <p:spPr>
+          <a:xfrm>
+            <a:off x="838200" y="2663825"/>
+            <a:ext cx="10925175" cy="3648075"/>
+          </a:xfrm>
+          <a:prstGeom prst="rect">
+            <a:avLst/>
+          </a:prstGeom>
+        </p:spPr>
+      </p:pic>
+    </p:spTree>
+    <p:extLst>
+      <p:ext uri="{BB962C8B-B14F-4D97-AF65-F5344CB8AC3E}">
+        <p14:creationId xmlns:p14="http://schemas.microsoft.com/office/powerpoint/2010/main" val="2585793577"/>
+      </p:ext>
+    </p:extLst>
+  </p:cSld>
+  <p:clrMapOvr>
+    <a:masterClrMapping/>
+  </p:clrMapOvr>
+</p:sld>
+</file>
+
+<file path=ppt/slides/slide2.xml><?xml version="1.0" encoding="utf-8"?>
 <p:sld xmlns:a="http://schemas.openxmlformats.org/drawingml/2006/main" xmlns:r="http://schemas.openxmlformats.org/officeDocument/2006/relationships" xmlns:p="http://schemas.openxmlformats.org/presentationml/2006/main">
   <p:cSld>
     <p:spTree>
@@ -6278,7 +8415,7 @@
 </p:sld>
 </file>
 
-<file path=ppt/slides/slide4.xml><?xml version="1.0" encoding="utf-8"?>
+<file path=ppt/slides/slide3.xml><?xml version="1.0" encoding="utf-8"?>
 <p:sld xmlns:a="http://schemas.openxmlformats.org/drawingml/2006/main" xmlns:r="http://schemas.openxmlformats.org/officeDocument/2006/relationships" xmlns:p="http://schemas.openxmlformats.org/presentationml/2006/main">
   <p:cSld>
     <p:spTree>
@@ -6832,7 +8969,7 @@
 </p:sld>
 </file>
 
-<file path=ppt/slides/slide5.xml><?xml version="1.0" encoding="utf-8"?>
+<file path=ppt/slides/slide4.xml><?xml version="1.0" encoding="utf-8"?>
 <p:sld xmlns:a="http://schemas.openxmlformats.org/drawingml/2006/main" xmlns:r="http://schemas.openxmlformats.org/officeDocument/2006/relationships" xmlns:p="http://schemas.openxmlformats.org/presentationml/2006/main">
   <p:cSld>
     <p:spTree>
@@ -6930,15 +9067,6 @@
               <a:rPr lang="en-GB" sz="2000" dirty="0">
                 <a:latin typeface="Consolas" panose="020B0609020204030204" pitchFamily="49" charset="0"/>
               </a:rPr>
-              <a:t>Validation structure for initial quality estimate of model output + prompt</a:t>
-            </a:r>
-          </a:p>
-          <a:p>
-            <a:pPr lvl="1"/>
-            <a:r>
-              <a:rPr lang="en-GB" sz="2000" dirty="0">
-                <a:latin typeface="Consolas" panose="020B0609020204030204" pitchFamily="49" charset="0"/>
-              </a:rPr>
               <a:t>Basic Test Description structure shall be enforced</a:t>
             </a:r>
           </a:p>
@@ -6971,6 +9099,45 @@
             <a:endParaRPr lang="en-GB" sz="1800" dirty="0">
               <a:latin typeface="Consolas" panose="020B0609020204030204" pitchFamily="49" charset="0"/>
             </a:endParaRPr>
+          </a:p>
+          <a:p>
+            <a:pPr lvl="1"/>
+            <a:r>
+              <a:rPr lang="en-GB" sz="2000" dirty="0">
+                <a:latin typeface="Consolas" panose="020B0609020204030204" pitchFamily="49" charset="0"/>
+              </a:rPr>
+              <a:t>Validation framework </a:t>
+            </a:r>
+            <a:r>
+              <a:rPr lang="en-GB" sz="2000">
+                <a:latin typeface="Consolas" panose="020B0609020204030204" pitchFamily="49" charset="0"/>
+              </a:rPr>
+              <a:t>for quality </a:t>
+            </a:r>
+            <a:r>
+              <a:rPr lang="en-GB" sz="2000" dirty="0">
+                <a:latin typeface="Consolas" panose="020B0609020204030204" pitchFamily="49" charset="0"/>
+              </a:rPr>
+              <a:t>estimate of Model + prompt variations</a:t>
+            </a:r>
+          </a:p>
+          <a:p>
+            <a:pPr lvl="2"/>
+            <a:r>
+              <a:rPr lang="en-GB" sz="1800" dirty="0">
+                <a:latin typeface="Consolas" panose="020B0609020204030204" pitchFamily="49" charset="0"/>
+              </a:rPr>
+              <a:t>Simple structural checks</a:t>
+            </a:r>
+          </a:p>
+          <a:p>
+            <a:pPr lvl="2"/>
+            <a:r>
+              <a:rPr lang="en-GB" sz="1800" dirty="0">
+                <a:latin typeface="Consolas" panose="020B0609020204030204" pitchFamily="49" charset="0"/>
+              </a:rPr>
+              <a:t>SpaCy for field characterization</a:t>
+            </a:r>
           </a:p>
           <a:p>
             <a:pPr lvl="1"/>
@@ -7011,7 +9178,7 @@
         </p:blipFill>
         <p:spPr>
           <a:xfrm>
-            <a:off x="3476786" y="3429000"/>
+            <a:off x="3400586" y="2790825"/>
             <a:ext cx="2415107" cy="1434615"/>
           </a:xfrm>
           <a:prstGeom prst="rect">
@@ -7032,7 +9199,7 @@
 </p:sld>
 </file>
 
-<file path=ppt/slides/slide6.xml><?xml version="1.0" encoding="utf-8"?>
+<file path=ppt/slides/slide5.xml><?xml version="1.0" encoding="utf-8"?>
 <p:sld xmlns:a="http://schemas.openxmlformats.org/drawingml/2006/main" xmlns:r="http://schemas.openxmlformats.org/officeDocument/2006/relationships" xmlns:p="http://schemas.openxmlformats.org/presentationml/2006/main">
   <p:cSld>
     <p:spTree>
@@ -7104,7 +9271,7 @@
           <a:lstStyle/>
           <a:p>
             <a:r>
-              <a:rPr lang="en-GB" dirty="0">
+              <a:rPr lang="en-GB" sz="2400" dirty="0">
                 <a:latin typeface="Consolas" panose="020B0609020204030204" pitchFamily="49" charset="0"/>
               </a:rPr>
               <a:t>Evaluation on Dronology</a:t>
@@ -7283,7 +9450,7 @@
 </p:sld>
 </file>
 
-<file path=ppt/slides/slide7.xml><?xml version="1.0" encoding="utf-8"?>
+<file path=ppt/slides/slide6.xml><?xml version="1.0" encoding="utf-8"?>
 <p:sld xmlns:a="http://schemas.openxmlformats.org/drawingml/2006/main" xmlns:r="http://schemas.openxmlformats.org/officeDocument/2006/relationships" xmlns:p="http://schemas.openxmlformats.org/presentationml/2006/main">
   <p:cSld>
     <p:spTree>
@@ -7328,7 +9495,7 @@
           <a:p>
             <a:r>
               <a:rPr lang="en-GB" dirty="0"/>
-              <a:t>99 Requirements</a:t>
+              <a:t>97 Requirements</a:t>
             </a:r>
             <a:endParaRPr lang="en-AT" dirty="0"/>
           </a:p>
@@ -7349,7 +9516,7 @@
           <p:nvPr/>
         </p:nvPicPr>
         <p:blipFill>
-          <a:blip r:embed="rId2"/>
+          <a:blip r:embed="rId3"/>
           <a:stretch>
             <a:fillRect/>
           </a:stretch>
@@ -7379,7 +9546,7 @@
           <p:nvPr/>
         </p:nvPicPr>
         <p:blipFill>
-          <a:blip r:embed="rId3"/>
+          <a:blip r:embed="rId4"/>
           <a:stretch>
             <a:fillRect/>
           </a:stretch>
@@ -7409,7 +9576,7 @@
           <p:nvPr/>
         </p:nvPicPr>
         <p:blipFill>
-          <a:blip r:embed="rId4"/>
+          <a:blip r:embed="rId5"/>
           <a:stretch>
             <a:fillRect/>
           </a:stretch>
@@ -7437,6 +9604,662 @@
 </p:sld>
 </file>
 
+<file path=ppt/slides/slide7.xml><?xml version="1.0" encoding="utf-8"?>
+<p:sld xmlns:a="http://schemas.openxmlformats.org/drawingml/2006/main" xmlns:r="http://schemas.openxmlformats.org/officeDocument/2006/relationships" xmlns:p="http://schemas.openxmlformats.org/presentationml/2006/main">
+  <p:cSld>
+    <p:spTree>
+      <p:nvGrpSpPr>
+        <p:cNvPr id="1" name=""/>
+        <p:cNvGrpSpPr/>
+        <p:nvPr/>
+      </p:nvGrpSpPr>
+      <p:grpSpPr>
+        <a:xfrm>
+          <a:off x="0" y="0"/>
+          <a:ext cx="0" cy="0"/>
+          <a:chOff x="0" y="0"/>
+          <a:chExt cx="0" cy="0"/>
+        </a:xfrm>
+      </p:grpSpPr>
+      <p:sp>
+        <p:nvSpPr>
+          <p:cNvPr id="2" name="Title 1">
+            <a:extLst>
+              <a:ext uri="{FF2B5EF4-FFF2-40B4-BE49-F238E27FC236}">
+                <a16:creationId xmlns:a16="http://schemas.microsoft.com/office/drawing/2014/main" id="{1F7CB6FD-3E1F-2106-AB44-D5433E1BD859}"/>
+              </a:ext>
+            </a:extLst>
+          </p:cNvPr>
+          <p:cNvSpPr>
+            <a:spLocks noGrp="1"/>
+          </p:cNvSpPr>
+          <p:nvPr>
+            <p:ph type="title"/>
+          </p:nvPr>
+        </p:nvSpPr>
+        <p:spPr/>
+        <p:txBody>
+          <a:bodyPr>
+            <a:normAutofit/>
+          </a:bodyPr>
+          <a:lstStyle/>
+          <a:p>
+            <a:r>
+              <a:rPr lang="en-GB" dirty="0"/>
+              <a:t>Prompt Engineering techniques</a:t>
+            </a:r>
+            <a:endParaRPr lang="en-AT" dirty="0"/>
+          </a:p>
+        </p:txBody>
+      </p:sp>
+      <p:sp>
+        <p:nvSpPr>
+          <p:cNvPr id="3" name="Content Placeholder 2">
+            <a:extLst>
+              <a:ext uri="{FF2B5EF4-FFF2-40B4-BE49-F238E27FC236}">
+                <a16:creationId xmlns:a16="http://schemas.microsoft.com/office/drawing/2014/main" id="{55D9D6CC-D1AB-939C-3B8A-914D47CCE9A0}"/>
+              </a:ext>
+            </a:extLst>
+          </p:cNvPr>
+          <p:cNvSpPr>
+            <a:spLocks noGrp="1"/>
+          </p:cNvSpPr>
+          <p:nvPr>
+            <p:ph idx="1"/>
+          </p:nvPr>
+        </p:nvSpPr>
+        <p:spPr>
+          <a:xfrm>
+            <a:off x="838200" y="1803867"/>
+            <a:ext cx="10053918" cy="3513138"/>
+          </a:xfrm>
+        </p:spPr>
+        <p:txBody>
+          <a:bodyPr>
+            <a:normAutofit/>
+          </a:bodyPr>
+          <a:lstStyle/>
+          <a:p>
+            <a:pPr marL="0" indent="0">
+              <a:buNone/>
+            </a:pPr>
+            <a:endParaRPr lang="en-GB" sz="2400" dirty="0">
+              <a:latin typeface="Consolas" panose="020B0609020204030204" pitchFamily="49" charset="0"/>
+            </a:endParaRPr>
+          </a:p>
+          <a:p>
+            <a:pPr marL="457200" indent="-457200">
+              <a:buFont typeface="+mj-lt"/>
+              <a:buAutoNum type="arabicPeriod"/>
+            </a:pPr>
+            <a:r>
+              <a:rPr lang="en-GB" sz="2400" dirty="0">
+                <a:latin typeface="Consolas" panose="020B0609020204030204" pitchFamily="49" charset="0"/>
+              </a:rPr>
+              <a:t>Zero shot learning </a:t>
+            </a:r>
+            <a:br>
+              <a:rPr lang="en-GB" sz="2400" dirty="0">
+                <a:latin typeface="Consolas" panose="020B0609020204030204" pitchFamily="49" charset="0"/>
+              </a:rPr>
+            </a:br>
+            <a:r>
+              <a:rPr lang="en-GB" sz="2000" dirty="0">
+                <a:latin typeface="Consolas" panose="020B0609020204030204" pitchFamily="49" charset="0"/>
+              </a:rPr>
+              <a:t>+ Directional stimulus 	</a:t>
+            </a:r>
+          </a:p>
+          <a:p>
+            <a:pPr marL="457200" indent="-457200">
+              <a:buFont typeface="+mj-lt"/>
+              <a:buAutoNum type="arabicPeriod"/>
+            </a:pPr>
+            <a:r>
+              <a:rPr lang="en-GB" sz="2400" dirty="0">
+                <a:latin typeface="Consolas" panose="020B0609020204030204" pitchFamily="49" charset="0"/>
+              </a:rPr>
+              <a:t>Personas – software tester</a:t>
+            </a:r>
+          </a:p>
+          <a:p>
+            <a:pPr marL="457200" indent="-457200">
+              <a:buFont typeface="+mj-lt"/>
+              <a:buAutoNum type="arabicPeriod"/>
+            </a:pPr>
+            <a:r>
+              <a:rPr lang="en-GB" sz="2400" dirty="0">
+                <a:latin typeface="Consolas" panose="020B0609020204030204" pitchFamily="49" charset="0"/>
+              </a:rPr>
+              <a:t>Tree of thought – multiple experts</a:t>
+            </a:r>
+          </a:p>
+          <a:p>
+            <a:pPr marL="457200" indent="-457200">
+              <a:buFont typeface="+mj-lt"/>
+              <a:buAutoNum type="arabicPeriod"/>
+            </a:pPr>
+            <a:r>
+              <a:rPr lang="en-GB" sz="2400" dirty="0">
+                <a:latin typeface="Consolas" panose="020B0609020204030204" pitchFamily="49" charset="0"/>
+              </a:rPr>
+              <a:t>Providing Context</a:t>
+            </a:r>
+          </a:p>
+          <a:p>
+            <a:pPr lvl="1"/>
+            <a:r>
+              <a:rPr lang="en-GB" sz="2000" dirty="0">
+                <a:latin typeface="Consolas" panose="020B0609020204030204" pitchFamily="49" charset="0"/>
+              </a:rPr>
+              <a:t>Dronology introduction</a:t>
+            </a:r>
+          </a:p>
+          <a:p>
+            <a:pPr lvl="1"/>
+            <a:r>
+              <a:rPr lang="en-GB" sz="2000" dirty="0">
+                <a:latin typeface="Consolas" panose="020B0609020204030204" pitchFamily="49" charset="0"/>
+              </a:rPr>
+              <a:t>Preparsing of requirements + TOT</a:t>
+            </a:r>
+          </a:p>
+        </p:txBody>
+      </p:sp>
+      <p:sp>
+        <p:nvSpPr>
+          <p:cNvPr id="6" name="Content Placeholder 2">
+            <a:extLst>
+              <a:ext uri="{FF2B5EF4-FFF2-40B4-BE49-F238E27FC236}">
+                <a16:creationId xmlns:a16="http://schemas.microsoft.com/office/drawing/2014/main" id="{0501C84C-A285-C805-1E9C-EBD00CE4D1CC}"/>
+              </a:ext>
+            </a:extLst>
+          </p:cNvPr>
+          <p:cNvSpPr txBox="1">
+            <a:spLocks/>
+          </p:cNvSpPr>
+          <p:nvPr/>
+        </p:nvSpPr>
+        <p:spPr>
+          <a:xfrm>
+            <a:off x="5979459" y="1825625"/>
+            <a:ext cx="4728882" cy="4351338"/>
+          </a:xfrm>
+          <a:prstGeom prst="rect">
+            <a:avLst/>
+          </a:prstGeom>
+        </p:spPr>
+        <p:txBody>
+          <a:bodyPr vert="horz" lIns="91440" tIns="45720" rIns="91440" bIns="45720" rtlCol="0">
+            <a:normAutofit/>
+          </a:bodyPr>
+          <a:lstStyle>
+            <a:lvl1pPr marL="228600" indent="-228600" algn="l" defTabSz="914400" rtl="0" eaLnBrk="1" latinLnBrk="0" hangingPunct="1">
+              <a:lnSpc>
+                <a:spcPct val="90000"/>
+              </a:lnSpc>
+              <a:spcBef>
+                <a:spcPts val="1000"/>
+              </a:spcBef>
+              <a:buFont typeface="Arial" panose="020B0604020202020204" pitchFamily="34" charset="0"/>
+              <a:buChar char="•"/>
+              <a:defRPr sz="2800" kern="1200">
+                <a:solidFill>
+                  <a:schemeClr val="tx1"/>
+                </a:solidFill>
+                <a:latin typeface="+mn-lt"/>
+                <a:ea typeface="+mn-ea"/>
+                <a:cs typeface="+mn-cs"/>
+              </a:defRPr>
+            </a:lvl1pPr>
+            <a:lvl2pPr marL="685800" indent="-228600" algn="l" defTabSz="914400" rtl="0" eaLnBrk="1" latinLnBrk="0" hangingPunct="1">
+              <a:lnSpc>
+                <a:spcPct val="90000"/>
+              </a:lnSpc>
+              <a:spcBef>
+                <a:spcPts val="500"/>
+              </a:spcBef>
+              <a:buFont typeface="Arial" panose="020B0604020202020204" pitchFamily="34" charset="0"/>
+              <a:buChar char="•"/>
+              <a:defRPr sz="2400" kern="1200">
+                <a:solidFill>
+                  <a:schemeClr val="tx1"/>
+                </a:solidFill>
+                <a:latin typeface="+mn-lt"/>
+                <a:ea typeface="+mn-ea"/>
+                <a:cs typeface="+mn-cs"/>
+              </a:defRPr>
+            </a:lvl2pPr>
+            <a:lvl3pPr marL="1143000" indent="-228600" algn="l" defTabSz="914400" rtl="0" eaLnBrk="1" latinLnBrk="0" hangingPunct="1">
+              <a:lnSpc>
+                <a:spcPct val="90000"/>
+              </a:lnSpc>
+              <a:spcBef>
+                <a:spcPts val="500"/>
+              </a:spcBef>
+              <a:buFont typeface="Arial" panose="020B0604020202020204" pitchFamily="34" charset="0"/>
+              <a:buChar char="•"/>
+              <a:defRPr sz="2000" kern="1200">
+                <a:solidFill>
+                  <a:schemeClr val="tx1"/>
+                </a:solidFill>
+                <a:latin typeface="+mn-lt"/>
+                <a:ea typeface="+mn-ea"/>
+                <a:cs typeface="+mn-cs"/>
+              </a:defRPr>
+            </a:lvl3pPr>
+            <a:lvl4pPr marL="1600200" indent="-228600" algn="l" defTabSz="914400" rtl="0" eaLnBrk="1" latinLnBrk="0" hangingPunct="1">
+              <a:lnSpc>
+                <a:spcPct val="90000"/>
+              </a:lnSpc>
+              <a:spcBef>
+                <a:spcPts val="500"/>
+              </a:spcBef>
+              <a:buFont typeface="Arial" panose="020B0604020202020204" pitchFamily="34" charset="0"/>
+              <a:buChar char="•"/>
+              <a:defRPr sz="1800" kern="1200">
+                <a:solidFill>
+                  <a:schemeClr val="tx1"/>
+                </a:solidFill>
+                <a:latin typeface="+mn-lt"/>
+                <a:ea typeface="+mn-ea"/>
+                <a:cs typeface="+mn-cs"/>
+              </a:defRPr>
+            </a:lvl4pPr>
+            <a:lvl5pPr marL="2057400" indent="-228600" algn="l" defTabSz="914400" rtl="0" eaLnBrk="1" latinLnBrk="0" hangingPunct="1">
+              <a:lnSpc>
+                <a:spcPct val="90000"/>
+              </a:lnSpc>
+              <a:spcBef>
+                <a:spcPts val="500"/>
+              </a:spcBef>
+              <a:buFont typeface="Arial" panose="020B0604020202020204" pitchFamily="34" charset="0"/>
+              <a:buChar char="•"/>
+              <a:defRPr sz="1800" kern="1200">
+                <a:solidFill>
+                  <a:schemeClr val="tx1"/>
+                </a:solidFill>
+                <a:latin typeface="+mn-lt"/>
+                <a:ea typeface="+mn-ea"/>
+                <a:cs typeface="+mn-cs"/>
+              </a:defRPr>
+            </a:lvl5pPr>
+            <a:lvl6pPr marL="2514600" indent="-228600" algn="l" defTabSz="914400" rtl="0" eaLnBrk="1" latinLnBrk="0" hangingPunct="1">
+              <a:lnSpc>
+                <a:spcPct val="90000"/>
+              </a:lnSpc>
+              <a:spcBef>
+                <a:spcPts val="500"/>
+              </a:spcBef>
+              <a:buFont typeface="Arial" panose="020B0604020202020204" pitchFamily="34" charset="0"/>
+              <a:buChar char="•"/>
+              <a:defRPr sz="1800" kern="1200">
+                <a:solidFill>
+                  <a:schemeClr val="tx1"/>
+                </a:solidFill>
+                <a:latin typeface="+mn-lt"/>
+                <a:ea typeface="+mn-ea"/>
+                <a:cs typeface="+mn-cs"/>
+              </a:defRPr>
+            </a:lvl6pPr>
+            <a:lvl7pPr marL="2971800" indent="-228600" algn="l" defTabSz="914400" rtl="0" eaLnBrk="1" latinLnBrk="0" hangingPunct="1">
+              <a:lnSpc>
+                <a:spcPct val="90000"/>
+              </a:lnSpc>
+              <a:spcBef>
+                <a:spcPts val="500"/>
+              </a:spcBef>
+              <a:buFont typeface="Arial" panose="020B0604020202020204" pitchFamily="34" charset="0"/>
+              <a:buChar char="•"/>
+              <a:defRPr sz="1800" kern="1200">
+                <a:solidFill>
+                  <a:schemeClr val="tx1"/>
+                </a:solidFill>
+                <a:latin typeface="+mn-lt"/>
+                <a:ea typeface="+mn-ea"/>
+                <a:cs typeface="+mn-cs"/>
+              </a:defRPr>
+            </a:lvl7pPr>
+            <a:lvl8pPr marL="3429000" indent="-228600" algn="l" defTabSz="914400" rtl="0" eaLnBrk="1" latinLnBrk="0" hangingPunct="1">
+              <a:lnSpc>
+                <a:spcPct val="90000"/>
+              </a:lnSpc>
+              <a:spcBef>
+                <a:spcPts val="500"/>
+              </a:spcBef>
+              <a:buFont typeface="Arial" panose="020B0604020202020204" pitchFamily="34" charset="0"/>
+              <a:buChar char="•"/>
+              <a:defRPr sz="1800" kern="1200">
+                <a:solidFill>
+                  <a:schemeClr val="tx1"/>
+                </a:solidFill>
+                <a:latin typeface="+mn-lt"/>
+                <a:ea typeface="+mn-ea"/>
+                <a:cs typeface="+mn-cs"/>
+              </a:defRPr>
+            </a:lvl8pPr>
+            <a:lvl9pPr marL="3886200" indent="-228600" algn="l" defTabSz="914400" rtl="0" eaLnBrk="1" latinLnBrk="0" hangingPunct="1">
+              <a:lnSpc>
+                <a:spcPct val="90000"/>
+              </a:lnSpc>
+              <a:spcBef>
+                <a:spcPts val="500"/>
+              </a:spcBef>
+              <a:buFont typeface="Arial" panose="020B0604020202020204" pitchFamily="34" charset="0"/>
+              <a:buChar char="•"/>
+              <a:defRPr sz="1800" kern="1200">
+                <a:solidFill>
+                  <a:schemeClr val="tx1"/>
+                </a:solidFill>
+                <a:latin typeface="+mn-lt"/>
+                <a:ea typeface="+mn-ea"/>
+                <a:cs typeface="+mn-cs"/>
+              </a:defRPr>
+            </a:lvl9pPr>
+          </a:lstStyle>
+          <a:p>
+            <a:endParaRPr lang="en-AT" sz="2000" dirty="0">
+              <a:latin typeface="Consolas" panose="020B0609020204030204" pitchFamily="49" charset="0"/>
+            </a:endParaRPr>
+          </a:p>
+        </p:txBody>
+      </p:sp>
+      <p:sp>
+        <p:nvSpPr>
+          <p:cNvPr id="8" name="Content Placeholder 2">
+            <a:extLst>
+              <a:ext uri="{FF2B5EF4-FFF2-40B4-BE49-F238E27FC236}">
+                <a16:creationId xmlns:a16="http://schemas.microsoft.com/office/drawing/2014/main" id="{5DF99C2E-C6EE-7D90-DA67-84830D34BB28}"/>
+              </a:ext>
+            </a:extLst>
+          </p:cNvPr>
+          <p:cNvSpPr txBox="1">
+            <a:spLocks/>
+          </p:cNvSpPr>
+          <p:nvPr/>
+        </p:nvSpPr>
+        <p:spPr>
+          <a:xfrm>
+            <a:off x="6096000" y="1825625"/>
+            <a:ext cx="4728882" cy="4351338"/>
+          </a:xfrm>
+          <a:prstGeom prst="rect">
+            <a:avLst/>
+          </a:prstGeom>
+        </p:spPr>
+        <p:txBody>
+          <a:bodyPr vert="horz" lIns="91440" tIns="45720" rIns="91440" bIns="45720" rtlCol="0">
+            <a:normAutofit/>
+          </a:bodyPr>
+          <a:lstStyle>
+            <a:lvl1pPr marL="228600" indent="-228600" algn="l" defTabSz="914400" rtl="0" eaLnBrk="1" latinLnBrk="0" hangingPunct="1">
+              <a:lnSpc>
+                <a:spcPct val="90000"/>
+              </a:lnSpc>
+              <a:spcBef>
+                <a:spcPts val="1000"/>
+              </a:spcBef>
+              <a:buFont typeface="Arial" panose="020B0604020202020204" pitchFamily="34" charset="0"/>
+              <a:buChar char="•"/>
+              <a:defRPr sz="2800" kern="1200">
+                <a:solidFill>
+                  <a:schemeClr val="tx1"/>
+                </a:solidFill>
+                <a:latin typeface="+mn-lt"/>
+                <a:ea typeface="+mn-ea"/>
+                <a:cs typeface="+mn-cs"/>
+              </a:defRPr>
+            </a:lvl1pPr>
+            <a:lvl2pPr marL="685800" indent="-228600" algn="l" defTabSz="914400" rtl="0" eaLnBrk="1" latinLnBrk="0" hangingPunct="1">
+              <a:lnSpc>
+                <a:spcPct val="90000"/>
+              </a:lnSpc>
+              <a:spcBef>
+                <a:spcPts val="500"/>
+              </a:spcBef>
+              <a:buFont typeface="Arial" panose="020B0604020202020204" pitchFamily="34" charset="0"/>
+              <a:buChar char="•"/>
+              <a:defRPr sz="2400" kern="1200">
+                <a:solidFill>
+                  <a:schemeClr val="tx1"/>
+                </a:solidFill>
+                <a:latin typeface="+mn-lt"/>
+                <a:ea typeface="+mn-ea"/>
+                <a:cs typeface="+mn-cs"/>
+              </a:defRPr>
+            </a:lvl2pPr>
+            <a:lvl3pPr marL="1143000" indent="-228600" algn="l" defTabSz="914400" rtl="0" eaLnBrk="1" latinLnBrk="0" hangingPunct="1">
+              <a:lnSpc>
+                <a:spcPct val="90000"/>
+              </a:lnSpc>
+              <a:spcBef>
+                <a:spcPts val="500"/>
+              </a:spcBef>
+              <a:buFont typeface="Arial" panose="020B0604020202020204" pitchFamily="34" charset="0"/>
+              <a:buChar char="•"/>
+              <a:defRPr sz="2000" kern="1200">
+                <a:solidFill>
+                  <a:schemeClr val="tx1"/>
+                </a:solidFill>
+                <a:latin typeface="+mn-lt"/>
+                <a:ea typeface="+mn-ea"/>
+                <a:cs typeface="+mn-cs"/>
+              </a:defRPr>
+            </a:lvl3pPr>
+            <a:lvl4pPr marL="1600200" indent="-228600" algn="l" defTabSz="914400" rtl="0" eaLnBrk="1" latinLnBrk="0" hangingPunct="1">
+              <a:lnSpc>
+                <a:spcPct val="90000"/>
+              </a:lnSpc>
+              <a:spcBef>
+                <a:spcPts val="500"/>
+              </a:spcBef>
+              <a:buFont typeface="Arial" panose="020B0604020202020204" pitchFamily="34" charset="0"/>
+              <a:buChar char="•"/>
+              <a:defRPr sz="1800" kern="1200">
+                <a:solidFill>
+                  <a:schemeClr val="tx1"/>
+                </a:solidFill>
+                <a:latin typeface="+mn-lt"/>
+                <a:ea typeface="+mn-ea"/>
+                <a:cs typeface="+mn-cs"/>
+              </a:defRPr>
+            </a:lvl4pPr>
+            <a:lvl5pPr marL="2057400" indent="-228600" algn="l" defTabSz="914400" rtl="0" eaLnBrk="1" latinLnBrk="0" hangingPunct="1">
+              <a:lnSpc>
+                <a:spcPct val="90000"/>
+              </a:lnSpc>
+              <a:spcBef>
+                <a:spcPts val="500"/>
+              </a:spcBef>
+              <a:buFont typeface="Arial" panose="020B0604020202020204" pitchFamily="34" charset="0"/>
+              <a:buChar char="•"/>
+              <a:defRPr sz="1800" kern="1200">
+                <a:solidFill>
+                  <a:schemeClr val="tx1"/>
+                </a:solidFill>
+                <a:latin typeface="+mn-lt"/>
+                <a:ea typeface="+mn-ea"/>
+                <a:cs typeface="+mn-cs"/>
+              </a:defRPr>
+            </a:lvl5pPr>
+            <a:lvl6pPr marL="2514600" indent="-228600" algn="l" defTabSz="914400" rtl="0" eaLnBrk="1" latinLnBrk="0" hangingPunct="1">
+              <a:lnSpc>
+                <a:spcPct val="90000"/>
+              </a:lnSpc>
+              <a:spcBef>
+                <a:spcPts val="500"/>
+              </a:spcBef>
+              <a:buFont typeface="Arial" panose="020B0604020202020204" pitchFamily="34" charset="0"/>
+              <a:buChar char="•"/>
+              <a:defRPr sz="1800" kern="1200">
+                <a:solidFill>
+                  <a:schemeClr val="tx1"/>
+                </a:solidFill>
+                <a:latin typeface="+mn-lt"/>
+                <a:ea typeface="+mn-ea"/>
+                <a:cs typeface="+mn-cs"/>
+              </a:defRPr>
+            </a:lvl6pPr>
+            <a:lvl7pPr marL="2971800" indent="-228600" algn="l" defTabSz="914400" rtl="0" eaLnBrk="1" latinLnBrk="0" hangingPunct="1">
+              <a:lnSpc>
+                <a:spcPct val="90000"/>
+              </a:lnSpc>
+              <a:spcBef>
+                <a:spcPts val="500"/>
+              </a:spcBef>
+              <a:buFont typeface="Arial" panose="020B0604020202020204" pitchFamily="34" charset="0"/>
+              <a:buChar char="•"/>
+              <a:defRPr sz="1800" kern="1200">
+                <a:solidFill>
+                  <a:schemeClr val="tx1"/>
+                </a:solidFill>
+                <a:latin typeface="+mn-lt"/>
+                <a:ea typeface="+mn-ea"/>
+                <a:cs typeface="+mn-cs"/>
+              </a:defRPr>
+            </a:lvl7pPr>
+            <a:lvl8pPr marL="3429000" indent="-228600" algn="l" defTabSz="914400" rtl="0" eaLnBrk="1" latinLnBrk="0" hangingPunct="1">
+              <a:lnSpc>
+                <a:spcPct val="90000"/>
+              </a:lnSpc>
+              <a:spcBef>
+                <a:spcPts val="500"/>
+              </a:spcBef>
+              <a:buFont typeface="Arial" panose="020B0604020202020204" pitchFamily="34" charset="0"/>
+              <a:buChar char="•"/>
+              <a:defRPr sz="1800" kern="1200">
+                <a:solidFill>
+                  <a:schemeClr val="tx1"/>
+                </a:solidFill>
+                <a:latin typeface="+mn-lt"/>
+                <a:ea typeface="+mn-ea"/>
+                <a:cs typeface="+mn-cs"/>
+              </a:defRPr>
+            </a:lvl8pPr>
+            <a:lvl9pPr marL="3886200" indent="-228600" algn="l" defTabSz="914400" rtl="0" eaLnBrk="1" latinLnBrk="0" hangingPunct="1">
+              <a:lnSpc>
+                <a:spcPct val="90000"/>
+              </a:lnSpc>
+              <a:spcBef>
+                <a:spcPts val="500"/>
+              </a:spcBef>
+              <a:buFont typeface="Arial" panose="020B0604020202020204" pitchFamily="34" charset="0"/>
+              <a:buChar char="•"/>
+              <a:defRPr sz="1800" kern="1200">
+                <a:solidFill>
+                  <a:schemeClr val="tx1"/>
+                </a:solidFill>
+                <a:latin typeface="+mn-lt"/>
+                <a:ea typeface="+mn-ea"/>
+                <a:cs typeface="+mn-cs"/>
+              </a:defRPr>
+            </a:lvl9pPr>
+          </a:lstStyle>
+          <a:p>
+            <a:endParaRPr lang="en-GB" sz="2000" dirty="0">
+              <a:latin typeface="Consolas" panose="020B0609020204030204" pitchFamily="49" charset="0"/>
+            </a:endParaRPr>
+          </a:p>
+          <a:p>
+            <a:endParaRPr lang="en-GB" sz="2000" dirty="0">
+              <a:latin typeface="Consolas" panose="020B0609020204030204" pitchFamily="49" charset="0"/>
+            </a:endParaRPr>
+          </a:p>
+        </p:txBody>
+      </p:sp>
+      <p:sp>
+        <p:nvSpPr>
+          <p:cNvPr id="9" name="Right Brace 8">
+            <a:extLst>
+              <a:ext uri="{FF2B5EF4-FFF2-40B4-BE49-F238E27FC236}">
+                <a16:creationId xmlns:a16="http://schemas.microsoft.com/office/drawing/2014/main" id="{9A61D3C4-EE0C-5FB4-28D7-90C003E4C103}"/>
+              </a:ext>
+            </a:extLst>
+          </p:cNvPr>
+          <p:cNvSpPr/>
+          <p:nvPr/>
+        </p:nvSpPr>
+        <p:spPr>
+          <a:xfrm>
+            <a:off x="4513730" y="2356784"/>
+            <a:ext cx="277906" cy="569259"/>
+          </a:xfrm>
+          <a:prstGeom prst="rightBrace">
+            <a:avLst/>
+          </a:prstGeom>
+        </p:spPr>
+        <p:style>
+          <a:lnRef idx="2">
+            <a:schemeClr val="dk1"/>
+          </a:lnRef>
+          <a:fillRef idx="0">
+            <a:schemeClr val="dk1"/>
+          </a:fillRef>
+          <a:effectRef idx="1">
+            <a:schemeClr val="dk1"/>
+          </a:effectRef>
+          <a:fontRef idx="minor">
+            <a:schemeClr val="tx1"/>
+          </a:fontRef>
+        </p:style>
+        <p:txBody>
+          <a:bodyPr rtlCol="0" anchor="ctr"/>
+          <a:lstStyle/>
+          <a:p>
+            <a:pPr algn="ctr"/>
+            <a:endParaRPr lang="en-AT" dirty="0"/>
+          </a:p>
+        </p:txBody>
+      </p:sp>
+      <p:sp>
+        <p:nvSpPr>
+          <p:cNvPr id="10" name="TextBox 9">
+            <a:extLst>
+              <a:ext uri="{FF2B5EF4-FFF2-40B4-BE49-F238E27FC236}">
+                <a16:creationId xmlns:a16="http://schemas.microsoft.com/office/drawing/2014/main" id="{8F3466CA-45AF-D62D-70D7-E987CEC521ED}"/>
+              </a:ext>
+            </a:extLst>
+          </p:cNvPr>
+          <p:cNvSpPr txBox="1"/>
+          <p:nvPr/>
+        </p:nvSpPr>
+        <p:spPr>
+          <a:xfrm>
+            <a:off x="4908177" y="2456747"/>
+            <a:ext cx="1479176" cy="369332"/>
+          </a:xfrm>
+          <a:prstGeom prst="rect">
+            <a:avLst/>
+          </a:prstGeom>
+          <a:noFill/>
+        </p:spPr>
+        <p:txBody>
+          <a:bodyPr wrap="square" rtlCol="0">
+            <a:spAutoFit/>
+          </a:bodyPr>
+          <a:lstStyle/>
+          <a:p>
+            <a:r>
+              <a:rPr lang="en-GB" dirty="0"/>
+              <a:t>Baseline</a:t>
+            </a:r>
+            <a:endParaRPr lang="en-AT" dirty="0"/>
+          </a:p>
+        </p:txBody>
+      </p:sp>
+    </p:spTree>
+    <p:extLst>
+      <p:ext uri="{BB962C8B-B14F-4D97-AF65-F5344CB8AC3E}">
+        <p14:creationId xmlns:p14="http://schemas.microsoft.com/office/powerpoint/2010/main" val="651094963"/>
+      </p:ext>
+    </p:extLst>
+  </p:cSld>
+  <p:clrMapOvr>
+    <a:masterClrMapping/>
+  </p:clrMapOvr>
+</p:sld>
+</file>
+
 <file path=ppt/slides/slide8.xml><?xml version="1.0" encoding="utf-8"?>
 <p:sld xmlns:a="http://schemas.openxmlformats.org/drawingml/2006/main" xmlns:r="http://schemas.openxmlformats.org/officeDocument/2006/relationships" xmlns:p="http://schemas.openxmlformats.org/presentationml/2006/main">
   <p:cSld>
@@ -7459,7 +10282,7 @@
           <p:cNvPr id="2" name="Title 1">
             <a:extLst>
               <a:ext uri="{FF2B5EF4-FFF2-40B4-BE49-F238E27FC236}">
-                <a16:creationId xmlns:a16="http://schemas.microsoft.com/office/drawing/2014/main" id="{1F7CB6FD-3E1F-2106-AB44-D5433E1BD859}"/>
+                <a16:creationId xmlns:a16="http://schemas.microsoft.com/office/drawing/2014/main" id="{45D95FC3-D62C-CFE7-A486-9F5D562F1CDC}"/>
               </a:ext>
             </a:extLst>
           </p:cNvPr>
@@ -7476,94 +10299,185 @@
           <a:lstStyle/>
           <a:p>
             <a:r>
-              <a:rPr lang="en-GB" dirty="0">
+              <a:rPr lang="en-GB" dirty="0"/>
+              <a:t>Models - </a:t>
+            </a:r>
+            <a:r>
+              <a:rPr lang="en-GB" sz="4400" dirty="0">
                 <a:latin typeface="Consolas" panose="020B0609020204030204" pitchFamily="49" charset="0"/>
               </a:rPr>
-              <a:t>Prompt Engineering techniques </a:t>
-            </a:r>
-            <a:endParaRPr lang="en-AT" dirty="0">
+              <a:t>Deepseek-r1</a:t>
+            </a:r>
+            <a:endParaRPr lang="en-AT" dirty="0"/>
+          </a:p>
+        </p:txBody>
+      </p:sp>
+      <p:sp>
+        <p:nvSpPr>
+          <p:cNvPr id="3" name="Content Placeholder 2">
+            <a:extLst>
+              <a:ext uri="{FF2B5EF4-FFF2-40B4-BE49-F238E27FC236}">
+                <a16:creationId xmlns:a16="http://schemas.microsoft.com/office/drawing/2014/main" id="{480F3908-10FD-6222-8A24-FFB972FCF589}"/>
+              </a:ext>
+            </a:extLst>
+          </p:cNvPr>
+          <p:cNvSpPr>
+            <a:spLocks noGrp="1"/>
+          </p:cNvSpPr>
+          <p:nvPr>
+            <p:ph idx="1"/>
+          </p:nvPr>
+        </p:nvSpPr>
+        <p:spPr/>
+        <p:txBody>
+          <a:bodyPr>
+            <a:normAutofit/>
+          </a:bodyPr>
+          <a:lstStyle/>
+          <a:p>
+            <a:r>
+              <a:rPr lang="en-GB" sz="2200" dirty="0">
+                <a:latin typeface="Consolas" panose="020B0609020204030204" pitchFamily="49" charset="0"/>
+              </a:rPr>
+              <a:t>Distilled</a:t>
+            </a:r>
+          </a:p>
+          <a:p>
+            <a:pPr lvl="1"/>
+            <a:r>
+              <a:rPr lang="en-GB" sz="1800" dirty="0">
+                <a:latin typeface="Consolas" panose="020B0609020204030204" pitchFamily="49" charset="0"/>
+              </a:rPr>
+              <a:t>1.5b</a:t>
+            </a:r>
+          </a:p>
+          <a:p>
+            <a:pPr lvl="1"/>
+            <a:r>
+              <a:rPr lang="en-GB" sz="1800" dirty="0">
+                <a:latin typeface="Consolas" panose="020B0609020204030204" pitchFamily="49" charset="0"/>
+              </a:rPr>
+              <a:t>7b</a:t>
+            </a:r>
+          </a:p>
+          <a:p>
+            <a:pPr lvl="1"/>
+            <a:r>
+              <a:rPr lang="en-GB" sz="1800" dirty="0">
+                <a:latin typeface="Consolas" panose="020B0609020204030204" pitchFamily="49" charset="0"/>
+              </a:rPr>
+              <a:t>8b</a:t>
+            </a:r>
+          </a:p>
+          <a:p>
+            <a:pPr lvl="1"/>
+            <a:r>
+              <a:rPr lang="en-GB" sz="1800" dirty="0">
+                <a:latin typeface="Consolas" panose="020B0609020204030204" pitchFamily="49" charset="0"/>
+              </a:rPr>
+              <a:t>14b</a:t>
+            </a:r>
+          </a:p>
+          <a:p>
+            <a:pPr lvl="1"/>
+            <a:r>
+              <a:rPr lang="en-GB" sz="1800" dirty="0">
+                <a:latin typeface="Consolas" panose="020B0609020204030204" pitchFamily="49" charset="0"/>
+              </a:rPr>
+              <a:t>32b</a:t>
+            </a:r>
+          </a:p>
+          <a:p>
+            <a:pPr lvl="1"/>
+            <a:r>
+              <a:rPr lang="en-GB" sz="1800" dirty="0">
+                <a:latin typeface="Consolas" panose="020B0609020204030204" pitchFamily="49" charset="0"/>
+              </a:rPr>
+              <a:t>…</a:t>
+            </a:r>
+            <a:endParaRPr lang="en-GB" sz="2400" dirty="0">
               <a:latin typeface="Consolas" panose="020B0609020204030204" pitchFamily="49" charset="0"/>
             </a:endParaRPr>
           </a:p>
-        </p:txBody>
-      </p:sp>
-      <p:sp>
-        <p:nvSpPr>
-          <p:cNvPr id="3" name="Content Placeholder 2">
-            <a:extLst>
-              <a:ext uri="{FF2B5EF4-FFF2-40B4-BE49-F238E27FC236}">
-                <a16:creationId xmlns:a16="http://schemas.microsoft.com/office/drawing/2014/main" id="{55D9D6CC-D1AB-939C-3B8A-914D47CCE9A0}"/>
-              </a:ext>
-            </a:extLst>
-          </p:cNvPr>
-          <p:cNvSpPr>
-            <a:spLocks noGrp="1"/>
-          </p:cNvSpPr>
-          <p:nvPr>
-            <p:ph idx="1"/>
-          </p:nvPr>
-        </p:nvSpPr>
-        <p:spPr/>
-        <p:txBody>
-          <a:bodyPr/>
-          <a:lstStyle/>
-          <a:p>
-            <a:r>
-              <a:rPr lang="en-GB" dirty="0">
+          <a:p>
+            <a:r>
+              <a:rPr lang="en-GB" sz="2000" dirty="0">
                 <a:latin typeface="Consolas" panose="020B0609020204030204" pitchFamily="49" charset="0"/>
               </a:rPr>
-              <a:t>Zero shot learning – base line</a:t>
-            </a:r>
-          </a:p>
-          <a:p>
-            <a:r>
-              <a:rPr lang="en-GB" dirty="0">
+              <a:t>Ollama 0.6.2</a:t>
+            </a:r>
+          </a:p>
+          <a:p>
+            <a:pPr lvl="1"/>
+            <a:r>
+              <a:rPr lang="en-GB" sz="1600" dirty="0">
                 <a:latin typeface="Consolas" panose="020B0609020204030204" pitchFamily="49" charset="0"/>
               </a:rPr>
-              <a:t>Chain of thought prompting</a:t>
-            </a:r>
-          </a:p>
-          <a:p>
-            <a:r>
-              <a:rPr lang="en-GB" dirty="0">
+              <a:t>local</a:t>
+            </a:r>
+          </a:p>
+          <a:p>
+            <a:pPr lvl="1"/>
+            <a:r>
+              <a:rPr lang="en-GB" sz="1600" dirty="0">
                 <a:latin typeface="Consolas" panose="020B0609020204030204" pitchFamily="49" charset="0"/>
               </a:rPr>
-              <a:t>Personas</a:t>
-            </a:r>
-          </a:p>
-          <a:p>
-            <a:r>
-              <a:rPr lang="en-GB" dirty="0">
+              <a:t>independent</a:t>
+            </a:r>
+            <a:endParaRPr lang="en-GB" sz="2000" dirty="0">
+              <a:latin typeface="Consolas" panose="020B0609020204030204" pitchFamily="49" charset="0"/>
+            </a:endParaRPr>
+          </a:p>
+          <a:p>
+            <a:r>
+              <a:rPr lang="en-GB" sz="2000" dirty="0">
                 <a:latin typeface="Consolas" panose="020B0609020204030204" pitchFamily="49" charset="0"/>
               </a:rPr>
-              <a:t>Providing context</a:t>
-            </a:r>
-          </a:p>
-          <a:p>
-            <a:r>
-              <a:rPr lang="en-GB" dirty="0">
-                <a:latin typeface="Consolas" panose="020B0609020204030204" pitchFamily="49" charset="0"/>
-              </a:rPr>
-              <a:t>Tree of thought</a:t>
-            </a:r>
-          </a:p>
-          <a:p>
-            <a:r>
-              <a:rPr lang="en-GB" dirty="0">
-                <a:latin typeface="Consolas" panose="020B0609020204030204" pitchFamily="49" charset="0"/>
-              </a:rPr>
-              <a:t>Chain of density</a:t>
-            </a:r>
-            <a:endParaRPr lang="en-AT" dirty="0">
-              <a:latin typeface="Consolas" panose="020B0609020204030204" pitchFamily="49" charset="0"/>
-            </a:endParaRPr>
-          </a:p>
-        </p:txBody>
-      </p:sp>
+              <a:t>Fixed Parameters</a:t>
+            </a:r>
+          </a:p>
+        </p:txBody>
+      </p:sp>
+      <p:pic>
+        <p:nvPicPr>
+          <p:cNvPr id="6" name="Picture 5" descr="A graph of different colored bars&#10;&#10;AI-generated content may be incorrect.">
+            <a:extLst>
+              <a:ext uri="{FF2B5EF4-FFF2-40B4-BE49-F238E27FC236}">
+                <a16:creationId xmlns:a16="http://schemas.microsoft.com/office/drawing/2014/main" id="{9FFA9432-CB55-8855-73A0-86152DFE819C}"/>
+              </a:ext>
+            </a:extLst>
+          </p:cNvPr>
+          <p:cNvPicPr>
+            <a:picLocks noChangeAspect="1"/>
+          </p:cNvPicPr>
+          <p:nvPr/>
+        </p:nvPicPr>
+        <p:blipFill>
+          <a:blip r:embed="rId3">
+            <a:extLst>
+              <a:ext uri="{28A0092B-C50C-407E-A947-70E740481C1C}">
+                <a14:useLocalDpi xmlns:a14="http://schemas.microsoft.com/office/drawing/2010/main" val="0"/>
+              </a:ext>
+            </a:extLst>
+          </a:blip>
+          <a:stretch>
+            <a:fillRect/>
+          </a:stretch>
+        </p:blipFill>
+        <p:spPr>
+          <a:xfrm>
+            <a:off x="4332754" y="1480634"/>
+            <a:ext cx="7773574" cy="4696329"/>
+          </a:xfrm>
+          <a:prstGeom prst="rect">
+            <a:avLst/>
+          </a:prstGeom>
+        </p:spPr>
+      </p:pic>
     </p:spTree>
     <p:extLst>
       <p:ext uri="{BB962C8B-B14F-4D97-AF65-F5344CB8AC3E}">
-        <p14:creationId xmlns:p14="http://schemas.microsoft.com/office/powerpoint/2010/main" val="651094963"/>
+        <p14:creationId xmlns:p14="http://schemas.microsoft.com/office/powerpoint/2010/main" val="2990344676"/>
       </p:ext>
     </p:extLst>
   </p:cSld>
@@ -7623,61 +10537,78 @@
           </a:p>
         </p:txBody>
       </p:sp>
-      <p:sp>
-        <p:nvSpPr>
-          <p:cNvPr id="3" name="Content Placeholder 2">
-            <a:extLst>
-              <a:ext uri="{FF2B5EF4-FFF2-40B4-BE49-F238E27FC236}">
-                <a16:creationId xmlns:a16="http://schemas.microsoft.com/office/drawing/2014/main" id="{D35BD819-E768-0DFD-90C5-0AB0A93E1026}"/>
-              </a:ext>
-            </a:extLst>
-          </p:cNvPr>
-          <p:cNvSpPr>
-            <a:spLocks noGrp="1"/>
-          </p:cNvSpPr>
-          <p:nvPr>
-            <p:ph idx="1"/>
-          </p:nvPr>
-        </p:nvSpPr>
-        <p:spPr/>
-        <p:txBody>
-          <a:bodyPr/>
-          <a:lstStyle/>
-          <a:p>
-            <a:r>
-              <a:rPr lang="en-GB" dirty="0">
-                <a:latin typeface="Consolas" panose="020B0609020204030204" pitchFamily="49" charset="0"/>
-              </a:rPr>
-              <a:t>Prompts examples …</a:t>
-            </a:r>
-          </a:p>
-          <a:p>
-            <a:r>
-              <a:rPr lang="en-GB" dirty="0">
-                <a:latin typeface="Consolas" panose="020B0609020204030204" pitchFamily="49" charset="0"/>
-              </a:rPr>
-              <a:t>Models …</a:t>
-            </a:r>
-          </a:p>
-          <a:p>
-            <a:r>
-              <a:rPr lang="en-GB" dirty="0">
-                <a:latin typeface="Consolas" panose="020B0609020204030204" pitchFamily="49" charset="0"/>
-              </a:rPr>
-              <a:t>Quality of output visualization</a:t>
-            </a:r>
-          </a:p>
-          <a:p>
-            <a:pPr lvl="1"/>
-            <a:r>
-              <a:rPr lang="en-GB" dirty="0">
-                <a:latin typeface="Consolas" panose="020B0609020204030204" pitchFamily="49" charset="0"/>
-              </a:rPr>
-              <a:t>Performance of different prompts …</a:t>
-            </a:r>
-          </a:p>
-        </p:txBody>
-      </p:sp>
+      <p:pic>
+        <p:nvPicPr>
+          <p:cNvPr id="21" name="Picture 20" descr="A graph with blue and white bars&#10;&#10;AI-generated content may be incorrect.">
+            <a:extLst>
+              <a:ext uri="{FF2B5EF4-FFF2-40B4-BE49-F238E27FC236}">
+                <a16:creationId xmlns:a16="http://schemas.microsoft.com/office/drawing/2014/main" id="{7538A437-384A-1D85-278D-C45A8712FC8A}"/>
+              </a:ext>
+            </a:extLst>
+          </p:cNvPr>
+          <p:cNvPicPr>
+            <a:picLocks noChangeAspect="1"/>
+          </p:cNvPicPr>
+          <p:nvPr/>
+        </p:nvPicPr>
+        <p:blipFill>
+          <a:blip r:embed="rId3">
+            <a:extLst>
+              <a:ext uri="{28A0092B-C50C-407E-A947-70E740481C1C}">
+                <a14:useLocalDpi xmlns:a14="http://schemas.microsoft.com/office/drawing/2010/main" val="0"/>
+              </a:ext>
+            </a:extLst>
+          </a:blip>
+          <a:stretch>
+            <a:fillRect/>
+          </a:stretch>
+        </p:blipFill>
+        <p:spPr>
+          <a:xfrm>
+            <a:off x="0" y="1259542"/>
+            <a:ext cx="12192000" cy="3406158"/>
+          </a:xfrm>
+          <a:prstGeom prst="rect">
+            <a:avLst/>
+          </a:prstGeom>
+        </p:spPr>
+      </p:pic>
+      <p:pic>
+        <p:nvPicPr>
+          <p:cNvPr id="24" name="Picture 23" descr="A graph with blue and white stripes&#10;&#10;AI-generated content may be incorrect.">
+            <a:extLst>
+              <a:ext uri="{FF2B5EF4-FFF2-40B4-BE49-F238E27FC236}">
+                <a16:creationId xmlns:a16="http://schemas.microsoft.com/office/drawing/2014/main" id="{D76A1B89-AE64-9F40-6E92-7384CBD7034F}"/>
+              </a:ext>
+            </a:extLst>
+          </p:cNvPr>
+          <p:cNvPicPr>
+            <a:picLocks noChangeAspect="1"/>
+          </p:cNvPicPr>
+          <p:nvPr/>
+        </p:nvPicPr>
+        <p:blipFill>
+          <a:blip r:embed="rId4">
+            <a:extLst>
+              <a:ext uri="{28A0092B-C50C-407E-A947-70E740481C1C}">
+                <a14:useLocalDpi xmlns:a14="http://schemas.microsoft.com/office/drawing/2010/main" val="0"/>
+              </a:ext>
+            </a:extLst>
+          </a:blip>
+          <a:stretch>
+            <a:fillRect/>
+          </a:stretch>
+        </p:blipFill>
+        <p:spPr>
+          <a:xfrm>
+            <a:off x="0" y="3540899"/>
+            <a:ext cx="12192000" cy="3406158"/>
+          </a:xfrm>
+          <a:prstGeom prst="rect">
+            <a:avLst/>
+          </a:prstGeom>
+        </p:spPr>
+      </p:pic>
     </p:spTree>
     <p:extLst>
       <p:ext uri="{BB962C8B-B14F-4D97-AF65-F5344CB8AC3E}">

--- a/presentation/RBST_prompt-eng [Autosaved].pptx
+++ b/presentation/RBST_prompt-eng [Autosaved].pptx
@@ -210,7 +210,7 @@
           <a:p>
             <a:fld id="{0C1CC868-F01F-4D3C-B0FF-9A3075033AE5}" type="datetimeFigureOut">
               <a:rPr lang="en-AT" smtClean="0"/>
-              <a:t>02/06/2025</a:t>
+              <a:t>03/06/2025</a:t>
             </a:fld>
             <a:endParaRPr lang="en-AT"/>
           </a:p>
@@ -698,571 +698,6 @@
           <a:p>
             <a:endParaRPr lang="en-GB" dirty="0"/>
           </a:p>
-          <a:p>
-            <a:endParaRPr lang="en-GB" dirty="0"/>
-          </a:p>
-          <a:p>
-            <a:pPr marL="0" algn="l" rtl="0" eaLnBrk="1" latinLnBrk="0" hangingPunct="1">
-              <a:buNone/>
-            </a:pPr>
-            <a:endParaRPr lang="en-AT" dirty="0">
-              <a:effectLst/>
-            </a:endParaRPr>
-          </a:p>
-          <a:p>
-            <a:pPr marL="0" algn="l" rtl="0" eaLnBrk="1" latinLnBrk="0" hangingPunct="1">
-              <a:buNone/>
-            </a:pPr>
-            <a:r>
-              <a:rPr lang="en-GB" sz="1800" kern="1200" dirty="0">
-                <a:solidFill>
-                  <a:srgbClr val="000000"/>
-                </a:solidFill>
-                <a:effectLst/>
-                <a:latin typeface="Aptos" panose="020B0004020202020204" pitchFamily="34" charset="0"/>
-                <a:ea typeface="+mn-ea"/>
-                <a:cs typeface="+mn-cs"/>
-              </a:rPr>
-              <a:t>Zero </a:t>
-            </a:r>
-            <a:endParaRPr lang="en-AT" dirty="0">
-              <a:effectLst/>
-            </a:endParaRPr>
-          </a:p>
-          <a:p>
-            <a:pPr marL="0" algn="l" rtl="0" eaLnBrk="1" latinLnBrk="0" hangingPunct="1">
-              <a:buNone/>
-            </a:pPr>
-            <a:r>
-              <a:rPr lang="en-GB" sz="1800" kern="1200" dirty="0">
-                <a:solidFill>
-                  <a:srgbClr val="000000"/>
-                </a:solidFill>
-                <a:effectLst/>
-                <a:latin typeface="Aptos" panose="020B0004020202020204" pitchFamily="34" charset="0"/>
-                <a:ea typeface="+mn-ea"/>
-                <a:cs typeface="+mn-cs"/>
-              </a:rPr>
-              <a:t>1.5 – invalid json structure</a:t>
-            </a:r>
-            <a:endParaRPr lang="en-AT" dirty="0">
-              <a:effectLst/>
-            </a:endParaRPr>
-          </a:p>
-          <a:p>
-            <a:pPr marL="0" algn="l" rtl="0" eaLnBrk="1" latinLnBrk="0" hangingPunct="1">
-              <a:buNone/>
-            </a:pPr>
-            <a:r>
-              <a:rPr lang="en-GB" sz="1800" kern="1200" dirty="0">
-                <a:solidFill>
-                  <a:srgbClr val="000000"/>
-                </a:solidFill>
-                <a:effectLst/>
-                <a:latin typeface="Aptos" panose="020B0004020202020204" pitchFamily="34" charset="0"/>
-                <a:ea typeface="+mn-ea"/>
-                <a:cs typeface="+mn-cs"/>
-              </a:rPr>
-              <a:t>7 - Empty</a:t>
-            </a:r>
-            <a:endParaRPr lang="en-AT" dirty="0">
-              <a:effectLst/>
-            </a:endParaRPr>
-          </a:p>
-          <a:p>
-            <a:pPr marL="0" algn="l" rtl="0" eaLnBrk="1" latinLnBrk="0" hangingPunct="1">
-              <a:buNone/>
-            </a:pPr>
-            <a:r>
-              <a:rPr lang="en-GB" sz="1800" kern="1200" dirty="0">
-                <a:solidFill>
-                  <a:srgbClr val="000000"/>
-                </a:solidFill>
-                <a:effectLst/>
-                <a:latin typeface="Aptos" panose="020B0004020202020204" pitchFamily="34" charset="0"/>
-                <a:ea typeface="+mn-ea"/>
-                <a:cs typeface="+mn-cs"/>
-              </a:rPr>
-              <a:t>8 - Empty</a:t>
-            </a:r>
-            <a:endParaRPr lang="en-AT" dirty="0">
-              <a:effectLst/>
-            </a:endParaRPr>
-          </a:p>
-          <a:p>
-            <a:pPr marL="0" algn="l" rtl="0" eaLnBrk="1" latinLnBrk="0" hangingPunct="1">
-              <a:buNone/>
-            </a:pPr>
-            <a:r>
-              <a:rPr lang="en-GB" sz="1800" kern="1200" dirty="0">
-                <a:solidFill>
-                  <a:srgbClr val="000000"/>
-                </a:solidFill>
-                <a:effectLst/>
-                <a:latin typeface="Aptos" panose="020B0004020202020204" pitchFamily="34" charset="0"/>
-                <a:ea typeface="+mn-ea"/>
-                <a:cs typeface="+mn-cs"/>
-              </a:rPr>
-              <a:t>14 – Empty</a:t>
-            </a:r>
-            <a:endParaRPr lang="en-AT" dirty="0">
-              <a:effectLst/>
-            </a:endParaRPr>
-          </a:p>
-          <a:p>
-            <a:pPr marL="0" algn="l" rtl="0" eaLnBrk="1" latinLnBrk="0" hangingPunct="1">
-              <a:buNone/>
-            </a:pPr>
-            <a:r>
-              <a:rPr lang="en-GB" sz="1800" kern="1200" dirty="0">
-                <a:solidFill>
-                  <a:srgbClr val="000000"/>
-                </a:solidFill>
-                <a:effectLst/>
-                <a:latin typeface="Aptos" panose="020B0004020202020204" pitchFamily="34" charset="0"/>
-                <a:ea typeface="+mn-ea"/>
-                <a:cs typeface="+mn-cs"/>
-              </a:rPr>
-              <a:t>Persona</a:t>
-            </a:r>
-            <a:endParaRPr lang="en-AT" dirty="0">
-              <a:effectLst/>
-            </a:endParaRPr>
-          </a:p>
-          <a:p>
-            <a:pPr marL="0" algn="l" rtl="0" eaLnBrk="1" latinLnBrk="0" hangingPunct="1">
-              <a:buNone/>
-            </a:pPr>
-            <a:r>
-              <a:rPr lang="en-GB" sz="1800" kern="1200" dirty="0">
-                <a:solidFill>
-                  <a:srgbClr val="000000"/>
-                </a:solidFill>
-                <a:effectLst/>
-                <a:latin typeface="Aptos" panose="020B0004020202020204" pitchFamily="34" charset="0"/>
-                <a:ea typeface="+mn-ea"/>
-                <a:cs typeface="+mn-cs"/>
-              </a:rPr>
-              <a:t>7 - Empty</a:t>
-            </a:r>
-            <a:endParaRPr lang="en-AT" dirty="0">
-              <a:effectLst/>
-            </a:endParaRPr>
-          </a:p>
-          <a:p>
-            <a:pPr marL="0" algn="l" rtl="0" eaLnBrk="1" latinLnBrk="0" hangingPunct="1">
-              <a:buNone/>
-            </a:pPr>
-            <a:r>
-              <a:rPr lang="en-GB" sz="1800" kern="1200" dirty="0">
-                <a:solidFill>
-                  <a:srgbClr val="000000"/>
-                </a:solidFill>
-                <a:effectLst/>
-                <a:latin typeface="Aptos" panose="020B0004020202020204" pitchFamily="34" charset="0"/>
-                <a:ea typeface="+mn-ea"/>
-                <a:cs typeface="+mn-cs"/>
-              </a:rPr>
-              <a:t>8 – invalid check</a:t>
-            </a:r>
-            <a:endParaRPr lang="en-AT" dirty="0">
-              <a:effectLst/>
-            </a:endParaRPr>
-          </a:p>
-          <a:p>
-            <a:pPr marL="0" algn="l" rtl="0" eaLnBrk="1" latinLnBrk="0" hangingPunct="1">
-              <a:buNone/>
-            </a:pPr>
-            <a:r>
-              <a:rPr lang="en-GB" sz="1800" kern="1200" dirty="0">
-                <a:solidFill>
-                  <a:srgbClr val="000000"/>
-                </a:solidFill>
-                <a:effectLst/>
-                <a:latin typeface="Aptos" panose="020B0004020202020204" pitchFamily="34" charset="0"/>
-                <a:ea typeface="+mn-ea"/>
-                <a:cs typeface="+mn-cs"/>
-              </a:rPr>
-              <a:t>14 – valid + invalid -&gt; good</a:t>
-            </a:r>
-            <a:endParaRPr lang="en-AT" dirty="0">
-              <a:effectLst/>
-            </a:endParaRPr>
-          </a:p>
-          <a:p>
-            <a:pPr marL="0" algn="l" rtl="0" eaLnBrk="1" latinLnBrk="0" hangingPunct="1">
-              <a:buNone/>
-            </a:pPr>
-            <a:r>
-              <a:rPr lang="en-GB" sz="1800" kern="1200" dirty="0">
-                <a:solidFill>
-                  <a:srgbClr val="000000"/>
-                </a:solidFill>
-                <a:effectLst/>
-                <a:latin typeface="Aptos" panose="020B0004020202020204" pitchFamily="34" charset="0"/>
-                <a:ea typeface="+mn-ea"/>
-                <a:cs typeface="+mn-cs"/>
-              </a:rPr>
-              <a:t>TOT</a:t>
-            </a:r>
-            <a:endParaRPr lang="en-AT" dirty="0">
-              <a:effectLst/>
-            </a:endParaRPr>
-          </a:p>
-          <a:p>
-            <a:pPr marL="0" algn="l" rtl="0" eaLnBrk="1" latinLnBrk="0" hangingPunct="1">
-              <a:buNone/>
-            </a:pPr>
-            <a:r>
-              <a:rPr lang="en-GB" sz="1800" kern="1200" dirty="0">
-                <a:solidFill>
-                  <a:srgbClr val="000000"/>
-                </a:solidFill>
-                <a:effectLst/>
-                <a:latin typeface="Aptos" panose="020B0004020202020204" pitchFamily="34" charset="0"/>
-                <a:ea typeface="+mn-ea"/>
-                <a:cs typeface="+mn-cs"/>
-              </a:rPr>
-              <a:t>1.5 - Emtpy</a:t>
-            </a:r>
-            <a:endParaRPr lang="en-AT" dirty="0">
-              <a:effectLst/>
-            </a:endParaRPr>
-          </a:p>
-          <a:p>
-            <a:pPr marL="0" algn="l" rtl="0" eaLnBrk="1" latinLnBrk="0" hangingPunct="1">
-              <a:buNone/>
-            </a:pPr>
-            <a:r>
-              <a:rPr lang="en-GB" sz="1800" kern="1200" dirty="0">
-                <a:solidFill>
-                  <a:srgbClr val="000000"/>
-                </a:solidFill>
-                <a:effectLst/>
-                <a:latin typeface="Aptos" panose="020B0004020202020204" pitchFamily="34" charset="0"/>
-                <a:ea typeface="+mn-ea"/>
-                <a:cs typeface="+mn-cs"/>
-              </a:rPr>
-              <a:t>7 - Empty</a:t>
-            </a:r>
-            <a:endParaRPr lang="en-AT" dirty="0">
-              <a:effectLst/>
-            </a:endParaRPr>
-          </a:p>
-          <a:p>
-            <a:pPr marL="0" algn="l" rtl="0" eaLnBrk="1" latinLnBrk="0" hangingPunct="1">
-              <a:lnSpc>
-                <a:spcPts val="1425"/>
-              </a:lnSpc>
-              <a:buNone/>
-            </a:pPr>
-            <a:r>
-              <a:rPr lang="en-GB" sz="1800" kern="1200" dirty="0">
-                <a:solidFill>
-                  <a:srgbClr val="000000"/>
-                </a:solidFill>
-                <a:effectLst/>
-                <a:latin typeface="Aptos" panose="020B0004020202020204" pitchFamily="34" charset="0"/>
-                <a:ea typeface="+mn-ea"/>
-                <a:cs typeface="+mn-cs"/>
-              </a:rPr>
-              <a:t>8 - </a:t>
-            </a:r>
-            <a:r>
-              <a:rPr lang="en-GB" sz="1800" b="0" kern="1200" dirty="0">
-                <a:solidFill>
-                  <a:srgbClr val="F8F8F2"/>
-                </a:solidFill>
-                <a:effectLst/>
-                <a:latin typeface="Consolas" panose="020B0609020204030204" pitchFamily="49" charset="0"/>
-                <a:ea typeface="+mn-ea"/>
-                <a:cs typeface="+mn-cs"/>
-              </a:rPr>
-              <a:t>        </a:t>
-            </a:r>
-            <a:r>
-              <a:rPr lang="en-GB" sz="1800" b="0" i="1" kern="1200" dirty="0">
-                <a:solidFill>
-                  <a:srgbClr val="66D9EF"/>
-                </a:solidFill>
-                <a:effectLst/>
-                <a:latin typeface="Consolas" panose="020B0609020204030204" pitchFamily="49" charset="0"/>
-                <a:ea typeface="+mn-ea"/>
-                <a:cs typeface="+mn-cs"/>
-              </a:rPr>
-              <a:t>"preconditions"</a:t>
-            </a:r>
-            <a:r>
-              <a:rPr lang="en-GB" sz="1800" b="0" kern="1200" dirty="0">
-                <a:solidFill>
-                  <a:srgbClr val="F8F8F2"/>
-                </a:solidFill>
-                <a:effectLst/>
-                <a:latin typeface="Consolas" panose="020B0609020204030204" pitchFamily="49" charset="0"/>
-                <a:ea typeface="+mn-ea"/>
-                <a:cs typeface="+mn-cs"/>
-              </a:rPr>
-              <a:t>: [</a:t>
-            </a:r>
-            <a:endParaRPr lang="en-AT" dirty="0">
-              <a:effectLst/>
-            </a:endParaRPr>
-          </a:p>
-          <a:p>
-            <a:pPr marL="0" algn="l" rtl="0" eaLnBrk="1" latinLnBrk="0" hangingPunct="1">
-              <a:lnSpc>
-                <a:spcPts val="1425"/>
-              </a:lnSpc>
-              <a:buNone/>
-            </a:pPr>
-            <a:r>
-              <a:rPr lang="en-GB" sz="1800" b="0" kern="1200" dirty="0">
-                <a:solidFill>
-                  <a:srgbClr val="F8F8F2"/>
-                </a:solidFill>
-                <a:effectLst/>
-                <a:latin typeface="Consolas" panose="020B0609020204030204" pitchFamily="49" charset="0"/>
-                <a:ea typeface="+mn-ea"/>
-                <a:cs typeface="+mn-cs"/>
-              </a:rPr>
-              <a:t>            </a:t>
-            </a:r>
-            <a:r>
-              <a:rPr lang="en-GB" sz="1800" b="0" kern="1200" dirty="0">
-                <a:solidFill>
-                  <a:srgbClr val="CFCFC2"/>
-                </a:solidFill>
-                <a:effectLst/>
-                <a:latin typeface="Consolas" panose="020B0609020204030204" pitchFamily="49" charset="0"/>
-                <a:ea typeface="+mn-ea"/>
-                <a:cs typeface="+mn-cs"/>
-              </a:rPr>
-              <a:t>"The application must be running."</a:t>
-            </a:r>
-            <a:r>
-              <a:rPr lang="en-GB" sz="1800" b="0" kern="1200" dirty="0">
-                <a:solidFill>
-                  <a:srgbClr val="F8F8F2"/>
-                </a:solidFill>
-                <a:effectLst/>
-                <a:latin typeface="Consolas" panose="020B0609020204030204" pitchFamily="49" charset="0"/>
-                <a:ea typeface="+mn-ea"/>
-                <a:cs typeface="+mn-cs"/>
-              </a:rPr>
-              <a:t>,</a:t>
-            </a:r>
-            <a:endParaRPr lang="en-AT" dirty="0">
-              <a:effectLst/>
-            </a:endParaRPr>
-          </a:p>
-          <a:p>
-            <a:pPr marL="0" algn="l" rtl="0" eaLnBrk="1" latinLnBrk="0" hangingPunct="1">
-              <a:lnSpc>
-                <a:spcPts val="1425"/>
-              </a:lnSpc>
-              <a:buNone/>
-            </a:pPr>
-            <a:r>
-              <a:rPr lang="en-GB" sz="1800" b="0" kern="1200" dirty="0">
-                <a:solidFill>
-                  <a:srgbClr val="F8F8F2"/>
-                </a:solidFill>
-                <a:effectLst/>
-                <a:latin typeface="Consolas" panose="020B0609020204030204" pitchFamily="49" charset="0"/>
-                <a:ea typeface="+mn-ea"/>
-                <a:cs typeface="+mn-cs"/>
-              </a:rPr>
-              <a:t>            </a:t>
-            </a:r>
-            <a:r>
-              <a:rPr lang="en-GB" sz="1800" b="0" kern="1200" dirty="0">
-                <a:solidFill>
-                  <a:srgbClr val="CFCFC2"/>
-                </a:solidFill>
-                <a:effectLst/>
-                <a:latin typeface="Consolas" panose="020B0609020204030204" pitchFamily="49" charset="0"/>
-                <a:ea typeface="+mn-ea"/>
-                <a:cs typeface="+mn-cs"/>
-              </a:rPr>
-              <a:t>"At least one flight route exists."</a:t>
-            </a:r>
-            <a:endParaRPr lang="en-AT" dirty="0">
-              <a:effectLst/>
-            </a:endParaRPr>
-          </a:p>
-          <a:p>
-            <a:pPr marL="0" algn="l" rtl="0" eaLnBrk="1" latinLnBrk="0" hangingPunct="1">
-              <a:lnSpc>
-                <a:spcPts val="1425"/>
-              </a:lnSpc>
-              <a:buNone/>
-            </a:pPr>
-            <a:r>
-              <a:rPr lang="en-GB" sz="1800" b="0" kern="1200" dirty="0">
-                <a:solidFill>
-                  <a:srgbClr val="F8F8F2"/>
-                </a:solidFill>
-                <a:effectLst/>
-                <a:latin typeface="Consolas" panose="020B0609020204030204" pitchFamily="49" charset="0"/>
-                <a:ea typeface="+mn-ea"/>
-                <a:cs typeface="+mn-cs"/>
-              </a:rPr>
-              <a:t>        ],</a:t>
-            </a:r>
-            <a:endParaRPr lang="en-AT" dirty="0">
-              <a:effectLst/>
-            </a:endParaRPr>
-          </a:p>
-          <a:p>
-            <a:pPr marL="0" algn="l" rtl="0" eaLnBrk="1" latinLnBrk="0" hangingPunct="1">
-              <a:lnSpc>
-                <a:spcPts val="1425"/>
-              </a:lnSpc>
-              <a:buNone/>
-            </a:pPr>
-            <a:r>
-              <a:rPr lang="en-GB" sz="1800" b="0" kern="1200" dirty="0">
-                <a:solidFill>
-                  <a:srgbClr val="F8F8F2"/>
-                </a:solidFill>
-                <a:effectLst/>
-                <a:latin typeface="Consolas" panose="020B0609020204030204" pitchFamily="49" charset="0"/>
-                <a:ea typeface="+mn-ea"/>
-                <a:cs typeface="+mn-cs"/>
-              </a:rPr>
-              <a:t>        </a:t>
-            </a:r>
-            <a:r>
-              <a:rPr lang="en-GB" sz="1800" b="0" i="1" kern="1200" dirty="0">
-                <a:solidFill>
-                  <a:srgbClr val="66D9EF"/>
-                </a:solidFill>
-                <a:effectLst/>
-                <a:latin typeface="Consolas" panose="020B0609020204030204" pitchFamily="49" charset="0"/>
-                <a:ea typeface="+mn-ea"/>
-                <a:cs typeface="+mn-cs"/>
-              </a:rPr>
-              <a:t>"testSteps"</a:t>
-            </a:r>
-            <a:r>
-              <a:rPr lang="en-GB" sz="1800" b="0" kern="1200" dirty="0">
-                <a:solidFill>
-                  <a:srgbClr val="F8F8F2"/>
-                </a:solidFill>
-                <a:effectLst/>
-                <a:latin typeface="Consolas" panose="020B0609020204030204" pitchFamily="49" charset="0"/>
-                <a:ea typeface="+mn-ea"/>
-                <a:cs typeface="+mn-cs"/>
-              </a:rPr>
-              <a:t>: [</a:t>
-            </a:r>
-            <a:endParaRPr lang="en-AT" dirty="0">
-              <a:effectLst/>
-            </a:endParaRPr>
-          </a:p>
-          <a:p>
-            <a:pPr marL="0" algn="l" rtl="0" eaLnBrk="1" latinLnBrk="0" hangingPunct="1">
-              <a:lnSpc>
-                <a:spcPts val="1425"/>
-              </a:lnSpc>
-              <a:buNone/>
-            </a:pPr>
-            <a:r>
-              <a:rPr lang="en-GB" sz="1800" b="0" kern="1200" dirty="0">
-                <a:solidFill>
-                  <a:srgbClr val="F8F8F2"/>
-                </a:solidFill>
-                <a:effectLst/>
-                <a:latin typeface="Consolas" panose="020B0609020204030204" pitchFamily="49" charset="0"/>
-                <a:ea typeface="+mn-ea"/>
-                <a:cs typeface="+mn-cs"/>
-              </a:rPr>
-              <a:t>            </a:t>
-            </a:r>
-            <a:r>
-              <a:rPr lang="en-GB" sz="1800" b="0" kern="1200" dirty="0">
-                <a:solidFill>
-                  <a:srgbClr val="CFCFC2"/>
-                </a:solidFill>
-                <a:effectLst/>
-                <a:latin typeface="Consolas" panose="020B0609020204030204" pitchFamily="49" charset="0"/>
-                <a:ea typeface="+mn-ea"/>
-                <a:cs typeface="+mn-cs"/>
-              </a:rPr>
-              <a:t>"1. Access the FlightRouteManager application."</a:t>
-            </a:r>
-            <a:r>
-              <a:rPr lang="en-GB" sz="1800" b="0" kern="1200" dirty="0">
-                <a:solidFill>
-                  <a:srgbClr val="F8F8F2"/>
-                </a:solidFill>
-                <a:effectLst/>
-                <a:latin typeface="Consolas" panose="020B0609020204030204" pitchFamily="49" charset="0"/>
-                <a:ea typeface="+mn-ea"/>
-                <a:cs typeface="+mn-cs"/>
-              </a:rPr>
-              <a:t>,</a:t>
-            </a:r>
-            <a:endParaRPr lang="en-AT" dirty="0">
-              <a:effectLst/>
-            </a:endParaRPr>
-          </a:p>
-          <a:p>
-            <a:pPr marL="0" algn="l" rtl="0" eaLnBrk="1" latinLnBrk="0" hangingPunct="1">
-              <a:lnSpc>
-                <a:spcPts val="1425"/>
-              </a:lnSpc>
-              <a:buNone/>
-            </a:pPr>
-            <a:r>
-              <a:rPr lang="en-GB" sz="1800" b="0" kern="1200" dirty="0">
-                <a:solidFill>
-                  <a:srgbClr val="F8F8F2"/>
-                </a:solidFill>
-                <a:effectLst/>
-                <a:latin typeface="Consolas" panose="020B0609020204030204" pitchFamily="49" charset="0"/>
-                <a:ea typeface="+mn-ea"/>
-                <a:cs typeface="+mn-cs"/>
-              </a:rPr>
-              <a:t>            </a:t>
-            </a:r>
-            <a:r>
-              <a:rPr lang="en-GB" sz="1800" b="0" kern="1200" dirty="0">
-                <a:solidFill>
-                  <a:srgbClr val="CFCFC2"/>
-                </a:solidFill>
-                <a:effectLst/>
-                <a:latin typeface="Consolas" panose="020B0609020204030204" pitchFamily="49" charset="0"/>
-                <a:ea typeface="+mn-ea"/>
-                <a:cs typeface="+mn-cs"/>
-              </a:rPr>
-              <a:t>"2. Identify all existing flight routes."</a:t>
-            </a:r>
-            <a:endParaRPr lang="en-AT" dirty="0">
-              <a:effectLst/>
-            </a:endParaRPr>
-          </a:p>
-          <a:p>
-            <a:pPr marL="0" algn="l" rtl="0" eaLnBrk="1" latinLnBrk="0" hangingPunct="1"/>
-            <a:r>
-              <a:rPr lang="en-GB" sz="1800" kern="1200" dirty="0">
-                <a:solidFill>
-                  <a:srgbClr val="000000"/>
-                </a:solidFill>
-                <a:effectLst/>
-                <a:latin typeface="Aptos" panose="020B0004020202020204" pitchFamily="34" charset="0"/>
-                <a:ea typeface="+mn-ea"/>
-                <a:cs typeface="+mn-cs"/>
-              </a:rPr>
-              <a:t>14 – Empty</a:t>
-            </a:r>
-            <a:endParaRPr lang="en-AT" dirty="0">
-              <a:effectLst/>
-            </a:endParaRPr>
-          </a:p>
-          <a:p>
-            <a:endParaRPr lang="en-AT" dirty="0"/>
-          </a:p>
         </p:txBody>
       </p:sp>
       <p:sp>
@@ -1370,6 +805,24 @@
               <a:rPr lang="en-GB" b="0" dirty="0"/>
               <a:t>Only from a json template point of view. Valid entry here means the model was able to generate the expected json template.</a:t>
             </a:r>
+          </a:p>
+          <a:p>
+            <a:endParaRPr lang="en-GB" b="0" dirty="0"/>
+          </a:p>
+          <a:p>
+            <a:r>
+              <a:rPr lang="en-GB" b="0" dirty="0"/>
+              <a:t>Trend that Json entry validity increases with model size.</a:t>
+            </a:r>
+          </a:p>
+          <a:p>
+            <a:r>
+              <a:rPr lang="en-GB" b="0" dirty="0"/>
+              <a:t>But field quality from rules already good for 7/8 b models, although the actual coverage of the test description is likely to be still better with bigger model.</a:t>
+            </a:r>
+          </a:p>
+          <a:p>
+            <a:endParaRPr lang="en-GB" b="0" dirty="0"/>
           </a:p>
         </p:txBody>
       </p:sp>
@@ -1471,6 +924,10 @@
           <a:bodyPr/>
           <a:lstStyle/>
           <a:p>
+            <a:r>
+              <a:rPr lang="en-GB" b="0"/>
+              <a:t>To conclude …..</a:t>
+            </a:r>
             <a:endParaRPr lang="en-GB" b="0" dirty="0"/>
           </a:p>
         </p:txBody>
@@ -1739,16 +1196,17 @@
             <a:endParaRPr lang="en-GB" dirty="0"/>
           </a:p>
           <a:p>
-            <a:r>
-              <a:rPr lang="en-GB" dirty="0"/>
-              <a:t>With that being said there are in general four types of testing strategies.</a:t>
-            </a:r>
-          </a:p>
-          <a:p>
             <a:pPr marL="171450" indent="-171450">
               <a:buFontTx/>
               <a:buChar char="-"/>
             </a:pPr>
+            <a:endParaRPr lang="en-GB" dirty="0"/>
+          </a:p>
+          <a:p>
+            <a:pPr marL="171450" indent="-171450">
+              <a:buFontTx/>
+              <a:buChar char="-"/>
+            </a:pPr>
             <a:r>
               <a:rPr lang="en-GB" dirty="0"/>
               <a:t>Unit testing: smallest testable part (done by developer)</a:t>
@@ -1805,23 +1263,36 @@
             </a:r>
           </a:p>
           <a:p>
+            <a:pPr marL="628650" marR="0" lvl="1" indent="-171450" algn="l" defTabSz="914400" rtl="0" eaLnBrk="1" fontAlgn="auto" latinLnBrk="0" hangingPunct="1">
+              <a:lnSpc>
+                <a:spcPct val="100000"/>
+              </a:lnSpc>
+              <a:spcBef>
+                <a:spcPts val="0"/>
+              </a:spcBef>
+              <a:spcAft>
+                <a:spcPts val="0"/>
+              </a:spcAft>
+              <a:buClrTx/>
+              <a:buSzTx/>
+              <a:buFontTx/>
+              <a:buChar char="-"/>
+              <a:tabLst/>
+              <a:defRPr/>
+            </a:pPr>
+            <a:r>
+              <a:rPr lang="en-GB" dirty="0"/>
+              <a:t>ReSystem testing: testing done on complete integrated system</a:t>
+            </a:r>
+          </a:p>
+          <a:p>
             <a:pPr marL="628650" lvl="1" indent="-171450">
               <a:buFontTx/>
               <a:buChar char="-"/>
             </a:pPr>
             <a:r>
               <a:rPr lang="en-GB" dirty="0"/>
-              <a:t>Research??</a:t>
-            </a:r>
-          </a:p>
-          <a:p>
-            <a:pPr marL="171450" indent="-171450">
-              <a:buFontTx/>
-              <a:buChar char="-"/>
-            </a:pPr>
-            <a:r>
-              <a:rPr lang="en-GB" dirty="0"/>
-              <a:t>System testing: testing done on complete integrated system</a:t>
+              <a:t>search??</a:t>
             </a:r>
           </a:p>
           <a:p>
@@ -2759,12 +2230,6 @@
           <a:p>
             <a:r>
               <a:rPr lang="en-GB" dirty="0"/>
-              <a:t>This includes centralized collision avoidance, fleet management, internal simulator, and management of vehicle status.</a:t>
-            </a:r>
-          </a:p>
-          <a:p>
-            <a:r>
-              <a:rPr lang="en-GB" dirty="0"/>
               <a:t>Dronology services are used by various clients to construct user interfaces. </a:t>
             </a:r>
           </a:p>
@@ -2781,12 +2246,6 @@
             <a:r>
               <a:rPr lang="en-GB" dirty="0"/>
               <a:t>The ground station middleware provides a bridge between the Dronology core and a diverse set of ground stations.  </a:t>
-            </a:r>
-          </a:p>
-          <a:p>
-            <a:r>
-              <a:rPr lang="en-GB" dirty="0"/>
-              <a:t>The middleware allows registration of a new ground station.  </a:t>
             </a:r>
           </a:p>
           <a:p>
@@ -3756,7 +3215,7 @@
           <a:p>
             <a:fld id="{CD0BFEE2-3EAA-4386-9A3C-82D92E479C9F}" type="datetimeFigureOut">
               <a:rPr lang="en-AT" smtClean="0"/>
-              <a:t>02/06/2025</a:t>
+              <a:t>03/06/2025</a:t>
             </a:fld>
             <a:endParaRPr lang="en-AT"/>
           </a:p>
@@ -4054,7 +3513,7 @@
           <a:p>
             <a:fld id="{CD0BFEE2-3EAA-4386-9A3C-82D92E479C9F}" type="datetimeFigureOut">
               <a:rPr lang="en-AT" smtClean="0"/>
-              <a:t>02/06/2025</a:t>
+              <a:t>03/06/2025</a:t>
             </a:fld>
             <a:endParaRPr lang="en-AT"/>
           </a:p>
@@ -4246,7 +3705,7 @@
           <a:p>
             <a:fld id="{CD0BFEE2-3EAA-4386-9A3C-82D92E479C9F}" type="datetimeFigureOut">
               <a:rPr lang="en-AT" smtClean="0"/>
-              <a:t>02/06/2025</a:t>
+              <a:t>03/06/2025</a:t>
             </a:fld>
             <a:endParaRPr lang="en-AT"/>
           </a:p>
@@ -4507,7 +3966,7 @@
           <a:p>
             <a:fld id="{CD0BFEE2-3EAA-4386-9A3C-82D92E479C9F}" type="datetimeFigureOut">
               <a:rPr lang="en-AT" smtClean="0"/>
-              <a:t>02/06/2025</a:t>
+              <a:t>03/06/2025</a:t>
             </a:fld>
             <a:endParaRPr lang="en-AT"/>
           </a:p>
@@ -4931,7 +4390,7 @@
           <a:p>
             <a:fld id="{CD0BFEE2-3EAA-4386-9A3C-82D92E479C9F}" type="datetimeFigureOut">
               <a:rPr lang="en-AT" smtClean="0"/>
-              <a:t>02/06/2025</a:t>
+              <a:t>03/06/2025</a:t>
             </a:fld>
             <a:endParaRPr lang="en-AT"/>
           </a:p>
@@ -5468,7 +4927,7 @@
           <a:p>
             <a:fld id="{CD0BFEE2-3EAA-4386-9A3C-82D92E479C9F}" type="datetimeFigureOut">
               <a:rPr lang="en-AT" smtClean="0"/>
-              <a:t>02/06/2025</a:t>
+              <a:t>03/06/2025</a:t>
             </a:fld>
             <a:endParaRPr lang="en-AT"/>
           </a:p>
@@ -6332,7 +5791,7 @@
           <a:p>
             <a:fld id="{CD0BFEE2-3EAA-4386-9A3C-82D92E479C9F}" type="datetimeFigureOut">
               <a:rPr lang="en-AT" smtClean="0"/>
-              <a:t>02/06/2025</a:t>
+              <a:t>03/06/2025</a:t>
             </a:fld>
             <a:endParaRPr lang="en-AT"/>
           </a:p>
@@ -6502,7 +5961,7 @@
           <a:p>
             <a:fld id="{CD0BFEE2-3EAA-4386-9A3C-82D92E479C9F}" type="datetimeFigureOut">
               <a:rPr lang="en-AT" smtClean="0"/>
-              <a:t>02/06/2025</a:t>
+              <a:t>03/06/2025</a:t>
             </a:fld>
             <a:endParaRPr lang="en-AT"/>
           </a:p>
@@ -6686,7 +6145,7 @@
           <a:p>
             <a:fld id="{CD0BFEE2-3EAA-4386-9A3C-82D92E479C9F}" type="datetimeFigureOut">
               <a:rPr lang="en-AT" smtClean="0"/>
-              <a:t>02/06/2025</a:t>
+              <a:t>03/06/2025</a:t>
             </a:fld>
             <a:endParaRPr lang="en-AT"/>
           </a:p>
@@ -6856,7 +6315,7 @@
           <a:p>
             <a:fld id="{CD0BFEE2-3EAA-4386-9A3C-82D92E479C9F}" type="datetimeFigureOut">
               <a:rPr lang="en-AT" smtClean="0"/>
-              <a:t>02/06/2025</a:t>
+              <a:t>03/06/2025</a:t>
             </a:fld>
             <a:endParaRPr lang="en-AT"/>
           </a:p>
@@ -7100,7 +6559,7 @@
           <a:p>
             <a:fld id="{CD0BFEE2-3EAA-4386-9A3C-82D92E479C9F}" type="datetimeFigureOut">
               <a:rPr lang="en-AT" smtClean="0"/>
-              <a:t>02/06/2025</a:t>
+              <a:t>03/06/2025</a:t>
             </a:fld>
             <a:endParaRPr lang="en-AT"/>
           </a:p>
@@ -7336,7 +6795,7 @@
           <a:p>
             <a:fld id="{CD0BFEE2-3EAA-4386-9A3C-82D92E479C9F}" type="datetimeFigureOut">
               <a:rPr lang="en-AT" smtClean="0"/>
-              <a:t>02/06/2025</a:t>
+              <a:t>03/06/2025</a:t>
             </a:fld>
             <a:endParaRPr lang="en-AT"/>
           </a:p>
@@ -7802,7 +7261,7 @@
           <a:p>
             <a:fld id="{CD0BFEE2-3EAA-4386-9A3C-82D92E479C9F}" type="datetimeFigureOut">
               <a:rPr lang="en-AT" smtClean="0"/>
-              <a:t>02/06/2025</a:t>
+              <a:t>03/06/2025</a:t>
             </a:fld>
             <a:endParaRPr lang="en-AT"/>
           </a:p>
@@ -7920,7 +7379,7 @@
           <a:p>
             <a:fld id="{CD0BFEE2-3EAA-4386-9A3C-82D92E479C9F}" type="datetimeFigureOut">
               <a:rPr lang="en-AT" smtClean="0"/>
-              <a:t>02/06/2025</a:t>
+              <a:t>03/06/2025</a:t>
             </a:fld>
             <a:endParaRPr lang="en-AT"/>
           </a:p>
@@ -8015,7 +7474,7 @@
           <a:p>
             <a:fld id="{CD0BFEE2-3EAA-4386-9A3C-82D92E479C9F}" type="datetimeFigureOut">
               <a:rPr lang="en-AT" smtClean="0"/>
-              <a:t>02/06/2025</a:t>
+              <a:t>03/06/2025</a:t>
             </a:fld>
             <a:endParaRPr lang="en-AT"/>
           </a:p>
@@ -8270,7 +7729,7 @@
           <a:p>
             <a:fld id="{CD0BFEE2-3EAA-4386-9A3C-82D92E479C9F}" type="datetimeFigureOut">
               <a:rPr lang="en-AT" smtClean="0"/>
-              <a:t>02/06/2025</a:t>
+              <a:t>03/06/2025</a:t>
             </a:fld>
             <a:endParaRPr lang="en-AT"/>
           </a:p>
@@ -8570,7 +8029,7 @@
           <a:p>
             <a:fld id="{CD0BFEE2-3EAA-4386-9A3C-82D92E479C9F}" type="datetimeFigureOut">
               <a:rPr lang="en-AT" smtClean="0"/>
-              <a:t>02/06/2025</a:t>
+              <a:t>03/06/2025</a:t>
             </a:fld>
             <a:endParaRPr lang="en-AT"/>
           </a:p>
@@ -8804,7 +8263,7 @@
           <a:p>
             <a:fld id="{CD0BFEE2-3EAA-4386-9A3C-82D92E479C9F}" type="datetimeFigureOut">
               <a:rPr lang="en-AT" smtClean="0"/>
-              <a:t>02/06/2025</a:t>
+              <a:t>03/06/2025</a:t>
             </a:fld>
             <a:endParaRPr lang="en-AT"/>
           </a:p>
@@ -9467,7 +8926,7 @@
     <p:bg>
       <p:bgPr>
         <a:solidFill>
-          <a:schemeClr val="bg1"/>
+          <a:schemeClr val="bg2"/>
         </a:solidFill>
         <a:effectLst/>
       </p:bgPr>
@@ -10012,6 +9471,7 @@
                 <a:solidFill>
                   <a:srgbClr val="00B0F0"/>
                 </a:solidFill>
+                <a:latin typeface="Consolas" panose="020B0609020204030204" pitchFamily="49" charset="0"/>
               </a:rPr>
               <a:t>Context + TOT 8b</a:t>
             </a:r>
@@ -10019,6 +9479,7 @@
               <a:solidFill>
                 <a:srgbClr val="00B0F0"/>
               </a:solidFill>
+              <a:latin typeface="Consolas" panose="020B0609020204030204" pitchFamily="49" charset="0"/>
             </a:endParaRPr>
           </a:p>
         </p:txBody>
@@ -10085,6 +9546,7 @@
                 <a:solidFill>
                   <a:srgbClr val="00B0F0"/>
                 </a:solidFill>
+                <a:latin typeface="Consolas" panose="020B0609020204030204" pitchFamily="49" charset="0"/>
               </a:rPr>
               <a:t>TOT 8b</a:t>
             </a:r>
@@ -10092,6 +9554,7 @@
               <a:solidFill>
                 <a:srgbClr val="00B0F0"/>
               </a:solidFill>
+              <a:latin typeface="Consolas" panose="020B0609020204030204" pitchFamily="49" charset="0"/>
             </a:endParaRPr>
           </a:p>
         </p:txBody>
@@ -10159,6 +9622,7 @@
                 <a:solidFill>
                   <a:srgbClr val="00B0F0"/>
                 </a:solidFill>
+                <a:latin typeface="Consolas" panose="020B0609020204030204" pitchFamily="49" charset="0"/>
               </a:rPr>
               <a:t>Preparse + TOT 8b</a:t>
             </a:r>
@@ -10166,6 +9630,7 @@
               <a:solidFill>
                 <a:srgbClr val="00B0F0"/>
               </a:solidFill>
+              <a:latin typeface="Consolas" panose="020B0609020204030204" pitchFamily="49" charset="0"/>
             </a:endParaRPr>
           </a:p>
         </p:txBody>
@@ -12501,6 +11966,7 @@
                 <a:solidFill>
                   <a:srgbClr val="00B0F0"/>
                 </a:solidFill>
+                <a:latin typeface="Consolas" panose="020B0609020204030204" pitchFamily="49" charset="0"/>
               </a:rPr>
               <a:t>Preparse +  TOT 14b</a:t>
             </a:r>
@@ -12508,6 +11974,7 @@
               <a:solidFill>
                 <a:srgbClr val="00B0F0"/>
               </a:solidFill>
+              <a:latin typeface="Consolas" panose="020B0609020204030204" pitchFamily="49" charset="0"/>
             </a:endParaRPr>
           </a:p>
         </p:txBody>
@@ -12575,6 +12042,7 @@
                 <a:solidFill>
                   <a:srgbClr val="00B0F0"/>
                 </a:solidFill>
+                <a:latin typeface="Consolas" panose="020B0609020204030204" pitchFamily="49" charset="0"/>
               </a:rPr>
               <a:t>Persona 14b</a:t>
             </a:r>
@@ -12582,6 +12050,7 @@
               <a:solidFill>
                 <a:srgbClr val="00B0F0"/>
               </a:solidFill>
+              <a:latin typeface="Consolas" panose="020B0609020204030204" pitchFamily="49" charset="0"/>
             </a:endParaRPr>
           </a:p>
         </p:txBody>
@@ -12671,6 +12140,7 @@
         </p:nvPicPr>
         <p:blipFill>
           <a:blip r:embed="rId3">
+            <a:grayscl/>
             <a:extLst>
               <a:ext uri="{28A0092B-C50C-407E-A947-70E740481C1C}">
                 <a14:useLocalDpi xmlns:a14="http://schemas.microsoft.com/office/drawing/2010/main" val="0"/>
@@ -12689,6 +12159,11 @@
           <a:prstGeom prst="rect">
             <a:avLst/>
           </a:prstGeom>
+          <a:effectLst>
+            <a:outerShdw blurRad="50800" dist="50800" dir="5400000" algn="ctr" rotWithShape="0">
+              <a:srgbClr val="000000"/>
+            </a:outerShdw>
+          </a:effectLst>
         </p:spPr>
       </p:pic>
       <p:pic>
@@ -12707,6 +12182,7 @@
         </p:nvPicPr>
         <p:blipFill>
           <a:blip r:embed="rId4">
+            <a:grayscl/>
             <a:extLst>
               <a:ext uri="{28A0092B-C50C-407E-A947-70E740481C1C}">
                 <a14:useLocalDpi xmlns:a14="http://schemas.microsoft.com/office/drawing/2010/main" val="0"/>
@@ -12725,6 +12201,11 @@
           <a:prstGeom prst="rect">
             <a:avLst/>
           </a:prstGeom>
+          <a:effectLst>
+            <a:outerShdw blurRad="50800" dist="50800" dir="5400000" algn="ctr" rotWithShape="0">
+              <a:srgbClr val="000000"/>
+            </a:outerShdw>
+          </a:effectLst>
         </p:spPr>
       </p:pic>
     </p:spTree>
@@ -12779,6 +12260,7 @@
         </p:nvPicPr>
         <p:blipFill>
           <a:blip r:embed="rId3">
+            <a:grayscl/>
             <a:extLst>
               <a:ext uri="{28A0092B-C50C-407E-A947-70E740481C1C}">
                 <a14:useLocalDpi xmlns:a14="http://schemas.microsoft.com/office/drawing/2010/main" val="0"/>
@@ -12815,6 +12297,7 @@
         </p:nvPicPr>
         <p:blipFill>
           <a:blip r:embed="rId4">
+            <a:grayscl/>
             <a:extLst>
               <a:ext uri="{28A0092B-C50C-407E-A947-70E740481C1C}">
                 <a14:useLocalDpi xmlns:a14="http://schemas.microsoft.com/office/drawing/2010/main" val="0"/>
@@ -13206,7 +12689,7 @@
     <p:bg>
       <p:bgPr>
         <a:solidFill>
-          <a:schemeClr val="bg1"/>
+          <a:schemeClr val="bg2"/>
         </a:solidFill>
         <a:effectLst/>
       </p:bgPr>
@@ -13966,12 +13449,146 @@
           </a:p>
         </p:txBody>
       </p:sp>
-      <p:sp>
-        <p:nvSpPr>
-          <p:cNvPr id="14" name="Content Placeholder 2">
+      <p:pic>
+        <p:nvPicPr>
+          <p:cNvPr id="7" name="Picture 6">
             <a:extLst>
               <a:ext uri="{FF2B5EF4-FFF2-40B4-BE49-F238E27FC236}">
-                <a16:creationId xmlns:a16="http://schemas.microsoft.com/office/drawing/2014/main" id="{6B242104-2FEC-1869-1808-9D75D42809B6}"/>
+                <a16:creationId xmlns:a16="http://schemas.microsoft.com/office/drawing/2014/main" id="{8F93D3F5-F7D5-1320-E7E5-70F89E3F743B}"/>
+              </a:ext>
+            </a:extLst>
+          </p:cNvPr>
+          <p:cNvPicPr>
+            <a:picLocks noChangeAspect="1"/>
+          </p:cNvPicPr>
+          <p:nvPr/>
+        </p:nvPicPr>
+        <p:blipFill>
+          <a:blip r:embed="rId3"/>
+          <a:stretch>
+            <a:fillRect/>
+          </a:stretch>
+        </p:blipFill>
+        <p:spPr>
+          <a:xfrm>
+            <a:off x="5890260" y="2290322"/>
+            <a:ext cx="6114215" cy="3555153"/>
+          </a:xfrm>
+          <a:prstGeom prst="rect">
+            <a:avLst/>
+          </a:prstGeom>
+        </p:spPr>
+      </p:pic>
+      <p:sp>
+        <p:nvSpPr>
+          <p:cNvPr id="4" name="Content Placeholder 2">
+            <a:extLst>
+              <a:ext uri="{FF2B5EF4-FFF2-40B4-BE49-F238E27FC236}">
+                <a16:creationId xmlns:a16="http://schemas.microsoft.com/office/drawing/2014/main" id="{BE5006CE-F9F7-A39C-217C-2E4255995144}"/>
+              </a:ext>
+            </a:extLst>
+          </p:cNvPr>
+          <p:cNvSpPr>
+            <a:spLocks noGrp="1"/>
+          </p:cNvSpPr>
+          <p:nvPr>
+            <p:ph idx="1"/>
+          </p:nvPr>
+        </p:nvSpPr>
+        <p:spPr>
+          <a:xfrm>
+            <a:off x="632460" y="1810506"/>
+            <a:ext cx="10515600" cy="3728830"/>
+          </a:xfrm>
+        </p:spPr>
+        <p:txBody>
+          <a:bodyPr>
+            <a:normAutofit lnSpcReduction="10000"/>
+          </a:bodyPr>
+          <a:lstStyle/>
+          <a:p>
+            <a:r>
+              <a:rPr lang="en-GB" dirty="0">
+                <a:latin typeface="Consolas" panose="020B0609020204030204" pitchFamily="49" charset="0"/>
+              </a:rPr>
+              <a:t>Quality assurance through testing</a:t>
+            </a:r>
+          </a:p>
+          <a:p>
+            <a:pPr marL="36900" indent="0">
+              <a:buNone/>
+            </a:pPr>
+            <a:endParaRPr lang="en-GB" dirty="0"/>
+          </a:p>
+          <a:p>
+            <a:r>
+              <a:rPr lang="en-GB" dirty="0"/>
+              <a:t>In practive a lot of manual labor</a:t>
+            </a:r>
+          </a:p>
+          <a:p>
+            <a:endParaRPr lang="en-GB" dirty="0"/>
+          </a:p>
+          <a:p>
+            <a:r>
+              <a:rPr lang="en-GB" dirty="0"/>
+              <a:t>Strategies</a:t>
+            </a:r>
+          </a:p>
+          <a:p>
+            <a:pPr lvl="1"/>
+            <a:r>
+              <a:rPr lang="en-GB" dirty="0">
+                <a:latin typeface="Consolas" panose="020B0609020204030204" pitchFamily="49" charset="0"/>
+              </a:rPr>
+              <a:t>Unit testing</a:t>
+            </a:r>
+            <a:endParaRPr lang="en-GB" sz="1400" dirty="0">
+              <a:latin typeface="Consolas" panose="020B0609020204030204" pitchFamily="49" charset="0"/>
+            </a:endParaRPr>
+          </a:p>
+          <a:p>
+            <a:pPr lvl="1"/>
+            <a:r>
+              <a:rPr lang="en-GB" dirty="0">
+                <a:latin typeface="Consolas" panose="020B0609020204030204" pitchFamily="49" charset="0"/>
+              </a:rPr>
+              <a:t>Integration testing</a:t>
+            </a:r>
+          </a:p>
+          <a:p>
+            <a:pPr lvl="1"/>
+            <a:r>
+              <a:rPr lang="en-GB" dirty="0">
+                <a:latin typeface="Consolas" panose="020B0609020204030204" pitchFamily="49" charset="0"/>
+              </a:rPr>
+              <a:t>Acceptance/Validation testing</a:t>
+            </a:r>
+          </a:p>
+          <a:p>
+            <a:pPr lvl="1"/>
+            <a:r>
+              <a:rPr lang="en-GB" dirty="0">
+                <a:latin typeface="Consolas" panose="020B0609020204030204" pitchFamily="49" charset="0"/>
+              </a:rPr>
+              <a:t>System testing</a:t>
+            </a:r>
+          </a:p>
+          <a:p>
+            <a:pPr lvl="1"/>
+            <a:endParaRPr lang="en-GB" dirty="0"/>
+          </a:p>
+          <a:p>
+            <a:endParaRPr lang="en-GB" dirty="0"/>
+          </a:p>
+        </p:txBody>
+      </p:sp>
+      <p:sp>
+        <p:nvSpPr>
+          <p:cNvPr id="5" name="Content Placeholder 2">
+            <a:extLst>
+              <a:ext uri="{FF2B5EF4-FFF2-40B4-BE49-F238E27FC236}">
+                <a16:creationId xmlns:a16="http://schemas.microsoft.com/office/drawing/2014/main" id="{33AF0E93-7BB0-EA34-D60C-AF0DF45FF03B}"/>
               </a:ext>
             </a:extLst>
           </p:cNvPr>
@@ -13982,7 +13599,477 @@
         </p:nvSpPr>
         <p:spPr>
           <a:xfrm>
-            <a:off x="838200" y="1812925"/>
+            <a:off x="6870917" y="5881845"/>
+            <a:ext cx="4152900" cy="233400"/>
+          </a:xfrm>
+          <a:prstGeom prst="rect">
+            <a:avLst/>
+          </a:prstGeom>
+          <a:effectLst>
+            <a:outerShdw blurRad="25400" dir="17880000">
+              <a:srgbClr val="000000">
+                <a:alpha val="46000"/>
+              </a:srgbClr>
+            </a:outerShdw>
+          </a:effectLst>
+        </p:spPr>
+        <p:txBody>
+          <a:bodyPr vert="horz" lIns="91440" tIns="45720" rIns="91440" bIns="45720" rtlCol="0" anchor="t">
+            <a:normAutofit fontScale="55000" lnSpcReduction="20000"/>
+          </a:bodyPr>
+          <a:lstStyle>
+            <a:lvl1pPr marL="342900" indent="-306000" algn="l" defTabSz="457200" rtl="0" eaLnBrk="1" latinLnBrk="0" hangingPunct="1">
+              <a:spcBef>
+                <a:spcPct val="20000"/>
+              </a:spcBef>
+              <a:spcAft>
+                <a:spcPts val="600"/>
+              </a:spcAft>
+              <a:buClr>
+                <a:schemeClr val="tx2"/>
+              </a:buClr>
+              <a:buSzPct val="70000"/>
+              <a:buFont typeface="Wingdings 2" charset="2"/>
+              <a:buChar char=""/>
+              <a:defRPr sz="2000" kern="1200">
+                <a:ln>
+                  <a:solidFill>
+                    <a:schemeClr val="bg1">
+                      <a:lumMod val="75000"/>
+                      <a:lumOff val="25000"/>
+                      <a:alpha val="10000"/>
+                    </a:schemeClr>
+                  </a:solidFill>
+                </a:ln>
+                <a:solidFill>
+                  <a:schemeClr val="tx2"/>
+                </a:solidFill>
+                <a:effectLst>
+                  <a:outerShdw blurRad="9525" dist="25400" dir="14640000" algn="tl" rotWithShape="0">
+                    <a:schemeClr val="bg1">
+                      <a:alpha val="30000"/>
+                    </a:schemeClr>
+                  </a:outerShdw>
+                </a:effectLst>
+                <a:latin typeface="+mn-lt"/>
+                <a:ea typeface="+mn-ea"/>
+                <a:cs typeface="+mn-cs"/>
+              </a:defRPr>
+            </a:lvl1pPr>
+            <a:lvl2pPr marL="720000" indent="-270000" algn="l" defTabSz="457200" rtl="0" eaLnBrk="1" latinLnBrk="0" hangingPunct="1">
+              <a:spcBef>
+                <a:spcPct val="20000"/>
+              </a:spcBef>
+              <a:spcAft>
+                <a:spcPts val="600"/>
+              </a:spcAft>
+              <a:buClr>
+                <a:schemeClr val="tx2"/>
+              </a:buClr>
+              <a:buSzPct val="70000"/>
+              <a:buFont typeface="Wingdings 2" charset="2"/>
+              <a:buChar char=""/>
+              <a:defRPr sz="1800" kern="1200">
+                <a:ln>
+                  <a:solidFill>
+                    <a:schemeClr val="bg1">
+                      <a:lumMod val="75000"/>
+                      <a:lumOff val="25000"/>
+                      <a:alpha val="10000"/>
+                    </a:schemeClr>
+                  </a:solidFill>
+                </a:ln>
+                <a:solidFill>
+                  <a:schemeClr val="tx2"/>
+                </a:solidFill>
+                <a:effectLst>
+                  <a:outerShdw blurRad="9525" dist="25400" dir="14640000" algn="tl" rotWithShape="0">
+                    <a:schemeClr val="bg1">
+                      <a:alpha val="30000"/>
+                    </a:schemeClr>
+                  </a:outerShdw>
+                </a:effectLst>
+                <a:latin typeface="+mn-lt"/>
+                <a:ea typeface="+mn-ea"/>
+                <a:cs typeface="+mn-cs"/>
+              </a:defRPr>
+            </a:lvl2pPr>
+            <a:lvl3pPr marL="1026000" indent="-216000" algn="l" defTabSz="457200" rtl="0" eaLnBrk="1" latinLnBrk="0" hangingPunct="1">
+              <a:spcBef>
+                <a:spcPct val="20000"/>
+              </a:spcBef>
+              <a:spcAft>
+                <a:spcPts val="600"/>
+              </a:spcAft>
+              <a:buClr>
+                <a:schemeClr val="tx2"/>
+              </a:buClr>
+              <a:buSzPct val="70000"/>
+              <a:buFont typeface="Wingdings 2" charset="2"/>
+              <a:buChar char=""/>
+              <a:defRPr sz="1600" kern="1200">
+                <a:ln>
+                  <a:solidFill>
+                    <a:schemeClr val="bg1">
+                      <a:lumMod val="75000"/>
+                      <a:lumOff val="25000"/>
+                      <a:alpha val="10000"/>
+                    </a:schemeClr>
+                  </a:solidFill>
+                </a:ln>
+                <a:solidFill>
+                  <a:schemeClr val="tx2"/>
+                </a:solidFill>
+                <a:effectLst>
+                  <a:outerShdw blurRad="9525" dist="25400" dir="14640000" algn="tl" rotWithShape="0">
+                    <a:schemeClr val="bg1">
+                      <a:alpha val="30000"/>
+                    </a:schemeClr>
+                  </a:outerShdw>
+                </a:effectLst>
+                <a:latin typeface="+mn-lt"/>
+                <a:ea typeface="+mn-ea"/>
+                <a:cs typeface="+mn-cs"/>
+              </a:defRPr>
+            </a:lvl3pPr>
+            <a:lvl4pPr marL="1386000" indent="-216000" algn="l" defTabSz="457200" rtl="0" eaLnBrk="1" latinLnBrk="0" hangingPunct="1">
+              <a:spcBef>
+                <a:spcPct val="20000"/>
+              </a:spcBef>
+              <a:spcAft>
+                <a:spcPts val="600"/>
+              </a:spcAft>
+              <a:buClr>
+                <a:schemeClr val="tx2"/>
+              </a:buClr>
+              <a:buSzPct val="70000"/>
+              <a:buFont typeface="Wingdings 2" charset="2"/>
+              <a:buChar char=""/>
+              <a:defRPr sz="1400" kern="1200">
+                <a:ln>
+                  <a:solidFill>
+                    <a:schemeClr val="bg1">
+                      <a:lumMod val="75000"/>
+                      <a:lumOff val="25000"/>
+                      <a:alpha val="10000"/>
+                    </a:schemeClr>
+                  </a:solidFill>
+                </a:ln>
+                <a:solidFill>
+                  <a:schemeClr val="tx2"/>
+                </a:solidFill>
+                <a:effectLst>
+                  <a:outerShdw blurRad="9525" dist="25400" dir="14640000" algn="tl" rotWithShape="0">
+                    <a:schemeClr val="bg1">
+                      <a:alpha val="30000"/>
+                    </a:schemeClr>
+                  </a:outerShdw>
+                </a:effectLst>
+                <a:latin typeface="+mn-lt"/>
+                <a:ea typeface="+mn-ea"/>
+                <a:cs typeface="+mn-cs"/>
+              </a:defRPr>
+            </a:lvl4pPr>
+            <a:lvl5pPr marL="1674000" indent="-216000" algn="l" defTabSz="457200" rtl="0" eaLnBrk="1" latinLnBrk="0" hangingPunct="1">
+              <a:spcBef>
+                <a:spcPct val="20000"/>
+              </a:spcBef>
+              <a:spcAft>
+                <a:spcPts val="600"/>
+              </a:spcAft>
+              <a:buClr>
+                <a:schemeClr val="tx2"/>
+              </a:buClr>
+              <a:buSzPct val="70000"/>
+              <a:buFont typeface="Wingdings 2" charset="2"/>
+              <a:buChar char=""/>
+              <a:defRPr sz="1400" kern="1200">
+                <a:ln>
+                  <a:solidFill>
+                    <a:schemeClr val="bg1">
+                      <a:lumMod val="75000"/>
+                      <a:lumOff val="25000"/>
+                      <a:alpha val="10000"/>
+                    </a:schemeClr>
+                  </a:solidFill>
+                </a:ln>
+                <a:solidFill>
+                  <a:schemeClr val="tx2"/>
+                </a:solidFill>
+                <a:effectLst>
+                  <a:outerShdw blurRad="9525" dist="25400" dir="14640000" algn="tl" rotWithShape="0">
+                    <a:schemeClr val="bg1">
+                      <a:alpha val="30000"/>
+                    </a:schemeClr>
+                  </a:outerShdw>
+                </a:effectLst>
+                <a:latin typeface="+mn-lt"/>
+                <a:ea typeface="+mn-ea"/>
+                <a:cs typeface="+mn-cs"/>
+              </a:defRPr>
+            </a:lvl5pPr>
+            <a:lvl6pPr marL="2014600" indent="-228600" algn="l" defTabSz="457200" rtl="0" eaLnBrk="1" latinLnBrk="0" hangingPunct="1">
+              <a:spcBef>
+                <a:spcPct val="20000"/>
+              </a:spcBef>
+              <a:spcAft>
+                <a:spcPts val="600"/>
+              </a:spcAft>
+              <a:buClr>
+                <a:schemeClr val="tx2"/>
+              </a:buClr>
+              <a:buSzPct val="70000"/>
+              <a:buFont typeface="Wingdings 2" charset="2"/>
+              <a:buChar char=""/>
+              <a:defRPr sz="1400" kern="1200">
+                <a:ln>
+                  <a:solidFill>
+                    <a:schemeClr val="bg1">
+                      <a:lumMod val="75000"/>
+                      <a:lumOff val="25000"/>
+                      <a:alpha val="10000"/>
+                    </a:schemeClr>
+                  </a:solidFill>
+                </a:ln>
+                <a:solidFill>
+                  <a:schemeClr val="tx2"/>
+                </a:solidFill>
+                <a:effectLst>
+                  <a:outerShdw blurRad="9525" dist="25400" dir="14640000" algn="tl" rotWithShape="0">
+                    <a:schemeClr val="bg1">
+                      <a:alpha val="30000"/>
+                    </a:schemeClr>
+                  </a:outerShdw>
+                </a:effectLst>
+                <a:latin typeface="+mn-lt"/>
+                <a:ea typeface="+mn-ea"/>
+                <a:cs typeface="+mn-cs"/>
+              </a:defRPr>
+            </a:lvl6pPr>
+            <a:lvl7pPr marL="2401800" indent="-228600" algn="l" defTabSz="457200" rtl="0" eaLnBrk="1" latinLnBrk="0" hangingPunct="1">
+              <a:spcBef>
+                <a:spcPct val="20000"/>
+              </a:spcBef>
+              <a:spcAft>
+                <a:spcPts val="600"/>
+              </a:spcAft>
+              <a:buClr>
+                <a:schemeClr val="tx2"/>
+              </a:buClr>
+              <a:buSzPct val="70000"/>
+              <a:buFont typeface="Wingdings 2" charset="2"/>
+              <a:buChar char=""/>
+              <a:defRPr sz="1400" kern="1200">
+                <a:ln>
+                  <a:solidFill>
+                    <a:schemeClr val="bg1">
+                      <a:lumMod val="75000"/>
+                      <a:lumOff val="25000"/>
+                      <a:alpha val="10000"/>
+                    </a:schemeClr>
+                  </a:solidFill>
+                </a:ln>
+                <a:solidFill>
+                  <a:schemeClr val="tx2"/>
+                </a:solidFill>
+                <a:effectLst>
+                  <a:outerShdw blurRad="9525" dist="25400" dir="14640000" algn="tl" rotWithShape="0">
+                    <a:schemeClr val="bg1">
+                      <a:alpha val="30000"/>
+                    </a:schemeClr>
+                  </a:outerShdw>
+                </a:effectLst>
+                <a:latin typeface="+mn-lt"/>
+                <a:ea typeface="+mn-ea"/>
+                <a:cs typeface="+mn-cs"/>
+              </a:defRPr>
+            </a:lvl7pPr>
+            <a:lvl8pPr marL="2789000" indent="-228600" algn="l" defTabSz="457200" rtl="0" eaLnBrk="1" latinLnBrk="0" hangingPunct="1">
+              <a:spcBef>
+                <a:spcPct val="20000"/>
+              </a:spcBef>
+              <a:spcAft>
+                <a:spcPts val="600"/>
+              </a:spcAft>
+              <a:buClr>
+                <a:schemeClr val="tx2"/>
+              </a:buClr>
+              <a:buSzPct val="70000"/>
+              <a:buFont typeface="Wingdings 2" charset="2"/>
+              <a:buChar char=""/>
+              <a:defRPr sz="1400" kern="1200">
+                <a:ln>
+                  <a:solidFill>
+                    <a:schemeClr val="bg1">
+                      <a:lumMod val="75000"/>
+                      <a:lumOff val="25000"/>
+                      <a:alpha val="10000"/>
+                    </a:schemeClr>
+                  </a:solidFill>
+                </a:ln>
+                <a:solidFill>
+                  <a:schemeClr val="tx2"/>
+                </a:solidFill>
+                <a:effectLst>
+                  <a:outerShdw blurRad="9525" dist="25400" dir="14640000" algn="tl" rotWithShape="0">
+                    <a:schemeClr val="bg1">
+                      <a:alpha val="30000"/>
+                    </a:schemeClr>
+                  </a:outerShdw>
+                </a:effectLst>
+                <a:latin typeface="+mn-lt"/>
+                <a:ea typeface="+mn-ea"/>
+                <a:cs typeface="+mn-cs"/>
+              </a:defRPr>
+            </a:lvl8pPr>
+            <a:lvl9pPr marL="3106200" indent="-228600" algn="l" defTabSz="457200" rtl="0" eaLnBrk="1" latinLnBrk="0" hangingPunct="1">
+              <a:spcBef>
+                <a:spcPct val="20000"/>
+              </a:spcBef>
+              <a:spcAft>
+                <a:spcPts val="600"/>
+              </a:spcAft>
+              <a:buClr>
+                <a:schemeClr val="tx2"/>
+              </a:buClr>
+              <a:buSzPct val="70000"/>
+              <a:buFont typeface="Wingdings 2" charset="2"/>
+              <a:buChar char=""/>
+              <a:defRPr sz="1400" kern="1200">
+                <a:ln>
+                  <a:solidFill>
+                    <a:schemeClr val="bg1">
+                      <a:lumMod val="75000"/>
+                      <a:lumOff val="25000"/>
+                      <a:alpha val="10000"/>
+                    </a:schemeClr>
+                  </a:solidFill>
+                </a:ln>
+                <a:solidFill>
+                  <a:schemeClr val="tx2"/>
+                </a:solidFill>
+                <a:effectLst>
+                  <a:outerShdw blurRad="9525" dist="25400" dir="14640000" algn="tl" rotWithShape="0">
+                    <a:schemeClr val="bg1">
+                      <a:alpha val="30000"/>
+                    </a:schemeClr>
+                  </a:outerShdw>
+                </a:effectLst>
+                <a:latin typeface="+mn-lt"/>
+                <a:ea typeface="+mn-ea"/>
+                <a:cs typeface="+mn-cs"/>
+              </a:defRPr>
+            </a:lvl9pPr>
+          </a:lstStyle>
+          <a:p>
+            <a:pPr marL="36900" indent="0">
+              <a:buNone/>
+            </a:pPr>
+            <a:r>
+              <a:rPr lang="en-GB" dirty="0"/>
+              <a:t>Mapping between testing tasks and how LLMs are used</a:t>
+            </a:r>
+            <a:endParaRPr lang="en-AT" dirty="0"/>
+          </a:p>
+        </p:txBody>
+      </p:sp>
+    </p:spTree>
+    <p:extLst>
+      <p:ext uri="{BB962C8B-B14F-4D97-AF65-F5344CB8AC3E}">
+        <p14:creationId xmlns:p14="http://schemas.microsoft.com/office/powerpoint/2010/main" val="1426877168"/>
+      </p:ext>
+    </p:extLst>
+  </p:cSld>
+  <p:clrMapOvr>
+    <a:masterClrMapping/>
+  </p:clrMapOvr>
+</p:sld>
+</file>
+
+<file path=ppt/slides/slide3.xml><?xml version="1.0" encoding="utf-8"?>
+<p:sld xmlns:a="http://schemas.openxmlformats.org/drawingml/2006/main" xmlns:r="http://schemas.openxmlformats.org/officeDocument/2006/relationships" xmlns:p="http://schemas.openxmlformats.org/presentationml/2006/main">
+  <p:cSld>
+    <p:spTree>
+      <p:nvGrpSpPr>
+        <p:cNvPr id="1" name=""/>
+        <p:cNvGrpSpPr/>
+        <p:nvPr/>
+      </p:nvGrpSpPr>
+      <p:grpSpPr>
+        <a:xfrm>
+          <a:off x="0" y="0"/>
+          <a:ext cx="0" cy="0"/>
+          <a:chOff x="0" y="0"/>
+          <a:chExt cx="0" cy="0"/>
+        </a:xfrm>
+      </p:grpSpPr>
+      <p:sp>
+        <p:nvSpPr>
+          <p:cNvPr id="2" name="Title 1">
+            <a:extLst>
+              <a:ext uri="{FF2B5EF4-FFF2-40B4-BE49-F238E27FC236}">
+                <a16:creationId xmlns:a16="http://schemas.microsoft.com/office/drawing/2014/main" id="{32EF2D71-438D-DFA0-9F13-C5FC5247325D}"/>
+              </a:ext>
+            </a:extLst>
+          </p:cNvPr>
+          <p:cNvSpPr>
+            <a:spLocks noGrp="1"/>
+          </p:cNvSpPr>
+          <p:nvPr>
+            <p:ph type="title"/>
+          </p:nvPr>
+        </p:nvSpPr>
+        <p:spPr>
+          <a:xfrm>
+            <a:off x="800724" y="402601"/>
+            <a:ext cx="10515600" cy="1325563"/>
+          </a:xfrm>
+        </p:spPr>
+        <p:txBody>
+          <a:bodyPr/>
+          <a:lstStyle/>
+          <a:p>
+            <a:pPr algn="l"/>
+            <a:r>
+              <a:rPr lang="en-GB" dirty="0">
+                <a:latin typeface="Consolas" panose="020B0609020204030204" pitchFamily="49" charset="0"/>
+              </a:rPr>
+              <a:t>Focus of this study – </a:t>
+            </a:r>
+            <a:br>
+              <a:rPr lang="en-GB" dirty="0">
+                <a:latin typeface="Consolas" panose="020B0609020204030204" pitchFamily="49" charset="0"/>
+              </a:rPr>
+            </a:br>
+            <a:r>
+              <a:rPr lang="en-GB" dirty="0">
+                <a:latin typeface="Consolas" panose="020B0609020204030204" pitchFamily="49" charset="0"/>
+              </a:rPr>
+              <a:t>Acceptance Testing</a:t>
+            </a:r>
+            <a:endParaRPr lang="en-AT" dirty="0">
+              <a:latin typeface="Consolas" panose="020B0609020204030204" pitchFamily="49" charset="0"/>
+            </a:endParaRPr>
+          </a:p>
+        </p:txBody>
+      </p:sp>
+      <p:sp>
+        <p:nvSpPr>
+          <p:cNvPr id="4" name="Content Placeholder 2">
+            <a:extLst>
+              <a:ext uri="{FF2B5EF4-FFF2-40B4-BE49-F238E27FC236}">
+                <a16:creationId xmlns:a16="http://schemas.microsoft.com/office/drawing/2014/main" id="{883C6131-AD2C-2511-3E29-8773C5DB885F}"/>
+              </a:ext>
+            </a:extLst>
+          </p:cNvPr>
+          <p:cNvSpPr txBox="1">
+            <a:spLocks/>
+          </p:cNvSpPr>
+          <p:nvPr/>
+        </p:nvSpPr>
+        <p:spPr>
+          <a:xfrm>
+            <a:off x="756274" y="1996451"/>
             <a:ext cx="10515600" cy="4351338"/>
           </a:xfrm>
           <a:prstGeom prst="rect">
@@ -14158,214 +14245,21 @@
             </a:lvl9pPr>
           </a:lstStyle>
           <a:p>
-            <a:r>
-              <a:rPr lang="en-GB" sz="2400" dirty="0">
-                <a:latin typeface="Consolas" panose="020B0609020204030204" pitchFamily="49" charset="0"/>
-              </a:rPr>
-              <a:t>Quality assurance through testing</a:t>
-            </a:r>
-          </a:p>
-          <a:p>
-            <a:pPr lvl="1"/>
-            <a:endParaRPr lang="en-GB" sz="2000" dirty="0">
-              <a:latin typeface="Consolas" panose="020B0609020204030204" pitchFamily="49" charset="0"/>
-            </a:endParaRPr>
-          </a:p>
-          <a:p>
-            <a:r>
-              <a:rPr lang="en-GB" sz="2400" dirty="0">
-                <a:latin typeface="Consolas" panose="020B0609020204030204" pitchFamily="49" charset="0"/>
-              </a:rPr>
-              <a:t>Strategies</a:t>
-            </a:r>
-          </a:p>
-          <a:p>
-            <a:pPr lvl="1"/>
-            <a:r>
-              <a:rPr lang="en-GB" sz="2000" dirty="0">
-                <a:latin typeface="Consolas" panose="020B0609020204030204" pitchFamily="49" charset="0"/>
-              </a:rPr>
-              <a:t>Unit testing</a:t>
-            </a:r>
-            <a:endParaRPr lang="en-GB" sz="1600" dirty="0">
-              <a:latin typeface="Consolas" panose="020B0609020204030204" pitchFamily="49" charset="0"/>
-            </a:endParaRPr>
-          </a:p>
-          <a:p>
-            <a:pPr lvl="1"/>
-            <a:r>
-              <a:rPr lang="en-GB" sz="2000" dirty="0">
-                <a:latin typeface="Consolas" panose="020B0609020204030204" pitchFamily="49" charset="0"/>
-              </a:rPr>
-              <a:t>Integration testing</a:t>
-            </a:r>
-          </a:p>
-          <a:p>
-            <a:pPr lvl="1"/>
-            <a:r>
-              <a:rPr lang="en-GB" sz="2000" dirty="0">
-                <a:latin typeface="Consolas" panose="020B0609020204030204" pitchFamily="49" charset="0"/>
-              </a:rPr>
-              <a:t>Acceptance/Validation testing</a:t>
-            </a:r>
-          </a:p>
-          <a:p>
-            <a:pPr lvl="1"/>
-            <a:r>
-              <a:rPr lang="en-GB" sz="2000" dirty="0">
-                <a:latin typeface="Consolas" panose="020B0609020204030204" pitchFamily="49" charset="0"/>
-              </a:rPr>
-              <a:t>System testing</a:t>
-            </a:r>
+            <a:pPr marL="0" indent="0">
+              <a:buNone/>
+            </a:pPr>
             <a:endParaRPr lang="en-GB" dirty="0">
               <a:latin typeface="Consolas" panose="020B0609020204030204" pitchFamily="49" charset="0"/>
             </a:endParaRPr>
           </a:p>
-          <a:p>
-            <a:pPr marL="0" indent="0">
-              <a:buNone/>
-            </a:pPr>
-            <a:endParaRPr lang="en-GB" sz="1800" dirty="0">
-              <a:latin typeface="Consolas" panose="020B0609020204030204" pitchFamily="49" charset="0"/>
-            </a:endParaRPr>
-          </a:p>
-          <a:p>
-            <a:r>
-              <a:rPr lang="en-GB" sz="2000" dirty="0">
-                <a:latin typeface="Consolas" panose="020B0609020204030204" pitchFamily="49" charset="0"/>
-              </a:rPr>
-              <a:t>Research on applying LLM’s for </a:t>
-            </a:r>
-            <a:br>
-              <a:rPr lang="en-GB" sz="2000" dirty="0">
-                <a:latin typeface="Consolas" panose="020B0609020204030204" pitchFamily="49" charset="0"/>
-              </a:rPr>
-            </a:br>
-            <a:r>
-              <a:rPr lang="en-GB" sz="2000" dirty="0">
-                <a:latin typeface="Consolas" panose="020B0609020204030204" pitchFamily="49" charset="0"/>
-              </a:rPr>
-              <a:t>different testing strategies:</a:t>
-            </a:r>
-          </a:p>
-          <a:p>
-            <a:pPr lvl="1"/>
-            <a:endParaRPr lang="en-GB" sz="1400" dirty="0">
-              <a:latin typeface="Consolas" panose="020B0609020204030204" pitchFamily="49" charset="0"/>
-            </a:endParaRPr>
-          </a:p>
-          <a:p>
-            <a:endParaRPr lang="en-AT" sz="1600" dirty="0">
-              <a:latin typeface="Consolas" panose="020B0609020204030204" pitchFamily="49" charset="0"/>
-            </a:endParaRPr>
-          </a:p>
-        </p:txBody>
-      </p:sp>
-      <p:pic>
-        <p:nvPicPr>
-          <p:cNvPr id="7" name="Picture 6">
+        </p:txBody>
+      </p:sp>
+      <p:sp>
+        <p:nvSpPr>
+          <p:cNvPr id="5" name="Content Placeholder 2">
             <a:extLst>
               <a:ext uri="{FF2B5EF4-FFF2-40B4-BE49-F238E27FC236}">
-                <a16:creationId xmlns:a16="http://schemas.microsoft.com/office/drawing/2014/main" id="{8F93D3F5-F7D5-1320-E7E5-70F89E3F743B}"/>
-              </a:ext>
-            </a:extLst>
-          </p:cNvPr>
-          <p:cNvPicPr>
-            <a:picLocks noChangeAspect="1"/>
-          </p:cNvPicPr>
-          <p:nvPr/>
-        </p:nvPicPr>
-        <p:blipFill>
-          <a:blip r:embed="rId3"/>
-          <a:stretch>
-            <a:fillRect/>
-          </a:stretch>
-        </p:blipFill>
-        <p:spPr>
-          <a:xfrm>
-            <a:off x="6608027" y="3340241"/>
-            <a:ext cx="5421955" cy="3152634"/>
-          </a:xfrm>
-          <a:prstGeom prst="rect">
-            <a:avLst/>
-          </a:prstGeom>
-        </p:spPr>
-      </p:pic>
-    </p:spTree>
-    <p:extLst>
-      <p:ext uri="{BB962C8B-B14F-4D97-AF65-F5344CB8AC3E}">
-        <p14:creationId xmlns:p14="http://schemas.microsoft.com/office/powerpoint/2010/main" val="1426877168"/>
-      </p:ext>
-    </p:extLst>
-  </p:cSld>
-  <p:clrMapOvr>
-    <a:masterClrMapping/>
-  </p:clrMapOvr>
-</p:sld>
-</file>
-
-<file path=ppt/slides/slide3.xml><?xml version="1.0" encoding="utf-8"?>
-<p:sld xmlns:a="http://schemas.openxmlformats.org/drawingml/2006/main" xmlns:r="http://schemas.openxmlformats.org/officeDocument/2006/relationships" xmlns:p="http://schemas.openxmlformats.org/presentationml/2006/main">
-  <p:cSld>
-    <p:spTree>
-      <p:nvGrpSpPr>
-        <p:cNvPr id="1" name=""/>
-        <p:cNvGrpSpPr/>
-        <p:nvPr/>
-      </p:nvGrpSpPr>
-      <p:grpSpPr>
-        <a:xfrm>
-          <a:off x="0" y="0"/>
-          <a:ext cx="0" cy="0"/>
-          <a:chOff x="0" y="0"/>
-          <a:chExt cx="0" cy="0"/>
-        </a:xfrm>
-      </p:grpSpPr>
-      <p:sp>
-        <p:nvSpPr>
-          <p:cNvPr id="2" name="Title 1">
-            <a:extLst>
-              <a:ext uri="{FF2B5EF4-FFF2-40B4-BE49-F238E27FC236}">
-                <a16:creationId xmlns:a16="http://schemas.microsoft.com/office/drawing/2014/main" id="{32EF2D71-438D-DFA0-9F13-C5FC5247325D}"/>
-              </a:ext>
-            </a:extLst>
-          </p:cNvPr>
-          <p:cNvSpPr>
-            <a:spLocks noGrp="1"/>
-          </p:cNvSpPr>
-          <p:nvPr>
-            <p:ph type="title"/>
-          </p:nvPr>
-        </p:nvSpPr>
-        <p:spPr>
-          <a:xfrm>
-            <a:off x="800724" y="402601"/>
-            <a:ext cx="10515600" cy="1325563"/>
-          </a:xfrm>
-        </p:spPr>
-        <p:txBody>
-          <a:bodyPr/>
-          <a:lstStyle/>
-          <a:p>
-            <a:pPr algn="l"/>
-            <a:r>
-              <a:rPr lang="en-GB" dirty="0">
-                <a:latin typeface="Consolas" panose="020B0609020204030204" pitchFamily="49" charset="0"/>
-              </a:rPr>
-              <a:t>Focus of this study – Acceptance Testing</a:t>
-            </a:r>
-            <a:endParaRPr lang="en-AT" dirty="0">
-              <a:latin typeface="Consolas" panose="020B0609020204030204" pitchFamily="49" charset="0"/>
-            </a:endParaRPr>
-          </a:p>
-        </p:txBody>
-      </p:sp>
-      <p:sp>
-        <p:nvSpPr>
-          <p:cNvPr id="4" name="Content Placeholder 2">
-            <a:extLst>
-              <a:ext uri="{FF2B5EF4-FFF2-40B4-BE49-F238E27FC236}">
-                <a16:creationId xmlns:a16="http://schemas.microsoft.com/office/drawing/2014/main" id="{883C6131-AD2C-2511-3E29-8773C5DB885F}"/>
+                <a16:creationId xmlns:a16="http://schemas.microsoft.com/office/drawing/2014/main" id="{792CF4CB-6E66-0719-4475-DDBC347B8036}"/>
               </a:ext>
             </a:extLst>
           </p:cNvPr>
@@ -14376,7 +14270,7 @@
         </p:nvSpPr>
         <p:spPr>
           <a:xfrm>
-            <a:off x="756274" y="1996451"/>
+            <a:off x="756274" y="2104061"/>
             <a:ext cx="10515600" cy="4351338"/>
           </a:xfrm>
           <a:prstGeom prst="rect">
@@ -14555,18 +14449,1184 @@
             <a:pPr marL="0" indent="0">
               <a:buNone/>
             </a:pPr>
+            <a:r>
+              <a:rPr lang="en-GB" sz="2200" dirty="0">
+                <a:ln>
+                  <a:solidFill>
+                    <a:schemeClr val="bg1">
+                      <a:lumMod val="75000"/>
+                      <a:lumOff val="25000"/>
+                      <a:alpha val="10000"/>
+                    </a:schemeClr>
+                  </a:solidFill>
+                </a:ln>
+                <a:solidFill>
+                  <a:schemeClr val="tx2"/>
+                </a:solidFill>
+                <a:effectLst>
+                  <a:outerShdw blurRad="9525" dist="25400" dir="14640000" algn="tl" rotWithShape="0">
+                    <a:schemeClr val="bg1">
+                      <a:alpha val="30000"/>
+                    </a:schemeClr>
+                  </a:outerShdw>
+                </a:effectLst>
+                <a:latin typeface="Consolas" panose="020B0609020204030204" pitchFamily="49" charset="0"/>
+              </a:rPr>
+              <a:t>Are requirements fullfilled?</a:t>
+            </a:r>
+          </a:p>
+          <a:p>
+            <a:pPr marL="0" indent="0">
+              <a:buNone/>
+            </a:pPr>
+            <a:endParaRPr lang="en-GB" sz="2200" dirty="0">
+              <a:ln>
+                <a:solidFill>
+                  <a:schemeClr val="bg1">
+                    <a:lumMod val="75000"/>
+                    <a:lumOff val="25000"/>
+                    <a:alpha val="10000"/>
+                  </a:schemeClr>
+                </a:solidFill>
+              </a:ln>
+              <a:solidFill>
+                <a:schemeClr val="tx2"/>
+              </a:solidFill>
+              <a:effectLst>
+                <a:outerShdw blurRad="9525" dist="25400" dir="14640000" algn="tl" rotWithShape="0">
+                  <a:schemeClr val="bg1">
+                    <a:alpha val="30000"/>
+                  </a:schemeClr>
+                </a:outerShdw>
+              </a:effectLst>
+              <a:latin typeface="Consolas" panose="020B0609020204030204" pitchFamily="49" charset="0"/>
+            </a:endParaRPr>
+          </a:p>
+          <a:p>
+            <a:pPr marL="0" indent="0">
+              <a:buNone/>
+            </a:pPr>
+            <a:r>
+              <a:rPr lang="en-GB" sz="2200" dirty="0">
+                <a:ln>
+                  <a:solidFill>
+                    <a:schemeClr val="bg1">
+                      <a:lumMod val="75000"/>
+                      <a:lumOff val="25000"/>
+                      <a:alpha val="10000"/>
+                    </a:schemeClr>
+                  </a:solidFill>
+                </a:ln>
+                <a:solidFill>
+                  <a:schemeClr val="tx2"/>
+                </a:solidFill>
+                <a:effectLst>
+                  <a:outerShdw blurRad="9525" dist="25400" dir="14640000" algn="tl" rotWithShape="0">
+                    <a:schemeClr val="bg1">
+                      <a:alpha val="30000"/>
+                    </a:schemeClr>
+                  </a:outerShdw>
+                </a:effectLst>
+                <a:latin typeface="Consolas" panose="020B0609020204030204" pitchFamily="49" charset="0"/>
+              </a:rPr>
+              <a:t>How capable are LLM’s in:</a:t>
+            </a:r>
+          </a:p>
+          <a:p>
+            <a:pPr marL="457200" lvl="1" indent="0">
+              <a:buNone/>
+            </a:pPr>
+            <a:endParaRPr lang="en-GB" sz="2200" dirty="0">
+              <a:ln>
+                <a:solidFill>
+                  <a:schemeClr val="bg1">
+                    <a:lumMod val="75000"/>
+                    <a:lumOff val="25000"/>
+                    <a:alpha val="10000"/>
+                  </a:schemeClr>
+                </a:solidFill>
+              </a:ln>
+              <a:solidFill>
+                <a:schemeClr val="tx2"/>
+              </a:solidFill>
+              <a:effectLst>
+                <a:outerShdw blurRad="9525" dist="25400" dir="14640000" algn="tl" rotWithShape="0">
+                  <a:schemeClr val="bg1">
+                    <a:alpha val="30000"/>
+                  </a:schemeClr>
+                </a:outerShdw>
+              </a:effectLst>
+              <a:latin typeface="Consolas" panose="020B0609020204030204" pitchFamily="49" charset="0"/>
+            </a:endParaRPr>
+          </a:p>
+          <a:p>
+            <a:pPr marL="457200" lvl="1" indent="0">
+              <a:buNone/>
+            </a:pPr>
+            <a:r>
+              <a:rPr lang="en-GB" sz="2200" dirty="0">
+                <a:ln>
+                  <a:solidFill>
+                    <a:schemeClr val="bg1">
+                      <a:lumMod val="75000"/>
+                      <a:lumOff val="25000"/>
+                      <a:alpha val="10000"/>
+                    </a:schemeClr>
+                  </a:solidFill>
+                </a:ln>
+                <a:solidFill>
+                  <a:schemeClr val="tx2"/>
+                </a:solidFill>
+                <a:effectLst>
+                  <a:outerShdw blurRad="9525" dist="25400" dir="14640000" algn="tl" rotWithShape="0">
+                    <a:schemeClr val="bg1">
+                      <a:alpha val="30000"/>
+                    </a:schemeClr>
+                  </a:outerShdw>
+                </a:effectLst>
+                <a:latin typeface="Consolas" panose="020B0609020204030204" pitchFamily="49" charset="0"/>
+              </a:rPr>
+              <a:t>Understanding requirements in technical domain?</a:t>
+            </a:r>
+          </a:p>
+          <a:p>
+            <a:pPr marL="457200" lvl="1" indent="0">
+              <a:buNone/>
+            </a:pPr>
+            <a:endParaRPr lang="en-GB" sz="2200" dirty="0">
+              <a:ln>
+                <a:solidFill>
+                  <a:schemeClr val="bg1">
+                    <a:lumMod val="75000"/>
+                    <a:lumOff val="25000"/>
+                    <a:alpha val="10000"/>
+                  </a:schemeClr>
+                </a:solidFill>
+              </a:ln>
+              <a:solidFill>
+                <a:schemeClr val="tx2"/>
+              </a:solidFill>
+              <a:effectLst>
+                <a:outerShdw blurRad="9525" dist="25400" dir="14640000" algn="tl" rotWithShape="0">
+                  <a:schemeClr val="bg1">
+                    <a:alpha val="30000"/>
+                  </a:schemeClr>
+                </a:outerShdw>
+              </a:effectLst>
+              <a:latin typeface="Consolas" panose="020B0609020204030204" pitchFamily="49" charset="0"/>
+            </a:endParaRPr>
+          </a:p>
+          <a:p>
+            <a:pPr marL="457200" lvl="1" indent="0">
+              <a:buNone/>
+            </a:pPr>
+            <a:r>
+              <a:rPr lang="en-GB" sz="2200" dirty="0">
+                <a:ln>
+                  <a:solidFill>
+                    <a:schemeClr val="bg1">
+                      <a:lumMod val="75000"/>
+                      <a:lumOff val="25000"/>
+                      <a:alpha val="10000"/>
+                    </a:schemeClr>
+                  </a:solidFill>
+                </a:ln>
+                <a:solidFill>
+                  <a:schemeClr val="tx2"/>
+                </a:solidFill>
+                <a:effectLst>
+                  <a:outerShdw blurRad="9525" dist="25400" dir="14640000" algn="tl" rotWithShape="0">
+                    <a:schemeClr val="bg1">
+                      <a:alpha val="30000"/>
+                    </a:schemeClr>
+                  </a:outerShdw>
+                </a:effectLst>
+                <a:latin typeface="Consolas" panose="020B0609020204030204" pitchFamily="49" charset="0"/>
+              </a:rPr>
+              <a:t>Deriving test descriptions from requirements?</a:t>
+            </a:r>
+          </a:p>
+          <a:p>
+            <a:pPr marL="0" indent="0">
+              <a:buNone/>
+            </a:pPr>
+            <a:endParaRPr lang="en-GB" sz="2200" dirty="0">
+              <a:ln>
+                <a:solidFill>
+                  <a:schemeClr val="bg1">
+                    <a:lumMod val="75000"/>
+                    <a:lumOff val="25000"/>
+                    <a:alpha val="10000"/>
+                  </a:schemeClr>
+                </a:solidFill>
+              </a:ln>
+              <a:solidFill>
+                <a:schemeClr val="tx2"/>
+              </a:solidFill>
+              <a:effectLst>
+                <a:outerShdw blurRad="9525" dist="25400" dir="14640000" algn="tl" rotWithShape="0">
+                  <a:schemeClr val="bg1">
+                    <a:alpha val="30000"/>
+                  </a:schemeClr>
+                </a:outerShdw>
+              </a:effectLst>
+              <a:latin typeface="Consolas" panose="020B0609020204030204" pitchFamily="49" charset="0"/>
+            </a:endParaRPr>
+          </a:p>
+          <a:p>
+            <a:pPr marL="0" indent="0">
+              <a:buNone/>
+            </a:pPr>
+            <a:r>
+              <a:rPr lang="en-GB" sz="2200" dirty="0">
+                <a:ln>
+                  <a:solidFill>
+                    <a:schemeClr val="bg1">
+                      <a:lumMod val="75000"/>
+                      <a:lumOff val="25000"/>
+                      <a:alpha val="10000"/>
+                    </a:schemeClr>
+                  </a:solidFill>
+                </a:ln>
+                <a:solidFill>
+                  <a:schemeClr val="tx2"/>
+                </a:solidFill>
+                <a:effectLst>
+                  <a:outerShdw blurRad="9525" dist="25400" dir="14640000" algn="tl" rotWithShape="0">
+                    <a:schemeClr val="bg1">
+                      <a:alpha val="30000"/>
+                    </a:schemeClr>
+                  </a:outerShdw>
+                </a:effectLst>
+                <a:latin typeface="Consolas" panose="020B0609020204030204" pitchFamily="49" charset="0"/>
+              </a:rPr>
+              <a:t>Is there potential for automation?</a:t>
+            </a:r>
+          </a:p>
+        </p:txBody>
+      </p:sp>
+      <p:pic>
+        <p:nvPicPr>
+          <p:cNvPr id="12" name="Picture 11" descr="A diagram of a software process&#10;&#10;AI-generated content may be incorrect.">
+            <a:extLst>
+              <a:ext uri="{FF2B5EF4-FFF2-40B4-BE49-F238E27FC236}">
+                <a16:creationId xmlns:a16="http://schemas.microsoft.com/office/drawing/2014/main" id="{8668134D-364E-A501-4C35-C07E89BAF2A6}"/>
+              </a:ext>
+            </a:extLst>
+          </p:cNvPr>
+          <p:cNvPicPr>
+            <a:picLocks noChangeAspect="1"/>
+          </p:cNvPicPr>
+          <p:nvPr/>
+        </p:nvPicPr>
+        <p:blipFill>
+          <a:blip r:embed="rId3">
+            <a:extLst>
+              <a:ext uri="{28A0092B-C50C-407E-A947-70E740481C1C}">
+                <a14:useLocalDpi xmlns:a14="http://schemas.microsoft.com/office/drawing/2010/main" val="0"/>
+              </a:ext>
+            </a:extLst>
+          </a:blip>
+          <a:stretch>
+            <a:fillRect/>
+          </a:stretch>
+        </p:blipFill>
+        <p:spPr>
+          <a:xfrm>
+            <a:off x="8921147" y="107014"/>
+            <a:ext cx="3173584" cy="5121565"/>
+          </a:xfrm>
+          <a:prstGeom prst="rect">
+            <a:avLst/>
+          </a:prstGeom>
+        </p:spPr>
+      </p:pic>
+    </p:spTree>
+    <p:extLst>
+      <p:ext uri="{BB962C8B-B14F-4D97-AF65-F5344CB8AC3E}">
+        <p14:creationId xmlns:p14="http://schemas.microsoft.com/office/powerpoint/2010/main" val="882905187"/>
+      </p:ext>
+    </p:extLst>
+  </p:cSld>
+  <p:clrMapOvr>
+    <a:masterClrMapping/>
+  </p:clrMapOvr>
+</p:sld>
+</file>
+
+<file path=ppt/slides/slide4.xml><?xml version="1.0" encoding="utf-8"?>
+<p:sld xmlns:a="http://schemas.openxmlformats.org/drawingml/2006/main" xmlns:r="http://schemas.openxmlformats.org/officeDocument/2006/relationships" xmlns:p="http://schemas.openxmlformats.org/presentationml/2006/main">
+  <p:cSld>
+    <p:spTree>
+      <p:nvGrpSpPr>
+        <p:cNvPr id="1" name=""/>
+        <p:cNvGrpSpPr/>
+        <p:nvPr/>
+      </p:nvGrpSpPr>
+      <p:grpSpPr>
+        <a:xfrm>
+          <a:off x="0" y="0"/>
+          <a:ext cx="0" cy="0"/>
+          <a:chOff x="0" y="0"/>
+          <a:chExt cx="0" cy="0"/>
+        </a:xfrm>
+      </p:grpSpPr>
+      <p:sp>
+        <p:nvSpPr>
+          <p:cNvPr id="2" name="Title 1">
+            <a:extLst>
+              <a:ext uri="{FF2B5EF4-FFF2-40B4-BE49-F238E27FC236}">
+                <a16:creationId xmlns:a16="http://schemas.microsoft.com/office/drawing/2014/main" id="{338D8DF0-C0BD-E427-7A98-F6B01EF2EC9C}"/>
+              </a:ext>
+            </a:extLst>
+          </p:cNvPr>
+          <p:cNvSpPr>
+            <a:spLocks noGrp="1"/>
+          </p:cNvSpPr>
+          <p:nvPr>
+            <p:ph type="title"/>
+          </p:nvPr>
+        </p:nvSpPr>
+        <p:spPr/>
+        <p:txBody>
+          <a:bodyPr/>
+          <a:lstStyle/>
+          <a:p>
+            <a:pPr algn="l"/>
+            <a:r>
+              <a:rPr lang="en-GB" dirty="0">
+                <a:latin typeface="Consolas" panose="020B0609020204030204" pitchFamily="49" charset="0"/>
+              </a:rPr>
+              <a:t>Experimental Setup</a:t>
+            </a:r>
+            <a:endParaRPr lang="en-AT" dirty="0">
+              <a:latin typeface="Consolas" panose="020B0609020204030204" pitchFamily="49" charset="0"/>
+            </a:endParaRPr>
+          </a:p>
+        </p:txBody>
+      </p:sp>
+      <p:sp>
+        <p:nvSpPr>
+          <p:cNvPr id="3" name="Content Placeholder 2">
+            <a:extLst>
+              <a:ext uri="{FF2B5EF4-FFF2-40B4-BE49-F238E27FC236}">
+                <a16:creationId xmlns:a16="http://schemas.microsoft.com/office/drawing/2014/main" id="{B84A5450-8775-0042-54CF-CB44039CF4E2}"/>
+              </a:ext>
+            </a:extLst>
+          </p:cNvPr>
+          <p:cNvSpPr>
+            <a:spLocks noGrp="1"/>
+          </p:cNvSpPr>
+          <p:nvPr>
+            <p:ph idx="1"/>
+          </p:nvPr>
+        </p:nvSpPr>
+        <p:spPr>
+          <a:xfrm>
+            <a:off x="838200" y="1690688"/>
+            <a:ext cx="10515600" cy="4351338"/>
+          </a:xfrm>
+        </p:spPr>
+        <p:txBody>
+          <a:bodyPr>
+            <a:normAutofit fontScale="92500" lnSpcReduction="20000"/>
+          </a:bodyPr>
+          <a:lstStyle/>
+          <a:p>
+            <a:r>
+              <a:rPr lang="en-GB" sz="2400" dirty="0">
+                <a:latin typeface="Consolas" panose="020B0609020204030204" pitchFamily="49" charset="0"/>
+              </a:rPr>
+              <a:t>Evaluation Procedure</a:t>
+            </a:r>
+          </a:p>
+          <a:p>
+            <a:pPr lvl="1"/>
+            <a:r>
+              <a:rPr lang="en-GB" sz="2000" dirty="0">
+                <a:latin typeface="Consolas" panose="020B0609020204030204" pitchFamily="49" charset="0"/>
+              </a:rPr>
+              <a:t>Use prompt engineering techniques to generate testcases</a:t>
+            </a:r>
+          </a:p>
+          <a:p>
+            <a:pPr lvl="1"/>
+            <a:r>
+              <a:rPr lang="en-GB" sz="2000" dirty="0">
+                <a:latin typeface="Consolas" panose="020B0609020204030204" pitchFamily="49" charset="0"/>
+              </a:rPr>
+              <a:t>Basic Test Description structure shall be enforced</a:t>
+            </a:r>
+          </a:p>
+          <a:p>
+            <a:pPr lvl="2"/>
+            <a:endParaRPr lang="en-GB" sz="1800" dirty="0">
+              <a:latin typeface="Consolas" panose="020B0609020204030204" pitchFamily="49" charset="0"/>
+            </a:endParaRPr>
+          </a:p>
+          <a:p>
+            <a:pPr lvl="2"/>
+            <a:endParaRPr lang="en-GB" sz="1800" dirty="0">
+              <a:latin typeface="Consolas" panose="020B0609020204030204" pitchFamily="49" charset="0"/>
+            </a:endParaRPr>
+          </a:p>
+          <a:p>
+            <a:pPr lvl="2"/>
+            <a:endParaRPr lang="en-GB" sz="1800" dirty="0">
+              <a:latin typeface="Consolas" panose="020B0609020204030204" pitchFamily="49" charset="0"/>
+            </a:endParaRPr>
+          </a:p>
+          <a:p>
+            <a:pPr lvl="2"/>
+            <a:endParaRPr lang="en-GB" sz="1800" dirty="0">
+              <a:latin typeface="Consolas" panose="020B0609020204030204" pitchFamily="49" charset="0"/>
+            </a:endParaRPr>
+          </a:p>
+          <a:p>
+            <a:pPr lvl="2"/>
+            <a:endParaRPr lang="en-GB" sz="1800" dirty="0">
+              <a:latin typeface="Consolas" panose="020B0609020204030204" pitchFamily="49" charset="0"/>
+            </a:endParaRPr>
+          </a:p>
+          <a:p>
+            <a:pPr lvl="1"/>
+            <a:r>
+              <a:rPr lang="en-GB" sz="2000" dirty="0">
+                <a:latin typeface="Consolas" panose="020B0609020204030204" pitchFamily="49" charset="0"/>
+              </a:rPr>
+              <a:t>Validation framework for quality estimate of Model + prompt variations</a:t>
+            </a:r>
+          </a:p>
+          <a:p>
+            <a:pPr lvl="2"/>
+            <a:r>
+              <a:rPr lang="en-GB" sz="1800" dirty="0">
+                <a:latin typeface="Consolas" panose="020B0609020204030204" pitchFamily="49" charset="0"/>
+              </a:rPr>
+              <a:t>Simple structural checks</a:t>
+            </a:r>
+          </a:p>
+          <a:p>
+            <a:pPr lvl="2"/>
+            <a:r>
+              <a:rPr lang="en-GB" sz="1800" dirty="0">
+                <a:latin typeface="Consolas" panose="020B0609020204030204" pitchFamily="49" charset="0"/>
+              </a:rPr>
+              <a:t>SpaCy for field characteristics</a:t>
+            </a:r>
+          </a:p>
+          <a:p>
+            <a:pPr lvl="1"/>
+            <a:r>
+              <a:rPr lang="en-GB" sz="2000" dirty="0">
+                <a:latin typeface="Consolas" panose="020B0609020204030204" pitchFamily="49" charset="0"/>
+              </a:rPr>
+              <a:t>Human verification as final evaluation</a:t>
+            </a:r>
+          </a:p>
+          <a:p>
+            <a:pPr lvl="1"/>
             <a:endParaRPr lang="en-GB" dirty="0">
               <a:latin typeface="Consolas" panose="020B0609020204030204" pitchFamily="49" charset="0"/>
             </a:endParaRPr>
           </a:p>
         </p:txBody>
       </p:sp>
-      <p:sp>
-        <p:nvSpPr>
-          <p:cNvPr id="5" name="Content Placeholder 2">
+      <p:pic>
+        <p:nvPicPr>
+          <p:cNvPr id="5" name="Picture 4">
             <a:extLst>
               <a:ext uri="{FF2B5EF4-FFF2-40B4-BE49-F238E27FC236}">
-                <a16:creationId xmlns:a16="http://schemas.microsoft.com/office/drawing/2014/main" id="{792CF4CB-6E66-0719-4475-DDBC347B8036}"/>
+                <a16:creationId xmlns:a16="http://schemas.microsoft.com/office/drawing/2014/main" id="{3E48E7C1-7749-EDCC-8F01-AEDE69A6F890}"/>
+              </a:ext>
+            </a:extLst>
+          </p:cNvPr>
+          <p:cNvPicPr>
+            <a:picLocks noChangeAspect="1"/>
+          </p:cNvPicPr>
+          <p:nvPr/>
+        </p:nvPicPr>
+        <p:blipFill>
+          <a:blip r:embed="rId3"/>
+          <a:stretch>
+            <a:fillRect/>
+          </a:stretch>
+        </p:blipFill>
+        <p:spPr>
+          <a:xfrm>
+            <a:off x="3400586" y="2790825"/>
+            <a:ext cx="2415107" cy="1434615"/>
+          </a:xfrm>
+          <a:prstGeom prst="rect">
+            <a:avLst/>
+          </a:prstGeom>
+        </p:spPr>
+      </p:pic>
+    </p:spTree>
+    <p:extLst>
+      <p:ext uri="{BB962C8B-B14F-4D97-AF65-F5344CB8AC3E}">
+        <p14:creationId xmlns:p14="http://schemas.microsoft.com/office/powerpoint/2010/main" val="2522491419"/>
+      </p:ext>
+    </p:extLst>
+  </p:cSld>
+  <p:clrMapOvr>
+    <a:masterClrMapping/>
+  </p:clrMapOvr>
+</p:sld>
+</file>
+
+<file path=ppt/slides/slide5.xml><?xml version="1.0" encoding="utf-8"?>
+<p:sld xmlns:a="http://schemas.openxmlformats.org/drawingml/2006/main" xmlns:r="http://schemas.openxmlformats.org/officeDocument/2006/relationships" xmlns:p="http://schemas.openxmlformats.org/presentationml/2006/main">
+  <p:cSld>
+    <p:spTree>
+      <p:nvGrpSpPr>
+        <p:cNvPr id="1" name=""/>
+        <p:cNvGrpSpPr/>
+        <p:nvPr/>
+      </p:nvGrpSpPr>
+      <p:grpSpPr>
+        <a:xfrm>
+          <a:off x="0" y="0"/>
+          <a:ext cx="0" cy="0"/>
+          <a:chOff x="0" y="0"/>
+          <a:chExt cx="0" cy="0"/>
+        </a:xfrm>
+      </p:grpSpPr>
+      <p:sp>
+        <p:nvSpPr>
+          <p:cNvPr id="2" name="Title 1">
+            <a:extLst>
+              <a:ext uri="{FF2B5EF4-FFF2-40B4-BE49-F238E27FC236}">
+                <a16:creationId xmlns:a16="http://schemas.microsoft.com/office/drawing/2014/main" id="{E36F5826-B656-D6BD-8186-42E8FB31D677}"/>
+              </a:ext>
+            </a:extLst>
+          </p:cNvPr>
+          <p:cNvSpPr>
+            <a:spLocks noGrp="1"/>
+          </p:cNvSpPr>
+          <p:nvPr>
+            <p:ph type="title"/>
+          </p:nvPr>
+        </p:nvSpPr>
+        <p:spPr/>
+        <p:txBody>
+          <a:bodyPr/>
+          <a:lstStyle/>
+          <a:p>
+            <a:pPr algn="l"/>
+            <a:r>
+              <a:rPr lang="en-GB" dirty="0">
+                <a:latin typeface="Consolas" panose="020B0609020204030204" pitchFamily="49" charset="0"/>
+              </a:rPr>
+              <a:t>Experimental Setup</a:t>
+            </a:r>
+            <a:endParaRPr lang="en-AT" dirty="0">
+              <a:latin typeface="Consolas" panose="020B0609020204030204" pitchFamily="49" charset="0"/>
+            </a:endParaRPr>
+          </a:p>
+        </p:txBody>
+      </p:sp>
+      <p:sp>
+        <p:nvSpPr>
+          <p:cNvPr id="3" name="Content Placeholder 2">
+            <a:extLst>
+              <a:ext uri="{FF2B5EF4-FFF2-40B4-BE49-F238E27FC236}">
+                <a16:creationId xmlns:a16="http://schemas.microsoft.com/office/drawing/2014/main" id="{9BBF55A9-6E35-8D97-F429-C4C602BAD3A1}"/>
+              </a:ext>
+            </a:extLst>
+          </p:cNvPr>
+          <p:cNvSpPr>
+            <a:spLocks noGrp="1"/>
+          </p:cNvSpPr>
+          <p:nvPr>
+            <p:ph idx="1"/>
+          </p:nvPr>
+        </p:nvSpPr>
+        <p:spPr/>
+        <p:txBody>
+          <a:bodyPr>
+            <a:normAutofit lnSpcReduction="10000"/>
+          </a:bodyPr>
+          <a:lstStyle/>
+          <a:p>
+            <a:r>
+              <a:rPr lang="en-GB" sz="2400" dirty="0">
+                <a:latin typeface="Consolas" panose="020B0609020204030204" pitchFamily="49" charset="0"/>
+              </a:rPr>
+              <a:t>Evaluation on Dronology</a:t>
+            </a:r>
+          </a:p>
+          <a:p>
+            <a:pPr marL="457200" lvl="1" indent="0">
+              <a:buNone/>
+            </a:pPr>
+            <a:r>
+              <a:rPr lang="en-GB" dirty="0">
+                <a:latin typeface="Consolas" panose="020B0609020204030204" pitchFamily="49" charset="0"/>
+              </a:rPr>
+              <a:t>Unmanned Aerial Systems </a:t>
+            </a:r>
+            <a:br>
+              <a:rPr lang="en-GB" dirty="0">
+                <a:latin typeface="Consolas" panose="020B0609020204030204" pitchFamily="49" charset="0"/>
+              </a:rPr>
+            </a:br>
+            <a:r>
+              <a:rPr lang="en-GB" dirty="0">
+                <a:latin typeface="Consolas" panose="020B0609020204030204" pitchFamily="49" charset="0"/>
+              </a:rPr>
+              <a:t>Management and Control</a:t>
+            </a:r>
+          </a:p>
+          <a:p>
+            <a:pPr marL="457200" lvl="1" indent="0">
+              <a:buNone/>
+            </a:pPr>
+            <a:endParaRPr lang="en-GB" dirty="0">
+              <a:latin typeface="Consolas" panose="020B0609020204030204" pitchFamily="49" charset="0"/>
+            </a:endParaRPr>
+          </a:p>
+          <a:p>
+            <a:pPr lvl="1"/>
+            <a:r>
+              <a:rPr lang="en-GB" sz="2000" dirty="0">
+                <a:latin typeface="Consolas" panose="020B0609020204030204" pitchFamily="49" charset="0"/>
+              </a:rPr>
+              <a:t>research environment </a:t>
+            </a:r>
+          </a:p>
+          <a:p>
+            <a:pPr lvl="1"/>
+            <a:endParaRPr lang="en-GB" sz="2000" dirty="0">
+              <a:latin typeface="Consolas" panose="020B0609020204030204" pitchFamily="49" charset="0"/>
+            </a:endParaRPr>
+          </a:p>
+          <a:p>
+            <a:pPr lvl="1"/>
+            <a:r>
+              <a:rPr lang="en-GB" sz="2000" dirty="0">
+                <a:latin typeface="Consolas" panose="020B0609020204030204" pitchFamily="49" charset="0"/>
+              </a:rPr>
+              <a:t>framework for controlling </a:t>
+            </a:r>
+            <a:br>
+              <a:rPr lang="en-GB" sz="2000" dirty="0">
+                <a:latin typeface="Consolas" panose="020B0609020204030204" pitchFamily="49" charset="0"/>
+              </a:rPr>
+            </a:br>
+            <a:r>
+              <a:rPr lang="en-GB" sz="2000" dirty="0">
+                <a:latin typeface="Consolas" panose="020B0609020204030204" pitchFamily="49" charset="0"/>
+              </a:rPr>
+              <a:t>and coordinating the flight</a:t>
+            </a:r>
+          </a:p>
+          <a:p>
+            <a:pPr lvl="1"/>
+            <a:endParaRPr lang="en-GB" sz="2000" dirty="0">
+              <a:latin typeface="Consolas" panose="020B0609020204030204" pitchFamily="49" charset="0"/>
+            </a:endParaRPr>
+          </a:p>
+          <a:p>
+            <a:pPr lvl="1"/>
+            <a:r>
+              <a:rPr lang="en-AT" sz="2000" dirty="0">
+                <a:latin typeface="Consolas" panose="020B0609020204030204" pitchFamily="49" charset="0"/>
+              </a:rPr>
+              <a:t>https://dronology.info/</a:t>
+            </a:r>
+          </a:p>
+          <a:p>
+            <a:pPr lvl="1"/>
+            <a:endParaRPr lang="en-GB" sz="2000" dirty="0">
+              <a:latin typeface="Consolas" panose="020B0609020204030204" pitchFamily="49" charset="0"/>
+            </a:endParaRPr>
+          </a:p>
+        </p:txBody>
+      </p:sp>
+      <p:pic>
+        <p:nvPicPr>
+          <p:cNvPr id="5" name="Picture 4" descr="A person using a computer and a drone&#10;&#10;AI-generated content may be incorrect.">
+            <a:extLst>
+              <a:ext uri="{FF2B5EF4-FFF2-40B4-BE49-F238E27FC236}">
+                <a16:creationId xmlns:a16="http://schemas.microsoft.com/office/drawing/2014/main" id="{80912622-564C-C3AB-88C4-7DEF830BEC0F}"/>
+              </a:ext>
+            </a:extLst>
+          </p:cNvPr>
+          <p:cNvPicPr>
+            <a:picLocks noChangeAspect="1"/>
+          </p:cNvPicPr>
+          <p:nvPr/>
+        </p:nvPicPr>
+        <p:blipFill>
+          <a:blip r:embed="rId3">
+            <a:extLst>
+              <a:ext uri="{28A0092B-C50C-407E-A947-70E740481C1C}">
+                <a14:useLocalDpi xmlns:a14="http://schemas.microsoft.com/office/drawing/2010/main" val="0"/>
+              </a:ext>
+            </a:extLst>
+          </a:blip>
+          <a:stretch>
+            <a:fillRect/>
+          </a:stretch>
+        </p:blipFill>
+        <p:spPr>
+          <a:xfrm>
+            <a:off x="9113520" y="168993"/>
+            <a:ext cx="2923581" cy="1947151"/>
+          </a:xfrm>
+          <a:prstGeom prst="rect">
+            <a:avLst/>
+          </a:prstGeom>
+        </p:spPr>
+      </p:pic>
+      <p:pic>
+        <p:nvPicPr>
+          <p:cNvPr id="7" name="Picture 6" descr="A diagram of a system&#10;&#10;AI-generated content may be incorrect.">
+            <a:extLst>
+              <a:ext uri="{FF2B5EF4-FFF2-40B4-BE49-F238E27FC236}">
+                <a16:creationId xmlns:a16="http://schemas.microsoft.com/office/drawing/2014/main" id="{7ADA1AF0-4FF3-84AC-B02E-76B7C8010BC6}"/>
+              </a:ext>
+            </a:extLst>
+          </p:cNvPr>
+          <p:cNvPicPr>
+            <a:picLocks noChangeAspect="1"/>
+          </p:cNvPicPr>
+          <p:nvPr/>
+        </p:nvPicPr>
+        <p:blipFill>
+          <a:blip r:embed="rId4">
+            <a:extLst>
+              <a:ext uri="{28A0092B-C50C-407E-A947-70E740481C1C}">
+                <a14:useLocalDpi xmlns:a14="http://schemas.microsoft.com/office/drawing/2010/main" val="0"/>
+              </a:ext>
+            </a:extLst>
+          </a:blip>
+          <a:stretch>
+            <a:fillRect/>
+          </a:stretch>
+        </p:blipFill>
+        <p:spPr>
+          <a:xfrm>
+            <a:off x="5591331" y="2260899"/>
+            <a:ext cx="6445770" cy="4271071"/>
+          </a:xfrm>
+          <a:prstGeom prst="rect">
+            <a:avLst/>
+          </a:prstGeom>
+        </p:spPr>
+      </p:pic>
+    </p:spTree>
+    <p:extLst>
+      <p:ext uri="{BB962C8B-B14F-4D97-AF65-F5344CB8AC3E}">
+        <p14:creationId xmlns:p14="http://schemas.microsoft.com/office/powerpoint/2010/main" val="3581915940"/>
+      </p:ext>
+    </p:extLst>
+  </p:cSld>
+  <p:clrMapOvr>
+    <a:masterClrMapping/>
+  </p:clrMapOvr>
+</p:sld>
+</file>
+
+<file path=ppt/slides/slide6.xml><?xml version="1.0" encoding="utf-8"?>
+<p:sld xmlns:a="http://schemas.openxmlformats.org/drawingml/2006/main" xmlns:r="http://schemas.openxmlformats.org/officeDocument/2006/relationships" xmlns:p="http://schemas.openxmlformats.org/presentationml/2006/main">
+  <p:cSld>
+    <p:spTree>
+      <p:nvGrpSpPr>
+        <p:cNvPr id="1" name=""/>
+        <p:cNvGrpSpPr/>
+        <p:nvPr/>
+      </p:nvGrpSpPr>
+      <p:grpSpPr>
+        <a:xfrm>
+          <a:off x="0" y="0"/>
+          <a:ext cx="0" cy="0"/>
+          <a:chOff x="0" y="0"/>
+          <a:chExt cx="0" cy="0"/>
+        </a:xfrm>
+      </p:grpSpPr>
+      <p:sp>
+        <p:nvSpPr>
+          <p:cNvPr id="3" name="Content Placeholder 2">
+            <a:extLst>
+              <a:ext uri="{FF2B5EF4-FFF2-40B4-BE49-F238E27FC236}">
+                <a16:creationId xmlns:a16="http://schemas.microsoft.com/office/drawing/2014/main" id="{B1DA438F-5413-F9F1-89D8-9609E2FC78E3}"/>
+              </a:ext>
+            </a:extLst>
+          </p:cNvPr>
+          <p:cNvSpPr>
+            <a:spLocks noGrp="1"/>
+          </p:cNvSpPr>
+          <p:nvPr>
+            <p:ph idx="1"/>
+          </p:nvPr>
+        </p:nvSpPr>
+        <p:spPr>
+          <a:xfrm>
+            <a:off x="838200" y="1859280"/>
+            <a:ext cx="10515600" cy="4918776"/>
+          </a:xfrm>
+        </p:spPr>
+        <p:txBody>
+          <a:bodyPr/>
+          <a:lstStyle/>
+          <a:p>
+            <a:r>
+              <a:rPr lang="en-GB" dirty="0"/>
+              <a:t>97 Requirements</a:t>
+            </a:r>
+          </a:p>
+          <a:p>
+            <a:endParaRPr lang="en-GB" dirty="0"/>
+          </a:p>
+          <a:p>
+            <a:endParaRPr lang="en-GB" dirty="0"/>
+          </a:p>
+          <a:p>
+            <a:endParaRPr lang="en-GB" dirty="0"/>
+          </a:p>
+          <a:p>
+            <a:endParaRPr lang="en-GB" dirty="0"/>
+          </a:p>
+          <a:p>
+            <a:endParaRPr lang="en-GB" dirty="0"/>
+          </a:p>
+          <a:p>
+            <a:endParaRPr lang="en-GB" dirty="0"/>
+          </a:p>
+          <a:p>
+            <a:endParaRPr lang="en-GB" dirty="0"/>
+          </a:p>
+          <a:p>
+            <a:endParaRPr lang="en-GB" dirty="0"/>
+          </a:p>
+          <a:p>
+            <a:r>
+              <a:rPr lang="en-GB" dirty="0"/>
+              <a:t>Short and precise</a:t>
+            </a:r>
+          </a:p>
+        </p:txBody>
+      </p:sp>
+      <p:pic>
+        <p:nvPicPr>
+          <p:cNvPr id="5" name="Picture 4">
+            <a:extLst>
+              <a:ext uri="{FF2B5EF4-FFF2-40B4-BE49-F238E27FC236}">
+                <a16:creationId xmlns:a16="http://schemas.microsoft.com/office/drawing/2014/main" id="{B8E5F2F9-9753-FF9C-7EBE-D14CABCFCF02}"/>
+              </a:ext>
+            </a:extLst>
+          </p:cNvPr>
+          <p:cNvPicPr>
+            <a:picLocks noChangeAspect="1"/>
+          </p:cNvPicPr>
+          <p:nvPr/>
+        </p:nvPicPr>
+        <p:blipFill>
+          <a:blip r:embed="rId3"/>
+          <a:stretch>
+            <a:fillRect/>
+          </a:stretch>
+        </p:blipFill>
+        <p:spPr>
+          <a:xfrm>
+            <a:off x="838200" y="2374268"/>
+            <a:ext cx="9906000" cy="1085850"/>
+          </a:xfrm>
+          <a:prstGeom prst="rect">
+            <a:avLst/>
+          </a:prstGeom>
+        </p:spPr>
+      </p:pic>
+      <p:pic>
+        <p:nvPicPr>
+          <p:cNvPr id="7" name="Picture 6">
+            <a:extLst>
+              <a:ext uri="{FF2B5EF4-FFF2-40B4-BE49-F238E27FC236}">
+                <a16:creationId xmlns:a16="http://schemas.microsoft.com/office/drawing/2014/main" id="{D837A745-121B-4935-E946-8711B1904B06}"/>
+              </a:ext>
+            </a:extLst>
+          </p:cNvPr>
+          <p:cNvPicPr>
+            <a:picLocks noChangeAspect="1"/>
+          </p:cNvPicPr>
+          <p:nvPr/>
+        </p:nvPicPr>
+        <p:blipFill>
+          <a:blip r:embed="rId4"/>
+          <a:stretch>
+            <a:fillRect/>
+          </a:stretch>
+        </p:blipFill>
+        <p:spPr>
+          <a:xfrm>
+            <a:off x="838200" y="4836157"/>
+            <a:ext cx="9886950" cy="923925"/>
+          </a:xfrm>
+          <a:prstGeom prst="rect">
+            <a:avLst/>
+          </a:prstGeom>
+        </p:spPr>
+      </p:pic>
+      <p:pic>
+        <p:nvPicPr>
+          <p:cNvPr id="9" name="Picture 8">
+            <a:extLst>
+              <a:ext uri="{FF2B5EF4-FFF2-40B4-BE49-F238E27FC236}">
+                <a16:creationId xmlns:a16="http://schemas.microsoft.com/office/drawing/2014/main" id="{B0002559-88D5-E759-23AB-5D3BA4E8B464}"/>
+              </a:ext>
+            </a:extLst>
+          </p:cNvPr>
+          <p:cNvPicPr>
+            <a:picLocks noChangeAspect="1"/>
+          </p:cNvPicPr>
+          <p:nvPr/>
+        </p:nvPicPr>
+        <p:blipFill>
+          <a:blip r:embed="rId5"/>
+          <a:stretch>
+            <a:fillRect/>
+          </a:stretch>
+        </p:blipFill>
+        <p:spPr>
+          <a:xfrm>
+            <a:off x="838200" y="3695700"/>
+            <a:ext cx="9886950" cy="904875"/>
+          </a:xfrm>
+          <a:prstGeom prst="rect">
+            <a:avLst/>
+          </a:prstGeom>
+        </p:spPr>
+      </p:pic>
+      <p:sp>
+        <p:nvSpPr>
+          <p:cNvPr id="6" name="Title 1">
+            <a:extLst>
+              <a:ext uri="{FF2B5EF4-FFF2-40B4-BE49-F238E27FC236}">
+                <a16:creationId xmlns:a16="http://schemas.microsoft.com/office/drawing/2014/main" id="{826ECF3D-CDB1-5D88-B3BF-0EF3A932FA5E}"/>
+              </a:ext>
+            </a:extLst>
+          </p:cNvPr>
+          <p:cNvSpPr>
+            <a:spLocks noGrp="1"/>
+          </p:cNvSpPr>
+          <p:nvPr>
+            <p:ph type="title"/>
+          </p:nvPr>
+        </p:nvSpPr>
+        <p:spPr>
+          <a:xfrm>
+            <a:off x="913795" y="609600"/>
+            <a:ext cx="10353762" cy="970450"/>
+          </a:xfrm>
+        </p:spPr>
+        <p:txBody>
+          <a:bodyPr/>
+          <a:lstStyle/>
+          <a:p>
+            <a:pPr algn="l"/>
+            <a:r>
+              <a:rPr lang="en-GB" dirty="0">
+                <a:latin typeface="Consolas" panose="020B0609020204030204" pitchFamily="49" charset="0"/>
+              </a:rPr>
+              <a:t>Experimental Setup</a:t>
+            </a:r>
+            <a:endParaRPr lang="en-AT" dirty="0">
+              <a:latin typeface="Consolas" panose="020B0609020204030204" pitchFamily="49" charset="0"/>
+            </a:endParaRPr>
+          </a:p>
+        </p:txBody>
+      </p:sp>
+    </p:spTree>
+    <p:extLst>
+      <p:ext uri="{BB962C8B-B14F-4D97-AF65-F5344CB8AC3E}">
+        <p14:creationId xmlns:p14="http://schemas.microsoft.com/office/powerpoint/2010/main" val="1375322924"/>
+      </p:ext>
+    </p:extLst>
+  </p:cSld>
+  <p:clrMapOvr>
+    <a:masterClrMapping/>
+  </p:clrMapOvr>
+</p:sld>
+</file>
+
+<file path=ppt/slides/slide7.xml><?xml version="1.0" encoding="utf-8"?>
+<p:sld xmlns:a="http://schemas.openxmlformats.org/drawingml/2006/main" xmlns:r="http://schemas.openxmlformats.org/officeDocument/2006/relationships" xmlns:p="http://schemas.openxmlformats.org/presentationml/2006/main">
+  <p:cSld>
+    <p:spTree>
+      <p:nvGrpSpPr>
+        <p:cNvPr id="1" name=""/>
+        <p:cNvGrpSpPr/>
+        <p:nvPr/>
+      </p:nvGrpSpPr>
+      <p:grpSpPr>
+        <a:xfrm>
+          <a:off x="0" y="0"/>
+          <a:ext cx="0" cy="0"/>
+          <a:chOff x="0" y="0"/>
+          <a:chExt cx="0" cy="0"/>
+        </a:xfrm>
+      </p:grpSpPr>
+      <p:sp>
+        <p:nvSpPr>
+          <p:cNvPr id="2" name="Title 1">
+            <a:extLst>
+              <a:ext uri="{FF2B5EF4-FFF2-40B4-BE49-F238E27FC236}">
+                <a16:creationId xmlns:a16="http://schemas.microsoft.com/office/drawing/2014/main" id="{1F7CB6FD-3E1F-2106-AB44-D5433E1BD859}"/>
+              </a:ext>
+            </a:extLst>
+          </p:cNvPr>
+          <p:cNvSpPr>
+            <a:spLocks noGrp="1"/>
+          </p:cNvSpPr>
+          <p:nvPr>
+            <p:ph type="title"/>
+          </p:nvPr>
+        </p:nvSpPr>
+        <p:spPr/>
+        <p:txBody>
+          <a:bodyPr>
+            <a:normAutofit/>
+          </a:bodyPr>
+          <a:lstStyle/>
+          <a:p>
+            <a:pPr algn="l"/>
+            <a:r>
+              <a:rPr lang="en-GB" dirty="0"/>
+              <a:t>Prompt Engineering techniques</a:t>
+            </a:r>
+            <a:endParaRPr lang="en-AT" dirty="0"/>
+          </a:p>
+        </p:txBody>
+      </p:sp>
+      <p:sp>
+        <p:nvSpPr>
+          <p:cNvPr id="3" name="Content Placeholder 2">
+            <a:extLst>
+              <a:ext uri="{FF2B5EF4-FFF2-40B4-BE49-F238E27FC236}">
+                <a16:creationId xmlns:a16="http://schemas.microsoft.com/office/drawing/2014/main" id="{55D9D6CC-D1AB-939C-3B8A-914D47CCE9A0}"/>
+              </a:ext>
+            </a:extLst>
+          </p:cNvPr>
+          <p:cNvSpPr>
+            <a:spLocks noGrp="1"/>
+          </p:cNvSpPr>
+          <p:nvPr>
+            <p:ph idx="1"/>
+          </p:nvPr>
+        </p:nvSpPr>
+        <p:spPr>
+          <a:xfrm>
+            <a:off x="838200" y="1803867"/>
+            <a:ext cx="10053918" cy="3513138"/>
+          </a:xfrm>
+        </p:spPr>
+        <p:txBody>
+          <a:bodyPr>
+            <a:normAutofit lnSpcReduction="10000"/>
+          </a:bodyPr>
+          <a:lstStyle/>
+          <a:p>
+            <a:pPr marL="0" indent="0">
+              <a:buNone/>
+            </a:pPr>
+            <a:endParaRPr lang="en-GB" sz="2400" dirty="0">
+              <a:latin typeface="Consolas" panose="020B0609020204030204" pitchFamily="49" charset="0"/>
+            </a:endParaRPr>
+          </a:p>
+          <a:p>
+            <a:pPr marL="457200" indent="-457200"/>
+            <a:r>
+              <a:rPr lang="en-GB" sz="2400" dirty="0">
+                <a:latin typeface="Consolas" panose="020B0609020204030204" pitchFamily="49" charset="0"/>
+              </a:rPr>
+              <a:t>Zero shot </a:t>
+            </a:r>
+            <a:r>
+              <a:rPr lang="en-GB" sz="2400" dirty="0">
+                <a:effectLst>
+                  <a:outerShdw blurRad="38100" dist="38100" dir="2700000" algn="tl">
+                    <a:srgbClr val="000000">
+                      <a:alpha val="43137"/>
+                    </a:srgbClr>
+                  </a:outerShdw>
+                </a:effectLst>
+                <a:latin typeface="Consolas" panose="020B0609020204030204" pitchFamily="49" charset="0"/>
+              </a:rPr>
+              <a:t>learning</a:t>
+            </a:r>
+            <a:r>
+              <a:rPr lang="en-GB" sz="2400" dirty="0">
+                <a:latin typeface="Consolas" panose="020B0609020204030204" pitchFamily="49" charset="0"/>
+              </a:rPr>
+              <a:t> </a:t>
+            </a:r>
+            <a:br>
+              <a:rPr lang="en-GB" sz="2400" dirty="0">
+                <a:latin typeface="Consolas" panose="020B0609020204030204" pitchFamily="49" charset="0"/>
+              </a:rPr>
+            </a:br>
+            <a:r>
+              <a:rPr lang="en-GB" sz="2000" dirty="0">
+                <a:latin typeface="Consolas" panose="020B0609020204030204" pitchFamily="49" charset="0"/>
+              </a:rPr>
+              <a:t>+ Directional stimulus 	</a:t>
+            </a:r>
+          </a:p>
+          <a:p>
+            <a:pPr marL="457200" indent="-457200"/>
+            <a:r>
+              <a:rPr lang="en-GB" sz="2400" dirty="0">
+                <a:latin typeface="Consolas" panose="020B0609020204030204" pitchFamily="49" charset="0"/>
+              </a:rPr>
+              <a:t>Personas – software tester</a:t>
+            </a:r>
+          </a:p>
+          <a:p>
+            <a:pPr marL="457200" indent="-457200"/>
+            <a:r>
+              <a:rPr lang="en-GB" sz="2400" dirty="0">
+                <a:latin typeface="Consolas" panose="020B0609020204030204" pitchFamily="49" charset="0"/>
+              </a:rPr>
+              <a:t>Tree of thought – multiple experts</a:t>
+            </a:r>
+          </a:p>
+          <a:p>
+            <a:pPr marL="457200" indent="-457200"/>
+            <a:r>
+              <a:rPr lang="en-GB" sz="2400" dirty="0">
+                <a:latin typeface="Consolas" panose="020B0609020204030204" pitchFamily="49" charset="0"/>
+              </a:rPr>
+              <a:t>Providing Context</a:t>
+            </a:r>
+          </a:p>
+          <a:p>
+            <a:pPr lvl="1"/>
+            <a:r>
+              <a:rPr lang="en-GB" sz="2000" dirty="0">
+                <a:latin typeface="Consolas" panose="020B0609020204030204" pitchFamily="49" charset="0"/>
+              </a:rPr>
+              <a:t>Dronology introduction + TOT</a:t>
+            </a:r>
+          </a:p>
+          <a:p>
+            <a:pPr lvl="1"/>
+            <a:r>
+              <a:rPr lang="en-GB" sz="2000" dirty="0">
+                <a:latin typeface="Consolas" panose="020B0609020204030204" pitchFamily="49" charset="0"/>
+              </a:rPr>
+              <a:t>Preparsing of requirements + TOT</a:t>
+            </a:r>
+          </a:p>
+        </p:txBody>
+      </p:sp>
+      <p:sp>
+        <p:nvSpPr>
+          <p:cNvPr id="6" name="Content Placeholder 2">
+            <a:extLst>
+              <a:ext uri="{FF2B5EF4-FFF2-40B4-BE49-F238E27FC236}">
+                <a16:creationId xmlns:a16="http://schemas.microsoft.com/office/drawing/2014/main" id="{0501C84C-A285-C805-1E9C-EBD00CE4D1CC}"/>
               </a:ext>
             </a:extLst>
           </p:cNvPr>
@@ -14577,8 +15637,8 @@
         </p:nvSpPr>
         <p:spPr>
           <a:xfrm>
-            <a:off x="756274" y="1888841"/>
-            <a:ext cx="10515600" cy="4351338"/>
+            <a:off x="5979459" y="1825625"/>
+            <a:ext cx="4728882" cy="4351338"/>
           </a:xfrm>
           <a:prstGeom prst="rect">
             <a:avLst/>
@@ -14753,910 +15813,18 @@
             </a:lvl9pPr>
           </a:lstStyle>
           <a:p>
-            <a:r>
-              <a:rPr lang="en-GB" sz="2400" dirty="0">
-                <a:latin typeface="Consolas" panose="020B0609020204030204" pitchFamily="49" charset="0"/>
-              </a:rPr>
-              <a:t>Are requirements fullfilled?</a:t>
-            </a:r>
-          </a:p>
-          <a:p>
-            <a:endParaRPr lang="en-GB" sz="2400" dirty="0">
+            <a:endParaRPr lang="en-AT" sz="2000" dirty="0">
               <a:latin typeface="Consolas" panose="020B0609020204030204" pitchFamily="49" charset="0"/>
             </a:endParaRPr>
           </a:p>
-          <a:p>
-            <a:r>
-              <a:rPr lang="en-GB" sz="2400" dirty="0">
-                <a:latin typeface="Consolas" panose="020B0609020204030204" pitchFamily="49" charset="0"/>
-              </a:rPr>
-              <a:t>How capable are LLM’s in:</a:t>
-            </a:r>
-          </a:p>
-          <a:p>
-            <a:pPr lvl="1"/>
-            <a:endParaRPr lang="en-GB" sz="2000" dirty="0">
-              <a:latin typeface="Consolas" panose="020B0609020204030204" pitchFamily="49" charset="0"/>
-            </a:endParaRPr>
-          </a:p>
-          <a:p>
-            <a:pPr lvl="1"/>
-            <a:r>
-              <a:rPr lang="en-GB" sz="2000" dirty="0">
-                <a:latin typeface="Consolas" panose="020B0609020204030204" pitchFamily="49" charset="0"/>
-              </a:rPr>
-              <a:t>Understanding requirements in technical domain?</a:t>
-            </a:r>
-          </a:p>
-          <a:p>
-            <a:pPr lvl="1"/>
-            <a:endParaRPr lang="en-GB" sz="2000" dirty="0">
-              <a:latin typeface="Consolas" panose="020B0609020204030204" pitchFamily="49" charset="0"/>
-            </a:endParaRPr>
-          </a:p>
-          <a:p>
-            <a:pPr lvl="1"/>
-            <a:r>
-              <a:rPr lang="en-GB" sz="2000" dirty="0">
-                <a:latin typeface="Consolas" panose="020B0609020204030204" pitchFamily="49" charset="0"/>
-              </a:rPr>
-              <a:t>Deriving test descriptions from requirements?</a:t>
-            </a:r>
-          </a:p>
-          <a:p>
-            <a:endParaRPr lang="en-GB" dirty="0">
-              <a:latin typeface="Consolas" panose="020B0609020204030204" pitchFamily="49" charset="0"/>
-            </a:endParaRPr>
-          </a:p>
-        </p:txBody>
-      </p:sp>
-      <p:pic>
-        <p:nvPicPr>
-          <p:cNvPr id="12" name="Picture 11" descr="A diagram of a software process&#10;&#10;AI-generated content may be incorrect.">
+        </p:txBody>
+      </p:sp>
+      <p:sp>
+        <p:nvSpPr>
+          <p:cNvPr id="8" name="Content Placeholder 2">
             <a:extLst>
               <a:ext uri="{FF2B5EF4-FFF2-40B4-BE49-F238E27FC236}">
-                <a16:creationId xmlns:a16="http://schemas.microsoft.com/office/drawing/2014/main" id="{8668134D-364E-A501-4C35-C07E89BAF2A6}"/>
-              </a:ext>
-            </a:extLst>
-          </p:cNvPr>
-          <p:cNvPicPr>
-            <a:picLocks noChangeAspect="1"/>
-          </p:cNvPicPr>
-          <p:nvPr/>
-        </p:nvPicPr>
-        <p:blipFill>
-          <a:blip r:embed="rId3">
-            <a:extLst>
-              <a:ext uri="{28A0092B-C50C-407E-A947-70E740481C1C}">
-                <a14:useLocalDpi xmlns:a14="http://schemas.microsoft.com/office/drawing/2010/main" val="0"/>
-              </a:ext>
-            </a:extLst>
-          </a:blip>
-          <a:stretch>
-            <a:fillRect/>
-          </a:stretch>
-        </p:blipFill>
-        <p:spPr>
-          <a:xfrm>
-            <a:off x="8692547" y="1333834"/>
-            <a:ext cx="3173584" cy="5121565"/>
-          </a:xfrm>
-          <a:prstGeom prst="rect">
-            <a:avLst/>
-          </a:prstGeom>
-        </p:spPr>
-      </p:pic>
-    </p:spTree>
-    <p:extLst>
-      <p:ext uri="{BB962C8B-B14F-4D97-AF65-F5344CB8AC3E}">
-        <p14:creationId xmlns:p14="http://schemas.microsoft.com/office/powerpoint/2010/main" val="882905187"/>
-      </p:ext>
-    </p:extLst>
-  </p:cSld>
-  <p:clrMapOvr>
-    <a:masterClrMapping/>
-  </p:clrMapOvr>
-</p:sld>
-</file>
-
-<file path=ppt/slides/slide4.xml><?xml version="1.0" encoding="utf-8"?>
-<p:sld xmlns:a="http://schemas.openxmlformats.org/drawingml/2006/main" xmlns:r="http://schemas.openxmlformats.org/officeDocument/2006/relationships" xmlns:p="http://schemas.openxmlformats.org/presentationml/2006/main">
-  <p:cSld>
-    <p:spTree>
-      <p:nvGrpSpPr>
-        <p:cNvPr id="1" name=""/>
-        <p:cNvGrpSpPr/>
-        <p:nvPr/>
-      </p:nvGrpSpPr>
-      <p:grpSpPr>
-        <a:xfrm>
-          <a:off x="0" y="0"/>
-          <a:ext cx="0" cy="0"/>
-          <a:chOff x="0" y="0"/>
-          <a:chExt cx="0" cy="0"/>
-        </a:xfrm>
-      </p:grpSpPr>
-      <p:sp>
-        <p:nvSpPr>
-          <p:cNvPr id="2" name="Title 1">
-            <a:extLst>
-              <a:ext uri="{FF2B5EF4-FFF2-40B4-BE49-F238E27FC236}">
-                <a16:creationId xmlns:a16="http://schemas.microsoft.com/office/drawing/2014/main" id="{338D8DF0-C0BD-E427-7A98-F6B01EF2EC9C}"/>
-              </a:ext>
-            </a:extLst>
-          </p:cNvPr>
-          <p:cNvSpPr>
-            <a:spLocks noGrp="1"/>
-          </p:cNvSpPr>
-          <p:nvPr>
-            <p:ph type="title"/>
-          </p:nvPr>
-        </p:nvSpPr>
-        <p:spPr/>
-        <p:txBody>
-          <a:bodyPr/>
-          <a:lstStyle/>
-          <a:p>
-            <a:pPr algn="l"/>
-            <a:r>
-              <a:rPr lang="en-GB" dirty="0">
-                <a:latin typeface="Consolas" panose="020B0609020204030204" pitchFamily="49" charset="0"/>
-              </a:rPr>
-              <a:t>Experimental Setup</a:t>
-            </a:r>
-            <a:endParaRPr lang="en-AT" dirty="0">
-              <a:latin typeface="Consolas" panose="020B0609020204030204" pitchFamily="49" charset="0"/>
-            </a:endParaRPr>
-          </a:p>
-        </p:txBody>
-      </p:sp>
-      <p:sp>
-        <p:nvSpPr>
-          <p:cNvPr id="3" name="Content Placeholder 2">
-            <a:extLst>
-              <a:ext uri="{FF2B5EF4-FFF2-40B4-BE49-F238E27FC236}">
-                <a16:creationId xmlns:a16="http://schemas.microsoft.com/office/drawing/2014/main" id="{B84A5450-8775-0042-54CF-CB44039CF4E2}"/>
-              </a:ext>
-            </a:extLst>
-          </p:cNvPr>
-          <p:cNvSpPr>
-            <a:spLocks noGrp="1"/>
-          </p:cNvSpPr>
-          <p:nvPr>
-            <p:ph idx="1"/>
-          </p:nvPr>
-        </p:nvSpPr>
-        <p:spPr>
-          <a:xfrm>
-            <a:off x="838200" y="1690688"/>
-            <a:ext cx="10515600" cy="4351338"/>
-          </a:xfrm>
-        </p:spPr>
-        <p:txBody>
-          <a:bodyPr>
-            <a:normAutofit fontScale="92500" lnSpcReduction="20000"/>
-          </a:bodyPr>
-          <a:lstStyle/>
-          <a:p>
-            <a:r>
-              <a:rPr lang="en-GB" sz="2400" dirty="0">
-                <a:latin typeface="Consolas" panose="020B0609020204030204" pitchFamily="49" charset="0"/>
-              </a:rPr>
-              <a:t>Evaluation Procedure</a:t>
-            </a:r>
-          </a:p>
-          <a:p>
-            <a:pPr lvl="1"/>
-            <a:r>
-              <a:rPr lang="en-GB" sz="2000" dirty="0">
-                <a:latin typeface="Consolas" panose="020B0609020204030204" pitchFamily="49" charset="0"/>
-              </a:rPr>
-              <a:t>Use prompt engineering techniques to generate testcases</a:t>
-            </a:r>
-          </a:p>
-          <a:p>
-            <a:pPr lvl="1"/>
-            <a:r>
-              <a:rPr lang="en-GB" sz="2000" dirty="0">
-                <a:latin typeface="Consolas" panose="020B0609020204030204" pitchFamily="49" charset="0"/>
-              </a:rPr>
-              <a:t>Basic Test Description structure shall be enforced</a:t>
-            </a:r>
-          </a:p>
-          <a:p>
-            <a:pPr lvl="2"/>
-            <a:endParaRPr lang="en-GB" sz="1800" dirty="0">
-              <a:latin typeface="Consolas" panose="020B0609020204030204" pitchFamily="49" charset="0"/>
-            </a:endParaRPr>
-          </a:p>
-          <a:p>
-            <a:pPr lvl="2"/>
-            <a:endParaRPr lang="en-GB" sz="1800" dirty="0">
-              <a:latin typeface="Consolas" panose="020B0609020204030204" pitchFamily="49" charset="0"/>
-            </a:endParaRPr>
-          </a:p>
-          <a:p>
-            <a:pPr lvl="2"/>
-            <a:endParaRPr lang="en-GB" sz="1800" dirty="0">
-              <a:latin typeface="Consolas" panose="020B0609020204030204" pitchFamily="49" charset="0"/>
-            </a:endParaRPr>
-          </a:p>
-          <a:p>
-            <a:pPr lvl="2"/>
-            <a:endParaRPr lang="en-GB" sz="1800" dirty="0">
-              <a:latin typeface="Consolas" panose="020B0609020204030204" pitchFamily="49" charset="0"/>
-            </a:endParaRPr>
-          </a:p>
-          <a:p>
-            <a:pPr lvl="2"/>
-            <a:endParaRPr lang="en-GB" sz="1800" dirty="0">
-              <a:latin typeface="Consolas" panose="020B0609020204030204" pitchFamily="49" charset="0"/>
-            </a:endParaRPr>
-          </a:p>
-          <a:p>
-            <a:pPr lvl="1"/>
-            <a:r>
-              <a:rPr lang="en-GB" sz="2000" dirty="0">
-                <a:latin typeface="Consolas" panose="020B0609020204030204" pitchFamily="49" charset="0"/>
-              </a:rPr>
-              <a:t>Validation framework for quality estimate of Model + prompt variations</a:t>
-            </a:r>
-          </a:p>
-          <a:p>
-            <a:pPr lvl="2"/>
-            <a:r>
-              <a:rPr lang="en-GB" sz="1800" dirty="0">
-                <a:latin typeface="Consolas" panose="020B0609020204030204" pitchFamily="49" charset="0"/>
-              </a:rPr>
-              <a:t>Simple structural checks</a:t>
-            </a:r>
-          </a:p>
-          <a:p>
-            <a:pPr lvl="2"/>
-            <a:r>
-              <a:rPr lang="en-GB" sz="1800" dirty="0">
-                <a:latin typeface="Consolas" panose="020B0609020204030204" pitchFamily="49" charset="0"/>
-              </a:rPr>
-              <a:t>SpaCy for field characteristics</a:t>
-            </a:r>
-          </a:p>
-          <a:p>
-            <a:pPr lvl="1"/>
-            <a:r>
-              <a:rPr lang="en-GB" sz="2000" dirty="0">
-                <a:latin typeface="Consolas" panose="020B0609020204030204" pitchFamily="49" charset="0"/>
-              </a:rPr>
-              <a:t>Human verification as final evaluation</a:t>
-            </a:r>
-          </a:p>
-          <a:p>
-            <a:pPr lvl="1"/>
-            <a:endParaRPr lang="en-GB" dirty="0">
-              <a:latin typeface="Consolas" panose="020B0609020204030204" pitchFamily="49" charset="0"/>
-            </a:endParaRPr>
-          </a:p>
-        </p:txBody>
-      </p:sp>
-      <p:pic>
-        <p:nvPicPr>
-          <p:cNvPr id="5" name="Picture 4">
-            <a:extLst>
-              <a:ext uri="{FF2B5EF4-FFF2-40B4-BE49-F238E27FC236}">
-                <a16:creationId xmlns:a16="http://schemas.microsoft.com/office/drawing/2014/main" id="{3E48E7C1-7749-EDCC-8F01-AEDE69A6F890}"/>
-              </a:ext>
-            </a:extLst>
-          </p:cNvPr>
-          <p:cNvPicPr>
-            <a:picLocks noChangeAspect="1"/>
-          </p:cNvPicPr>
-          <p:nvPr/>
-        </p:nvPicPr>
-        <p:blipFill>
-          <a:blip r:embed="rId3"/>
-          <a:stretch>
-            <a:fillRect/>
-          </a:stretch>
-        </p:blipFill>
-        <p:spPr>
-          <a:xfrm>
-            <a:off x="3400586" y="2790825"/>
-            <a:ext cx="2415107" cy="1434615"/>
-          </a:xfrm>
-          <a:prstGeom prst="rect">
-            <a:avLst/>
-          </a:prstGeom>
-        </p:spPr>
-      </p:pic>
-    </p:spTree>
-    <p:extLst>
-      <p:ext uri="{BB962C8B-B14F-4D97-AF65-F5344CB8AC3E}">
-        <p14:creationId xmlns:p14="http://schemas.microsoft.com/office/powerpoint/2010/main" val="2522491419"/>
-      </p:ext>
-    </p:extLst>
-  </p:cSld>
-  <p:clrMapOvr>
-    <a:masterClrMapping/>
-  </p:clrMapOvr>
-</p:sld>
-</file>
-
-<file path=ppt/slides/slide5.xml><?xml version="1.0" encoding="utf-8"?>
-<p:sld xmlns:a="http://schemas.openxmlformats.org/drawingml/2006/main" xmlns:r="http://schemas.openxmlformats.org/officeDocument/2006/relationships" xmlns:p="http://schemas.openxmlformats.org/presentationml/2006/main">
-  <p:cSld>
-    <p:spTree>
-      <p:nvGrpSpPr>
-        <p:cNvPr id="1" name=""/>
-        <p:cNvGrpSpPr/>
-        <p:nvPr/>
-      </p:nvGrpSpPr>
-      <p:grpSpPr>
-        <a:xfrm>
-          <a:off x="0" y="0"/>
-          <a:ext cx="0" cy="0"/>
-          <a:chOff x="0" y="0"/>
-          <a:chExt cx="0" cy="0"/>
-        </a:xfrm>
-      </p:grpSpPr>
-      <p:sp>
-        <p:nvSpPr>
-          <p:cNvPr id="2" name="Title 1">
-            <a:extLst>
-              <a:ext uri="{FF2B5EF4-FFF2-40B4-BE49-F238E27FC236}">
-                <a16:creationId xmlns:a16="http://schemas.microsoft.com/office/drawing/2014/main" id="{E36F5826-B656-D6BD-8186-42E8FB31D677}"/>
-              </a:ext>
-            </a:extLst>
-          </p:cNvPr>
-          <p:cNvSpPr>
-            <a:spLocks noGrp="1"/>
-          </p:cNvSpPr>
-          <p:nvPr>
-            <p:ph type="title"/>
-          </p:nvPr>
-        </p:nvSpPr>
-        <p:spPr/>
-        <p:txBody>
-          <a:bodyPr/>
-          <a:lstStyle/>
-          <a:p>
-            <a:pPr algn="l"/>
-            <a:r>
-              <a:rPr lang="en-GB" dirty="0">
-                <a:latin typeface="Consolas" panose="020B0609020204030204" pitchFamily="49" charset="0"/>
-              </a:rPr>
-              <a:t>Experimental Setup</a:t>
-            </a:r>
-            <a:endParaRPr lang="en-AT" dirty="0">
-              <a:latin typeface="Consolas" panose="020B0609020204030204" pitchFamily="49" charset="0"/>
-            </a:endParaRPr>
-          </a:p>
-        </p:txBody>
-      </p:sp>
-      <p:sp>
-        <p:nvSpPr>
-          <p:cNvPr id="3" name="Content Placeholder 2">
-            <a:extLst>
-              <a:ext uri="{FF2B5EF4-FFF2-40B4-BE49-F238E27FC236}">
-                <a16:creationId xmlns:a16="http://schemas.microsoft.com/office/drawing/2014/main" id="{9BBF55A9-6E35-8D97-F429-C4C602BAD3A1}"/>
-              </a:ext>
-            </a:extLst>
-          </p:cNvPr>
-          <p:cNvSpPr>
-            <a:spLocks noGrp="1"/>
-          </p:cNvSpPr>
-          <p:nvPr>
-            <p:ph idx="1"/>
-          </p:nvPr>
-        </p:nvSpPr>
-        <p:spPr/>
-        <p:txBody>
-          <a:bodyPr>
-            <a:normAutofit lnSpcReduction="10000"/>
-          </a:bodyPr>
-          <a:lstStyle/>
-          <a:p>
-            <a:r>
-              <a:rPr lang="en-GB" sz="2400" dirty="0">
-                <a:latin typeface="Consolas" panose="020B0609020204030204" pitchFamily="49" charset="0"/>
-              </a:rPr>
-              <a:t>Evaluation on Dronology</a:t>
-            </a:r>
-          </a:p>
-          <a:p>
-            <a:pPr marL="457200" lvl="1" indent="0">
-              <a:buNone/>
-            </a:pPr>
-            <a:r>
-              <a:rPr lang="en-GB" dirty="0">
-                <a:latin typeface="Consolas" panose="020B0609020204030204" pitchFamily="49" charset="0"/>
-              </a:rPr>
-              <a:t>Unmanned Aerial Systems </a:t>
-            </a:r>
-            <a:br>
-              <a:rPr lang="en-GB" dirty="0">
-                <a:latin typeface="Consolas" panose="020B0609020204030204" pitchFamily="49" charset="0"/>
-              </a:rPr>
-            </a:br>
-            <a:r>
-              <a:rPr lang="en-GB" dirty="0">
-                <a:latin typeface="Consolas" panose="020B0609020204030204" pitchFamily="49" charset="0"/>
-              </a:rPr>
-              <a:t>Management and Control</a:t>
-            </a:r>
-          </a:p>
-          <a:p>
-            <a:pPr marL="457200" lvl="1" indent="0">
-              <a:buNone/>
-            </a:pPr>
-            <a:endParaRPr lang="en-GB" dirty="0">
-              <a:latin typeface="Consolas" panose="020B0609020204030204" pitchFamily="49" charset="0"/>
-            </a:endParaRPr>
-          </a:p>
-          <a:p>
-            <a:pPr lvl="1"/>
-            <a:r>
-              <a:rPr lang="en-GB" sz="2000" dirty="0">
-                <a:latin typeface="Consolas" panose="020B0609020204030204" pitchFamily="49" charset="0"/>
-              </a:rPr>
-              <a:t>research environment </a:t>
-            </a:r>
-          </a:p>
-          <a:p>
-            <a:pPr lvl="1"/>
-            <a:endParaRPr lang="en-GB" sz="2000" dirty="0">
-              <a:latin typeface="Consolas" panose="020B0609020204030204" pitchFamily="49" charset="0"/>
-            </a:endParaRPr>
-          </a:p>
-          <a:p>
-            <a:pPr lvl="1"/>
-            <a:r>
-              <a:rPr lang="en-GB" sz="2000" dirty="0">
-                <a:latin typeface="Consolas" panose="020B0609020204030204" pitchFamily="49" charset="0"/>
-              </a:rPr>
-              <a:t>framework for controlling </a:t>
-            </a:r>
-            <a:br>
-              <a:rPr lang="en-GB" sz="2000" dirty="0">
-                <a:latin typeface="Consolas" panose="020B0609020204030204" pitchFamily="49" charset="0"/>
-              </a:rPr>
-            </a:br>
-            <a:r>
-              <a:rPr lang="en-GB" sz="2000" dirty="0">
-                <a:latin typeface="Consolas" panose="020B0609020204030204" pitchFamily="49" charset="0"/>
-              </a:rPr>
-              <a:t>and coordinating the flight</a:t>
-            </a:r>
-          </a:p>
-          <a:p>
-            <a:pPr lvl="1"/>
-            <a:endParaRPr lang="en-GB" sz="2000" dirty="0">
-              <a:latin typeface="Consolas" panose="020B0609020204030204" pitchFamily="49" charset="0"/>
-            </a:endParaRPr>
-          </a:p>
-          <a:p>
-            <a:pPr lvl="1"/>
-            <a:r>
-              <a:rPr lang="en-AT" sz="2000" dirty="0">
-                <a:latin typeface="Consolas" panose="020B0609020204030204" pitchFamily="49" charset="0"/>
-              </a:rPr>
-              <a:t>https://dronology.info/</a:t>
-            </a:r>
-          </a:p>
-          <a:p>
-            <a:pPr lvl="1"/>
-            <a:endParaRPr lang="en-GB" sz="2000" dirty="0">
-              <a:latin typeface="Consolas" panose="020B0609020204030204" pitchFamily="49" charset="0"/>
-            </a:endParaRPr>
-          </a:p>
-        </p:txBody>
-      </p:sp>
-      <p:pic>
-        <p:nvPicPr>
-          <p:cNvPr id="5" name="Picture 4" descr="A person using a computer and a drone&#10;&#10;AI-generated content may be incorrect.">
-            <a:extLst>
-              <a:ext uri="{FF2B5EF4-FFF2-40B4-BE49-F238E27FC236}">
-                <a16:creationId xmlns:a16="http://schemas.microsoft.com/office/drawing/2014/main" id="{80912622-564C-C3AB-88C4-7DEF830BEC0F}"/>
-              </a:ext>
-            </a:extLst>
-          </p:cNvPr>
-          <p:cNvPicPr>
-            <a:picLocks noChangeAspect="1"/>
-          </p:cNvPicPr>
-          <p:nvPr/>
-        </p:nvPicPr>
-        <p:blipFill>
-          <a:blip r:embed="rId3">
-            <a:extLst>
-              <a:ext uri="{28A0092B-C50C-407E-A947-70E740481C1C}">
-                <a14:useLocalDpi xmlns:a14="http://schemas.microsoft.com/office/drawing/2010/main" val="0"/>
-              </a:ext>
-            </a:extLst>
-          </a:blip>
-          <a:stretch>
-            <a:fillRect/>
-          </a:stretch>
-        </p:blipFill>
-        <p:spPr>
-          <a:xfrm>
-            <a:off x="9346367" y="199514"/>
-            <a:ext cx="2470468" cy="1645371"/>
-          </a:xfrm>
-          <a:prstGeom prst="rect">
-            <a:avLst/>
-          </a:prstGeom>
-        </p:spPr>
-      </p:pic>
-      <p:pic>
-        <p:nvPicPr>
-          <p:cNvPr id="7" name="Picture 6" descr="A diagram of a system&#10;&#10;AI-generated content may be incorrect.">
-            <a:extLst>
-              <a:ext uri="{FF2B5EF4-FFF2-40B4-BE49-F238E27FC236}">
-                <a16:creationId xmlns:a16="http://schemas.microsoft.com/office/drawing/2014/main" id="{7ADA1AF0-4FF3-84AC-B02E-76B7C8010BC6}"/>
-              </a:ext>
-            </a:extLst>
-          </p:cNvPr>
-          <p:cNvPicPr>
-            <a:picLocks noChangeAspect="1"/>
-          </p:cNvPicPr>
-          <p:nvPr/>
-        </p:nvPicPr>
-        <p:blipFill>
-          <a:blip r:embed="rId4">
-            <a:extLst>
-              <a:ext uri="{28A0092B-C50C-407E-A947-70E740481C1C}">
-                <a14:useLocalDpi xmlns:a14="http://schemas.microsoft.com/office/drawing/2010/main" val="0"/>
-              </a:ext>
-            </a:extLst>
-          </a:blip>
-          <a:stretch>
-            <a:fillRect/>
-          </a:stretch>
-        </p:blipFill>
-        <p:spPr>
-          <a:xfrm>
-            <a:off x="5591331" y="2260899"/>
-            <a:ext cx="6445770" cy="4271071"/>
-          </a:xfrm>
-          <a:prstGeom prst="rect">
-            <a:avLst/>
-          </a:prstGeom>
-        </p:spPr>
-      </p:pic>
-    </p:spTree>
-    <p:extLst>
-      <p:ext uri="{BB962C8B-B14F-4D97-AF65-F5344CB8AC3E}">
-        <p14:creationId xmlns:p14="http://schemas.microsoft.com/office/powerpoint/2010/main" val="3581915940"/>
-      </p:ext>
-    </p:extLst>
-  </p:cSld>
-  <p:clrMapOvr>
-    <a:masterClrMapping/>
-  </p:clrMapOvr>
-</p:sld>
-</file>
-
-<file path=ppt/slides/slide6.xml><?xml version="1.0" encoding="utf-8"?>
-<p:sld xmlns:a="http://schemas.openxmlformats.org/drawingml/2006/main" xmlns:r="http://schemas.openxmlformats.org/officeDocument/2006/relationships" xmlns:p="http://schemas.openxmlformats.org/presentationml/2006/main">
-  <p:cSld>
-    <p:spTree>
-      <p:nvGrpSpPr>
-        <p:cNvPr id="1" name=""/>
-        <p:cNvGrpSpPr/>
-        <p:nvPr/>
-      </p:nvGrpSpPr>
-      <p:grpSpPr>
-        <a:xfrm>
-          <a:off x="0" y="0"/>
-          <a:ext cx="0" cy="0"/>
-          <a:chOff x="0" y="0"/>
-          <a:chExt cx="0" cy="0"/>
-        </a:xfrm>
-      </p:grpSpPr>
-      <p:sp>
-        <p:nvSpPr>
-          <p:cNvPr id="3" name="Content Placeholder 2">
-            <a:extLst>
-              <a:ext uri="{FF2B5EF4-FFF2-40B4-BE49-F238E27FC236}">
-                <a16:creationId xmlns:a16="http://schemas.microsoft.com/office/drawing/2014/main" id="{B1DA438F-5413-F9F1-89D8-9609E2FC78E3}"/>
-              </a:ext>
-            </a:extLst>
-          </p:cNvPr>
-          <p:cNvSpPr>
-            <a:spLocks noGrp="1"/>
-          </p:cNvSpPr>
-          <p:nvPr>
-            <p:ph idx="1"/>
-          </p:nvPr>
-        </p:nvSpPr>
-        <p:spPr>
-          <a:xfrm>
-            <a:off x="838200" y="1458978"/>
-            <a:ext cx="10515600" cy="4351338"/>
-          </a:xfrm>
-        </p:spPr>
-        <p:txBody>
-          <a:bodyPr/>
-          <a:lstStyle/>
-          <a:p>
-            <a:r>
-              <a:rPr lang="en-GB" dirty="0"/>
-              <a:t>97 Requirements</a:t>
-            </a:r>
-            <a:endParaRPr lang="en-AT" dirty="0"/>
-          </a:p>
-        </p:txBody>
-      </p:sp>
-      <p:pic>
-        <p:nvPicPr>
-          <p:cNvPr id="5" name="Picture 4">
-            <a:extLst>
-              <a:ext uri="{FF2B5EF4-FFF2-40B4-BE49-F238E27FC236}">
-                <a16:creationId xmlns:a16="http://schemas.microsoft.com/office/drawing/2014/main" id="{B8E5F2F9-9753-FF9C-7EBE-D14CABCFCF02}"/>
-              </a:ext>
-            </a:extLst>
-          </p:cNvPr>
-          <p:cNvPicPr>
-            <a:picLocks noChangeAspect="1"/>
-          </p:cNvPicPr>
-          <p:nvPr/>
-        </p:nvPicPr>
-        <p:blipFill>
-          <a:blip r:embed="rId3"/>
-          <a:stretch>
-            <a:fillRect/>
-          </a:stretch>
-        </p:blipFill>
-        <p:spPr>
-          <a:xfrm>
-            <a:off x="920178" y="2107568"/>
-            <a:ext cx="9906000" cy="1085850"/>
-          </a:xfrm>
-          <a:prstGeom prst="rect">
-            <a:avLst/>
-          </a:prstGeom>
-        </p:spPr>
-      </p:pic>
-      <p:pic>
-        <p:nvPicPr>
-          <p:cNvPr id="7" name="Picture 6">
-            <a:extLst>
-              <a:ext uri="{FF2B5EF4-FFF2-40B4-BE49-F238E27FC236}">
-                <a16:creationId xmlns:a16="http://schemas.microsoft.com/office/drawing/2014/main" id="{D837A745-121B-4935-E946-8711B1904B06}"/>
-              </a:ext>
-            </a:extLst>
-          </p:cNvPr>
-          <p:cNvPicPr>
-            <a:picLocks noChangeAspect="1"/>
-          </p:cNvPicPr>
-          <p:nvPr/>
-        </p:nvPicPr>
-        <p:blipFill>
-          <a:blip r:embed="rId4"/>
-          <a:stretch>
-            <a:fillRect/>
-          </a:stretch>
-        </p:blipFill>
-        <p:spPr>
-          <a:xfrm>
-            <a:off x="920178" y="4569457"/>
-            <a:ext cx="9886950" cy="923925"/>
-          </a:xfrm>
-          <a:prstGeom prst="rect">
-            <a:avLst/>
-          </a:prstGeom>
-        </p:spPr>
-      </p:pic>
-      <p:pic>
-        <p:nvPicPr>
-          <p:cNvPr id="9" name="Picture 8">
-            <a:extLst>
-              <a:ext uri="{FF2B5EF4-FFF2-40B4-BE49-F238E27FC236}">
-                <a16:creationId xmlns:a16="http://schemas.microsoft.com/office/drawing/2014/main" id="{B0002559-88D5-E759-23AB-5D3BA4E8B464}"/>
-              </a:ext>
-            </a:extLst>
-          </p:cNvPr>
-          <p:cNvPicPr>
-            <a:picLocks noChangeAspect="1"/>
-          </p:cNvPicPr>
-          <p:nvPr/>
-        </p:nvPicPr>
-        <p:blipFill>
-          <a:blip r:embed="rId5"/>
-          <a:stretch>
-            <a:fillRect/>
-          </a:stretch>
-        </p:blipFill>
-        <p:spPr>
-          <a:xfrm>
-            <a:off x="920178" y="3429000"/>
-            <a:ext cx="9886950" cy="904875"/>
-          </a:xfrm>
-          <a:prstGeom prst="rect">
-            <a:avLst/>
-          </a:prstGeom>
-        </p:spPr>
-      </p:pic>
-    </p:spTree>
-    <p:extLst>
-      <p:ext uri="{BB962C8B-B14F-4D97-AF65-F5344CB8AC3E}">
-        <p14:creationId xmlns:p14="http://schemas.microsoft.com/office/powerpoint/2010/main" val="1375322924"/>
-      </p:ext>
-    </p:extLst>
-  </p:cSld>
-  <p:clrMapOvr>
-    <a:masterClrMapping/>
-  </p:clrMapOvr>
-</p:sld>
-</file>
-
-<file path=ppt/slides/slide7.xml><?xml version="1.0" encoding="utf-8"?>
-<p:sld xmlns:a="http://schemas.openxmlformats.org/drawingml/2006/main" xmlns:r="http://schemas.openxmlformats.org/officeDocument/2006/relationships" xmlns:p="http://schemas.openxmlformats.org/presentationml/2006/main">
-  <p:cSld>
-    <p:spTree>
-      <p:nvGrpSpPr>
-        <p:cNvPr id="1" name=""/>
-        <p:cNvGrpSpPr/>
-        <p:nvPr/>
-      </p:nvGrpSpPr>
-      <p:grpSpPr>
-        <a:xfrm>
-          <a:off x="0" y="0"/>
-          <a:ext cx="0" cy="0"/>
-          <a:chOff x="0" y="0"/>
-          <a:chExt cx="0" cy="0"/>
-        </a:xfrm>
-      </p:grpSpPr>
-      <p:sp>
-        <p:nvSpPr>
-          <p:cNvPr id="2" name="Title 1">
-            <a:extLst>
-              <a:ext uri="{FF2B5EF4-FFF2-40B4-BE49-F238E27FC236}">
-                <a16:creationId xmlns:a16="http://schemas.microsoft.com/office/drawing/2014/main" id="{1F7CB6FD-3E1F-2106-AB44-D5433E1BD859}"/>
-              </a:ext>
-            </a:extLst>
-          </p:cNvPr>
-          <p:cNvSpPr>
-            <a:spLocks noGrp="1"/>
-          </p:cNvSpPr>
-          <p:nvPr>
-            <p:ph type="title"/>
-          </p:nvPr>
-        </p:nvSpPr>
-        <p:spPr/>
-        <p:txBody>
-          <a:bodyPr>
-            <a:normAutofit/>
-          </a:bodyPr>
-          <a:lstStyle/>
-          <a:p>
-            <a:pPr algn="l"/>
-            <a:r>
-              <a:rPr lang="en-GB" dirty="0"/>
-              <a:t>Prompt Engineering techniques</a:t>
-            </a:r>
-            <a:endParaRPr lang="en-AT" dirty="0"/>
-          </a:p>
-        </p:txBody>
-      </p:sp>
-      <p:sp>
-        <p:nvSpPr>
-          <p:cNvPr id="3" name="Content Placeholder 2">
-            <a:extLst>
-              <a:ext uri="{FF2B5EF4-FFF2-40B4-BE49-F238E27FC236}">
-                <a16:creationId xmlns:a16="http://schemas.microsoft.com/office/drawing/2014/main" id="{55D9D6CC-D1AB-939C-3B8A-914D47CCE9A0}"/>
-              </a:ext>
-            </a:extLst>
-          </p:cNvPr>
-          <p:cNvSpPr>
-            <a:spLocks noGrp="1"/>
-          </p:cNvSpPr>
-          <p:nvPr>
-            <p:ph idx="1"/>
-          </p:nvPr>
-        </p:nvSpPr>
-        <p:spPr>
-          <a:xfrm>
-            <a:off x="838200" y="1803867"/>
-            <a:ext cx="10053918" cy="3513138"/>
-          </a:xfrm>
-        </p:spPr>
-        <p:txBody>
-          <a:bodyPr>
-            <a:normAutofit lnSpcReduction="10000"/>
-          </a:bodyPr>
-          <a:lstStyle/>
-          <a:p>
-            <a:pPr marL="0" indent="0">
-              <a:buNone/>
-            </a:pPr>
-            <a:endParaRPr lang="en-GB" sz="2400" dirty="0">
-              <a:latin typeface="Consolas" panose="020B0609020204030204" pitchFamily="49" charset="0"/>
-            </a:endParaRPr>
-          </a:p>
-          <a:p>
-            <a:pPr marL="457200" indent="-457200">
-              <a:buFont typeface="+mj-lt"/>
-              <a:buAutoNum type="arabicPeriod"/>
-            </a:pPr>
-            <a:r>
-              <a:rPr lang="en-GB" sz="2400" dirty="0">
-                <a:latin typeface="Consolas" panose="020B0609020204030204" pitchFamily="49" charset="0"/>
-              </a:rPr>
-              <a:t>Zero shot learning </a:t>
-            </a:r>
-            <a:br>
-              <a:rPr lang="en-GB" sz="2400" dirty="0">
-                <a:latin typeface="Consolas" panose="020B0609020204030204" pitchFamily="49" charset="0"/>
-              </a:rPr>
-            </a:br>
-            <a:r>
-              <a:rPr lang="en-GB" sz="2000" dirty="0">
-                <a:latin typeface="Consolas" panose="020B0609020204030204" pitchFamily="49" charset="0"/>
-              </a:rPr>
-              <a:t>+ Directional stimulus 	</a:t>
-            </a:r>
-          </a:p>
-          <a:p>
-            <a:pPr marL="457200" indent="-457200">
-              <a:buFont typeface="+mj-lt"/>
-              <a:buAutoNum type="arabicPeriod"/>
-            </a:pPr>
-            <a:r>
-              <a:rPr lang="en-GB" sz="2400" dirty="0">
-                <a:latin typeface="Consolas" panose="020B0609020204030204" pitchFamily="49" charset="0"/>
-              </a:rPr>
-              <a:t>Personas – software tester</a:t>
-            </a:r>
-          </a:p>
-          <a:p>
-            <a:pPr marL="457200" indent="-457200">
-              <a:buFont typeface="+mj-lt"/>
-              <a:buAutoNum type="arabicPeriod"/>
-            </a:pPr>
-            <a:r>
-              <a:rPr lang="en-GB" sz="2400" dirty="0">
-                <a:latin typeface="Consolas" panose="020B0609020204030204" pitchFamily="49" charset="0"/>
-              </a:rPr>
-              <a:t>Tree of thought – multiple experts</a:t>
-            </a:r>
-          </a:p>
-          <a:p>
-            <a:pPr marL="457200" indent="-457200">
-              <a:buFont typeface="+mj-lt"/>
-              <a:buAutoNum type="arabicPeriod"/>
-            </a:pPr>
-            <a:r>
-              <a:rPr lang="en-GB" sz="2400" dirty="0">
-                <a:latin typeface="Consolas" panose="020B0609020204030204" pitchFamily="49" charset="0"/>
-              </a:rPr>
-              <a:t>Providing Context</a:t>
-            </a:r>
-          </a:p>
-          <a:p>
-            <a:pPr lvl="1"/>
-            <a:r>
-              <a:rPr lang="en-GB" sz="2000" dirty="0">
-                <a:latin typeface="Consolas" panose="020B0609020204030204" pitchFamily="49" charset="0"/>
-              </a:rPr>
-              <a:t>Dronology introduction + TOT</a:t>
-            </a:r>
-          </a:p>
-          <a:p>
-            <a:pPr lvl="1"/>
-            <a:r>
-              <a:rPr lang="en-GB" sz="2000" dirty="0">
-                <a:latin typeface="Consolas" panose="020B0609020204030204" pitchFamily="49" charset="0"/>
-              </a:rPr>
-              <a:t>Preparsing of requirements + TOT</a:t>
-            </a:r>
-          </a:p>
-        </p:txBody>
-      </p:sp>
-      <p:sp>
-        <p:nvSpPr>
-          <p:cNvPr id="6" name="Content Placeholder 2">
-            <a:extLst>
-              <a:ext uri="{FF2B5EF4-FFF2-40B4-BE49-F238E27FC236}">
-                <a16:creationId xmlns:a16="http://schemas.microsoft.com/office/drawing/2014/main" id="{0501C84C-A285-C805-1E9C-EBD00CE4D1CC}"/>
+                <a16:creationId xmlns:a16="http://schemas.microsoft.com/office/drawing/2014/main" id="{5DF99C2E-C6EE-7D90-DA67-84830D34BB28}"/>
               </a:ext>
             </a:extLst>
           </p:cNvPr>
@@ -15667,7 +15835,7 @@
         </p:nvSpPr>
         <p:spPr>
           <a:xfrm>
-            <a:off x="5979459" y="1825625"/>
+            <a:off x="6096000" y="1825625"/>
             <a:ext cx="4728882" cy="4351338"/>
           </a:xfrm>
           <a:prstGeom prst="rect">
@@ -15843,204 +16011,6 @@
             </a:lvl9pPr>
           </a:lstStyle>
           <a:p>
-            <a:endParaRPr lang="en-AT" sz="2000" dirty="0">
-              <a:latin typeface="Consolas" panose="020B0609020204030204" pitchFamily="49" charset="0"/>
-            </a:endParaRPr>
-          </a:p>
-        </p:txBody>
-      </p:sp>
-      <p:sp>
-        <p:nvSpPr>
-          <p:cNvPr id="8" name="Content Placeholder 2">
-            <a:extLst>
-              <a:ext uri="{FF2B5EF4-FFF2-40B4-BE49-F238E27FC236}">
-                <a16:creationId xmlns:a16="http://schemas.microsoft.com/office/drawing/2014/main" id="{5DF99C2E-C6EE-7D90-DA67-84830D34BB28}"/>
-              </a:ext>
-            </a:extLst>
-          </p:cNvPr>
-          <p:cNvSpPr txBox="1">
-            <a:spLocks/>
-          </p:cNvSpPr>
-          <p:nvPr/>
-        </p:nvSpPr>
-        <p:spPr>
-          <a:xfrm>
-            <a:off x="6096000" y="1825625"/>
-            <a:ext cx="4728882" cy="4351338"/>
-          </a:xfrm>
-          <a:prstGeom prst="rect">
-            <a:avLst/>
-          </a:prstGeom>
-        </p:spPr>
-        <p:txBody>
-          <a:bodyPr vert="horz" lIns="91440" tIns="45720" rIns="91440" bIns="45720" rtlCol="0">
-            <a:normAutofit/>
-          </a:bodyPr>
-          <a:lstStyle>
-            <a:lvl1pPr marL="228600" indent="-228600" algn="l" defTabSz="914400" rtl="0" eaLnBrk="1" latinLnBrk="0" hangingPunct="1">
-              <a:lnSpc>
-                <a:spcPct val="90000"/>
-              </a:lnSpc>
-              <a:spcBef>
-                <a:spcPts val="1000"/>
-              </a:spcBef>
-              <a:buFont typeface="Arial" panose="020B0604020202020204" pitchFamily="34" charset="0"/>
-              <a:buChar char="•"/>
-              <a:defRPr sz="2800" kern="1200">
-                <a:solidFill>
-                  <a:schemeClr val="tx1"/>
-                </a:solidFill>
-                <a:latin typeface="+mn-lt"/>
-                <a:ea typeface="+mn-ea"/>
-                <a:cs typeface="+mn-cs"/>
-              </a:defRPr>
-            </a:lvl1pPr>
-            <a:lvl2pPr marL="685800" indent="-228600" algn="l" defTabSz="914400" rtl="0" eaLnBrk="1" latinLnBrk="0" hangingPunct="1">
-              <a:lnSpc>
-                <a:spcPct val="90000"/>
-              </a:lnSpc>
-              <a:spcBef>
-                <a:spcPts val="500"/>
-              </a:spcBef>
-              <a:buFont typeface="Arial" panose="020B0604020202020204" pitchFamily="34" charset="0"/>
-              <a:buChar char="•"/>
-              <a:defRPr sz="2400" kern="1200">
-                <a:solidFill>
-                  <a:schemeClr val="tx1"/>
-                </a:solidFill>
-                <a:latin typeface="+mn-lt"/>
-                <a:ea typeface="+mn-ea"/>
-                <a:cs typeface="+mn-cs"/>
-              </a:defRPr>
-            </a:lvl2pPr>
-            <a:lvl3pPr marL="1143000" indent="-228600" algn="l" defTabSz="914400" rtl="0" eaLnBrk="1" latinLnBrk="0" hangingPunct="1">
-              <a:lnSpc>
-                <a:spcPct val="90000"/>
-              </a:lnSpc>
-              <a:spcBef>
-                <a:spcPts val="500"/>
-              </a:spcBef>
-              <a:buFont typeface="Arial" panose="020B0604020202020204" pitchFamily="34" charset="0"/>
-              <a:buChar char="•"/>
-              <a:defRPr sz="2000" kern="1200">
-                <a:solidFill>
-                  <a:schemeClr val="tx1"/>
-                </a:solidFill>
-                <a:latin typeface="+mn-lt"/>
-                <a:ea typeface="+mn-ea"/>
-                <a:cs typeface="+mn-cs"/>
-              </a:defRPr>
-            </a:lvl3pPr>
-            <a:lvl4pPr marL="1600200" indent="-228600" algn="l" defTabSz="914400" rtl="0" eaLnBrk="1" latinLnBrk="0" hangingPunct="1">
-              <a:lnSpc>
-                <a:spcPct val="90000"/>
-              </a:lnSpc>
-              <a:spcBef>
-                <a:spcPts val="500"/>
-              </a:spcBef>
-              <a:buFont typeface="Arial" panose="020B0604020202020204" pitchFamily="34" charset="0"/>
-              <a:buChar char="•"/>
-              <a:defRPr sz="1800" kern="1200">
-                <a:solidFill>
-                  <a:schemeClr val="tx1"/>
-                </a:solidFill>
-                <a:latin typeface="+mn-lt"/>
-                <a:ea typeface="+mn-ea"/>
-                <a:cs typeface="+mn-cs"/>
-              </a:defRPr>
-            </a:lvl4pPr>
-            <a:lvl5pPr marL="2057400" indent="-228600" algn="l" defTabSz="914400" rtl="0" eaLnBrk="1" latinLnBrk="0" hangingPunct="1">
-              <a:lnSpc>
-                <a:spcPct val="90000"/>
-              </a:lnSpc>
-              <a:spcBef>
-                <a:spcPts val="500"/>
-              </a:spcBef>
-              <a:buFont typeface="Arial" panose="020B0604020202020204" pitchFamily="34" charset="0"/>
-              <a:buChar char="•"/>
-              <a:defRPr sz="1800" kern="1200">
-                <a:solidFill>
-                  <a:schemeClr val="tx1"/>
-                </a:solidFill>
-                <a:latin typeface="+mn-lt"/>
-                <a:ea typeface="+mn-ea"/>
-                <a:cs typeface="+mn-cs"/>
-              </a:defRPr>
-            </a:lvl5pPr>
-            <a:lvl6pPr marL="2514600" indent="-228600" algn="l" defTabSz="914400" rtl="0" eaLnBrk="1" latinLnBrk="0" hangingPunct="1">
-              <a:lnSpc>
-                <a:spcPct val="90000"/>
-              </a:lnSpc>
-              <a:spcBef>
-                <a:spcPts val="500"/>
-              </a:spcBef>
-              <a:buFont typeface="Arial" panose="020B0604020202020204" pitchFamily="34" charset="0"/>
-              <a:buChar char="•"/>
-              <a:defRPr sz="1800" kern="1200">
-                <a:solidFill>
-                  <a:schemeClr val="tx1"/>
-                </a:solidFill>
-                <a:latin typeface="+mn-lt"/>
-                <a:ea typeface="+mn-ea"/>
-                <a:cs typeface="+mn-cs"/>
-              </a:defRPr>
-            </a:lvl6pPr>
-            <a:lvl7pPr marL="2971800" indent="-228600" algn="l" defTabSz="914400" rtl="0" eaLnBrk="1" latinLnBrk="0" hangingPunct="1">
-              <a:lnSpc>
-                <a:spcPct val="90000"/>
-              </a:lnSpc>
-              <a:spcBef>
-                <a:spcPts val="500"/>
-              </a:spcBef>
-              <a:buFont typeface="Arial" panose="020B0604020202020204" pitchFamily="34" charset="0"/>
-              <a:buChar char="•"/>
-              <a:defRPr sz="1800" kern="1200">
-                <a:solidFill>
-                  <a:schemeClr val="tx1"/>
-                </a:solidFill>
-                <a:latin typeface="+mn-lt"/>
-                <a:ea typeface="+mn-ea"/>
-                <a:cs typeface="+mn-cs"/>
-              </a:defRPr>
-            </a:lvl7pPr>
-            <a:lvl8pPr marL="3429000" indent="-228600" algn="l" defTabSz="914400" rtl="0" eaLnBrk="1" latinLnBrk="0" hangingPunct="1">
-              <a:lnSpc>
-                <a:spcPct val="90000"/>
-              </a:lnSpc>
-              <a:spcBef>
-                <a:spcPts val="500"/>
-              </a:spcBef>
-              <a:buFont typeface="Arial" panose="020B0604020202020204" pitchFamily="34" charset="0"/>
-              <a:buChar char="•"/>
-              <a:defRPr sz="1800" kern="1200">
-                <a:solidFill>
-                  <a:schemeClr val="tx1"/>
-                </a:solidFill>
-                <a:latin typeface="+mn-lt"/>
-                <a:ea typeface="+mn-ea"/>
-                <a:cs typeface="+mn-cs"/>
-              </a:defRPr>
-            </a:lvl8pPr>
-            <a:lvl9pPr marL="3886200" indent="-228600" algn="l" defTabSz="914400" rtl="0" eaLnBrk="1" latinLnBrk="0" hangingPunct="1">
-              <a:lnSpc>
-                <a:spcPct val="90000"/>
-              </a:lnSpc>
-              <a:spcBef>
-                <a:spcPts val="500"/>
-              </a:spcBef>
-              <a:buFont typeface="Arial" panose="020B0604020202020204" pitchFamily="34" charset="0"/>
-              <a:buChar char="•"/>
-              <a:defRPr sz="1800" kern="1200">
-                <a:solidFill>
-                  <a:schemeClr val="tx1"/>
-                </a:solidFill>
-                <a:latin typeface="+mn-lt"/>
-                <a:ea typeface="+mn-ea"/>
-                <a:cs typeface="+mn-cs"/>
-              </a:defRPr>
-            </a:lvl9pPr>
-          </a:lstStyle>
-          <a:p>
             <a:endParaRPr lang="en-GB" sz="2000" dirty="0">
               <a:latin typeface="Consolas" panose="020B0609020204030204" pitchFamily="49" charset="0"/>
             </a:endParaRPr>
@@ -16116,8 +16086,8 @@
         </p:nvSpPr>
         <p:spPr>
           <a:xfrm>
-            <a:off x="4791636" y="2456747"/>
-            <a:ext cx="1479176" cy="369332"/>
+            <a:off x="4816512" y="2433887"/>
+            <a:ext cx="2424504" cy="400110"/>
           </a:xfrm>
           <a:prstGeom prst="rect">
             <a:avLst/>
@@ -16131,13 +16101,51 @@
           <a:lstStyle/>
           <a:p>
             <a:r>
-              <a:rPr lang="en-GB" dirty="0">
-                <a:latin typeface="+mj-lt"/>
+              <a:rPr lang="en-GB" sz="2000" dirty="0">
+                <a:ln>
+                  <a:solidFill>
+                    <a:schemeClr val="bg1">
+                      <a:lumMod val="75000"/>
+                      <a:lumOff val="25000"/>
+                      <a:alpha val="10000"/>
+                    </a:schemeClr>
+                  </a:solidFill>
+                </a:ln>
+                <a:solidFill>
+                  <a:schemeClr val="tx2"/>
+                </a:solidFill>
+                <a:effectLst>
+                  <a:outerShdw blurRad="9525" dist="25400" dir="14640000" algn="tl" rotWithShape="0">
+                    <a:schemeClr val="bg1">
+                      <a:alpha val="30000"/>
+                    </a:schemeClr>
+                  </a:outerShdw>
+                </a:effectLst>
+                <a:latin typeface="Consolas" panose="020B0609020204030204" pitchFamily="49" charset="0"/>
               </a:rPr>
               <a:t>Baseline</a:t>
             </a:r>
-            <a:endParaRPr lang="en-AT" dirty="0">
-              <a:latin typeface="+mj-lt"/>
+            <a:endParaRPr lang="en-AT" sz="2000" dirty="0">
+              <a:ln>
+                <a:solidFill>
+                  <a:schemeClr val="bg1">
+                    <a:lumMod val="75000"/>
+                    <a:lumOff val="25000"/>
+                    <a:alpha val="10000"/>
+                  </a:schemeClr>
+                </a:solidFill>
+              </a:ln>
+              <a:solidFill>
+                <a:schemeClr val="tx2"/>
+              </a:solidFill>
+              <a:effectLst>
+                <a:outerShdw blurRad="9525" dist="25400" dir="14640000" algn="tl" rotWithShape="0">
+                  <a:schemeClr val="bg1">
+                    <a:alpha val="30000"/>
+                  </a:schemeClr>
+                </a:outerShdw>
+              </a:effectLst>
+              <a:latin typeface="Consolas" panose="020B0609020204030204" pitchFamily="49" charset="0"/>
             </a:endParaRPr>
           </a:p>
         </p:txBody>
@@ -16430,223 +16438,117 @@
           </a:p>
         </p:txBody>
       </p:sp>
-      <mc:AlternateContent xmlns:mc="http://schemas.openxmlformats.org/markup-compatibility/2006">
-        <mc:Choice xmlns:a14="http://schemas.microsoft.com/office/drawing/2010/main" Requires="a14">
-          <p:sp>
-            <p:nvSpPr>
-              <p:cNvPr id="3" name="Content Placeholder 2">
-                <a:extLst>
-                  <a:ext uri="{FF2B5EF4-FFF2-40B4-BE49-F238E27FC236}">
-                    <a16:creationId xmlns:a16="http://schemas.microsoft.com/office/drawing/2014/main" id="{94CE03A8-F7FF-9BC5-F7A1-C6BADD016042}"/>
-                  </a:ext>
-                </a:extLst>
-              </p:cNvPr>
-              <p:cNvSpPr>
-                <a:spLocks noGrp="1"/>
-              </p:cNvSpPr>
-              <p:nvPr>
-                <p:ph idx="1"/>
-              </p:nvPr>
-            </p:nvSpPr>
-            <p:spPr/>
-            <p:txBody>
-              <a:bodyPr>
-                <a:normAutofit fontScale="85000" lnSpcReduction="20000"/>
-              </a:bodyPr>
-              <a:lstStyle/>
-              <a:p>
-                <a:r>
-                  <a:rPr lang="en-GB" dirty="0"/>
-                  <a:t>Output generation</a:t>
-                </a:r>
-              </a:p>
-              <a:p>
-                <a:pPr lvl="1"/>
-                <a14:m>
-                  <m:oMath xmlns:m="http://schemas.openxmlformats.org/officeDocument/2006/math">
-                    <m:sSub>
-                      <m:sSubPr>
-                        <m:ctrlPr>
-                          <a:rPr lang="en-GB" i="1" smtClean="0">
-                            <a:latin typeface="Cambria Math" panose="02040503050406030204" pitchFamily="18" charset="0"/>
-                          </a:rPr>
-                        </m:ctrlPr>
-                      </m:sSubPr>
-                      <m:e>
-                        <m:sSub>
-                          <m:sSubPr>
-                            <m:ctrlPr>
-                              <a:rPr lang="en-GB" i="1" smtClean="0">
-                                <a:latin typeface="Cambria Math" panose="02040503050406030204" pitchFamily="18" charset="0"/>
-                              </a:rPr>
-                            </m:ctrlPr>
-                          </m:sSubPr>
-                          <m:e>
-                            <m:r>
-                              <a:rPr lang="en-GB" b="0" i="1" smtClean="0">
-                                <a:latin typeface="Cambria Math" panose="02040503050406030204" pitchFamily="18" charset="0"/>
-                              </a:rPr>
-                              <m:t>𝑁</m:t>
-                            </m:r>
-                          </m:e>
-                          <m:sub>
-                            <m:r>
-                              <a:rPr lang="en-GB" b="0" i="1" smtClean="0">
-                                <a:latin typeface="Cambria Math" panose="02040503050406030204" pitchFamily="18" charset="0"/>
-                              </a:rPr>
-                              <m:t>𝑝𝑟𝑜𝑚𝑝𝑡𝑠</m:t>
-                            </m:r>
-                          </m:sub>
-                        </m:sSub>
-                        <m:r>
-                          <a:rPr lang="en-GB" b="0" i="1" smtClean="0">
-                            <a:latin typeface="Cambria Math" panose="02040503050406030204" pitchFamily="18" charset="0"/>
-                          </a:rPr>
-                          <m:t>∗</m:t>
-                        </m:r>
-                        <m:r>
-                          <a:rPr lang="en-GB" b="0" i="1" smtClean="0">
-                            <a:latin typeface="Cambria Math" panose="02040503050406030204" pitchFamily="18" charset="0"/>
-                          </a:rPr>
-                          <m:t>𝑁</m:t>
-                        </m:r>
-                      </m:e>
-                      <m:sub>
-                        <m:r>
-                          <a:rPr lang="en-GB" b="0" i="1" smtClean="0">
-                            <a:latin typeface="Cambria Math" panose="02040503050406030204" pitchFamily="18" charset="0"/>
-                          </a:rPr>
-                          <m:t>𝑚𝑜𝑑𝑒𝑙𝑠</m:t>
-                        </m:r>
-                      </m:sub>
-                    </m:sSub>
-                  </m:oMath>
-                </a14:m>
-                <a:endParaRPr lang="en-GB" dirty="0"/>
-              </a:p>
-              <a:p>
-                <a:pPr lvl="1"/>
-                <a:r>
-                  <a:rPr lang="en-GB" sz="2000" dirty="0"/>
-                  <a:t>Unstable output with default parameters</a:t>
-                </a:r>
-              </a:p>
-              <a:p>
-                <a:pPr lvl="2"/>
-                <a:r>
-                  <a:rPr lang="en-GB" sz="1600" dirty="0"/>
-                  <a:t>context window, repeat penalty, top_p</a:t>
-                </a:r>
-              </a:p>
-              <a:p>
-                <a:pPr lvl="1"/>
-                <a:r>
-                  <a:rPr lang="en-GB" sz="2000" dirty="0"/>
-                  <a:t>1.5b – very unreliable</a:t>
-                </a:r>
-              </a:p>
-              <a:p>
-                <a:pPr lvl="1"/>
-                <a:r>
-                  <a:rPr lang="en-GB" sz="2000" dirty="0">
-                    <a:latin typeface="Consolas" panose="020B0609020204030204" pitchFamily="49" charset="0"/>
-                  </a:rPr>
-                  <a:t>32b parameters - local resource limit</a:t>
-                </a:r>
-              </a:p>
-              <a:p>
-                <a:r>
-                  <a:rPr lang="en-GB" dirty="0"/>
-                  <a:t>Present tense check – systematic fails</a:t>
-                </a:r>
-              </a:p>
-              <a:p>
-                <a:pPr lvl="1"/>
-                <a:r>
-                  <a:rPr lang="en-GB" dirty="0"/>
-                  <a:t>Requirement format:</a:t>
-                </a:r>
-              </a:p>
-              <a:p>
-                <a:pPr marL="457200" lvl="1" indent="0">
-                  <a:buNone/>
-                </a:pPr>
-                <a:r>
-                  <a:rPr lang="en-GB" sz="2000" dirty="0"/>
-                  <a:t>“When given situation / state … shall react in certain way.”</a:t>
-                </a:r>
-              </a:p>
-              <a:p>
-                <a:pPr lvl="1"/>
-                <a:r>
-                  <a:rPr lang="en-GB" dirty="0"/>
-                  <a:t>Last test step:</a:t>
-                </a:r>
-              </a:p>
-              <a:p>
-                <a:pPr marL="457200" lvl="1" indent="0">
-                  <a:buNone/>
-                </a:pPr>
-                <a:r>
-                  <a:rPr lang="en-GB" sz="2000" dirty="0"/>
-                  <a:t>“Verify that Noun &lt;verb past tense&gt; did something”</a:t>
-                </a:r>
-              </a:p>
-              <a:p>
-                <a:pPr marL="457200" lvl="1" indent="0">
-                  <a:buNone/>
-                </a:pPr>
-                <a:r>
-                  <a:rPr lang="en-GB" sz="2000" b="0" dirty="0">
-                    <a:effectLst/>
-                    <a:latin typeface="Consolas" panose="020B0609020204030204" pitchFamily="49" charset="0"/>
-                  </a:rPr>
-                  <a:t>“Verify that the selected map layer is displayed correctly.”</a:t>
-                </a:r>
-              </a:p>
-            </p:txBody>
-          </p:sp>
-        </mc:Choice>
-        <mc:Fallback>
-          <p:sp>
-            <p:nvSpPr>
-              <p:cNvPr id="3" name="Content Placeholder 2">
-                <a:extLst>
-                  <a:ext uri="{FF2B5EF4-FFF2-40B4-BE49-F238E27FC236}">
-                    <a16:creationId xmlns:a16="http://schemas.microsoft.com/office/drawing/2014/main" id="{94CE03A8-F7FF-9BC5-F7A1-C6BADD016042}"/>
-                  </a:ext>
-                </a:extLst>
-              </p:cNvPr>
-              <p:cNvSpPr>
-                <a:spLocks noGrp="1" noRot="1" noChangeAspect="1" noMove="1" noResize="1" noEditPoints="1" noAdjustHandles="1" noChangeArrowheads="1" noChangeShapeType="1" noTextEdit="1"/>
-              </p:cNvSpPr>
-              <p:nvPr>
-                <p:ph idx="1"/>
-              </p:nvPr>
-            </p:nvSpPr>
-            <p:spPr>
-              <a:blipFill>
-                <a:blip r:embed="rId3"/>
-                <a:stretch>
-                  <a:fillRect/>
-                </a:stretch>
-              </a:blipFill>
-            </p:spPr>
-            <p:txBody>
-              <a:bodyPr/>
-              <a:lstStyle/>
-              <a:p>
-                <a:r>
-                  <a:rPr lang="en-AT">
-                    <a:noFill/>
-                  </a:rPr>
-                  <a:t> </a:t>
-                </a:r>
-              </a:p>
-            </p:txBody>
-          </p:sp>
-        </mc:Fallback>
-      </mc:AlternateContent>
+      <p:sp>
+        <p:nvSpPr>
+          <p:cNvPr id="3" name="Content Placeholder 2">
+            <a:extLst>
+              <a:ext uri="{FF2B5EF4-FFF2-40B4-BE49-F238E27FC236}">
+                <a16:creationId xmlns:a16="http://schemas.microsoft.com/office/drawing/2014/main" id="{94CE03A8-F7FF-9BC5-F7A1-C6BADD016042}"/>
+              </a:ext>
+            </a:extLst>
+          </p:cNvPr>
+          <p:cNvSpPr>
+            <a:spLocks noGrp="1"/>
+          </p:cNvSpPr>
+          <p:nvPr>
+            <p:ph idx="1"/>
+          </p:nvPr>
+        </p:nvSpPr>
+        <p:spPr>
+          <a:xfrm>
+            <a:off x="913795" y="1732449"/>
+            <a:ext cx="10353762" cy="4363551"/>
+          </a:xfrm>
+        </p:spPr>
+        <p:txBody>
+          <a:bodyPr>
+            <a:normAutofit/>
+          </a:bodyPr>
+          <a:lstStyle/>
+          <a:p>
+            <a:r>
+              <a:rPr lang="en-GB" dirty="0"/>
+              <a:t>Output generation</a:t>
+            </a:r>
+          </a:p>
+          <a:p>
+            <a:pPr lvl="1"/>
+            <a:r>
+              <a:rPr lang="en-GB" sz="2000" dirty="0"/>
+              <a:t>Unstable output with default parameters</a:t>
+            </a:r>
+          </a:p>
+          <a:p>
+            <a:pPr lvl="1"/>
+            <a:r>
+              <a:rPr lang="en-GB" sz="2000" dirty="0"/>
+              <a:t>1.5b – very unreliable</a:t>
+            </a:r>
+          </a:p>
+          <a:p>
+            <a:pPr lvl="1"/>
+            <a:r>
+              <a:rPr lang="en-GB" sz="2000" dirty="0">
+                <a:latin typeface="Consolas" panose="020B0609020204030204" pitchFamily="49" charset="0"/>
+              </a:rPr>
+              <a:t>32b parameters - local resource limit</a:t>
+            </a:r>
+          </a:p>
+          <a:p>
+            <a:r>
+              <a:rPr lang="en-GB" dirty="0"/>
+              <a:t>Present tense check – systematic fails</a:t>
+            </a:r>
+          </a:p>
+          <a:p>
+            <a:pPr lvl="1"/>
+            <a:r>
+              <a:rPr lang="en-GB" dirty="0"/>
+              <a:t>Requirement format:</a:t>
+            </a:r>
+          </a:p>
+          <a:p>
+            <a:pPr marL="457200" lvl="1" indent="0">
+              <a:buNone/>
+            </a:pPr>
+            <a:r>
+              <a:rPr lang="en-GB" sz="2000" dirty="0"/>
+              <a:t>“When given situation / state … shall react in certain way.”</a:t>
+            </a:r>
+          </a:p>
+          <a:p>
+            <a:pPr lvl="1"/>
+            <a:r>
+              <a:rPr lang="en-GB" dirty="0"/>
+              <a:t>Likely result in a last test step:</a:t>
+            </a:r>
+          </a:p>
+          <a:p>
+            <a:pPr marL="457200" lvl="1" indent="0">
+              <a:buNone/>
+            </a:pPr>
+            <a:r>
+              <a:rPr lang="en-GB" sz="2000" b="0" dirty="0">
+                <a:effectLst/>
+                <a:latin typeface="Consolas" panose="020B0609020204030204" pitchFamily="49" charset="0"/>
+              </a:rPr>
+              <a:t>“Verify that the selected map layer is displayed correctly.”</a:t>
+            </a:r>
+          </a:p>
+          <a:p>
+            <a:pPr marL="457200" lvl="1" indent="0">
+              <a:buNone/>
+            </a:pPr>
+            <a:r>
+              <a:rPr lang="en-GB" sz="2000" b="0" dirty="0">
+                <a:effectLst/>
+                <a:latin typeface="Consolas" panose="020B0609020204030204" pitchFamily="49" charset="0"/>
+              </a:rPr>
+              <a:t>-&gt; Not catched by defined rule</a:t>
+            </a:r>
+          </a:p>
+        </p:txBody>
+      </p:sp>
       <p:pic>
         <p:nvPicPr>
           <p:cNvPr id="5" name="Picture 4">
@@ -16662,14 +16564,14 @@
           <p:nvPr/>
         </p:nvPicPr>
         <p:blipFill>
-          <a:blip r:embed="rId4"/>
+          <a:blip r:embed="rId3"/>
           <a:stretch>
             <a:fillRect/>
           </a:stretch>
         </p:blipFill>
         <p:spPr>
           <a:xfrm>
-            <a:off x="5262564" y="490537"/>
+            <a:off x="5262564" y="181216"/>
             <a:ext cx="6653212" cy="1475034"/>
           </a:xfrm>
           <a:prstGeom prst="rect">
@@ -16679,38 +16581,394 @@
       </p:pic>
       <p:sp>
         <p:nvSpPr>
-          <p:cNvPr id="6" name="TextBox 5">
+          <p:cNvPr id="4" name="Content Placeholder 2">
             <a:extLst>
               <a:ext uri="{FF2B5EF4-FFF2-40B4-BE49-F238E27FC236}">
-                <a16:creationId xmlns:a16="http://schemas.microsoft.com/office/drawing/2014/main" id="{940A3595-5C25-877C-1579-868E6E0B0E01}"/>
+                <a16:creationId xmlns:a16="http://schemas.microsoft.com/office/drawing/2014/main" id="{35D5146E-FCD2-CA61-60FB-F376F34394D9}"/>
               </a:ext>
             </a:extLst>
           </p:cNvPr>
-          <p:cNvSpPr txBox="1"/>
+          <p:cNvSpPr txBox="1">
+            <a:spLocks/>
+          </p:cNvSpPr>
           <p:nvPr/>
         </p:nvSpPr>
         <p:spPr>
           <a:xfrm>
-            <a:off x="8724899" y="1952483"/>
-            <a:ext cx="3190877" cy="276999"/>
+            <a:off x="9752995" y="1634743"/>
+            <a:ext cx="2225645" cy="347811"/>
           </a:xfrm>
           <a:prstGeom prst="rect">
             <a:avLst/>
           </a:prstGeom>
-          <a:noFill/>
+          <a:effectLst>
+            <a:outerShdw blurRad="25400" dir="17880000">
+              <a:srgbClr val="000000">
+                <a:alpha val="46000"/>
+              </a:srgbClr>
+            </a:outerShdw>
+          </a:effectLst>
         </p:spPr>
         <p:txBody>
-          <a:bodyPr wrap="square" rtlCol="0">
-            <a:spAutoFit/>
+          <a:bodyPr vert="horz" lIns="91440" tIns="45720" rIns="91440" bIns="45720" rtlCol="0" anchor="t">
+            <a:normAutofit fontScale="92500"/>
           </a:bodyPr>
-          <a:lstStyle/>
-          <a:p>
-            <a:pPr algn="r"/>
-            <a:r>
-              <a:rPr lang="en-GB" sz="1200" dirty="0"/>
-              <a:t>Example 1.5b zero shot </a:t>
-            </a:r>
-            <a:endParaRPr lang="en-AT" sz="1200" dirty="0"/>
+          <a:lstStyle>
+            <a:lvl1pPr marL="342900" indent="-306000" algn="l" defTabSz="457200" rtl="0" eaLnBrk="1" latinLnBrk="0" hangingPunct="1">
+              <a:spcBef>
+                <a:spcPct val="20000"/>
+              </a:spcBef>
+              <a:spcAft>
+                <a:spcPts val="600"/>
+              </a:spcAft>
+              <a:buClr>
+                <a:schemeClr val="tx2"/>
+              </a:buClr>
+              <a:buSzPct val="70000"/>
+              <a:buFont typeface="Wingdings 2" charset="2"/>
+              <a:buChar char=""/>
+              <a:defRPr sz="2000" kern="1200">
+                <a:ln>
+                  <a:solidFill>
+                    <a:schemeClr val="bg1">
+                      <a:lumMod val="75000"/>
+                      <a:lumOff val="25000"/>
+                      <a:alpha val="10000"/>
+                    </a:schemeClr>
+                  </a:solidFill>
+                </a:ln>
+                <a:solidFill>
+                  <a:schemeClr val="tx2"/>
+                </a:solidFill>
+                <a:effectLst>
+                  <a:outerShdw blurRad="9525" dist="25400" dir="14640000" algn="tl" rotWithShape="0">
+                    <a:schemeClr val="bg1">
+                      <a:alpha val="30000"/>
+                    </a:schemeClr>
+                  </a:outerShdw>
+                </a:effectLst>
+                <a:latin typeface="+mn-lt"/>
+                <a:ea typeface="+mn-ea"/>
+                <a:cs typeface="+mn-cs"/>
+              </a:defRPr>
+            </a:lvl1pPr>
+            <a:lvl2pPr marL="720000" indent="-270000" algn="l" defTabSz="457200" rtl="0" eaLnBrk="1" latinLnBrk="0" hangingPunct="1">
+              <a:spcBef>
+                <a:spcPct val="20000"/>
+              </a:spcBef>
+              <a:spcAft>
+                <a:spcPts val="600"/>
+              </a:spcAft>
+              <a:buClr>
+                <a:schemeClr val="tx2"/>
+              </a:buClr>
+              <a:buSzPct val="70000"/>
+              <a:buFont typeface="Wingdings 2" charset="2"/>
+              <a:buChar char=""/>
+              <a:defRPr sz="1800" kern="1200">
+                <a:ln>
+                  <a:solidFill>
+                    <a:schemeClr val="bg1">
+                      <a:lumMod val="75000"/>
+                      <a:lumOff val="25000"/>
+                      <a:alpha val="10000"/>
+                    </a:schemeClr>
+                  </a:solidFill>
+                </a:ln>
+                <a:solidFill>
+                  <a:schemeClr val="tx2"/>
+                </a:solidFill>
+                <a:effectLst>
+                  <a:outerShdw blurRad="9525" dist="25400" dir="14640000" algn="tl" rotWithShape="0">
+                    <a:schemeClr val="bg1">
+                      <a:alpha val="30000"/>
+                    </a:schemeClr>
+                  </a:outerShdw>
+                </a:effectLst>
+                <a:latin typeface="+mn-lt"/>
+                <a:ea typeface="+mn-ea"/>
+                <a:cs typeface="+mn-cs"/>
+              </a:defRPr>
+            </a:lvl2pPr>
+            <a:lvl3pPr marL="1026000" indent="-216000" algn="l" defTabSz="457200" rtl="0" eaLnBrk="1" latinLnBrk="0" hangingPunct="1">
+              <a:spcBef>
+                <a:spcPct val="20000"/>
+              </a:spcBef>
+              <a:spcAft>
+                <a:spcPts val="600"/>
+              </a:spcAft>
+              <a:buClr>
+                <a:schemeClr val="tx2"/>
+              </a:buClr>
+              <a:buSzPct val="70000"/>
+              <a:buFont typeface="Wingdings 2" charset="2"/>
+              <a:buChar char=""/>
+              <a:defRPr sz="1600" kern="1200">
+                <a:ln>
+                  <a:solidFill>
+                    <a:schemeClr val="bg1">
+                      <a:lumMod val="75000"/>
+                      <a:lumOff val="25000"/>
+                      <a:alpha val="10000"/>
+                    </a:schemeClr>
+                  </a:solidFill>
+                </a:ln>
+                <a:solidFill>
+                  <a:schemeClr val="tx2"/>
+                </a:solidFill>
+                <a:effectLst>
+                  <a:outerShdw blurRad="9525" dist="25400" dir="14640000" algn="tl" rotWithShape="0">
+                    <a:schemeClr val="bg1">
+                      <a:alpha val="30000"/>
+                    </a:schemeClr>
+                  </a:outerShdw>
+                </a:effectLst>
+                <a:latin typeface="+mn-lt"/>
+                <a:ea typeface="+mn-ea"/>
+                <a:cs typeface="+mn-cs"/>
+              </a:defRPr>
+            </a:lvl3pPr>
+            <a:lvl4pPr marL="1386000" indent="-216000" algn="l" defTabSz="457200" rtl="0" eaLnBrk="1" latinLnBrk="0" hangingPunct="1">
+              <a:spcBef>
+                <a:spcPct val="20000"/>
+              </a:spcBef>
+              <a:spcAft>
+                <a:spcPts val="600"/>
+              </a:spcAft>
+              <a:buClr>
+                <a:schemeClr val="tx2"/>
+              </a:buClr>
+              <a:buSzPct val="70000"/>
+              <a:buFont typeface="Wingdings 2" charset="2"/>
+              <a:buChar char=""/>
+              <a:defRPr sz="1400" kern="1200">
+                <a:ln>
+                  <a:solidFill>
+                    <a:schemeClr val="bg1">
+                      <a:lumMod val="75000"/>
+                      <a:lumOff val="25000"/>
+                      <a:alpha val="10000"/>
+                    </a:schemeClr>
+                  </a:solidFill>
+                </a:ln>
+                <a:solidFill>
+                  <a:schemeClr val="tx2"/>
+                </a:solidFill>
+                <a:effectLst>
+                  <a:outerShdw blurRad="9525" dist="25400" dir="14640000" algn="tl" rotWithShape="0">
+                    <a:schemeClr val="bg1">
+                      <a:alpha val="30000"/>
+                    </a:schemeClr>
+                  </a:outerShdw>
+                </a:effectLst>
+                <a:latin typeface="+mn-lt"/>
+                <a:ea typeface="+mn-ea"/>
+                <a:cs typeface="+mn-cs"/>
+              </a:defRPr>
+            </a:lvl4pPr>
+            <a:lvl5pPr marL="1674000" indent="-216000" algn="l" defTabSz="457200" rtl="0" eaLnBrk="1" latinLnBrk="0" hangingPunct="1">
+              <a:spcBef>
+                <a:spcPct val="20000"/>
+              </a:spcBef>
+              <a:spcAft>
+                <a:spcPts val="600"/>
+              </a:spcAft>
+              <a:buClr>
+                <a:schemeClr val="tx2"/>
+              </a:buClr>
+              <a:buSzPct val="70000"/>
+              <a:buFont typeface="Wingdings 2" charset="2"/>
+              <a:buChar char=""/>
+              <a:defRPr sz="1400" kern="1200">
+                <a:ln>
+                  <a:solidFill>
+                    <a:schemeClr val="bg1">
+                      <a:lumMod val="75000"/>
+                      <a:lumOff val="25000"/>
+                      <a:alpha val="10000"/>
+                    </a:schemeClr>
+                  </a:solidFill>
+                </a:ln>
+                <a:solidFill>
+                  <a:schemeClr val="tx2"/>
+                </a:solidFill>
+                <a:effectLst>
+                  <a:outerShdw blurRad="9525" dist="25400" dir="14640000" algn="tl" rotWithShape="0">
+                    <a:schemeClr val="bg1">
+                      <a:alpha val="30000"/>
+                    </a:schemeClr>
+                  </a:outerShdw>
+                </a:effectLst>
+                <a:latin typeface="+mn-lt"/>
+                <a:ea typeface="+mn-ea"/>
+                <a:cs typeface="+mn-cs"/>
+              </a:defRPr>
+            </a:lvl5pPr>
+            <a:lvl6pPr marL="2014600" indent="-228600" algn="l" defTabSz="457200" rtl="0" eaLnBrk="1" latinLnBrk="0" hangingPunct="1">
+              <a:spcBef>
+                <a:spcPct val="20000"/>
+              </a:spcBef>
+              <a:spcAft>
+                <a:spcPts val="600"/>
+              </a:spcAft>
+              <a:buClr>
+                <a:schemeClr val="tx2"/>
+              </a:buClr>
+              <a:buSzPct val="70000"/>
+              <a:buFont typeface="Wingdings 2" charset="2"/>
+              <a:buChar char=""/>
+              <a:defRPr sz="1400" kern="1200">
+                <a:ln>
+                  <a:solidFill>
+                    <a:schemeClr val="bg1">
+                      <a:lumMod val="75000"/>
+                      <a:lumOff val="25000"/>
+                      <a:alpha val="10000"/>
+                    </a:schemeClr>
+                  </a:solidFill>
+                </a:ln>
+                <a:solidFill>
+                  <a:schemeClr val="tx2"/>
+                </a:solidFill>
+                <a:effectLst>
+                  <a:outerShdw blurRad="9525" dist="25400" dir="14640000" algn="tl" rotWithShape="0">
+                    <a:schemeClr val="bg1">
+                      <a:alpha val="30000"/>
+                    </a:schemeClr>
+                  </a:outerShdw>
+                </a:effectLst>
+                <a:latin typeface="+mn-lt"/>
+                <a:ea typeface="+mn-ea"/>
+                <a:cs typeface="+mn-cs"/>
+              </a:defRPr>
+            </a:lvl6pPr>
+            <a:lvl7pPr marL="2401800" indent="-228600" algn="l" defTabSz="457200" rtl="0" eaLnBrk="1" latinLnBrk="0" hangingPunct="1">
+              <a:spcBef>
+                <a:spcPct val="20000"/>
+              </a:spcBef>
+              <a:spcAft>
+                <a:spcPts val="600"/>
+              </a:spcAft>
+              <a:buClr>
+                <a:schemeClr val="tx2"/>
+              </a:buClr>
+              <a:buSzPct val="70000"/>
+              <a:buFont typeface="Wingdings 2" charset="2"/>
+              <a:buChar char=""/>
+              <a:defRPr sz="1400" kern="1200">
+                <a:ln>
+                  <a:solidFill>
+                    <a:schemeClr val="bg1">
+                      <a:lumMod val="75000"/>
+                      <a:lumOff val="25000"/>
+                      <a:alpha val="10000"/>
+                    </a:schemeClr>
+                  </a:solidFill>
+                </a:ln>
+                <a:solidFill>
+                  <a:schemeClr val="tx2"/>
+                </a:solidFill>
+                <a:effectLst>
+                  <a:outerShdw blurRad="9525" dist="25400" dir="14640000" algn="tl" rotWithShape="0">
+                    <a:schemeClr val="bg1">
+                      <a:alpha val="30000"/>
+                    </a:schemeClr>
+                  </a:outerShdw>
+                </a:effectLst>
+                <a:latin typeface="+mn-lt"/>
+                <a:ea typeface="+mn-ea"/>
+                <a:cs typeface="+mn-cs"/>
+              </a:defRPr>
+            </a:lvl7pPr>
+            <a:lvl8pPr marL="2789000" indent="-228600" algn="l" defTabSz="457200" rtl="0" eaLnBrk="1" latinLnBrk="0" hangingPunct="1">
+              <a:spcBef>
+                <a:spcPct val="20000"/>
+              </a:spcBef>
+              <a:spcAft>
+                <a:spcPts val="600"/>
+              </a:spcAft>
+              <a:buClr>
+                <a:schemeClr val="tx2"/>
+              </a:buClr>
+              <a:buSzPct val="70000"/>
+              <a:buFont typeface="Wingdings 2" charset="2"/>
+              <a:buChar char=""/>
+              <a:defRPr sz="1400" kern="1200">
+                <a:ln>
+                  <a:solidFill>
+                    <a:schemeClr val="bg1">
+                      <a:lumMod val="75000"/>
+                      <a:lumOff val="25000"/>
+                      <a:alpha val="10000"/>
+                    </a:schemeClr>
+                  </a:solidFill>
+                </a:ln>
+                <a:solidFill>
+                  <a:schemeClr val="tx2"/>
+                </a:solidFill>
+                <a:effectLst>
+                  <a:outerShdw blurRad="9525" dist="25400" dir="14640000" algn="tl" rotWithShape="0">
+                    <a:schemeClr val="bg1">
+                      <a:alpha val="30000"/>
+                    </a:schemeClr>
+                  </a:outerShdw>
+                </a:effectLst>
+                <a:latin typeface="+mn-lt"/>
+                <a:ea typeface="+mn-ea"/>
+                <a:cs typeface="+mn-cs"/>
+              </a:defRPr>
+            </a:lvl8pPr>
+            <a:lvl9pPr marL="3106200" indent="-228600" algn="l" defTabSz="457200" rtl="0" eaLnBrk="1" latinLnBrk="0" hangingPunct="1">
+              <a:spcBef>
+                <a:spcPct val="20000"/>
+              </a:spcBef>
+              <a:spcAft>
+                <a:spcPts val="600"/>
+              </a:spcAft>
+              <a:buClr>
+                <a:schemeClr val="tx2"/>
+              </a:buClr>
+              <a:buSzPct val="70000"/>
+              <a:buFont typeface="Wingdings 2" charset="2"/>
+              <a:buChar char=""/>
+              <a:defRPr sz="1400" kern="1200">
+                <a:ln>
+                  <a:solidFill>
+                    <a:schemeClr val="bg1">
+                      <a:lumMod val="75000"/>
+                      <a:lumOff val="25000"/>
+                      <a:alpha val="10000"/>
+                    </a:schemeClr>
+                  </a:solidFill>
+                </a:ln>
+                <a:solidFill>
+                  <a:schemeClr val="tx2"/>
+                </a:solidFill>
+                <a:effectLst>
+                  <a:outerShdw blurRad="9525" dist="25400" dir="14640000" algn="tl" rotWithShape="0">
+                    <a:schemeClr val="bg1">
+                      <a:alpha val="30000"/>
+                    </a:schemeClr>
+                  </a:outerShdw>
+                </a:effectLst>
+                <a:latin typeface="+mn-lt"/>
+                <a:ea typeface="+mn-ea"/>
+                <a:cs typeface="+mn-cs"/>
+              </a:defRPr>
+            </a:lvl9pPr>
+          </a:lstStyle>
+          <a:p>
+            <a:pPr marL="36900" indent="0">
+              <a:buNone/>
+            </a:pPr>
+            <a:r>
+              <a:rPr lang="en-GB" sz="1400" dirty="0"/>
+              <a:t>Example 1.5b zero shot</a:t>
+            </a:r>
+            <a:endParaRPr lang="en-GB" sz="1400" dirty="0">
+              <a:effectLst/>
+              <a:latin typeface="Consolas" panose="020B0609020204030204" pitchFamily="49" charset="0"/>
+            </a:endParaRPr>
           </a:p>
         </p:txBody>
       </p:sp>
